--- a/納品レポート/ホテル別レポート/comfort_roppongi_口コミ分析レポート.pptx
+++ b/納品レポート/ホテル別レポート/comfort_roppongi_口コミ分析レポート.pptx
@@ -192,10 +192,10 @@
                     <c:v>Booking.com</c:v>
                   </c:pt>
                   <c:pt idx="4">
-                    <c:v>Agoda</c:v>
+                    <c:v>Google</c:v>
                   </c:pt>
                   <c:pt idx="5">
-                    <c:v>Google</c:v>
+                    <c:v>Agoda</c:v>
                   </c:pt>
                 </c:lvl>
               </c:multiLvlStrCache>
@@ -214,16 +214,16 @@
                   <c:v>9.6</c:v>
                 </c:pt>
                 <c:pt idx="2">
-                  <c:v>8.33</c:v>
+                  <c:v>8.46</c:v>
                 </c:pt>
                 <c:pt idx="3">
-                  <c:v>8.16</c:v>
+                  <c:v>8.17</c:v>
                 </c:pt>
                 <c:pt idx="4">
-                  <c:v>8</c:v>
+                  <c:v>7.57</c:v>
                 </c:pt>
                 <c:pt idx="5">
-                  <c:v>7.56</c:v>
+                  <c:v>7.33</c:v>
                 </c:pt>
               </c:numCache>
             </c:numRef>
@@ -566,10 +566,10 @@
               <c:numCache>
                 <c:ptCount val="3"/>
                 <c:pt idx="0">
-                  <c:v>76</c:v>
+                  <c:v>80</c:v>
                 </c:pt>
                 <c:pt idx="1">
-                  <c:v>12</c:v>
+                  <c:v>13</c:v>
                 </c:pt>
                 <c:pt idx="2">
                   <c:v>9</c:v>
@@ -809,19 +809,19 @@
                 <c:formatCode>General</c:formatCode>
                 <c:ptCount val="8"/>
                 <c:pt idx="0">
-                  <c:v>32</c:v>
+                  <c:v>33</c:v>
                 </c:pt>
                 <c:pt idx="1">
-                  <c:v>13</c:v>
+                  <c:v>14</c:v>
                 </c:pt>
                 <c:pt idx="2">
-                  <c:v>31</c:v>
+                  <c:v>33</c:v>
                 </c:pt>
                 <c:pt idx="3">
                   <c:v>8</c:v>
                 </c:pt>
                 <c:pt idx="4">
-                  <c:v>3</c:v>
+                  <c:v>4</c:v>
                 </c:pt>
                 <c:pt idx="5">
                   <c:v>1</c:v>
@@ -2781,7 +2781,7 @@
                 <a:ea typeface="Arial" pitchFamily="34" charset="-122"/>
                 <a:cs typeface="Arial" pitchFamily="34" charset="-120"/>
               </a:rPr>
-              <a:t>レビュー総数：97件（6サイト）</a:t>
+              <a:t>レビュー総数：102件（6サイト）</a:t>
             </a:r>
             <a:endParaRPr lang="en-US" sz="1000" dirty="0"/>
           </a:p>
@@ -2801,7 +2801,7 @@
                 <a:ea typeface="Arial" pitchFamily="34" charset="-122"/>
                 <a:cs typeface="Arial" pitchFamily="34" charset="-120"/>
               </a:rPr>
-              <a:t>作成日：2026年3月17日</a:t>
+              <a:t>作成日：2026年3月18日</a:t>
             </a:r>
             <a:endParaRPr lang="en-US" sz="1000" dirty="0"/>
           </a:p>
@@ -3347,7 +3347,7 @@
                           <a:ea typeface="Arial" pitchFamily="34" charset="-122"/>
                           <a:cs typeface="Arial" pitchFamily="34" charset="-120"/>
                         </a:rPr>
-                        <a:t>8.10点</a:t>
+                        <a:t>8.11点</a:t>
                       </a:r>
                       <a:endParaRPr lang="en-US" sz="1000" dirty="0">
                         <a:latin typeface="Arial" charset="0"/>
@@ -3895,7 +3895,7 @@
                           <a:ea typeface="Arial" pitchFamily="34" charset="-122"/>
                           <a:cs typeface="Arial" pitchFamily="34" charset="-120"/>
                         </a:rPr>
-                        <a:t>9.3%</a:t>
+                        <a:t>8.8%</a:t>
                       </a:r>
                       <a:endParaRPr lang="en-US" sz="1000" dirty="0">
                         <a:latin typeface="Arial" charset="0"/>
@@ -4101,7 +4101,7 @@
                           <a:ea typeface="Arial" pitchFamily="34" charset="-122"/>
                           <a:cs typeface="Arial" pitchFamily="34" charset="-120"/>
                         </a:rPr>
-                        <a:t>Google平均評価</a:t>
+                        <a:t>Agoda平均評価</a:t>
                       </a:r>
                       <a:endParaRPr lang="en-US" sz="1000" dirty="0">
                         <a:latin typeface="Arial" charset="0"/>
@@ -4169,7 +4169,7 @@
                           <a:ea typeface="Arial" pitchFamily="34" charset="-122"/>
                           <a:cs typeface="Arial" pitchFamily="34" charset="-120"/>
                         </a:rPr>
-                        <a:t>7.6点</a:t>
+                        <a:t>7.3点</a:t>
                       </a:r>
                       <a:endParaRPr lang="en-US" sz="1000" dirty="0">
                         <a:latin typeface="Arial" charset="0"/>
@@ -4237,7 +4237,7 @@
                           <a:ea typeface="Arial" pitchFamily="34" charset="-122"/>
                           <a:cs typeface="Arial" pitchFamily="34" charset="-120"/>
                         </a:rPr>
-                        <a:t>8.6点以上</a:t>
+                        <a:t>8.3点以上</a:t>
                       </a:r>
                       <a:endParaRPr lang="en-US" sz="1000" dirty="0">
                         <a:latin typeface="Arial" charset="0"/>
@@ -4717,7 +4717,7 @@
                           <a:ea typeface="Arial" pitchFamily="34" charset="-122"/>
                           <a:cs typeface="Arial" pitchFamily="34" charset="-120"/>
                         </a:rPr>
-                        <a:t>約21件/期間</a:t>
+                        <a:t>約23件/期間</a:t>
                       </a:r>
                       <a:endParaRPr lang="en-US" sz="1000" dirty="0">
                         <a:latin typeface="Arial" charset="0"/>
@@ -4785,7 +4785,7 @@
                           <a:ea typeface="Arial" pitchFamily="34" charset="-122"/>
                           <a:cs typeface="Arial" pitchFamily="34" charset="-120"/>
                         </a:rPr>
-                        <a:t>10件以下</a:t>
+                        <a:t>11件以下</a:t>
                       </a:r>
                       <a:endParaRPr lang="en-US" sz="1000" dirty="0">
                         <a:latin typeface="Arial" charset="0"/>
@@ -5356,7 +5356,7 @@
                 <a:ea typeface="Arial" pitchFamily="34" charset="-122"/>
                 <a:cs typeface="Arial" pitchFamily="34" charset="-120"/>
               </a:rPr>
-              <a:t>8.10</a:t>
+              <a:t>8.11</a:t>
             </a:r>
             <a:endParaRPr lang="en-US" sz="3200" dirty="0"/>
           </a:p>
@@ -5606,7 +5606,7 @@
                 <a:ea typeface="Arial" pitchFamily="34" charset="-122"/>
                 <a:cs typeface="Arial" pitchFamily="34" charset="-120"/>
               </a:rPr>
-              <a:t>9.3%</a:t>
+              <a:t>8.8%</a:t>
             </a:r>
             <a:endParaRPr lang="en-US" sz="3200" dirty="0"/>
           </a:p>
@@ -5731,7 +5731,7 @@
                 <a:ea typeface="Arial" pitchFamily="34" charset="-122"/>
                 <a:cs typeface="Arial" pitchFamily="34" charset="-120"/>
               </a:rPr>
-              <a:t>97件</a:t>
+              <a:t>102件</a:t>
             </a:r>
             <a:endParaRPr lang="en-US" sz="3200" dirty="0"/>
           </a:p>
@@ -5879,7 +5879,7 @@
                 <a:ea typeface="Arial" pitchFamily="34" charset="-122"/>
                 <a:cs typeface="Arial" pitchFamily="34" charset="-120"/>
               </a:rPr>
-              <a:t>  駅から近くて、寝るだけの滞在にピッタリ</a:t>
+              <a:t>  部屋には加湿器が備え付けられていて、滞在中とても便利でした</a:t>
             </a:r>
             <a:endParaRPr lang="en-US" sz="1100" dirty="0"/>
           </a:p>
@@ -5919,7 +5919,7 @@
                 <a:ea typeface="Arial" pitchFamily="34" charset="-122"/>
                 <a:cs typeface="Arial" pitchFamily="34" charset="-120"/>
               </a:rPr>
-              <a:t>  スタッフの対応 洗面ボール中のカビ 洗面ボール中のカビ</a:t>
+              <a:t>  スタッフは親切で気配りが行き届いていました</a:t>
             </a:r>
             <a:endParaRPr lang="en-US" sz="1100" dirty="0"/>
           </a:p>
@@ -5939,7 +5939,7 @@
                 <a:ea typeface="Arial" pitchFamily="34" charset="-122"/>
                 <a:cs typeface="Arial" pitchFamily="34" charset="-120"/>
               </a:rPr>
-              <a:t>朝食 </a:t>
+              <a:t>快適さ・設備 </a:t>
             </a:r>
             <a:endParaRPr lang="en-US" sz="1100" dirty="0"/>
           </a:p>
@@ -5959,7 +5959,7 @@
                 <a:ea typeface="Arial" pitchFamily="34" charset="-122"/>
                 <a:cs typeface="Arial" pitchFamily="34" charset="-120"/>
               </a:rPr>
-              <a:t>  タイ料理の朝食は、初めてで とても美味しかったです</a:t>
+              <a:t>  クイーンサイズのベッドがある部屋を予約したのですが、日本の基準からするとかなり広々としていました</a:t>
             </a:r>
             <a:endParaRPr lang="en-US" sz="1100" dirty="0"/>
           </a:p>
@@ -6107,7 +6107,7 @@
                 <a:ea typeface="Arial" pitchFamily="34" charset="-122"/>
                 <a:cs typeface="Arial" pitchFamily="34" charset="-120"/>
               </a:rPr>
-              <a:t>  he found the driver sitting in the car at the back of the...</a:t>
+              <a:t>  I booked a room with a queen bed, which I found quite spa...</a:t>
             </a:r>
             <a:endParaRPr lang="en-US" sz="1100" dirty="0"/>
           </a:p>
@@ -6540,7 +6540,7 @@
                 <a:ea typeface="Arial" pitchFamily="34" charset="-122"/>
                 <a:cs typeface="Arial" pitchFamily="34" charset="-120"/>
               </a:rPr>
-              <a:t>8.10</a:t>
+              <a:t>8.11</a:t>
             </a:r>
             <a:endParaRPr lang="en-US" sz="3200" dirty="0"/>
           </a:p>
@@ -6790,7 +6790,7 @@
                 <a:ea typeface="Arial" pitchFamily="34" charset="-122"/>
                 <a:cs typeface="Arial" pitchFamily="34" charset="-120"/>
               </a:rPr>
-              <a:t>9.3%</a:t>
+              <a:t>8.8%</a:t>
             </a:r>
             <a:endParaRPr lang="en-US" sz="3200" dirty="0"/>
           </a:p>
@@ -6915,7 +6915,7 @@
                 <a:ea typeface="Arial" pitchFamily="34" charset="-122"/>
                 <a:cs typeface="Arial" pitchFamily="34" charset="-120"/>
               </a:rPr>
-              <a:t>97件</a:t>
+              <a:t>102件</a:t>
             </a:r>
             <a:endParaRPr lang="en-US" sz="3200" dirty="0"/>
           </a:p>
@@ -7385,7 +7385,7 @@
                 <a:ea typeface="Arial" pitchFamily="34" charset="-122"/>
                 <a:cs typeface="Arial" pitchFamily="34" charset="-120"/>
               </a:rPr>
-              <a:t>Google(7.6)が相対的に低い。口コミ返信の強化が急務</a:t>
+              <a:t>Agoda(7.3)が相対的に低い。口コミ返信の強化が急務</a:t>
             </a:r>
             <a:endParaRPr lang="en-US" sz="1100" dirty="0"/>
           </a:p>
@@ -8578,7 +8578,7 @@
                           <a:ea typeface="Arial" pitchFamily="34" charset="-122"/>
                           <a:cs typeface="Arial" pitchFamily="34" charset="-120"/>
                         </a:rPr>
-                        <a:t>12</a:t>
+                        <a:t>13</a:t>
                       </a:r>
                       <a:endParaRPr lang="en-US" sz="900" dirty="0">
                         <a:latin typeface="Arial" charset="0"/>
@@ -8646,7 +8646,7 @@
                           <a:ea typeface="Arial" pitchFamily="34" charset="-122"/>
                           <a:cs typeface="Arial" pitchFamily="34" charset="-120"/>
                         </a:rPr>
-                        <a:t>4.17</a:t>
+                        <a:t>4.23</a:t>
                       </a:r>
                       <a:endParaRPr lang="en-US" sz="900" dirty="0">
                         <a:latin typeface="Arial" charset="0"/>
@@ -8782,7 +8782,7 @@
                           <a:ea typeface="Arial" pitchFamily="34" charset="-122"/>
                           <a:cs typeface="Arial" pitchFamily="34" charset="-120"/>
                         </a:rPr>
-                        <a:t>8.33</a:t>
+                        <a:t>8.46</a:t>
                       </a:r>
                       <a:endParaRPr lang="en-US" sz="900" dirty="0">
                         <a:latin typeface="Arial" charset="0"/>
@@ -8920,7 +8920,7 @@
                           <a:ea typeface="Arial" pitchFamily="34" charset="-122"/>
                           <a:cs typeface="Arial" pitchFamily="34" charset="-120"/>
                         </a:rPr>
-                        <a:t>50</a:t>
+                        <a:t>52</a:t>
                       </a:r>
                       <a:endParaRPr lang="en-US" sz="900" dirty="0">
                         <a:latin typeface="Arial" charset="0"/>
@@ -8988,7 +8988,7 @@
                           <a:ea typeface="Arial" pitchFamily="34" charset="-122"/>
                           <a:cs typeface="Arial" pitchFamily="34" charset="-120"/>
                         </a:rPr>
-                        <a:t>8.16</a:t>
+                        <a:t>8.17</a:t>
                       </a:r>
                       <a:endParaRPr lang="en-US" sz="900" dirty="0">
                         <a:latin typeface="Arial" charset="0"/>
@@ -9124,7 +9124,7 @@
                           <a:ea typeface="Arial" pitchFamily="34" charset="-122"/>
                           <a:cs typeface="Arial" pitchFamily="34" charset="-120"/>
                         </a:rPr>
-                        <a:t>8.16</a:t>
+                        <a:t>8.17</a:t>
                       </a:r>
                       <a:endParaRPr lang="en-US" sz="900" dirty="0">
                         <a:latin typeface="Arial" charset="0"/>
@@ -9172,6 +9172,348 @@
                     </a:lnB>
                     <a:solidFill>
                       <a:srgbClr val="FFFFFF"/>
+                    </a:solidFill>
+                  </a:tcPr>
+                </a:tc>
+              </a:tr>
+              <a:tr h="201168">
+                <a:tc>
+                  <a:txBody>
+                    <a:bodyPr/>
+                    <a:lstStyle/>
+                    <a:p>
+                      <a:pPr algn="ctr" indent="0" marL="0">
+                        <a:buNone/>
+                      </a:pPr>
+                      <a:r>
+                        <a:rPr lang="en-US" sz="900" dirty="0">
+                          <a:solidFill>
+                            <a:srgbClr val="000000"/>
+                          </a:solidFill>
+                          <a:latin typeface="Arial" pitchFamily="34" charset="0"/>
+                          <a:ea typeface="Arial" pitchFamily="34" charset="-122"/>
+                          <a:cs typeface="Arial" pitchFamily="34" charset="-120"/>
+                        </a:rPr>
+                        <a:t>Google</a:t>
+                      </a:r>
+                      <a:endParaRPr lang="en-US" sz="900" dirty="0">
+                        <a:latin typeface="Arial" charset="0"/>
+                        <a:ea typeface="Arial" charset="0"/>
+                        <a:cs typeface="Arial" charset="0"/>
+                      </a:endParaRPr>
+                    </a:p>
+                  </a:txBody>
+                  <a:tcPr marL="91440" marR="91440" marT="45720" marB="45720">
+                    <a:lnL w="6350" cap="flat" cmpd="sng" algn="ctr">
+                      <a:solidFill>
+                        <a:srgbClr val="CBD5E1"/>
+                      </a:solidFill>
+                      <a:prstDash val="solid"/>
+                      <a:round/>
+                      <a:headEnd type="none" w="med" len="med"/>
+                      <a:tailEnd type="none" w="med" len="med"/>
+                    </a:lnL>
+                    <a:lnR w="6350" cap="flat" cmpd="sng" algn="ctr">
+                      <a:solidFill>
+                        <a:srgbClr val="CBD5E1"/>
+                      </a:solidFill>
+                      <a:prstDash val="solid"/>
+                      <a:round/>
+                      <a:headEnd type="none" w="med" len="med"/>
+                      <a:tailEnd type="none" w="med" len="med"/>
+                    </a:lnR>
+                    <a:lnT w="6350" cap="flat" cmpd="sng" algn="ctr">
+                      <a:solidFill>
+                        <a:srgbClr val="CBD5E1"/>
+                      </a:solidFill>
+                      <a:prstDash val="solid"/>
+                      <a:round/>
+                      <a:headEnd type="none" w="med" len="med"/>
+                      <a:tailEnd type="none" w="med" len="med"/>
+                    </a:lnT>
+                    <a:lnB w="6350" cap="flat" cmpd="sng" algn="ctr">
+                      <a:solidFill>
+                        <a:srgbClr val="CBD5E1"/>
+                      </a:solidFill>
+                      <a:prstDash val="solid"/>
+                      <a:round/>
+                      <a:headEnd type="none" w="med" len="med"/>
+                      <a:tailEnd type="none" w="med" len="med"/>
+                    </a:lnB>
+                    <a:solidFill>
+                      <a:srgbClr val="E8EFF8"/>
+                    </a:solidFill>
+                  </a:tcPr>
+                </a:tc>
+                <a:tc>
+                  <a:txBody>
+                    <a:bodyPr/>
+                    <a:lstStyle/>
+                    <a:p>
+                      <a:pPr algn="ctr" indent="0" marL="0">
+                        <a:buNone/>
+                      </a:pPr>
+                      <a:r>
+                        <a:rPr lang="en-US" sz="900" dirty="0">
+                          <a:solidFill>
+                            <a:srgbClr val="000000"/>
+                          </a:solidFill>
+                          <a:latin typeface="Arial" pitchFamily="34" charset="0"/>
+                          <a:ea typeface="Arial" pitchFamily="34" charset="-122"/>
+                          <a:cs typeface="Arial" pitchFamily="34" charset="-120"/>
+                        </a:rPr>
+                        <a:t>28</a:t>
+                      </a:r>
+                      <a:endParaRPr lang="en-US" sz="900" dirty="0">
+                        <a:latin typeface="Arial" charset="0"/>
+                        <a:ea typeface="Arial" charset="0"/>
+                        <a:cs typeface="Arial" charset="0"/>
+                      </a:endParaRPr>
+                    </a:p>
+                  </a:txBody>
+                  <a:tcPr marL="91440" marR="91440" marT="45720" marB="45720">
+                    <a:lnL w="6350" cap="flat" cmpd="sng" algn="ctr">
+                      <a:solidFill>
+                        <a:srgbClr val="CBD5E1"/>
+                      </a:solidFill>
+                      <a:prstDash val="solid"/>
+                      <a:round/>
+                      <a:headEnd type="none" w="med" len="med"/>
+                      <a:tailEnd type="none" w="med" len="med"/>
+                    </a:lnL>
+                    <a:lnR w="6350" cap="flat" cmpd="sng" algn="ctr">
+                      <a:solidFill>
+                        <a:srgbClr val="CBD5E1"/>
+                      </a:solidFill>
+                      <a:prstDash val="solid"/>
+                      <a:round/>
+                      <a:headEnd type="none" w="med" len="med"/>
+                      <a:tailEnd type="none" w="med" len="med"/>
+                    </a:lnR>
+                    <a:lnT w="6350" cap="flat" cmpd="sng" algn="ctr">
+                      <a:solidFill>
+                        <a:srgbClr val="CBD5E1"/>
+                      </a:solidFill>
+                      <a:prstDash val="solid"/>
+                      <a:round/>
+                      <a:headEnd type="none" w="med" len="med"/>
+                      <a:tailEnd type="none" w="med" len="med"/>
+                    </a:lnT>
+                    <a:lnB w="6350" cap="flat" cmpd="sng" algn="ctr">
+                      <a:solidFill>
+                        <a:srgbClr val="CBD5E1"/>
+                      </a:solidFill>
+                      <a:prstDash val="solid"/>
+                      <a:round/>
+                      <a:headEnd type="none" w="med" len="med"/>
+                      <a:tailEnd type="none" w="med" len="med"/>
+                    </a:lnB>
+                    <a:solidFill>
+                      <a:srgbClr val="E8EFF8"/>
+                    </a:solidFill>
+                  </a:tcPr>
+                </a:tc>
+                <a:tc>
+                  <a:txBody>
+                    <a:bodyPr/>
+                    <a:lstStyle/>
+                    <a:p>
+                      <a:pPr algn="ctr" indent="0" marL="0">
+                        <a:buNone/>
+                      </a:pPr>
+                      <a:r>
+                        <a:rPr lang="en-US" sz="900" dirty="0">
+                          <a:solidFill>
+                            <a:srgbClr val="000000"/>
+                          </a:solidFill>
+                          <a:latin typeface="Arial" pitchFamily="34" charset="0"/>
+                          <a:ea typeface="Arial" pitchFamily="34" charset="-122"/>
+                          <a:cs typeface="Arial" pitchFamily="34" charset="-120"/>
+                        </a:rPr>
+                        <a:t>3.79</a:t>
+                      </a:r>
+                      <a:endParaRPr lang="en-US" sz="900" dirty="0">
+                        <a:latin typeface="Arial" charset="0"/>
+                        <a:ea typeface="Arial" charset="0"/>
+                        <a:cs typeface="Arial" charset="0"/>
+                      </a:endParaRPr>
+                    </a:p>
+                  </a:txBody>
+                  <a:tcPr marL="91440" marR="91440" marT="45720" marB="45720">
+                    <a:lnL w="6350" cap="flat" cmpd="sng" algn="ctr">
+                      <a:solidFill>
+                        <a:srgbClr val="CBD5E1"/>
+                      </a:solidFill>
+                      <a:prstDash val="solid"/>
+                      <a:round/>
+                      <a:headEnd type="none" w="med" len="med"/>
+                      <a:tailEnd type="none" w="med" len="med"/>
+                    </a:lnL>
+                    <a:lnR w="6350" cap="flat" cmpd="sng" algn="ctr">
+                      <a:solidFill>
+                        <a:srgbClr val="CBD5E1"/>
+                      </a:solidFill>
+                      <a:prstDash val="solid"/>
+                      <a:round/>
+                      <a:headEnd type="none" w="med" len="med"/>
+                      <a:tailEnd type="none" w="med" len="med"/>
+                    </a:lnR>
+                    <a:lnT w="6350" cap="flat" cmpd="sng" algn="ctr">
+                      <a:solidFill>
+                        <a:srgbClr val="CBD5E1"/>
+                      </a:solidFill>
+                      <a:prstDash val="solid"/>
+                      <a:round/>
+                      <a:headEnd type="none" w="med" len="med"/>
+                      <a:tailEnd type="none" w="med" len="med"/>
+                    </a:lnT>
+                    <a:lnB w="6350" cap="flat" cmpd="sng" algn="ctr">
+                      <a:solidFill>
+                        <a:srgbClr val="CBD5E1"/>
+                      </a:solidFill>
+                      <a:prstDash val="solid"/>
+                      <a:round/>
+                      <a:headEnd type="none" w="med" len="med"/>
+                      <a:tailEnd type="none" w="med" len="med"/>
+                    </a:lnB>
+                    <a:solidFill>
+                      <a:srgbClr val="E8EFF8"/>
+                    </a:solidFill>
+                  </a:tcPr>
+                </a:tc>
+                <a:tc>
+                  <a:txBody>
+                    <a:bodyPr/>
+                    <a:lstStyle/>
+                    <a:p>
+                      <a:pPr algn="ctr" indent="0" marL="0">
+                        <a:buNone/>
+                      </a:pPr>
+                      <a:r>
+                        <a:rPr lang="en-US" sz="900" dirty="0">
+                          <a:solidFill>
+                            <a:srgbClr val="000000"/>
+                          </a:solidFill>
+                          <a:latin typeface="Arial" pitchFamily="34" charset="0"/>
+                          <a:ea typeface="Arial" pitchFamily="34" charset="-122"/>
+                          <a:cs typeface="Arial" pitchFamily="34" charset="-120"/>
+                        </a:rPr>
+                        <a:t>/5 (×2)</a:t>
+                      </a:r>
+                      <a:endParaRPr lang="en-US" sz="900" dirty="0">
+                        <a:latin typeface="Arial" charset="0"/>
+                        <a:ea typeface="Arial" charset="0"/>
+                        <a:cs typeface="Arial" charset="0"/>
+                      </a:endParaRPr>
+                    </a:p>
+                  </a:txBody>
+                  <a:tcPr marL="91440" marR="91440" marT="45720" marB="45720">
+                    <a:lnL w="6350" cap="flat" cmpd="sng" algn="ctr">
+                      <a:solidFill>
+                        <a:srgbClr val="CBD5E1"/>
+                      </a:solidFill>
+                      <a:prstDash val="solid"/>
+                      <a:round/>
+                      <a:headEnd type="none" w="med" len="med"/>
+                      <a:tailEnd type="none" w="med" len="med"/>
+                    </a:lnL>
+                    <a:lnR w="6350" cap="flat" cmpd="sng" algn="ctr">
+                      <a:solidFill>
+                        <a:srgbClr val="CBD5E1"/>
+                      </a:solidFill>
+                      <a:prstDash val="solid"/>
+                      <a:round/>
+                      <a:headEnd type="none" w="med" len="med"/>
+                      <a:tailEnd type="none" w="med" len="med"/>
+                    </a:lnR>
+                    <a:lnT w="6350" cap="flat" cmpd="sng" algn="ctr">
+                      <a:solidFill>
+                        <a:srgbClr val="CBD5E1"/>
+                      </a:solidFill>
+                      <a:prstDash val="solid"/>
+                      <a:round/>
+                      <a:headEnd type="none" w="med" len="med"/>
+                      <a:tailEnd type="none" w="med" len="med"/>
+                    </a:lnT>
+                    <a:lnB w="6350" cap="flat" cmpd="sng" algn="ctr">
+                      <a:solidFill>
+                        <a:srgbClr val="CBD5E1"/>
+                      </a:solidFill>
+                      <a:prstDash val="solid"/>
+                      <a:round/>
+                      <a:headEnd type="none" w="med" len="med"/>
+                      <a:tailEnd type="none" w="med" len="med"/>
+                    </a:lnB>
+                    <a:solidFill>
+                      <a:srgbClr val="E8EFF8"/>
+                    </a:solidFill>
+                  </a:tcPr>
+                </a:tc>
+                <a:tc>
+                  <a:txBody>
+                    <a:bodyPr/>
+                    <a:lstStyle/>
+                    <a:p>
+                      <a:pPr algn="ctr" indent="0" marL="0">
+                        <a:buNone/>
+                      </a:pPr>
+                      <a:r>
+                        <a:rPr lang="en-US" sz="900" dirty="0">
+                          <a:solidFill>
+                            <a:srgbClr val="000000"/>
+                          </a:solidFill>
+                          <a:latin typeface="Arial" pitchFamily="34" charset="0"/>
+                          <a:ea typeface="Arial" pitchFamily="34" charset="-122"/>
+                          <a:cs typeface="Arial" pitchFamily="34" charset="-120"/>
+                        </a:rPr>
+                        <a:t>7.57</a:t>
+                      </a:r>
+                      <a:endParaRPr lang="en-US" sz="900" dirty="0">
+                        <a:latin typeface="Arial" charset="0"/>
+                        <a:ea typeface="Arial" charset="0"/>
+                        <a:cs typeface="Arial" charset="0"/>
+                      </a:endParaRPr>
+                    </a:p>
+                  </a:txBody>
+                  <a:tcPr marL="91440" marR="91440" marT="45720" marB="45720">
+                    <a:lnL w="6350" cap="flat" cmpd="sng" algn="ctr">
+                      <a:solidFill>
+                        <a:srgbClr val="CBD5E1"/>
+                      </a:solidFill>
+                      <a:prstDash val="solid"/>
+                      <a:round/>
+                      <a:headEnd type="none" w="med" len="med"/>
+                      <a:tailEnd type="none" w="med" len="med"/>
+                    </a:lnL>
+                    <a:lnR w="6350" cap="flat" cmpd="sng" algn="ctr">
+                      <a:solidFill>
+                        <a:srgbClr val="CBD5E1"/>
+                      </a:solidFill>
+                      <a:prstDash val="solid"/>
+                      <a:round/>
+                      <a:headEnd type="none" w="med" len="med"/>
+                      <a:tailEnd type="none" w="med" len="med"/>
+                    </a:lnR>
+                    <a:lnT w="6350" cap="flat" cmpd="sng" algn="ctr">
+                      <a:solidFill>
+                        <a:srgbClr val="CBD5E1"/>
+                      </a:solidFill>
+                      <a:prstDash val="solid"/>
+                      <a:round/>
+                      <a:headEnd type="none" w="med" len="med"/>
+                      <a:tailEnd type="none" w="med" len="med"/>
+                    </a:lnT>
+                    <a:lnB w="6350" cap="flat" cmpd="sng" algn="ctr">
+                      <a:solidFill>
+                        <a:srgbClr val="CBD5E1"/>
+                      </a:solidFill>
+                      <a:prstDash val="solid"/>
+                      <a:round/>
+                      <a:headEnd type="none" w="med" len="med"/>
+                      <a:tailEnd type="none" w="med" len="med"/>
+                    </a:lnB>
+                    <a:solidFill>
+                      <a:srgbClr val="E8EFF8"/>
                     </a:solidFill>
                   </a:tcPr>
                 </a:tc>
@@ -9241,7 +9583,7 @@
                       <a:tailEnd type="none" w="med" len="med"/>
                     </a:lnB>
                     <a:solidFill>
-                      <a:srgbClr val="E8EFF8"/>
+                      <a:srgbClr val="FFFFFF"/>
                     </a:solidFill>
                   </a:tcPr>
                 </a:tc>
@@ -9262,7 +9604,7 @@
                           <a:ea typeface="Arial" pitchFamily="34" charset="-122"/>
                           <a:cs typeface="Arial" pitchFamily="34" charset="-120"/>
                         </a:rPr>
-                        <a:t>2</a:t>
+                        <a:t>3</a:t>
                       </a:r>
                       <a:endParaRPr lang="en-US" sz="900" dirty="0">
                         <a:latin typeface="Arial" charset="0"/>
@@ -9309,7 +9651,7 @@
                       <a:tailEnd type="none" w="med" len="med"/>
                     </a:lnB>
                     <a:solidFill>
-                      <a:srgbClr val="E8EFF8"/>
+                      <a:srgbClr val="FFFFFF"/>
                     </a:solidFill>
                   </a:tcPr>
                 </a:tc>
@@ -9330,7 +9672,7 @@
                           <a:ea typeface="Arial" pitchFamily="34" charset="-122"/>
                           <a:cs typeface="Arial" pitchFamily="34" charset="-120"/>
                         </a:rPr>
-                        <a:t>8</a:t>
+                        <a:t>7.33</a:t>
                       </a:r>
                       <a:endParaRPr lang="en-US" sz="900" dirty="0">
                         <a:latin typeface="Arial" charset="0"/>
@@ -9377,7 +9719,7 @@
                       <a:tailEnd type="none" w="med" len="med"/>
                     </a:lnB>
                     <a:solidFill>
-                      <a:srgbClr val="E8EFF8"/>
+                      <a:srgbClr val="FFFFFF"/>
                     </a:solidFill>
                   </a:tcPr>
                 </a:tc>
@@ -9445,144 +9787,6 @@
                       <a:tailEnd type="none" w="med" len="med"/>
                     </a:lnB>
                     <a:solidFill>
-                      <a:srgbClr val="E8EFF8"/>
-                    </a:solidFill>
-                  </a:tcPr>
-                </a:tc>
-                <a:tc>
-                  <a:txBody>
-                    <a:bodyPr/>
-                    <a:lstStyle/>
-                    <a:p>
-                      <a:pPr algn="ctr" indent="0" marL="0">
-                        <a:buNone/>
-                      </a:pPr>
-                      <a:r>
-                        <a:rPr lang="en-US" sz="900" dirty="0">
-                          <a:solidFill>
-                            <a:srgbClr val="000000"/>
-                          </a:solidFill>
-                          <a:latin typeface="Arial" pitchFamily="34" charset="0"/>
-                          <a:ea typeface="Arial" pitchFamily="34" charset="-122"/>
-                          <a:cs typeface="Arial" pitchFamily="34" charset="-120"/>
-                        </a:rPr>
-                        <a:t>8</a:t>
-                      </a:r>
-                      <a:endParaRPr lang="en-US" sz="900" dirty="0">
-                        <a:latin typeface="Arial" charset="0"/>
-                        <a:ea typeface="Arial" charset="0"/>
-                        <a:cs typeface="Arial" charset="0"/>
-                      </a:endParaRPr>
-                    </a:p>
-                  </a:txBody>
-                  <a:tcPr marL="91440" marR="91440" marT="45720" marB="45720">
-                    <a:lnL w="6350" cap="flat" cmpd="sng" algn="ctr">
-                      <a:solidFill>
-                        <a:srgbClr val="CBD5E1"/>
-                      </a:solidFill>
-                      <a:prstDash val="solid"/>
-                      <a:round/>
-                      <a:headEnd type="none" w="med" len="med"/>
-                      <a:tailEnd type="none" w="med" len="med"/>
-                    </a:lnL>
-                    <a:lnR w="6350" cap="flat" cmpd="sng" algn="ctr">
-                      <a:solidFill>
-                        <a:srgbClr val="CBD5E1"/>
-                      </a:solidFill>
-                      <a:prstDash val="solid"/>
-                      <a:round/>
-                      <a:headEnd type="none" w="med" len="med"/>
-                      <a:tailEnd type="none" w="med" len="med"/>
-                    </a:lnR>
-                    <a:lnT w="6350" cap="flat" cmpd="sng" algn="ctr">
-                      <a:solidFill>
-                        <a:srgbClr val="CBD5E1"/>
-                      </a:solidFill>
-                      <a:prstDash val="solid"/>
-                      <a:round/>
-                      <a:headEnd type="none" w="med" len="med"/>
-                      <a:tailEnd type="none" w="med" len="med"/>
-                    </a:lnT>
-                    <a:lnB w="6350" cap="flat" cmpd="sng" algn="ctr">
-                      <a:solidFill>
-                        <a:srgbClr val="CBD5E1"/>
-                      </a:solidFill>
-                      <a:prstDash val="solid"/>
-                      <a:round/>
-                      <a:headEnd type="none" w="med" len="med"/>
-                      <a:tailEnd type="none" w="med" len="med"/>
-                    </a:lnB>
-                    <a:solidFill>
-                      <a:srgbClr val="E8EFF8"/>
-                    </a:solidFill>
-                  </a:tcPr>
-                </a:tc>
-              </a:tr>
-              <a:tr h="201168">
-                <a:tc>
-                  <a:txBody>
-                    <a:bodyPr/>
-                    <a:lstStyle/>
-                    <a:p>
-                      <a:pPr algn="ctr" indent="0" marL="0">
-                        <a:buNone/>
-                      </a:pPr>
-                      <a:r>
-                        <a:rPr lang="en-US" sz="900" dirty="0">
-                          <a:solidFill>
-                            <a:srgbClr val="000000"/>
-                          </a:solidFill>
-                          <a:latin typeface="Arial" pitchFamily="34" charset="0"/>
-                          <a:ea typeface="Arial" pitchFamily="34" charset="-122"/>
-                          <a:cs typeface="Arial" pitchFamily="34" charset="-120"/>
-                        </a:rPr>
-                        <a:t>Google</a:t>
-                      </a:r>
-                      <a:endParaRPr lang="en-US" sz="900" dirty="0">
-                        <a:latin typeface="Arial" charset="0"/>
-                        <a:ea typeface="Arial" charset="0"/>
-                        <a:cs typeface="Arial" charset="0"/>
-                      </a:endParaRPr>
-                    </a:p>
-                  </a:txBody>
-                  <a:tcPr marL="91440" marR="91440" marT="45720" marB="45720">
-                    <a:lnL w="6350" cap="flat" cmpd="sng" algn="ctr">
-                      <a:solidFill>
-                        <a:srgbClr val="CBD5E1"/>
-                      </a:solidFill>
-                      <a:prstDash val="solid"/>
-                      <a:round/>
-                      <a:headEnd type="none" w="med" len="med"/>
-                      <a:tailEnd type="none" w="med" len="med"/>
-                    </a:lnL>
-                    <a:lnR w="6350" cap="flat" cmpd="sng" algn="ctr">
-                      <a:solidFill>
-                        <a:srgbClr val="CBD5E1"/>
-                      </a:solidFill>
-                      <a:prstDash val="solid"/>
-                      <a:round/>
-                      <a:headEnd type="none" w="med" len="med"/>
-                      <a:tailEnd type="none" w="med" len="med"/>
-                    </a:lnR>
-                    <a:lnT w="6350" cap="flat" cmpd="sng" algn="ctr">
-                      <a:solidFill>
-                        <a:srgbClr val="CBD5E1"/>
-                      </a:solidFill>
-                      <a:prstDash val="solid"/>
-                      <a:round/>
-                      <a:headEnd type="none" w="med" len="med"/>
-                      <a:tailEnd type="none" w="med" len="med"/>
-                    </a:lnT>
-                    <a:lnB w="6350" cap="flat" cmpd="sng" algn="ctr">
-                      <a:solidFill>
-                        <a:srgbClr val="CBD5E1"/>
-                      </a:solidFill>
-                      <a:prstDash val="solid"/>
-                      <a:round/>
-                      <a:headEnd type="none" w="med" len="med"/>
-                      <a:tailEnd type="none" w="med" len="med"/>
-                    </a:lnB>
-                    <a:solidFill>
                       <a:srgbClr val="FFFFFF"/>
                     </a:solidFill>
                   </a:tcPr>
@@ -9604,211 +9808,7 @@
                           <a:ea typeface="Arial" pitchFamily="34" charset="-122"/>
                           <a:cs typeface="Arial" pitchFamily="34" charset="-120"/>
                         </a:rPr>
-                        <a:t>27</a:t>
-                      </a:r>
-                      <a:endParaRPr lang="en-US" sz="900" dirty="0">
-                        <a:latin typeface="Arial" charset="0"/>
-                        <a:ea typeface="Arial" charset="0"/>
-                        <a:cs typeface="Arial" charset="0"/>
-                      </a:endParaRPr>
-                    </a:p>
-                  </a:txBody>
-                  <a:tcPr marL="91440" marR="91440" marT="45720" marB="45720">
-                    <a:lnL w="6350" cap="flat" cmpd="sng" algn="ctr">
-                      <a:solidFill>
-                        <a:srgbClr val="CBD5E1"/>
-                      </a:solidFill>
-                      <a:prstDash val="solid"/>
-                      <a:round/>
-                      <a:headEnd type="none" w="med" len="med"/>
-                      <a:tailEnd type="none" w="med" len="med"/>
-                    </a:lnL>
-                    <a:lnR w="6350" cap="flat" cmpd="sng" algn="ctr">
-                      <a:solidFill>
-                        <a:srgbClr val="CBD5E1"/>
-                      </a:solidFill>
-                      <a:prstDash val="solid"/>
-                      <a:round/>
-                      <a:headEnd type="none" w="med" len="med"/>
-                      <a:tailEnd type="none" w="med" len="med"/>
-                    </a:lnR>
-                    <a:lnT w="6350" cap="flat" cmpd="sng" algn="ctr">
-                      <a:solidFill>
-                        <a:srgbClr val="CBD5E1"/>
-                      </a:solidFill>
-                      <a:prstDash val="solid"/>
-                      <a:round/>
-                      <a:headEnd type="none" w="med" len="med"/>
-                      <a:tailEnd type="none" w="med" len="med"/>
-                    </a:lnT>
-                    <a:lnB w="6350" cap="flat" cmpd="sng" algn="ctr">
-                      <a:solidFill>
-                        <a:srgbClr val="CBD5E1"/>
-                      </a:solidFill>
-                      <a:prstDash val="solid"/>
-                      <a:round/>
-                      <a:headEnd type="none" w="med" len="med"/>
-                      <a:tailEnd type="none" w="med" len="med"/>
-                    </a:lnB>
-                    <a:solidFill>
-                      <a:srgbClr val="FFFFFF"/>
-                    </a:solidFill>
-                  </a:tcPr>
-                </a:tc>
-                <a:tc>
-                  <a:txBody>
-                    <a:bodyPr/>
-                    <a:lstStyle/>
-                    <a:p>
-                      <a:pPr algn="ctr" indent="0" marL="0">
-                        <a:buNone/>
-                      </a:pPr>
-                      <a:r>
-                        <a:rPr lang="en-US" sz="900" dirty="0">
-                          <a:solidFill>
-                            <a:srgbClr val="000000"/>
-                          </a:solidFill>
-                          <a:latin typeface="Arial" pitchFamily="34" charset="0"/>
-                          <a:ea typeface="Arial" pitchFamily="34" charset="-122"/>
-                          <a:cs typeface="Arial" pitchFamily="34" charset="-120"/>
-                        </a:rPr>
-                        <a:t>3.78</a:t>
-                      </a:r>
-                      <a:endParaRPr lang="en-US" sz="900" dirty="0">
-                        <a:latin typeface="Arial" charset="0"/>
-                        <a:ea typeface="Arial" charset="0"/>
-                        <a:cs typeface="Arial" charset="0"/>
-                      </a:endParaRPr>
-                    </a:p>
-                  </a:txBody>
-                  <a:tcPr marL="91440" marR="91440" marT="45720" marB="45720">
-                    <a:lnL w="6350" cap="flat" cmpd="sng" algn="ctr">
-                      <a:solidFill>
-                        <a:srgbClr val="CBD5E1"/>
-                      </a:solidFill>
-                      <a:prstDash val="solid"/>
-                      <a:round/>
-                      <a:headEnd type="none" w="med" len="med"/>
-                      <a:tailEnd type="none" w="med" len="med"/>
-                    </a:lnL>
-                    <a:lnR w="6350" cap="flat" cmpd="sng" algn="ctr">
-                      <a:solidFill>
-                        <a:srgbClr val="CBD5E1"/>
-                      </a:solidFill>
-                      <a:prstDash val="solid"/>
-                      <a:round/>
-                      <a:headEnd type="none" w="med" len="med"/>
-                      <a:tailEnd type="none" w="med" len="med"/>
-                    </a:lnR>
-                    <a:lnT w="6350" cap="flat" cmpd="sng" algn="ctr">
-                      <a:solidFill>
-                        <a:srgbClr val="CBD5E1"/>
-                      </a:solidFill>
-                      <a:prstDash val="solid"/>
-                      <a:round/>
-                      <a:headEnd type="none" w="med" len="med"/>
-                      <a:tailEnd type="none" w="med" len="med"/>
-                    </a:lnT>
-                    <a:lnB w="6350" cap="flat" cmpd="sng" algn="ctr">
-                      <a:solidFill>
-                        <a:srgbClr val="CBD5E1"/>
-                      </a:solidFill>
-                      <a:prstDash val="solid"/>
-                      <a:round/>
-                      <a:headEnd type="none" w="med" len="med"/>
-                      <a:tailEnd type="none" w="med" len="med"/>
-                    </a:lnB>
-                    <a:solidFill>
-                      <a:srgbClr val="FFFFFF"/>
-                    </a:solidFill>
-                  </a:tcPr>
-                </a:tc>
-                <a:tc>
-                  <a:txBody>
-                    <a:bodyPr/>
-                    <a:lstStyle/>
-                    <a:p>
-                      <a:pPr algn="ctr" indent="0" marL="0">
-                        <a:buNone/>
-                      </a:pPr>
-                      <a:r>
-                        <a:rPr lang="en-US" sz="900" dirty="0">
-                          <a:solidFill>
-                            <a:srgbClr val="000000"/>
-                          </a:solidFill>
-                          <a:latin typeface="Arial" pitchFamily="34" charset="0"/>
-                          <a:ea typeface="Arial" pitchFamily="34" charset="-122"/>
-                          <a:cs typeface="Arial" pitchFamily="34" charset="-120"/>
-                        </a:rPr>
-                        <a:t>/5 (×2)</a:t>
-                      </a:r>
-                      <a:endParaRPr lang="en-US" sz="900" dirty="0">
-                        <a:latin typeface="Arial" charset="0"/>
-                        <a:ea typeface="Arial" charset="0"/>
-                        <a:cs typeface="Arial" charset="0"/>
-                      </a:endParaRPr>
-                    </a:p>
-                  </a:txBody>
-                  <a:tcPr marL="91440" marR="91440" marT="45720" marB="45720">
-                    <a:lnL w="6350" cap="flat" cmpd="sng" algn="ctr">
-                      <a:solidFill>
-                        <a:srgbClr val="CBD5E1"/>
-                      </a:solidFill>
-                      <a:prstDash val="solid"/>
-                      <a:round/>
-                      <a:headEnd type="none" w="med" len="med"/>
-                      <a:tailEnd type="none" w="med" len="med"/>
-                    </a:lnL>
-                    <a:lnR w="6350" cap="flat" cmpd="sng" algn="ctr">
-                      <a:solidFill>
-                        <a:srgbClr val="CBD5E1"/>
-                      </a:solidFill>
-                      <a:prstDash val="solid"/>
-                      <a:round/>
-                      <a:headEnd type="none" w="med" len="med"/>
-                      <a:tailEnd type="none" w="med" len="med"/>
-                    </a:lnR>
-                    <a:lnT w="6350" cap="flat" cmpd="sng" algn="ctr">
-                      <a:solidFill>
-                        <a:srgbClr val="CBD5E1"/>
-                      </a:solidFill>
-                      <a:prstDash val="solid"/>
-                      <a:round/>
-                      <a:headEnd type="none" w="med" len="med"/>
-                      <a:tailEnd type="none" w="med" len="med"/>
-                    </a:lnT>
-                    <a:lnB w="6350" cap="flat" cmpd="sng" algn="ctr">
-                      <a:solidFill>
-                        <a:srgbClr val="CBD5E1"/>
-                      </a:solidFill>
-                      <a:prstDash val="solid"/>
-                      <a:round/>
-                      <a:headEnd type="none" w="med" len="med"/>
-                      <a:tailEnd type="none" w="med" len="med"/>
-                    </a:lnB>
-                    <a:solidFill>
-                      <a:srgbClr val="FFFFFF"/>
-                    </a:solidFill>
-                  </a:tcPr>
-                </a:tc>
-                <a:tc>
-                  <a:txBody>
-                    <a:bodyPr/>
-                    <a:lstStyle/>
-                    <a:p>
-                      <a:pPr algn="ctr" indent="0" marL="0">
-                        <a:buNone/>
-                      </a:pPr>
-                      <a:r>
-                        <a:rPr lang="en-US" sz="900" dirty="0">
-                          <a:solidFill>
-                            <a:srgbClr val="000000"/>
-                          </a:solidFill>
-                          <a:latin typeface="Arial" pitchFamily="34" charset="0"/>
-                          <a:ea typeface="Arial" pitchFamily="34" charset="-122"/>
-                          <a:cs typeface="Arial" pitchFamily="34" charset="-120"/>
-                        </a:rPr>
-                        <a:t>7.56</a:t>
+                        <a:t>7.33</a:t>
                       </a:r>
                       <a:endParaRPr lang="en-US" sz="900" dirty="0">
                         <a:latin typeface="Arial" charset="0"/>
@@ -10216,7 +10216,7 @@
                 <a:ea typeface="Arial" pitchFamily="34" charset="-122"/>
                 <a:cs typeface="Arial" pitchFamily="34" charset="-120"/>
               </a:rPr>
-              <a:t>76件（78.4%）</a:t>
+              <a:t>80件（78.4%）</a:t>
             </a:r>
             <a:endParaRPr lang="en-US" sz="1100" dirty="0"/>
           </a:p>
@@ -10314,7 +10314,7 @@
                 <a:ea typeface="Arial" pitchFamily="34" charset="-122"/>
                 <a:cs typeface="Arial" pitchFamily="34" charset="-120"/>
               </a:rPr>
-              <a:t>12件（12.4%）</a:t>
+              <a:t>13件（12.7%）</a:t>
             </a:r>
             <a:endParaRPr lang="en-US" sz="1100" dirty="0"/>
           </a:p>
@@ -10412,7 +10412,7 @@
                 <a:ea typeface="Arial" pitchFamily="34" charset="-122"/>
                 <a:cs typeface="Arial" pitchFamily="34" charset="-120"/>
               </a:rPr>
-              <a:t>9件（9.3%）</a:t>
+              <a:t>9件（8.8%）</a:t>
             </a:r>
             <a:endParaRPr lang="en-US" sz="1100" dirty="0"/>
           </a:p>
@@ -10824,7 +10824,7 @@
                 <a:ea typeface="Arial" pitchFamily="34" charset="-122"/>
                 <a:cs typeface="Arial" pitchFamily="34" charset="-120"/>
               </a:rPr>
-              <a:t>駅から近くて、寝るだけの滞在にピッタリ</a:t>
+              <a:t>部屋には加湿器が備え付けられていて、滞在中とても便利でした</a:t>
             </a:r>
             <a:endParaRPr lang="en-US" sz="900" dirty="0"/>
           </a:p>
@@ -10863,7 +10863,7 @@
                 <a:ea typeface="Arial" pitchFamily="34" charset="-122"/>
                 <a:cs typeface="Arial" pitchFamily="34" charset="-120"/>
               </a:rPr>
-              <a:t>「地下鉄の駅からも近く、ホテルも分かりやすかったです」</a:t>
+              <a:t>「Clean spacious good location Lack of facilities but can’t...」</a:t>
             </a:r>
             <a:endParaRPr lang="en-US" sz="900" dirty="0"/>
           </a:p>
@@ -11047,7 +11047,7 @@
                 <a:ea typeface="Arial" pitchFamily="34" charset="-122"/>
                 <a:cs typeface="Arial" pitchFamily="34" charset="-120"/>
               </a:rPr>
-              <a:t>スタッフの対応 洗面ボール中のカビ 洗面ボール中のカビ</a:t>
+              <a:t>スタッフは親切で気配りが行き届いていました</a:t>
             </a:r>
             <a:endParaRPr lang="en-US" sz="900" dirty="0"/>
           </a:p>
@@ -11086,7 +11086,7 @@
                 <a:ea typeface="Arial" pitchFamily="34" charset="-122"/>
                 <a:cs typeface="Arial" pitchFamily="34" charset="-120"/>
               </a:rPr>
-              <a:t>「アップグレードをリクエストしたところ、対応してもらえたが、追加料金が少し高いと感じた」</a:t>
+              <a:t>「フロントの方々の対応が丁寧でした」</a:t>
             </a:r>
             <a:endParaRPr lang="en-US" sz="900" dirty="0"/>
           </a:p>
@@ -11231,7 +11231,7 @@
                 <a:ea typeface="Arial" pitchFamily="34" charset="-122"/>
                 <a:cs typeface="Arial" pitchFamily="34" charset="-120"/>
               </a:rPr>
-              <a:t>朝食</a:t>
+              <a:t>快適さ・設備</a:t>
             </a:r>
             <a:endParaRPr lang="en-US" sz="1300" dirty="0"/>
           </a:p>
@@ -11270,7 +11270,7 @@
                 <a:ea typeface="Arial" pitchFamily="34" charset="-122"/>
                 <a:cs typeface="Arial" pitchFamily="34" charset="-120"/>
               </a:rPr>
-              <a:t>タイ料理の朝食は、初めてで とても美味しかったです</a:t>
+              <a:t>クイーンサイズのベッドがある部屋を予約したのですが、日本の基準からするとかなり広々としていました</a:t>
             </a:r>
             <a:endParaRPr lang="en-US" sz="900" dirty="0"/>
           </a:p>
@@ -11309,7 +11309,7 @@
                 <a:ea typeface="Arial" pitchFamily="34" charset="-122"/>
                 <a:cs typeface="Arial" pitchFamily="34" charset="-120"/>
               </a:rPr>
-              <a:t>「朝食が「タイ料理」と言う事で楽しみにしていましたが、とても美味しかったです」</a:t>
+              <a:t>「Good value 設備は少ないけど、それ以上は望めない」</a:t>
             </a:r>
             <a:endParaRPr lang="en-US" sz="900" dirty="0"/>
           </a:p>
@@ -11454,7 +11454,7 @@
                 <a:ea typeface="Arial" pitchFamily="34" charset="-122"/>
                 <a:cs typeface="Arial" pitchFamily="34" charset="-120"/>
               </a:rPr>
-              <a:t>快適さ・設備</a:t>
+              <a:t>朝食</a:t>
             </a:r>
             <a:endParaRPr lang="en-US" sz="1300" dirty="0"/>
           </a:p>
@@ -11493,7 +11493,7 @@
                 <a:ea typeface="Arial" pitchFamily="34" charset="-122"/>
                 <a:cs typeface="Arial" pitchFamily="34" charset="-120"/>
               </a:rPr>
-              <a:t>ベッドにコンセントは無いですが、横の壁にはコンセントがあるので、少し長めの電源ケーブルがあれば問題無いかなと思います</a:t>
+              <a:t>タイ風の朝食は本当に美味しく、期待以上で、ぜひおすすめします</a:t>
             </a:r>
             <a:endParaRPr lang="en-US" sz="900" dirty="0"/>
           </a:p>
@@ -11532,7 +11532,7 @@
                 <a:ea typeface="Arial" pitchFamily="34" charset="-122"/>
                 <a:cs typeface="Arial" pitchFamily="34" charset="-120"/>
               </a:rPr>
-              <a:t>「Posizione attaccata alla metro  Dimensione spaziosa delle...」</a:t>
+              <a:t>「タイ料理の朝食は、初めてで とても美味しかったです」</a:t>
             </a:r>
             <a:endParaRPr lang="en-US" sz="900" dirty="0"/>
           </a:p>
@@ -11716,7 +11716,7 @@
                 <a:ea typeface="Arial" pitchFamily="34" charset="-122"/>
                 <a:cs typeface="Arial" pitchFamily="34" charset="-120"/>
               </a:rPr>
-              <a:t>建物自体は古いとは思いますが清掃が行き届いていて、快適に過ごせました</a:t>
+              <a:t>スタッフは親切で気配りが行き届いていました</a:t>
             </a:r>
             <a:endParaRPr lang="en-US" sz="900" dirty="0"/>
           </a:p>
@@ -11755,7 +11755,7 @@
                 <a:ea typeface="Arial" pitchFamily="34" charset="-122"/>
                 <a:cs typeface="Arial" pitchFamily="34" charset="-120"/>
               </a:rPr>
-              <a:t>「あまり清潔ではない」</a:t>
+              <a:t>「Clean spacious good location Lack of facilities but can’t...」</a:t>
             </a:r>
             <a:endParaRPr lang="en-US" sz="900" dirty="0"/>
           </a:p>
@@ -11861,7 +11861,7 @@
                 <a:ea typeface="Arial" pitchFamily="34" charset="-122"/>
                 <a:cs typeface="Arial" pitchFamily="34" charset="-120"/>
               </a:rPr>
-              <a:t>9件</a:t>
+              <a:t>10件+</a:t>
             </a:r>
             <a:endParaRPr lang="en-US" sz="900" dirty="0"/>
           </a:p>
@@ -11939,7 +11939,7 @@
                 <a:ea typeface="Arial" pitchFamily="34" charset="-122"/>
                 <a:cs typeface="Arial" pitchFamily="34" charset="-120"/>
               </a:rPr>
-              <a:t>不都合はありませんでしたが、段差が大きいなと思いました</a:t>
+              <a:t>I booked a room with a queen bed, which I found quite spa...</a:t>
             </a:r>
             <a:endParaRPr lang="en-US" sz="900" dirty="0"/>
           </a:p>
@@ -11978,7 +11978,7 @@
                 <a:ea typeface="Arial" pitchFamily="34" charset="-122"/>
                 <a:cs typeface="Arial" pitchFamily="34" charset="-120"/>
               </a:rPr>
-              <a:t>「風呂トイレはユニットバスになってますが、浴槽は広めで足を伸ばしてくつろげるサイズになってました」</a:t>
+              <a:t>「Clean spacious good location Lack of facilities but can’t...」</a:t>
             </a:r>
             <a:endParaRPr lang="en-US" sz="900" dirty="0"/>
           </a:p>
@@ -12668,7 +12668,7 @@
                           <a:ea typeface="Arial" pitchFamily="34" charset="-122"/>
                           <a:cs typeface="Arial" pitchFamily="34" charset="-120"/>
                         </a:rPr>
-                        <a:t>he found the driver sitting in the car at the back of the...</a:t>
+                        <a:t>I booked a room with a queen bed, which I found quite spa...</a:t>
                       </a:r>
                       <a:endParaRPr lang="en-US" sz="900" dirty="0">
                         <a:latin typeface="Arial" charset="0"/>
@@ -12736,7 +12736,7 @@
                           <a:ea typeface="Arial" pitchFamily="34" charset="-122"/>
                           <a:cs typeface="Arial" pitchFamily="34" charset="-120"/>
                         </a:rPr>
-                        <a:t>21件</a:t>
+                        <a:t>23件</a:t>
                       </a:r>
                       <a:endParaRPr lang="en-US" sz="900" dirty="0">
                         <a:latin typeface="Arial" charset="0"/>

--- a/納品レポート/ホテル別レポート/comfort_roppongi_口コミ分析レポート.pptx
+++ b/納品レポート/ホテル別レポート/comfort_roppongi_口コミ分析レポート.pptx
@@ -211,16 +211,16 @@
                   <c:v>10</c:v>
                 </c:pt>
                 <c:pt idx="1">
-                  <c:v>9.6</c:v>
+                  <c:v>9.71</c:v>
                 </c:pt>
                 <c:pt idx="2">
                   <c:v>8.46</c:v>
                 </c:pt>
                 <c:pt idx="3">
-                  <c:v>8.17</c:v>
+                  <c:v>8.21</c:v>
                 </c:pt>
                 <c:pt idx="4">
-                  <c:v>7.57</c:v>
+                  <c:v>7.59</c:v>
                 </c:pt>
                 <c:pt idx="5">
                   <c:v>7.33</c:v>
@@ -566,7 +566,7 @@
               <c:numCache>
                 <c:ptCount val="3"/>
                 <c:pt idx="0">
-                  <c:v>80</c:v>
+                  <c:v>84</c:v>
                 </c:pt>
                 <c:pt idx="1">
                   <c:v>13</c:v>
@@ -809,13 +809,13 @@
                 <c:formatCode>General</c:formatCode>
                 <c:ptCount val="8"/>
                 <c:pt idx="0">
-                  <c:v>33</c:v>
+                  <c:v>36</c:v>
                 </c:pt>
                 <c:pt idx="1">
                   <c:v>14</c:v>
                 </c:pt>
                 <c:pt idx="2">
-                  <c:v>33</c:v>
+                  <c:v>34</c:v>
                 </c:pt>
                 <c:pt idx="3">
                   <c:v>8</c:v>
@@ -2781,7 +2781,7 @@
                 <a:ea typeface="Arial" pitchFamily="34" charset="-122"/>
                 <a:cs typeface="Arial" pitchFamily="34" charset="-120"/>
               </a:rPr>
-              <a:t>レビュー総数：102件（6サイト）</a:t>
+              <a:t>レビュー総数：106件（6サイト）</a:t>
             </a:r>
             <a:endParaRPr lang="en-US" sz="1000" dirty="0"/>
           </a:p>
@@ -2801,7 +2801,7 @@
                 <a:ea typeface="Arial" pitchFamily="34" charset="-122"/>
                 <a:cs typeface="Arial" pitchFamily="34" charset="-120"/>
               </a:rPr>
-              <a:t>作成日：2026年3月18日</a:t>
+              <a:t>作成日：2026年3月19日</a:t>
             </a:r>
             <a:endParaRPr lang="en-US" sz="1000" dirty="0"/>
           </a:p>
@@ -3347,7 +3347,7 @@
                           <a:ea typeface="Arial" pitchFamily="34" charset="-122"/>
                           <a:cs typeface="Arial" pitchFamily="34" charset="-120"/>
                         </a:rPr>
-                        <a:t>8.11点</a:t>
+                        <a:t>8.16点</a:t>
                       </a:r>
                       <a:endParaRPr lang="en-US" sz="1000" dirty="0">
                         <a:latin typeface="Arial" charset="0"/>
@@ -3415,7 +3415,7 @@
                           <a:ea typeface="Arial" pitchFamily="34" charset="-122"/>
                           <a:cs typeface="Arial" pitchFamily="34" charset="-120"/>
                         </a:rPr>
-                        <a:t>8.4点以上</a:t>
+                        <a:t>8.5点以上</a:t>
                       </a:r>
                       <a:endParaRPr lang="en-US" sz="1000" dirty="0">
                         <a:latin typeface="Arial" charset="0"/>
@@ -3621,7 +3621,7 @@
                           <a:ea typeface="Arial" pitchFamily="34" charset="-122"/>
                           <a:cs typeface="Arial" pitchFamily="34" charset="-120"/>
                         </a:rPr>
-                        <a:t>78.4%</a:t>
+                        <a:t>79.2%</a:t>
                       </a:r>
                       <a:endParaRPr lang="en-US" sz="1000" dirty="0">
                         <a:latin typeface="Arial" charset="0"/>
@@ -3689,7 +3689,7 @@
                           <a:ea typeface="Arial" pitchFamily="34" charset="-122"/>
                           <a:cs typeface="Arial" pitchFamily="34" charset="-120"/>
                         </a:rPr>
-                        <a:t>83%以上</a:t>
+                        <a:t>84%以上</a:t>
                       </a:r>
                       <a:endParaRPr lang="en-US" sz="1000" dirty="0">
                         <a:latin typeface="Arial" charset="0"/>
@@ -3895,7 +3895,7 @@
                           <a:ea typeface="Arial" pitchFamily="34" charset="-122"/>
                           <a:cs typeface="Arial" pitchFamily="34" charset="-120"/>
                         </a:rPr>
-                        <a:t>8.8%</a:t>
+                        <a:t>8.5%</a:t>
                       </a:r>
                       <a:endParaRPr lang="en-US" sz="1000" dirty="0">
                         <a:latin typeface="Arial" charset="0"/>
@@ -5356,7 +5356,7 @@
                 <a:ea typeface="Arial" pitchFamily="34" charset="-122"/>
                 <a:cs typeface="Arial" pitchFamily="34" charset="-120"/>
               </a:rPr>
-              <a:t>8.11</a:t>
+              <a:t>8.16</a:t>
             </a:r>
             <a:endParaRPr lang="en-US" sz="3200" dirty="0"/>
           </a:p>
@@ -5481,7 +5481,7 @@
                 <a:ea typeface="Arial" pitchFamily="34" charset="-122"/>
                 <a:cs typeface="Arial" pitchFamily="34" charset="-120"/>
               </a:rPr>
-              <a:t>78.4%</a:t>
+              <a:t>79.2%</a:t>
             </a:r>
             <a:endParaRPr lang="en-US" sz="3200" dirty="0"/>
           </a:p>
@@ -5606,7 +5606,7 @@
                 <a:ea typeface="Arial" pitchFamily="34" charset="-122"/>
                 <a:cs typeface="Arial" pitchFamily="34" charset="-120"/>
               </a:rPr>
-              <a:t>8.8%</a:t>
+              <a:t>8.5%</a:t>
             </a:r>
             <a:endParaRPr lang="en-US" sz="3200" dirty="0"/>
           </a:p>
@@ -5731,7 +5731,7 @@
                 <a:ea typeface="Arial" pitchFamily="34" charset="-122"/>
                 <a:cs typeface="Arial" pitchFamily="34" charset="-120"/>
               </a:rPr>
-              <a:t>102件</a:t>
+              <a:t>106件</a:t>
             </a:r>
             <a:endParaRPr lang="en-US" sz="3200" dirty="0"/>
           </a:p>
@@ -5879,7 +5879,7 @@
                 <a:ea typeface="Arial" pitchFamily="34" charset="-122"/>
                 <a:cs typeface="Arial" pitchFamily="34" charset="-120"/>
               </a:rPr>
-              <a:t>  部屋には加湿器が備え付けられていて、滞在中とても便利でした</a:t>
+              <a:t>  六本木地點方便，價格合理，推薦 六本木は立地が良く、価格も手頃なのでおすすめです</a:t>
             </a:r>
             <a:endParaRPr lang="en-US" sz="1100" dirty="0"/>
           </a:p>
@@ -5919,7 +5919,7 @@
                 <a:ea typeface="Arial" pitchFamily="34" charset="-122"/>
                 <a:cs typeface="Arial" pitchFamily="34" charset="-120"/>
               </a:rPr>
-              <a:t>  スタッフは親切で気配りが行き届いていました</a:t>
+              <a:t>  そして何より、カスタマーサービスのスタッフがとても親切で助かります</a:t>
             </a:r>
             <a:endParaRPr lang="en-US" sz="1100" dirty="0"/>
           </a:p>
@@ -6540,7 +6540,7 @@
                 <a:ea typeface="Arial" pitchFamily="34" charset="-122"/>
                 <a:cs typeface="Arial" pitchFamily="34" charset="-120"/>
               </a:rPr>
-              <a:t>8.11</a:t>
+              <a:t>8.16</a:t>
             </a:r>
             <a:endParaRPr lang="en-US" sz="3200" dirty="0"/>
           </a:p>
@@ -6665,7 +6665,7 @@
                 <a:ea typeface="Arial" pitchFamily="34" charset="-122"/>
                 <a:cs typeface="Arial" pitchFamily="34" charset="-120"/>
               </a:rPr>
-              <a:t>78.4%</a:t>
+              <a:t>79.2%</a:t>
             </a:r>
             <a:endParaRPr lang="en-US" sz="3200" dirty="0"/>
           </a:p>
@@ -6790,7 +6790,7 @@
                 <a:ea typeface="Arial" pitchFamily="34" charset="-122"/>
                 <a:cs typeface="Arial" pitchFamily="34" charset="-120"/>
               </a:rPr>
-              <a:t>8.8%</a:t>
+              <a:t>8.5%</a:t>
             </a:r>
             <a:endParaRPr lang="en-US" sz="3200" dirty="0"/>
           </a:p>
@@ -6915,7 +6915,7 @@
                 <a:ea typeface="Arial" pitchFamily="34" charset="-122"/>
                 <a:cs typeface="Arial" pitchFamily="34" charset="-120"/>
               </a:rPr>
-              <a:t>102件</a:t>
+              <a:t>106件</a:t>
             </a:r>
             <a:endParaRPr lang="en-US" sz="3200" dirty="0"/>
           </a:p>
@@ -8236,7 +8236,7 @@
                           <a:ea typeface="Arial" pitchFamily="34" charset="-122"/>
                           <a:cs typeface="Arial" pitchFamily="34" charset="-120"/>
                         </a:rPr>
-                        <a:t>5</a:t>
+                        <a:t>7</a:t>
                       </a:r>
                       <a:endParaRPr lang="en-US" sz="900" dirty="0">
                         <a:latin typeface="Arial" charset="0"/>
@@ -8304,7 +8304,7 @@
                           <a:ea typeface="Arial" pitchFamily="34" charset="-122"/>
                           <a:cs typeface="Arial" pitchFamily="34" charset="-120"/>
                         </a:rPr>
-                        <a:t>9.6</a:t>
+                        <a:t>9.71</a:t>
                       </a:r>
                       <a:endParaRPr lang="en-US" sz="900" dirty="0">
                         <a:latin typeface="Arial" charset="0"/>
@@ -8440,7 +8440,7 @@
                           <a:ea typeface="Arial" pitchFamily="34" charset="-122"/>
                           <a:cs typeface="Arial" pitchFamily="34" charset="-120"/>
                         </a:rPr>
-                        <a:t>9.6</a:t>
+                        <a:t>9.71</a:t>
                       </a:r>
                       <a:endParaRPr lang="en-US" sz="900" dirty="0">
                         <a:latin typeface="Arial" charset="0"/>
@@ -8920,7 +8920,7 @@
                           <a:ea typeface="Arial" pitchFamily="34" charset="-122"/>
                           <a:cs typeface="Arial" pitchFamily="34" charset="-120"/>
                         </a:rPr>
-                        <a:t>52</a:t>
+                        <a:t>53</a:t>
                       </a:r>
                       <a:endParaRPr lang="en-US" sz="900" dirty="0">
                         <a:latin typeface="Arial" charset="0"/>
@@ -8988,7 +8988,7 @@
                           <a:ea typeface="Arial" pitchFamily="34" charset="-122"/>
                           <a:cs typeface="Arial" pitchFamily="34" charset="-120"/>
                         </a:rPr>
-                        <a:t>8.17</a:t>
+                        <a:t>8.21</a:t>
                       </a:r>
                       <a:endParaRPr lang="en-US" sz="900" dirty="0">
                         <a:latin typeface="Arial" charset="0"/>
@@ -9124,7 +9124,7 @@
                           <a:ea typeface="Arial" pitchFamily="34" charset="-122"/>
                           <a:cs typeface="Arial" pitchFamily="34" charset="-120"/>
                         </a:rPr>
-                        <a:t>8.17</a:t>
+                        <a:t>8.21</a:t>
                       </a:r>
                       <a:endParaRPr lang="en-US" sz="900" dirty="0">
                         <a:latin typeface="Arial" charset="0"/>
@@ -9262,7 +9262,7 @@
                           <a:ea typeface="Arial" pitchFamily="34" charset="-122"/>
                           <a:cs typeface="Arial" pitchFamily="34" charset="-120"/>
                         </a:rPr>
-                        <a:t>28</a:t>
+                        <a:t>29</a:t>
                       </a:r>
                       <a:endParaRPr lang="en-US" sz="900" dirty="0">
                         <a:latin typeface="Arial" charset="0"/>
@@ -9466,7 +9466,7 @@
                           <a:ea typeface="Arial" pitchFamily="34" charset="-122"/>
                           <a:cs typeface="Arial" pitchFamily="34" charset="-120"/>
                         </a:rPr>
-                        <a:t>7.57</a:t>
+                        <a:t>7.59</a:t>
                       </a:r>
                       <a:endParaRPr lang="en-US" sz="900" dirty="0">
                         <a:latin typeface="Arial" charset="0"/>
@@ -10216,7 +10216,7 @@
                 <a:ea typeface="Arial" pitchFamily="34" charset="-122"/>
                 <a:cs typeface="Arial" pitchFamily="34" charset="-120"/>
               </a:rPr>
-              <a:t>80件（78.4%）</a:t>
+              <a:t>84件（79.2%）</a:t>
             </a:r>
             <a:endParaRPr lang="en-US" sz="1100" dirty="0"/>
           </a:p>
@@ -10314,7 +10314,7 @@
                 <a:ea typeface="Arial" pitchFamily="34" charset="-122"/>
                 <a:cs typeface="Arial" pitchFamily="34" charset="-120"/>
               </a:rPr>
-              <a:t>13件（12.7%）</a:t>
+              <a:t>13件（12.3%）</a:t>
             </a:r>
             <a:endParaRPr lang="en-US" sz="1100" dirty="0"/>
           </a:p>
@@ -10412,7 +10412,7 @@
                 <a:ea typeface="Arial" pitchFamily="34" charset="-122"/>
                 <a:cs typeface="Arial" pitchFamily="34" charset="-120"/>
               </a:rPr>
-              <a:t>9件（8.8%）</a:t>
+              <a:t>9件（8.5%）</a:t>
             </a:r>
             <a:endParaRPr lang="en-US" sz="1100" dirty="0"/>
           </a:p>
@@ -10824,7 +10824,7 @@
                 <a:ea typeface="Arial" pitchFamily="34" charset="-122"/>
                 <a:cs typeface="Arial" pitchFamily="34" charset="-120"/>
               </a:rPr>
-              <a:t>部屋には加湿器が備え付けられていて、滞在中とても便利でした</a:t>
+              <a:t>六本木地點方便，價格合理，推薦 六本木は立地が良く、価格も手頃なのでおすすめです</a:t>
             </a:r>
             <a:endParaRPr lang="en-US" sz="900" dirty="0"/>
           </a:p>
@@ -10863,7 +10863,7 @@
                 <a:ea typeface="Arial" pitchFamily="34" charset="-122"/>
                 <a:cs typeface="Arial" pitchFamily="34" charset="-120"/>
               </a:rPr>
-              <a:t>「Clean spacious good location Lack of facilities but can’t...」</a:t>
+              <a:t>「階下に地下鉄の駅があるので、一人でも友達とでも気軽に来られます」</a:t>
             </a:r>
             <a:endParaRPr lang="en-US" sz="900" dirty="0"/>
           </a:p>
@@ -11047,7 +11047,7 @@
                 <a:ea typeface="Arial" pitchFamily="34" charset="-122"/>
                 <a:cs typeface="Arial" pitchFamily="34" charset="-120"/>
               </a:rPr>
-              <a:t>スタッフは親切で気配りが行き届いていました</a:t>
+              <a:t>そして何より、カスタマーサービスのスタッフがとても親切で助かります</a:t>
             </a:r>
             <a:endParaRPr lang="en-US" sz="900" dirty="0"/>
           </a:p>
@@ -11086,7 +11086,7 @@
                 <a:ea typeface="Arial" pitchFamily="34" charset="-122"/>
                 <a:cs typeface="Arial" pitchFamily="34" charset="-120"/>
               </a:rPr>
-              <a:t>「フロントの方々の対応が丁寧でした」</a:t>
+              <a:t>「スタッフは親切で気配りが行き届いていました」</a:t>
             </a:r>
             <a:endParaRPr lang="en-US" sz="900" dirty="0"/>
           </a:p>
@@ -11532,7 +11532,7 @@
                 <a:ea typeface="Arial" pitchFamily="34" charset="-122"/>
                 <a:cs typeface="Arial" pitchFamily="34" charset="-120"/>
               </a:rPr>
-              <a:t>「タイ料理の朝食は、初めてで とても美味しかったです」</a:t>
+              <a:t>「タイ式の朝食は本当に美味しく、期待以上で、ぜひおすすめします」</a:t>
             </a:r>
             <a:endParaRPr lang="en-US" sz="900" dirty="0"/>
           </a:p>
@@ -13696,7 +13696,7 @@
                           <a:ea typeface="Arial" pitchFamily="34" charset="-122"/>
                           <a:cs typeface="Arial" pitchFamily="34" charset="-120"/>
                         </a:rPr>
-                        <a:t>臭い・匂い</a:t>
+                        <a:t>対応・サービスの不満</a:t>
                       </a:r>
                       <a:endParaRPr lang="en-US" sz="900" dirty="0">
                         <a:latin typeface="Arial" charset="0"/>
@@ -13764,7 +13764,7 @@
                           <a:ea typeface="Arial" pitchFamily="34" charset="-122"/>
                           <a:cs typeface="Arial" pitchFamily="34" charset="-120"/>
                         </a:rPr>
-                        <a:t>また、禁煙室と謳われているにもかかわらず、部屋の中には明らかにタバコの臭いが漂っていた</a:t>
+                        <a:t>這裏太方便了，樓下就是地鐵站，不論是自己或是朋友一起來都非常之方便，最重要的是客服人員態度10分好，10分推薦 こ...</a:t>
                       </a:r>
                       <a:endParaRPr lang="en-US" sz="900" dirty="0">
                         <a:latin typeface="Arial" charset="0"/>
@@ -13832,7 +13832,7 @@
                           <a:ea typeface="Arial" pitchFamily="34" charset="-122"/>
                           <a:cs typeface="Arial" pitchFamily="34" charset="-120"/>
                         </a:rPr>
-                        <a:t>6件</a:t>
+                        <a:t>7件</a:t>
                       </a:r>
                       <a:endParaRPr lang="en-US" sz="900" dirty="0">
                         <a:latin typeface="Arial" charset="0"/>
@@ -13970,7 +13970,7 @@
                           <a:ea typeface="Arial" pitchFamily="34" charset="-122"/>
                           <a:cs typeface="Arial" pitchFamily="34" charset="-120"/>
                         </a:rPr>
-                        <a:t>対応・サービスの不満</a:t>
+                        <a:t>臭い・匂い</a:t>
                       </a:r>
                       <a:endParaRPr lang="en-US" sz="900" dirty="0">
                         <a:latin typeface="Arial" charset="0"/>
@@ -14038,7 +14038,7 @@
                           <a:ea typeface="Arial" pitchFamily="34" charset="-122"/>
                           <a:cs typeface="Arial" pitchFamily="34" charset="-120"/>
                         </a:rPr>
-                        <a:t>2泊予約しましたが、翌日午前10時前にチェックアウトしたため、2泊目の料金は返金されませんでした</a:t>
+                        <a:t>また、禁煙室と謳われているにもかかわらず、部屋の中には明らかにタバコの臭いが漂っていた</a:t>
                       </a:r>
                       <a:endParaRPr lang="en-US" sz="900" dirty="0">
                         <a:latin typeface="Arial" charset="0"/>

--- a/納品レポート/ホテル別レポート/comfort_roppongi_口コミ分析レポート.pptx
+++ b/納品レポート/ホテル別レポート/comfort_roppongi_口コミ分析レポート.pptx
@@ -2801,7 +2801,7 @@
                 <a:ea typeface="Arial" pitchFamily="34" charset="-122"/>
                 <a:cs typeface="Arial" pitchFamily="34" charset="-120"/>
               </a:rPr>
-              <a:t>作成日：2026年3月19日</a:t>
+              <a:t>作成日：2026年3月20日</a:t>
             </a:r>
             <a:endParaRPr lang="en-US" sz="1000" dirty="0"/>
           </a:p>
@@ -11493,7 +11493,7 @@
                 <a:ea typeface="Arial" pitchFamily="34" charset="-122"/>
                 <a:cs typeface="Arial" pitchFamily="34" charset="-120"/>
               </a:rPr>
-              <a:t>タイ風の朝食は本当に美味しく、期待以上で、ぜひおすすめします</a:t>
+              <a:t>タイ式の朝食は本当に美味しく、期待以上で、ぜひおすすめします</a:t>
             </a:r>
             <a:endParaRPr lang="en-US" sz="900" dirty="0"/>
           </a:p>
@@ -11532,7 +11532,7 @@
                 <a:ea typeface="Arial" pitchFamily="34" charset="-122"/>
                 <a:cs typeface="Arial" pitchFamily="34" charset="-120"/>
               </a:rPr>
-              <a:t>「タイ式の朝食は本当に美味しく、期待以上で、ぜひおすすめします」</a:t>
+              <a:t>「タイ料理の朝食は、初めてで とても美味しかったです」</a:t>
             </a:r>
             <a:endParaRPr lang="en-US" sz="900" dirty="0"/>
           </a:p>

--- a/納品レポート/ホテル別レポート/comfort_roppongi_口コミ分析レポート.pptx
+++ b/納品レポート/ホテル別レポート/comfort_roppongi_口コミ分析レポート.pptx
@@ -217,7 +217,7 @@
                   <c:v>8.46</c:v>
                 </c:pt>
                 <c:pt idx="3">
-                  <c:v>8.21</c:v>
+                  <c:v>8.18</c:v>
                 </c:pt>
                 <c:pt idx="4">
                   <c:v>7.59</c:v>
@@ -566,10 +566,10 @@
               <c:numCache>
                 <c:ptCount val="3"/>
                 <c:pt idx="0">
-                  <c:v>84</c:v>
+                  <c:v>85</c:v>
                 </c:pt>
                 <c:pt idx="1">
-                  <c:v>13</c:v>
+                  <c:v>14</c:v>
                 </c:pt>
                 <c:pt idx="2">
                   <c:v>9</c:v>
@@ -812,7 +812,7 @@
                   <c:v>36</c:v>
                 </c:pt>
                 <c:pt idx="1">
-                  <c:v>14</c:v>
+                  <c:v>15</c:v>
                 </c:pt>
                 <c:pt idx="2">
                   <c:v>34</c:v>
@@ -821,7 +821,7 @@
                   <c:v>8</c:v>
                 </c:pt>
                 <c:pt idx="4">
-                  <c:v>4</c:v>
+                  <c:v>5</c:v>
                 </c:pt>
                 <c:pt idx="5">
                   <c:v>1</c:v>
@@ -2781,7 +2781,7 @@
                 <a:ea typeface="Arial" pitchFamily="34" charset="-122"/>
                 <a:cs typeface="Arial" pitchFamily="34" charset="-120"/>
               </a:rPr>
-              <a:t>レビュー総数：106件（6サイト）</a:t>
+              <a:t>レビュー総数：108件（6サイト）</a:t>
             </a:r>
             <a:endParaRPr lang="en-US" sz="1000" dirty="0"/>
           </a:p>
@@ -2801,7 +2801,7 @@
                 <a:ea typeface="Arial" pitchFamily="34" charset="-122"/>
                 <a:cs typeface="Arial" pitchFamily="34" charset="-120"/>
               </a:rPr>
-              <a:t>作成日：2026年3月20日</a:t>
+              <a:t>作成日：2026年3月21日</a:t>
             </a:r>
             <a:endParaRPr lang="en-US" sz="1000" dirty="0"/>
           </a:p>
@@ -3347,7 +3347,7 @@
                           <a:ea typeface="Arial" pitchFamily="34" charset="-122"/>
                           <a:cs typeface="Arial" pitchFamily="34" charset="-120"/>
                         </a:rPr>
-                        <a:t>8.16点</a:t>
+                        <a:t>8.15点</a:t>
                       </a:r>
                       <a:endParaRPr lang="en-US" sz="1000" dirty="0">
                         <a:latin typeface="Arial" charset="0"/>
@@ -3621,7 +3621,7 @@
                           <a:ea typeface="Arial" pitchFamily="34" charset="-122"/>
                           <a:cs typeface="Arial" pitchFamily="34" charset="-120"/>
                         </a:rPr>
-                        <a:t>79.2%</a:t>
+                        <a:t>78.7%</a:t>
                       </a:r>
                       <a:endParaRPr lang="en-US" sz="1000" dirty="0">
                         <a:latin typeface="Arial" charset="0"/>
@@ -3895,7 +3895,7 @@
                           <a:ea typeface="Arial" pitchFamily="34" charset="-122"/>
                           <a:cs typeface="Arial" pitchFamily="34" charset="-120"/>
                         </a:rPr>
-                        <a:t>8.5%</a:t>
+                        <a:t>8.3%</a:t>
                       </a:r>
                       <a:endParaRPr lang="en-US" sz="1000" dirty="0">
                         <a:latin typeface="Arial" charset="0"/>
@@ -3963,7 +3963,7 @@
                           <a:ea typeface="Arial" pitchFamily="34" charset="-122"/>
                           <a:cs typeface="Arial" pitchFamily="34" charset="-120"/>
                         </a:rPr>
-                        <a:t>6%以下</a:t>
+                        <a:t>5%以下</a:t>
                       </a:r>
                       <a:endParaRPr lang="en-US" sz="1000" dirty="0">
                         <a:latin typeface="Arial" charset="0"/>
@@ -4717,7 +4717,7 @@
                           <a:ea typeface="Arial" pitchFamily="34" charset="-122"/>
                           <a:cs typeface="Arial" pitchFamily="34" charset="-120"/>
                         </a:rPr>
-                        <a:t>約23件/期間</a:t>
+                        <a:t>約24件/期間</a:t>
                       </a:r>
                       <a:endParaRPr lang="en-US" sz="1000" dirty="0">
                         <a:latin typeface="Arial" charset="0"/>
@@ -4785,7 +4785,7 @@
                           <a:ea typeface="Arial" pitchFamily="34" charset="-122"/>
                           <a:cs typeface="Arial" pitchFamily="34" charset="-120"/>
                         </a:rPr>
-                        <a:t>11件以下</a:t>
+                        <a:t>12件以下</a:t>
                       </a:r>
                       <a:endParaRPr lang="en-US" sz="1000" dirty="0">
                         <a:latin typeface="Arial" charset="0"/>
@@ -5356,7 +5356,7 @@
                 <a:ea typeface="Arial" pitchFamily="34" charset="-122"/>
                 <a:cs typeface="Arial" pitchFamily="34" charset="-120"/>
               </a:rPr>
-              <a:t>8.16</a:t>
+              <a:t>8.15</a:t>
             </a:r>
             <a:endParaRPr lang="en-US" sz="3200" dirty="0"/>
           </a:p>
@@ -5481,7 +5481,7 @@
                 <a:ea typeface="Arial" pitchFamily="34" charset="-122"/>
                 <a:cs typeface="Arial" pitchFamily="34" charset="-120"/>
               </a:rPr>
-              <a:t>79.2%</a:t>
+              <a:t>78.7%</a:t>
             </a:r>
             <a:endParaRPr lang="en-US" sz="3200" dirty="0"/>
           </a:p>
@@ -5606,7 +5606,7 @@
                 <a:ea typeface="Arial" pitchFamily="34" charset="-122"/>
                 <a:cs typeface="Arial" pitchFamily="34" charset="-120"/>
               </a:rPr>
-              <a:t>8.5%</a:t>
+              <a:t>8.3%</a:t>
             </a:r>
             <a:endParaRPr lang="en-US" sz="3200" dirty="0"/>
           </a:p>
@@ -5731,7 +5731,7 @@
                 <a:ea typeface="Arial" pitchFamily="34" charset="-122"/>
                 <a:cs typeface="Arial" pitchFamily="34" charset="-120"/>
               </a:rPr>
-              <a:t>106件</a:t>
+              <a:t>108件</a:t>
             </a:r>
             <a:endParaRPr lang="en-US" sz="3200" dirty="0"/>
           </a:p>
@@ -5879,7 +5879,7 @@
                 <a:ea typeface="Arial" pitchFamily="34" charset="-122"/>
                 <a:cs typeface="Arial" pitchFamily="34" charset="-120"/>
               </a:rPr>
-              <a:t>  六本木地點方便，價格合理，推薦 六本木は立地が良く、価格も手頃なのでおすすめです</a:t>
+              <a:t>  Good location and nice reception staff Coffee machine bro...</a:t>
             </a:r>
             <a:endParaRPr lang="en-US" sz="1100" dirty="0"/>
           </a:p>
@@ -5919,7 +5919,7 @@
                 <a:ea typeface="Arial" pitchFamily="34" charset="-122"/>
                 <a:cs typeface="Arial" pitchFamily="34" charset="-120"/>
               </a:rPr>
-              <a:t>  そして何より、カスタマーサービスのスタッフがとても親切で助かります</a:t>
+              <a:t>  Good location and nice reception staff Coffee machine bro...</a:t>
             </a:r>
             <a:endParaRPr lang="en-US" sz="1100" dirty="0"/>
           </a:p>
@@ -6107,7 +6107,7 @@
                 <a:ea typeface="Arial" pitchFamily="34" charset="-122"/>
                 <a:cs typeface="Arial" pitchFamily="34" charset="-120"/>
               </a:rPr>
-              <a:t>  I booked a room with a queen bed, which I found quite spa...</a:t>
+              <a:t>  Good location and nice reception staff Coffee machine bro...</a:t>
             </a:r>
             <a:endParaRPr lang="en-US" sz="1100" dirty="0"/>
           </a:p>
@@ -6540,7 +6540,7 @@
                 <a:ea typeface="Arial" pitchFamily="34" charset="-122"/>
                 <a:cs typeface="Arial" pitchFamily="34" charset="-120"/>
               </a:rPr>
-              <a:t>8.16</a:t>
+              <a:t>8.15</a:t>
             </a:r>
             <a:endParaRPr lang="en-US" sz="3200" dirty="0"/>
           </a:p>
@@ -6665,7 +6665,7 @@
                 <a:ea typeface="Arial" pitchFamily="34" charset="-122"/>
                 <a:cs typeface="Arial" pitchFamily="34" charset="-120"/>
               </a:rPr>
-              <a:t>79.2%</a:t>
+              <a:t>78.7%</a:t>
             </a:r>
             <a:endParaRPr lang="en-US" sz="3200" dirty="0"/>
           </a:p>
@@ -6790,7 +6790,7 @@
                 <a:ea typeface="Arial" pitchFamily="34" charset="-122"/>
                 <a:cs typeface="Arial" pitchFamily="34" charset="-120"/>
               </a:rPr>
-              <a:t>8.5%</a:t>
+              <a:t>8.3%</a:t>
             </a:r>
             <a:endParaRPr lang="en-US" sz="3200" dirty="0"/>
           </a:p>
@@ -6915,7 +6915,7 @@
                 <a:ea typeface="Arial" pitchFamily="34" charset="-122"/>
                 <a:cs typeface="Arial" pitchFamily="34" charset="-120"/>
               </a:rPr>
-              <a:t>106件</a:t>
+              <a:t>108件</a:t>
             </a:r>
             <a:endParaRPr lang="en-US" sz="3200" dirty="0"/>
           </a:p>
@@ -8920,7 +8920,7 @@
                           <a:ea typeface="Arial" pitchFamily="34" charset="-122"/>
                           <a:cs typeface="Arial" pitchFamily="34" charset="-120"/>
                         </a:rPr>
-                        <a:t>53</a:t>
+                        <a:t>55</a:t>
                       </a:r>
                       <a:endParaRPr lang="en-US" sz="900" dirty="0">
                         <a:latin typeface="Arial" charset="0"/>
@@ -8988,7 +8988,7 @@
                           <a:ea typeface="Arial" pitchFamily="34" charset="-122"/>
                           <a:cs typeface="Arial" pitchFamily="34" charset="-120"/>
                         </a:rPr>
-                        <a:t>8.21</a:t>
+                        <a:t>8.18</a:t>
                       </a:r>
                       <a:endParaRPr lang="en-US" sz="900" dirty="0">
                         <a:latin typeface="Arial" charset="0"/>
@@ -9124,7 +9124,7 @@
                           <a:ea typeface="Arial" pitchFamily="34" charset="-122"/>
                           <a:cs typeface="Arial" pitchFamily="34" charset="-120"/>
                         </a:rPr>
-                        <a:t>8.21</a:t>
+                        <a:t>8.18</a:t>
                       </a:r>
                       <a:endParaRPr lang="en-US" sz="900" dirty="0">
                         <a:latin typeface="Arial" charset="0"/>
@@ -10216,7 +10216,7 @@
                 <a:ea typeface="Arial" pitchFamily="34" charset="-122"/>
                 <a:cs typeface="Arial" pitchFamily="34" charset="-120"/>
               </a:rPr>
-              <a:t>84件（79.2%）</a:t>
+              <a:t>85件（78.7%）</a:t>
             </a:r>
             <a:endParaRPr lang="en-US" sz="1100" dirty="0"/>
           </a:p>
@@ -10314,7 +10314,7 @@
                 <a:ea typeface="Arial" pitchFamily="34" charset="-122"/>
                 <a:cs typeface="Arial" pitchFamily="34" charset="-120"/>
               </a:rPr>
-              <a:t>13件（12.3%）</a:t>
+              <a:t>14件（13.0%）</a:t>
             </a:r>
             <a:endParaRPr lang="en-US" sz="1100" dirty="0"/>
           </a:p>
@@ -10412,7 +10412,7 @@
                 <a:ea typeface="Arial" pitchFamily="34" charset="-122"/>
                 <a:cs typeface="Arial" pitchFamily="34" charset="-120"/>
               </a:rPr>
-              <a:t>9件（8.5%）</a:t>
+              <a:t>9件（8.3%）</a:t>
             </a:r>
             <a:endParaRPr lang="en-US" sz="1100" dirty="0"/>
           </a:p>
@@ -10824,7 +10824,7 @@
                 <a:ea typeface="Arial" pitchFamily="34" charset="-122"/>
                 <a:cs typeface="Arial" pitchFamily="34" charset="-120"/>
               </a:rPr>
-              <a:t>六本木地點方便，價格合理，推薦 六本木は立地が良く、価格も手頃なのでおすすめです</a:t>
+              <a:t>Good location and nice reception staff Coffee machine bro...</a:t>
             </a:r>
             <a:endParaRPr lang="en-US" sz="900" dirty="0"/>
           </a:p>
@@ -10863,7 +10863,7 @@
                 <a:ea typeface="Arial" pitchFamily="34" charset="-122"/>
                 <a:cs typeface="Arial" pitchFamily="34" charset="-120"/>
               </a:rPr>
-              <a:t>「階下に地下鉄の駅があるので、一人でも友達とでも気軽に来られます」</a:t>
+              <a:t>「六本木地點方便，價格合理，推薦 六本木は立地が良く、価格も手頃なのでおすすめです」</a:t>
             </a:r>
             <a:endParaRPr lang="en-US" sz="900" dirty="0"/>
           </a:p>
@@ -11047,7 +11047,7 @@
                 <a:ea typeface="Arial" pitchFamily="34" charset="-122"/>
                 <a:cs typeface="Arial" pitchFamily="34" charset="-120"/>
               </a:rPr>
-              <a:t>そして何より、カスタマーサービスのスタッフがとても親切で助かります</a:t>
+              <a:t>Good location and nice reception staff Coffee machine bro...</a:t>
             </a:r>
             <a:endParaRPr lang="en-US" sz="900" dirty="0"/>
           </a:p>
@@ -11086,7 +11086,7 @@
                 <a:ea typeface="Arial" pitchFamily="34" charset="-122"/>
                 <a:cs typeface="Arial" pitchFamily="34" charset="-120"/>
               </a:rPr>
-              <a:t>「スタッフは親切で気配りが行き届いていました」</a:t>
+              <a:t>「そして何より、カスタマーサービスのスタッフの方々がとても親切で助かります」</a:t>
             </a:r>
             <a:endParaRPr lang="en-US" sz="900" dirty="0"/>
           </a:p>
@@ -11493,7 +11493,7 @@
                 <a:ea typeface="Arial" pitchFamily="34" charset="-122"/>
                 <a:cs typeface="Arial" pitchFamily="34" charset="-120"/>
               </a:rPr>
-              <a:t>タイ式の朝食は本当に美味しく、期待以上で、ぜひおすすめします</a:t>
+              <a:t>タイ風の朝食は本当に美味しく、期待以上で、ぜひおすすめします</a:t>
             </a:r>
             <a:endParaRPr lang="en-US" sz="900" dirty="0"/>
           </a:p>
@@ -11532,7 +11532,7 @@
                 <a:ea typeface="Arial" pitchFamily="34" charset="-122"/>
                 <a:cs typeface="Arial" pitchFamily="34" charset="-120"/>
               </a:rPr>
-              <a:t>「タイ料理の朝食は、初めてで とても美味しかったです」</a:t>
+              <a:t>「タイ式の朝食は本当に美味しく、期待以上で、ぜひおすすめします」</a:t>
             </a:r>
             <a:endParaRPr lang="en-US" sz="900" dirty="0"/>
           </a:p>
@@ -12668,7 +12668,7 @@
                           <a:ea typeface="Arial" pitchFamily="34" charset="-122"/>
                           <a:cs typeface="Arial" pitchFamily="34" charset="-120"/>
                         </a:rPr>
-                        <a:t>I booked a room with a queen bed, which I found quite spa...</a:t>
+                        <a:t>Good location and nice reception staff Coffee machine bro...</a:t>
                       </a:r>
                       <a:endParaRPr lang="en-US" sz="900" dirty="0">
                         <a:latin typeface="Arial" charset="0"/>
@@ -12736,7 +12736,7 @@
                           <a:ea typeface="Arial" pitchFamily="34" charset="-122"/>
                           <a:cs typeface="Arial" pitchFamily="34" charset="-120"/>
                         </a:rPr>
-                        <a:t>23件</a:t>
+                        <a:t>24件</a:t>
                       </a:r>
                       <a:endParaRPr lang="en-US" sz="900" dirty="0">
                         <a:latin typeface="Arial" charset="0"/>

--- a/納品レポート/ホテル別レポート/comfort_roppongi_口コミ分析レポート.pptx
+++ b/納品レポート/ホテル別レポート/comfort_roppongi_口コミ分析レポート.pptx
@@ -217,13 +217,13 @@
                   <c:v>8.46</c:v>
                 </c:pt>
                 <c:pt idx="3">
-                  <c:v>8.18</c:v>
+                  <c:v>8.22</c:v>
                 </c:pt>
                 <c:pt idx="4">
-                  <c:v>7.59</c:v>
+                  <c:v>7.61</c:v>
                 </c:pt>
                 <c:pt idx="5">
-                  <c:v>7.33</c:v>
+                  <c:v>7.4</c:v>
                 </c:pt>
               </c:numCache>
             </c:numRef>
@@ -566,10 +566,10 @@
               <c:numCache>
                 <c:ptCount val="3"/>
                 <c:pt idx="0">
-                  <c:v>85</c:v>
+                  <c:v>91</c:v>
                 </c:pt>
                 <c:pt idx="1">
-                  <c:v>14</c:v>
+                  <c:v>15</c:v>
                 </c:pt>
                 <c:pt idx="2">
                   <c:v>9</c:v>
@@ -809,13 +809,13 @@
                 <c:formatCode>General</c:formatCode>
                 <c:ptCount val="8"/>
                 <c:pt idx="0">
-                  <c:v>36</c:v>
+                  <c:v>38</c:v>
                 </c:pt>
                 <c:pt idx="1">
-                  <c:v>15</c:v>
+                  <c:v>16</c:v>
                 </c:pt>
                 <c:pt idx="2">
-                  <c:v>34</c:v>
+                  <c:v>37</c:v>
                 </c:pt>
                 <c:pt idx="3">
                   <c:v>8</c:v>
@@ -824,7 +824,7 @@
                   <c:v>5</c:v>
                 </c:pt>
                 <c:pt idx="5">
-                  <c:v>1</c:v>
+                  <c:v>2</c:v>
                 </c:pt>
                 <c:pt idx="6">
                   <c:v>2</c:v>
@@ -2781,7 +2781,7 @@
                 <a:ea typeface="Arial" pitchFamily="34" charset="-122"/>
                 <a:cs typeface="Arial" pitchFamily="34" charset="-120"/>
               </a:rPr>
-              <a:t>レビュー総数：108件（6サイト）</a:t>
+              <a:t>レビュー総数：115件（6サイト）</a:t>
             </a:r>
             <a:endParaRPr lang="en-US" sz="1000" dirty="0"/>
           </a:p>
@@ -2801,7 +2801,7 @@
                 <a:ea typeface="Arial" pitchFamily="34" charset="-122"/>
                 <a:cs typeface="Arial" pitchFamily="34" charset="-120"/>
               </a:rPr>
-              <a:t>作成日：2026年3月21日</a:t>
+              <a:t>作成日：2026年3月23日</a:t>
             </a:r>
             <a:endParaRPr lang="en-US" sz="1000" dirty="0"/>
           </a:p>
@@ -3347,7 +3347,7 @@
                           <a:ea typeface="Arial" pitchFamily="34" charset="-122"/>
                           <a:cs typeface="Arial" pitchFamily="34" charset="-120"/>
                         </a:rPr>
-                        <a:t>8.15点</a:t>
+                        <a:t>8.16点</a:t>
                       </a:r>
                       <a:endParaRPr lang="en-US" sz="1000" dirty="0">
                         <a:latin typeface="Arial" charset="0"/>
@@ -3621,7 +3621,7 @@
                           <a:ea typeface="Arial" pitchFamily="34" charset="-122"/>
                           <a:cs typeface="Arial" pitchFamily="34" charset="-120"/>
                         </a:rPr>
-                        <a:t>78.7%</a:t>
+                        <a:t>79.1%</a:t>
                       </a:r>
                       <a:endParaRPr lang="en-US" sz="1000" dirty="0">
                         <a:latin typeface="Arial" charset="0"/>
@@ -3895,7 +3895,7 @@
                           <a:ea typeface="Arial" pitchFamily="34" charset="-122"/>
                           <a:cs typeface="Arial" pitchFamily="34" charset="-120"/>
                         </a:rPr>
-                        <a:t>8.3%</a:t>
+                        <a:t>7.8%</a:t>
                       </a:r>
                       <a:endParaRPr lang="en-US" sz="1000" dirty="0">
                         <a:latin typeface="Arial" charset="0"/>
@@ -4169,7 +4169,7 @@
                           <a:ea typeface="Arial" pitchFamily="34" charset="-122"/>
                           <a:cs typeface="Arial" pitchFamily="34" charset="-120"/>
                         </a:rPr>
-                        <a:t>7.3点</a:t>
+                        <a:t>7.4点</a:t>
                       </a:r>
                       <a:endParaRPr lang="en-US" sz="1000" dirty="0">
                         <a:latin typeface="Arial" charset="0"/>
@@ -4237,7 +4237,7 @@
                           <a:ea typeface="Arial" pitchFamily="34" charset="-122"/>
                           <a:cs typeface="Arial" pitchFamily="34" charset="-120"/>
                         </a:rPr>
-                        <a:t>8.3点以上</a:t>
+                        <a:t>8.4点以上</a:t>
                       </a:r>
                       <a:endParaRPr lang="en-US" sz="1000" dirty="0">
                         <a:latin typeface="Arial" charset="0"/>
@@ -4717,7 +4717,7 @@
                           <a:ea typeface="Arial" pitchFamily="34" charset="-122"/>
                           <a:cs typeface="Arial" pitchFamily="34" charset="-120"/>
                         </a:rPr>
-                        <a:t>約24件/期間</a:t>
+                        <a:t>約25件/期間</a:t>
                       </a:r>
                       <a:endParaRPr lang="en-US" sz="1000" dirty="0">
                         <a:latin typeface="Arial" charset="0"/>
@@ -5356,7 +5356,7 @@
                 <a:ea typeface="Arial" pitchFamily="34" charset="-122"/>
                 <a:cs typeface="Arial" pitchFamily="34" charset="-120"/>
               </a:rPr>
-              <a:t>8.15</a:t>
+              <a:t>8.16</a:t>
             </a:r>
             <a:endParaRPr lang="en-US" sz="3200" dirty="0"/>
           </a:p>
@@ -5481,7 +5481,7 @@
                 <a:ea typeface="Arial" pitchFamily="34" charset="-122"/>
                 <a:cs typeface="Arial" pitchFamily="34" charset="-120"/>
               </a:rPr>
-              <a:t>78.7%</a:t>
+              <a:t>79.1%</a:t>
             </a:r>
             <a:endParaRPr lang="en-US" sz="3200" dirty="0"/>
           </a:p>
@@ -5606,7 +5606,7 @@
                 <a:ea typeface="Arial" pitchFamily="34" charset="-122"/>
                 <a:cs typeface="Arial" pitchFamily="34" charset="-120"/>
               </a:rPr>
-              <a:t>8.3%</a:t>
+              <a:t>7.8%</a:t>
             </a:r>
             <a:endParaRPr lang="en-US" sz="3200" dirty="0"/>
           </a:p>
@@ -5731,7 +5731,7 @@
                 <a:ea typeface="Arial" pitchFamily="34" charset="-122"/>
                 <a:cs typeface="Arial" pitchFamily="34" charset="-120"/>
               </a:rPr>
-              <a:t>108件</a:t>
+              <a:t>115件</a:t>
             </a:r>
             <a:endParaRPr lang="en-US" sz="3200" dirty="0"/>
           </a:p>
@@ -5879,7 +5879,7 @@
                 <a:ea typeface="Arial" pitchFamily="34" charset="-122"/>
                 <a:cs typeface="Arial" pitchFamily="34" charset="-120"/>
               </a:rPr>
-              <a:t>  Good location and nice reception staff Coffee machine bro...</a:t>
+              <a:t>  The location and very comfortable place to stay</a:t>
             </a:r>
             <a:endParaRPr lang="en-US" sz="1100" dirty="0"/>
           </a:p>
@@ -5919,7 +5919,7 @@
                 <a:ea typeface="Arial" pitchFamily="34" charset="-122"/>
                 <a:cs typeface="Arial" pitchFamily="34" charset="-120"/>
               </a:rPr>
-              <a:t>  Good location and nice reception staff Coffee machine bro...</a:t>
+              <a:t>  駅からちかい スタッフの感じがいい</a:t>
             </a:r>
             <a:endParaRPr lang="en-US" sz="1100" dirty="0"/>
           </a:p>
@@ -5959,7 +5959,7 @@
                 <a:ea typeface="Arial" pitchFamily="34" charset="-122"/>
                 <a:cs typeface="Arial" pitchFamily="34" charset="-120"/>
               </a:rPr>
-              <a:t>  クイーンサイズのベッドがある部屋を予約したのですが、日本の基準からするとかなり広々としていました</a:t>
+              <a:t>  The location and very comfortable place to stay</a:t>
             </a:r>
             <a:endParaRPr lang="en-US" sz="1100" dirty="0"/>
           </a:p>
@@ -6107,7 +6107,7 @@
                 <a:ea typeface="Arial" pitchFamily="34" charset="-122"/>
                 <a:cs typeface="Arial" pitchFamily="34" charset="-120"/>
               </a:rPr>
-              <a:t>  Good location and nice reception staff Coffee machine bro...</a:t>
+              <a:t>  The location and very comfortable place to stay</a:t>
             </a:r>
             <a:endParaRPr lang="en-US" sz="1100" dirty="0"/>
           </a:p>
@@ -6147,7 +6147,7 @@
                 <a:ea typeface="Arial" pitchFamily="34" charset="-122"/>
                 <a:cs typeface="Arial" pitchFamily="34" charset="-120"/>
               </a:rPr>
-              <a:t>  風呂トイレはユニットバスになってますが、浴槽は広めで足を伸ばしてくつろげるサイズになってました</a:t>
+              <a:t>  バスルーム、トイレは小さいですが、そのまま水がよく出て水伝も最近変えたようです</a:t>
             </a:r>
             <a:endParaRPr lang="en-US" sz="1100" dirty="0"/>
           </a:p>
@@ -6187,7 +6187,7 @@
                 <a:ea typeface="Arial" pitchFamily="34" charset="-122"/>
                 <a:cs typeface="Arial" pitchFamily="34" charset="-120"/>
               </a:rPr>
-              <a:t>  The room originally allocated was very small</a:t>
+              <a:t>  自分は狭い部屋に追いやられたのかと思ってしまうくらい部屋は狭いです</a:t>
             </a:r>
             <a:endParaRPr lang="en-US" sz="1100" dirty="0"/>
           </a:p>
@@ -6540,7 +6540,7 @@
                 <a:ea typeface="Arial" pitchFamily="34" charset="-122"/>
                 <a:cs typeface="Arial" pitchFamily="34" charset="-120"/>
               </a:rPr>
-              <a:t>8.15</a:t>
+              <a:t>8.16</a:t>
             </a:r>
             <a:endParaRPr lang="en-US" sz="3200" dirty="0"/>
           </a:p>
@@ -6665,7 +6665,7 @@
                 <a:ea typeface="Arial" pitchFamily="34" charset="-122"/>
                 <a:cs typeface="Arial" pitchFamily="34" charset="-120"/>
               </a:rPr>
-              <a:t>78.7%</a:t>
+              <a:t>79.1%</a:t>
             </a:r>
             <a:endParaRPr lang="en-US" sz="3200" dirty="0"/>
           </a:p>
@@ -6790,7 +6790,7 @@
                 <a:ea typeface="Arial" pitchFamily="34" charset="-122"/>
                 <a:cs typeface="Arial" pitchFamily="34" charset="-120"/>
               </a:rPr>
-              <a:t>8.3%</a:t>
+              <a:t>7.8%</a:t>
             </a:r>
             <a:endParaRPr lang="en-US" sz="3200" dirty="0"/>
           </a:p>
@@ -6915,7 +6915,7 @@
                 <a:ea typeface="Arial" pitchFamily="34" charset="-122"/>
                 <a:cs typeface="Arial" pitchFamily="34" charset="-120"/>
               </a:rPr>
-              <a:t>108件</a:t>
+              <a:t>115件</a:t>
             </a:r>
             <a:endParaRPr lang="en-US" sz="3200" dirty="0"/>
           </a:p>
@@ -7385,7 +7385,7 @@
                 <a:ea typeface="Arial" pitchFamily="34" charset="-122"/>
                 <a:cs typeface="Arial" pitchFamily="34" charset="-120"/>
               </a:rPr>
-              <a:t>Agoda(7.3)が相対的に低い。口コミ返信の強化が急務</a:t>
+              <a:t>Agoda(7.4)が相対的に低い。口コミ返信の強化が急務</a:t>
             </a:r>
             <a:endParaRPr lang="en-US" sz="1100" dirty="0"/>
           </a:p>
@@ -8920,7 +8920,7 @@
                           <a:ea typeface="Arial" pitchFamily="34" charset="-122"/>
                           <a:cs typeface="Arial" pitchFamily="34" charset="-120"/>
                         </a:rPr>
-                        <a:t>55</a:t>
+                        <a:t>58</a:t>
                       </a:r>
                       <a:endParaRPr lang="en-US" sz="900" dirty="0">
                         <a:latin typeface="Arial" charset="0"/>
@@ -8988,7 +8988,7 @@
                           <a:ea typeface="Arial" pitchFamily="34" charset="-122"/>
                           <a:cs typeface="Arial" pitchFamily="34" charset="-120"/>
                         </a:rPr>
-                        <a:t>8.18</a:t>
+                        <a:t>8.22</a:t>
                       </a:r>
                       <a:endParaRPr lang="en-US" sz="900" dirty="0">
                         <a:latin typeface="Arial" charset="0"/>
@@ -9124,7 +9124,7 @@
                           <a:ea typeface="Arial" pitchFamily="34" charset="-122"/>
                           <a:cs typeface="Arial" pitchFamily="34" charset="-120"/>
                         </a:rPr>
-                        <a:t>8.18</a:t>
+                        <a:t>8.22</a:t>
                       </a:r>
                       <a:endParaRPr lang="en-US" sz="900" dirty="0">
                         <a:latin typeface="Arial" charset="0"/>
@@ -9262,7 +9262,7 @@
                           <a:ea typeface="Arial" pitchFamily="34" charset="-122"/>
                           <a:cs typeface="Arial" pitchFamily="34" charset="-120"/>
                         </a:rPr>
-                        <a:t>29</a:t>
+                        <a:t>31</a:t>
                       </a:r>
                       <a:endParaRPr lang="en-US" sz="900" dirty="0">
                         <a:latin typeface="Arial" charset="0"/>
@@ -9330,7 +9330,7 @@
                           <a:ea typeface="Arial" pitchFamily="34" charset="-122"/>
                           <a:cs typeface="Arial" pitchFamily="34" charset="-120"/>
                         </a:rPr>
-                        <a:t>3.79</a:t>
+                        <a:t>3.81</a:t>
                       </a:r>
                       <a:endParaRPr lang="en-US" sz="900" dirty="0">
                         <a:latin typeface="Arial" charset="0"/>
@@ -9466,7 +9466,7 @@
                           <a:ea typeface="Arial" pitchFamily="34" charset="-122"/>
                           <a:cs typeface="Arial" pitchFamily="34" charset="-120"/>
                         </a:rPr>
-                        <a:t>7.59</a:t>
+                        <a:t>7.61</a:t>
                       </a:r>
                       <a:endParaRPr lang="en-US" sz="900" dirty="0">
                         <a:latin typeface="Arial" charset="0"/>
@@ -9604,7 +9604,7 @@
                           <a:ea typeface="Arial" pitchFamily="34" charset="-122"/>
                           <a:cs typeface="Arial" pitchFamily="34" charset="-120"/>
                         </a:rPr>
-                        <a:t>3</a:t>
+                        <a:t>5</a:t>
                       </a:r>
                       <a:endParaRPr lang="en-US" sz="900" dirty="0">
                         <a:latin typeface="Arial" charset="0"/>
@@ -9672,7 +9672,7 @@
                           <a:ea typeface="Arial" pitchFamily="34" charset="-122"/>
                           <a:cs typeface="Arial" pitchFamily="34" charset="-120"/>
                         </a:rPr>
-                        <a:t>7.33</a:t>
+                        <a:t>7.4</a:t>
                       </a:r>
                       <a:endParaRPr lang="en-US" sz="900" dirty="0">
                         <a:latin typeface="Arial" charset="0"/>
@@ -9808,7 +9808,7 @@
                           <a:ea typeface="Arial" pitchFamily="34" charset="-122"/>
                           <a:cs typeface="Arial" pitchFamily="34" charset="-120"/>
                         </a:rPr>
-                        <a:t>7.33</a:t>
+                        <a:t>7.4</a:t>
                       </a:r>
                       <a:endParaRPr lang="en-US" sz="900" dirty="0">
                         <a:latin typeface="Arial" charset="0"/>
@@ -10216,7 +10216,7 @@
                 <a:ea typeface="Arial" pitchFamily="34" charset="-122"/>
                 <a:cs typeface="Arial" pitchFamily="34" charset="-120"/>
               </a:rPr>
-              <a:t>85件（78.7%）</a:t>
+              <a:t>91件（79.1%）</a:t>
             </a:r>
             <a:endParaRPr lang="en-US" sz="1100" dirty="0"/>
           </a:p>
@@ -10314,7 +10314,7 @@
                 <a:ea typeface="Arial" pitchFamily="34" charset="-122"/>
                 <a:cs typeface="Arial" pitchFamily="34" charset="-120"/>
               </a:rPr>
-              <a:t>14件（13.0%）</a:t>
+              <a:t>15件（13.0%）</a:t>
             </a:r>
             <a:endParaRPr lang="en-US" sz="1100" dirty="0"/>
           </a:p>
@@ -10412,7 +10412,7 @@
                 <a:ea typeface="Arial" pitchFamily="34" charset="-122"/>
                 <a:cs typeface="Arial" pitchFamily="34" charset="-120"/>
               </a:rPr>
-              <a:t>9件（8.3%）</a:t>
+              <a:t>9件（7.8%）</a:t>
             </a:r>
             <a:endParaRPr lang="en-US" sz="1100" dirty="0"/>
           </a:p>
@@ -10824,7 +10824,7 @@
                 <a:ea typeface="Arial" pitchFamily="34" charset="-122"/>
                 <a:cs typeface="Arial" pitchFamily="34" charset="-120"/>
               </a:rPr>
-              <a:t>Good location and nice reception staff Coffee machine bro...</a:t>
+              <a:t>The location and very comfortable place to stay</a:t>
             </a:r>
             <a:endParaRPr lang="en-US" sz="900" dirty="0"/>
           </a:p>
@@ -10863,7 +10863,7 @@
                 <a:ea typeface="Arial" pitchFamily="34" charset="-122"/>
                 <a:cs typeface="Arial" pitchFamily="34" charset="-120"/>
               </a:rPr>
-              <a:t>「六本木地點方便，價格合理，推薦 六本木は立地が良く、価格も手頃なのでおすすめです」</a:t>
+              <a:t>「立地は良いが部屋は狭く、外国人観光客も多いからか壁紙等も綺麗ではない」</a:t>
             </a:r>
             <a:endParaRPr lang="en-US" sz="900" dirty="0"/>
           </a:p>
@@ -11047,7 +11047,7 @@
                 <a:ea typeface="Arial" pitchFamily="34" charset="-122"/>
                 <a:cs typeface="Arial" pitchFamily="34" charset="-120"/>
               </a:rPr>
-              <a:t>Good location and nice reception staff Coffee machine bro...</a:t>
+              <a:t>駅からちかい スタッフの感じがいい</a:t>
             </a:r>
             <a:endParaRPr lang="en-US" sz="900" dirty="0"/>
           </a:p>
@@ -11086,7 +11086,7 @@
                 <a:ea typeface="Arial" pitchFamily="34" charset="-122"/>
                 <a:cs typeface="Arial" pitchFamily="34" charset="-120"/>
               </a:rPr>
-              <a:t>「そして何より、カスタマーサービスのスタッフの方々がとても親切で助かります」</a:t>
+              <a:t>「ウエルカムドリンクはコーヒーと紅茶（大好きなティーアース♡）があり2階に自販機、氷、レンジがあり便利でした(⁠◍⁠...」</a:t>
             </a:r>
             <a:endParaRPr lang="en-US" sz="900" dirty="0"/>
           </a:p>
@@ -11270,7 +11270,7 @@
                 <a:ea typeface="Arial" pitchFamily="34" charset="-122"/>
                 <a:cs typeface="Arial" pitchFamily="34" charset="-120"/>
               </a:rPr>
-              <a:t>クイーンサイズのベッドがある部屋を予約したのですが、日本の基準からするとかなり広々としていました</a:t>
+              <a:t>The location and very comfortable place to stay</a:t>
             </a:r>
             <a:endParaRPr lang="en-US" sz="900" dirty="0"/>
           </a:p>
@@ -11309,7 +11309,7 @@
                 <a:ea typeface="Arial" pitchFamily="34" charset="-122"/>
                 <a:cs typeface="Arial" pitchFamily="34" charset="-120"/>
               </a:rPr>
-              <a:t>「Good value 設備は少ないけど、それ以上は望めない」</a:t>
+              <a:t>「とにかくここファミリールームのツインベッドルームはエキストラベッドに増えて4人まで入るのに十分ですね」</a:t>
             </a:r>
             <a:endParaRPr lang="en-US" sz="900" dirty="0"/>
           </a:p>
@@ -11454,7 +11454,7 @@
                 <a:ea typeface="Arial" pitchFamily="34" charset="-122"/>
                 <a:cs typeface="Arial" pitchFamily="34" charset="-120"/>
               </a:rPr>
-              <a:t>朝食</a:t>
+              <a:t>清潔さ・清掃</a:t>
             </a:r>
             <a:endParaRPr lang="en-US" sz="1300" dirty="0"/>
           </a:p>
@@ -11493,7 +11493,7 @@
                 <a:ea typeface="Arial" pitchFamily="34" charset="-122"/>
                 <a:cs typeface="Arial" pitchFamily="34" charset="-120"/>
               </a:rPr>
-              <a:t>タイ風の朝食は本当に美味しく、期待以上で、ぜひおすすめします</a:t>
+              <a:t>立地は良いが部屋は狭く、外国人観光客も多いからか壁紙等も綺麗ではない</a:t>
             </a:r>
             <a:endParaRPr lang="en-US" sz="900" dirty="0"/>
           </a:p>
@@ -11532,7 +11532,7 @@
                 <a:ea typeface="Arial" pitchFamily="34" charset="-122"/>
                 <a:cs typeface="Arial" pitchFamily="34" charset="-120"/>
               </a:rPr>
-              <a:t>「タイ式の朝食は本当に美味しく、期待以上で、ぜひおすすめします」</a:t>
+              <a:t>「比較的綺麗に保たれるようだが昔のようではないよう」</a:t>
             </a:r>
             <a:endParaRPr lang="en-US" sz="900" dirty="0"/>
           </a:p>
@@ -11677,7 +11677,7 @@
                 <a:ea typeface="Arial" pitchFamily="34" charset="-122"/>
                 <a:cs typeface="Arial" pitchFamily="34" charset="-120"/>
               </a:rPr>
-              <a:t>清潔さ・清掃</a:t>
+              <a:t>朝食</a:t>
             </a:r>
             <a:endParaRPr lang="en-US" sz="1300" dirty="0"/>
           </a:p>
@@ -11716,7 +11716,7 @@
                 <a:ea typeface="Arial" pitchFamily="34" charset="-122"/>
                 <a:cs typeface="Arial" pitchFamily="34" charset="-120"/>
               </a:rPr>
-              <a:t>スタッフは親切で気配りが行き届いていました</a:t>
+              <a:t>ウエルカムドリンクはコーヒーと紅茶（大好きなティーアース♡）があり2階に自販機、氷、レンジがあり便利でした(⁠◍⁠...</a:t>
             </a:r>
             <a:endParaRPr lang="en-US" sz="900" dirty="0"/>
           </a:p>
@@ -11755,7 +11755,7 @@
                 <a:ea typeface="Arial" pitchFamily="34" charset="-122"/>
                 <a:cs typeface="Arial" pitchFamily="34" charset="-120"/>
               </a:rPr>
-              <a:t>「Clean spacious good location Lack of facilities but can’t...」</a:t>
+              <a:t>「タイ風の朝食は本当に美味しく、期待以上で、ぜひおすすめします」</a:t>
             </a:r>
             <a:endParaRPr lang="en-US" sz="900" dirty="0"/>
           </a:p>
@@ -11939,7 +11939,7 @@
                 <a:ea typeface="Arial" pitchFamily="34" charset="-122"/>
                 <a:cs typeface="Arial" pitchFamily="34" charset="-120"/>
               </a:rPr>
-              <a:t>I booked a room with a queen bed, which I found quite spa...</a:t>
+              <a:t>スペースをゆっくりと使えていいです</a:t>
             </a:r>
             <a:endParaRPr lang="en-US" sz="900" dirty="0"/>
           </a:p>
@@ -11978,7 +11978,7 @@
                 <a:ea typeface="Arial" pitchFamily="34" charset="-122"/>
                 <a:cs typeface="Arial" pitchFamily="34" charset="-120"/>
               </a:rPr>
-              <a:t>「Clean spacious good location Lack of facilities but can’t...」</a:t>
+              <a:t>「I booked a room with a queen bed, which I found quite spa...」</a:t>
             </a:r>
             <a:endParaRPr lang="en-US" sz="900" dirty="0"/>
           </a:p>
@@ -12668,7 +12668,7 @@
                           <a:ea typeface="Arial" pitchFamily="34" charset="-122"/>
                           <a:cs typeface="Arial" pitchFamily="34" charset="-120"/>
                         </a:rPr>
-                        <a:t>Good location and nice reception staff Coffee machine bro...</a:t>
+                        <a:t>The location and very comfortable place to stay</a:t>
                       </a:r>
                       <a:endParaRPr lang="en-US" sz="900" dirty="0">
                         <a:latin typeface="Arial" charset="0"/>
@@ -12736,7 +12736,7 @@
                           <a:ea typeface="Arial" pitchFamily="34" charset="-122"/>
                           <a:cs typeface="Arial" pitchFamily="34" charset="-120"/>
                         </a:rPr>
-                        <a:t>24件</a:t>
+                        <a:t>25件</a:t>
                       </a:r>
                       <a:endParaRPr lang="en-US" sz="900" dirty="0">
                         <a:latin typeface="Arial" charset="0"/>
@@ -12942,7 +12942,7 @@
                           <a:ea typeface="Arial" pitchFamily="34" charset="-122"/>
                           <a:cs typeface="Arial" pitchFamily="34" charset="-120"/>
                         </a:rPr>
-                        <a:t>風呂トイレはユニットバスになってますが、浴槽は広めで足を伸ばしてくつろげるサイズになってました</a:t>
+                        <a:t>バスルーム、トイレは小さいですが、そのまま水がよく出て水伝も最近変えたようです</a:t>
                       </a:r>
                       <a:endParaRPr lang="en-US" sz="900" dirty="0">
                         <a:latin typeface="Arial" charset="0"/>
@@ -13010,7 +13010,7 @@
                           <a:ea typeface="Arial" pitchFamily="34" charset="-122"/>
                           <a:cs typeface="Arial" pitchFamily="34" charset="-120"/>
                         </a:rPr>
-                        <a:t>17件</a:t>
+                        <a:t>20件</a:t>
                       </a:r>
                       <a:endParaRPr lang="en-US" sz="900" dirty="0">
                         <a:latin typeface="Arial" charset="0"/>
@@ -13216,7 +13216,7 @@
                           <a:ea typeface="Arial" pitchFamily="34" charset="-122"/>
                           <a:cs typeface="Arial" pitchFamily="34" charset="-120"/>
                         </a:rPr>
-                        <a:t>The room originally allocated was very small</a:t>
+                        <a:t>自分は狭い部屋に追いやられたのかと思ってしまうくらい部屋は狭いです</a:t>
                       </a:r>
                       <a:endParaRPr lang="en-US" sz="900" dirty="0">
                         <a:latin typeface="Arial" charset="0"/>
@@ -13284,7 +13284,7 @@
                           <a:ea typeface="Arial" pitchFamily="34" charset="-122"/>
                           <a:cs typeface="Arial" pitchFamily="34" charset="-120"/>
                         </a:rPr>
-                        <a:t>10件</a:t>
+                        <a:t>13件</a:t>
                       </a:r>
                       <a:endParaRPr lang="en-US" sz="900" dirty="0">
                         <a:latin typeface="Arial" charset="0"/>
@@ -13490,7 +13490,7 @@
                           <a:ea typeface="Arial" pitchFamily="34" charset="-122"/>
                           <a:cs typeface="Arial" pitchFamily="34" charset="-120"/>
                         </a:rPr>
-                        <a:t>建物自体は古いとは思いますが清掃が行き届いていて、快適に過ごせました</a:t>
+                        <a:t>古いホテルです</a:t>
                       </a:r>
                       <a:endParaRPr lang="en-US" sz="900" dirty="0">
                         <a:latin typeface="Arial" charset="0"/>
@@ -13558,7 +13558,7 @@
                           <a:ea typeface="Arial" pitchFamily="34" charset="-122"/>
                           <a:cs typeface="Arial" pitchFamily="34" charset="-120"/>
                         </a:rPr>
-                        <a:t>7件</a:t>
+                        <a:t>9件</a:t>
                       </a:r>
                       <a:endParaRPr lang="en-US" sz="900" dirty="0">
                         <a:latin typeface="Arial" charset="0"/>
@@ -13696,7 +13696,7 @@
                           <a:ea typeface="Arial" pitchFamily="34" charset="-122"/>
                           <a:cs typeface="Arial" pitchFamily="34" charset="-120"/>
                         </a:rPr>
-                        <a:t>対応・サービスの不満</a:t>
+                        <a:t>窓・採光</a:t>
                       </a:r>
                       <a:endParaRPr lang="en-US" sz="900" dirty="0">
                         <a:latin typeface="Arial" charset="0"/>
@@ -13764,7 +13764,7 @@
                           <a:ea typeface="Arial" pitchFamily="34" charset="-122"/>
                           <a:cs typeface="Arial" pitchFamily="34" charset="-120"/>
                         </a:rPr>
-                        <a:t>這裏太方便了，樓下就是地鐵站，不論是自己或是朋友一起來都非常之方便，最重要的是客服人員態度10分好，10分推薦 こ...</a:t>
+                        <a:t>短所/窓の外がすぐに高架道路があるので防音がうまくいきません</a:t>
                       </a:r>
                       <a:endParaRPr lang="en-US" sz="900" dirty="0">
                         <a:latin typeface="Arial" charset="0"/>
@@ -13970,7 +13970,7 @@
                           <a:ea typeface="Arial" pitchFamily="34" charset="-122"/>
                           <a:cs typeface="Arial" pitchFamily="34" charset="-120"/>
                         </a:rPr>
-                        <a:t>臭い・匂い</a:t>
+                        <a:t>対応・サービスの不満</a:t>
                       </a:r>
                       <a:endParaRPr lang="en-US" sz="900" dirty="0">
                         <a:latin typeface="Arial" charset="0"/>
@@ -14038,7 +14038,7 @@
                           <a:ea typeface="Arial" pitchFamily="34" charset="-122"/>
                           <a:cs typeface="Arial" pitchFamily="34" charset="-120"/>
                         </a:rPr>
-                        <a:t>また、禁煙室と謳われているにもかかわらず、部屋の中には明らかにタバコの臭いが漂っていた</a:t>
+                        <a:t>這裏太方便了，樓下就是地鐵站，不論是自己或是朋友一起來都非常之方便，最重要的是客服人員態度10分好，10分推薦 こ...</a:t>
                       </a:r>
                       <a:endParaRPr lang="en-US" sz="900" dirty="0">
                         <a:latin typeface="Arial" charset="0"/>
@@ -14106,7 +14106,7 @@
                           <a:ea typeface="Arial" pitchFamily="34" charset="-122"/>
                           <a:cs typeface="Arial" pitchFamily="34" charset="-120"/>
                         </a:rPr>
-                        <a:t>6件</a:t>
+                        <a:t>7件</a:t>
                       </a:r>
                       <a:endParaRPr lang="en-US" sz="900" dirty="0">
                         <a:latin typeface="Arial" charset="0"/>
@@ -14244,7 +14244,7 @@
                           <a:ea typeface="Arial" pitchFamily="34" charset="-122"/>
                           <a:cs typeface="Arial" pitchFamily="34" charset="-120"/>
                         </a:rPr>
-                        <a:t>朝食の改善要望</a:t>
+                        <a:t>防音性能</a:t>
                       </a:r>
                       <a:endParaRPr lang="en-US" sz="900" dirty="0">
                         <a:latin typeface="Arial" charset="0"/>
@@ -14312,7 +14312,7 @@
                           <a:ea typeface="Arial" pitchFamily="34" charset="-122"/>
                           <a:cs typeface="Arial" pitchFamily="34" charset="-120"/>
                         </a:rPr>
-                        <a:t>朝食は品数が多いわけではなく  和食ではありませんが十分です、美味しかったです</a:t>
+                        <a:t>短所/窓の外がすぐに高架道路があるので防音がうまくいきません</a:t>
                       </a:r>
                       <a:endParaRPr lang="en-US" sz="900" dirty="0">
                         <a:latin typeface="Arial" charset="0"/>
@@ -14380,7 +14380,7 @@
                           <a:ea typeface="Arial" pitchFamily="34" charset="-122"/>
                           <a:cs typeface="Arial" pitchFamily="34" charset="-120"/>
                         </a:rPr>
-                        <a:t>5件</a:t>
+                        <a:t>6件</a:t>
                       </a:r>
                       <a:endParaRPr lang="en-US" sz="900" dirty="0">
                         <a:latin typeface="Arial" charset="0"/>
@@ -14518,7 +14518,7 @@
                           <a:ea typeface="Arial" pitchFamily="34" charset="-122"/>
                           <a:cs typeface="Arial" pitchFamily="34" charset="-120"/>
                         </a:rPr>
-                        <a:t>窓・採光</a:t>
+                        <a:t>臭い・匂い</a:t>
                       </a:r>
                       <a:endParaRPr lang="en-US" sz="900" dirty="0">
                         <a:latin typeface="Arial" charset="0"/>
@@ -14586,7 +14586,7 @@
                           <a:ea typeface="Arial" pitchFamily="34" charset="-122"/>
                           <a:cs typeface="Arial" pitchFamily="34" charset="-120"/>
                         </a:rPr>
-                        <a:t>部屋には窓が1つしかなく、しかも曇りガラスで開けることができなかった</a:t>
+                        <a:t>また、禁煙室と謳われているにもかかわらず、部屋の中には明らかにタバコの臭いが漂っていた</a:t>
                       </a:r>
                       <a:endParaRPr lang="en-US" sz="900" dirty="0">
                         <a:latin typeface="Arial" charset="0"/>
@@ -14654,7 +14654,7 @@
                           <a:ea typeface="Arial" pitchFamily="34" charset="-122"/>
                           <a:cs typeface="Arial" pitchFamily="34" charset="-120"/>
                         </a:rPr>
-                        <a:t>5件</a:t>
+                        <a:t>6件</a:t>
                       </a:r>
                       <a:endParaRPr lang="en-US" sz="900" dirty="0">
                         <a:latin typeface="Arial" charset="0"/>
@@ -14792,7 +14792,7 @@
                           <a:ea typeface="Arial" pitchFamily="34" charset="-122"/>
                           <a:cs typeface="Arial" pitchFamily="34" charset="-120"/>
                         </a:rPr>
-                        <a:t>防音性能</a:t>
+                        <a:t>朝食の改善要望</a:t>
                       </a:r>
                       <a:endParaRPr lang="en-US" sz="900" dirty="0">
                         <a:latin typeface="Arial" charset="0"/>
@@ -14860,7 +14860,7 @@
                           <a:ea typeface="Arial" pitchFamily="34" charset="-122"/>
                           <a:cs typeface="Arial" pitchFamily="34" charset="-120"/>
                         </a:rPr>
-                        <a:t>室内はきれいで、雑音も騒音もなくゆったりとすごせました</a:t>
+                        <a:t>朝食は品数が多いわけではなく  和食ではありませんが十分です、美味しかったです</a:t>
                       </a:r>
                       <a:endParaRPr lang="en-US" sz="900" dirty="0">
                         <a:latin typeface="Arial" charset="0"/>
@@ -14928,7 +14928,7 @@
                           <a:ea typeface="Arial" pitchFamily="34" charset="-122"/>
                           <a:cs typeface="Arial" pitchFamily="34" charset="-120"/>
                         </a:rPr>
-                        <a:t>4件</a:t>
+                        <a:t>5件</a:t>
                       </a:r>
                       <a:endParaRPr lang="en-US" sz="900" dirty="0">
                         <a:latin typeface="Arial" charset="0"/>

--- a/納品レポート/ホテル別レポート/comfort_roppongi_口コミ分析レポート.pptx
+++ b/納品レポート/ホテル別レポート/comfort_roppongi_口コミ分析レポート.pptx
@@ -211,16 +211,16 @@
                   <c:v>10</c:v>
                 </c:pt>
                 <c:pt idx="1">
-                  <c:v>9.71</c:v>
+                  <c:v>9.75</c:v>
                 </c:pt>
                 <c:pt idx="2">
-                  <c:v>8.46</c:v>
+                  <c:v>8.67</c:v>
                 </c:pt>
                 <c:pt idx="3">
                   <c:v>8.22</c:v>
                 </c:pt>
                 <c:pt idx="4">
-                  <c:v>7.61</c:v>
+                  <c:v>7.7</c:v>
                 </c:pt>
                 <c:pt idx="5">
                   <c:v>7.4</c:v>
@@ -566,7 +566,7 @@
               <c:numCache>
                 <c:ptCount val="3"/>
                 <c:pt idx="0">
-                  <c:v>91</c:v>
+                  <c:v>96</c:v>
                 </c:pt>
                 <c:pt idx="1">
                   <c:v>15</c:v>
@@ -809,13 +809,13 @@
                 <c:formatCode>General</c:formatCode>
                 <c:ptCount val="8"/>
                 <c:pt idx="0">
-                  <c:v>38</c:v>
+                  <c:v>42</c:v>
                 </c:pt>
                 <c:pt idx="1">
                   <c:v>16</c:v>
                 </c:pt>
                 <c:pt idx="2">
-                  <c:v>37</c:v>
+                  <c:v>38</c:v>
                 </c:pt>
                 <c:pt idx="3">
                   <c:v>8</c:v>
@@ -2781,7 +2781,7 @@
                 <a:ea typeface="Arial" pitchFamily="34" charset="-122"/>
                 <a:cs typeface="Arial" pitchFamily="34" charset="-120"/>
               </a:rPr>
-              <a:t>レビュー総数：115件（6サイト）</a:t>
+              <a:t>レビュー総数：120件（6サイト）</a:t>
             </a:r>
             <a:endParaRPr lang="en-US" sz="1000" dirty="0"/>
           </a:p>
@@ -2801,7 +2801,7 @@
                 <a:ea typeface="Arial" pitchFamily="34" charset="-122"/>
                 <a:cs typeface="Arial" pitchFamily="34" charset="-120"/>
               </a:rPr>
-              <a:t>作成日：2026年3月23日</a:t>
+              <a:t>作成日：2026年3月24日</a:t>
             </a:r>
             <a:endParaRPr lang="en-US" sz="1000" dirty="0"/>
           </a:p>
@@ -3347,7 +3347,7 @@
                           <a:ea typeface="Arial" pitchFamily="34" charset="-122"/>
                           <a:cs typeface="Arial" pitchFamily="34" charset="-120"/>
                         </a:rPr>
-                        <a:t>8.16点</a:t>
+                        <a:t>8.22点</a:t>
                       </a:r>
                       <a:endParaRPr lang="en-US" sz="1000" dirty="0">
                         <a:latin typeface="Arial" charset="0"/>
@@ -3621,7 +3621,7 @@
                           <a:ea typeface="Arial" pitchFamily="34" charset="-122"/>
                           <a:cs typeface="Arial" pitchFamily="34" charset="-120"/>
                         </a:rPr>
-                        <a:t>79.1%</a:t>
+                        <a:t>80.0%</a:t>
                       </a:r>
                       <a:endParaRPr lang="en-US" sz="1000" dirty="0">
                         <a:latin typeface="Arial" charset="0"/>
@@ -3689,7 +3689,7 @@
                           <a:ea typeface="Arial" pitchFamily="34" charset="-122"/>
                           <a:cs typeface="Arial" pitchFamily="34" charset="-120"/>
                         </a:rPr>
-                        <a:t>84%以上</a:t>
+                        <a:t>85%以上</a:t>
                       </a:r>
                       <a:endParaRPr lang="en-US" sz="1000" dirty="0">
                         <a:latin typeface="Arial" charset="0"/>
@@ -3895,7 +3895,7 @@
                           <a:ea typeface="Arial" pitchFamily="34" charset="-122"/>
                           <a:cs typeface="Arial" pitchFamily="34" charset="-120"/>
                         </a:rPr>
-                        <a:t>7.8%</a:t>
+                        <a:t>7.5%</a:t>
                       </a:r>
                       <a:endParaRPr lang="en-US" sz="1000" dirty="0">
                         <a:latin typeface="Arial" charset="0"/>
@@ -5356,7 +5356,7 @@
                 <a:ea typeface="Arial" pitchFamily="34" charset="-122"/>
                 <a:cs typeface="Arial" pitchFamily="34" charset="-120"/>
               </a:rPr>
-              <a:t>8.16</a:t>
+              <a:t>8.22</a:t>
             </a:r>
             <a:endParaRPr lang="en-US" sz="3200" dirty="0"/>
           </a:p>
@@ -5481,7 +5481,7 @@
                 <a:ea typeface="Arial" pitchFamily="34" charset="-122"/>
                 <a:cs typeface="Arial" pitchFamily="34" charset="-120"/>
               </a:rPr>
-              <a:t>79.1%</a:t>
+              <a:t>80.0%</a:t>
             </a:r>
             <a:endParaRPr lang="en-US" sz="3200" dirty="0"/>
           </a:p>
@@ -5606,7 +5606,7 @@
                 <a:ea typeface="Arial" pitchFamily="34" charset="-122"/>
                 <a:cs typeface="Arial" pitchFamily="34" charset="-120"/>
               </a:rPr>
-              <a:t>7.8%</a:t>
+              <a:t>7.5%</a:t>
             </a:r>
             <a:endParaRPr lang="en-US" sz="3200" dirty="0"/>
           </a:p>
@@ -5731,7 +5731,7 @@
                 <a:ea typeface="Arial" pitchFamily="34" charset="-122"/>
                 <a:cs typeface="Arial" pitchFamily="34" charset="-120"/>
               </a:rPr>
-              <a:t>115件</a:t>
+              <a:t>120件</a:t>
             </a:r>
             <a:endParaRPr lang="en-US" sz="3200" dirty="0"/>
           </a:p>
@@ -5879,7 +5879,7 @@
                 <a:ea typeface="Arial" pitchFamily="34" charset="-122"/>
                 <a:cs typeface="Arial" pitchFamily="34" charset="-120"/>
               </a:rPr>
-              <a:t>  The location and very comfortable place to stay</a:t>
+              <a:t>  駅からも近く部屋はベッド４つで添い寝も問題なくゆったりとした部屋で大満足</a:t>
             </a:r>
             <a:endParaRPr lang="en-US" sz="1100" dirty="0"/>
           </a:p>
@@ -5919,7 +5919,7 @@
                 <a:ea typeface="Arial" pitchFamily="34" charset="-122"/>
                 <a:cs typeface="Arial" pitchFamily="34" charset="-120"/>
               </a:rPr>
-              <a:t>  駅からちかい スタッフの感じがいい</a:t>
+              <a:t>  完全不親切に気分が悪い</a:t>
             </a:r>
             <a:endParaRPr lang="en-US" sz="1100" dirty="0"/>
           </a:p>
@@ -5959,7 +5959,7 @@
                 <a:ea typeface="Arial" pitchFamily="34" charset="-122"/>
                 <a:cs typeface="Arial" pitchFamily="34" charset="-120"/>
               </a:rPr>
-              <a:t>  The location and very comfortable place to stay</a:t>
+              <a:t>  とにかくここファミリールームのツインベッドルームはエキストラベッドに増えて4人まで入るのに十分ですね</a:t>
             </a:r>
             <a:endParaRPr lang="en-US" sz="1100" dirty="0"/>
           </a:p>
@@ -6187,7 +6187,7 @@
                 <a:ea typeface="Arial" pitchFamily="34" charset="-122"/>
                 <a:cs typeface="Arial" pitchFamily="34" charset="-120"/>
               </a:rPr>
-              <a:t>  自分は狭い部屋に追いやられたのかと思ってしまうくらい部屋は狭いです</a:t>
+              <a:t>  バスルーム、トイレは小さいですが、そのまま水がよく出て水伝も最近変えたようです</a:t>
             </a:r>
             <a:endParaRPr lang="en-US" sz="1100" dirty="0"/>
           </a:p>
@@ -6540,7 +6540,7 @@
                 <a:ea typeface="Arial" pitchFamily="34" charset="-122"/>
                 <a:cs typeface="Arial" pitchFamily="34" charset="-120"/>
               </a:rPr>
-              <a:t>8.16</a:t>
+              <a:t>8.22</a:t>
             </a:r>
             <a:endParaRPr lang="en-US" sz="3200" dirty="0"/>
           </a:p>
@@ -6588,7 +6588,7 @@
             <a:avLst/>
           </a:prstGeom>
           <a:solidFill>
-            <a:srgbClr val="D4A843"/>
+            <a:srgbClr val="16A34A"/>
           </a:solidFill>
           <a:ln/>
         </p:spPr>
@@ -6659,13 +6659,13 @@
             <a:r>
               <a:rPr lang="en-US" sz="3200" b="1" dirty="0">
                 <a:solidFill>
-                  <a:srgbClr val="D4A843"/>
+                  <a:srgbClr val="16A34A"/>
                 </a:solidFill>
                 <a:latin typeface="Arial" pitchFamily="34" charset="0"/>
                 <a:ea typeface="Arial" pitchFamily="34" charset="-122"/>
                 <a:cs typeface="Arial" pitchFamily="34" charset="-120"/>
               </a:rPr>
-              <a:t>79.1%</a:t>
+              <a:t>80.0%</a:t>
             </a:r>
             <a:endParaRPr lang="en-US" sz="3200" dirty="0"/>
           </a:p>
@@ -6790,7 +6790,7 @@
                 <a:ea typeface="Arial" pitchFamily="34" charset="-122"/>
                 <a:cs typeface="Arial" pitchFamily="34" charset="-120"/>
               </a:rPr>
-              <a:t>7.8%</a:t>
+              <a:t>7.5%</a:t>
             </a:r>
             <a:endParaRPr lang="en-US" sz="3200" dirty="0"/>
           </a:p>
@@ -6915,7 +6915,7 @@
                 <a:ea typeface="Arial" pitchFamily="34" charset="-122"/>
                 <a:cs typeface="Arial" pitchFamily="34" charset="-120"/>
               </a:rPr>
-              <a:t>115件</a:t>
+              <a:t>120件</a:t>
             </a:r>
             <a:endParaRPr lang="en-US" sz="3200" dirty="0"/>
           </a:p>
@@ -8236,7 +8236,7 @@
                           <a:ea typeface="Arial" pitchFamily="34" charset="-122"/>
                           <a:cs typeface="Arial" pitchFamily="34" charset="-120"/>
                         </a:rPr>
-                        <a:t>7</a:t>
+                        <a:t>8</a:t>
                       </a:r>
                       <a:endParaRPr lang="en-US" sz="900" dirty="0">
                         <a:latin typeface="Arial" charset="0"/>
@@ -8304,7 +8304,7 @@
                           <a:ea typeface="Arial" pitchFamily="34" charset="-122"/>
                           <a:cs typeface="Arial" pitchFamily="34" charset="-120"/>
                         </a:rPr>
-                        <a:t>9.71</a:t>
+                        <a:t>9.75</a:t>
                       </a:r>
                       <a:endParaRPr lang="en-US" sz="900" dirty="0">
                         <a:latin typeface="Arial" charset="0"/>
@@ -8440,7 +8440,7 @@
                           <a:ea typeface="Arial" pitchFamily="34" charset="-122"/>
                           <a:cs typeface="Arial" pitchFamily="34" charset="-120"/>
                         </a:rPr>
-                        <a:t>9.71</a:t>
+                        <a:t>9.75</a:t>
                       </a:r>
                       <a:endParaRPr lang="en-US" sz="900" dirty="0">
                         <a:latin typeface="Arial" charset="0"/>
@@ -8578,7 +8578,7 @@
                           <a:ea typeface="Arial" pitchFamily="34" charset="-122"/>
                           <a:cs typeface="Arial" pitchFamily="34" charset="-120"/>
                         </a:rPr>
-                        <a:t>13</a:t>
+                        <a:t>15</a:t>
                       </a:r>
                       <a:endParaRPr lang="en-US" sz="900" dirty="0">
                         <a:latin typeface="Arial" charset="0"/>
@@ -8646,7 +8646,7 @@
                           <a:ea typeface="Arial" pitchFamily="34" charset="-122"/>
                           <a:cs typeface="Arial" pitchFamily="34" charset="-120"/>
                         </a:rPr>
-                        <a:t>4.23</a:t>
+                        <a:t>4.33</a:t>
                       </a:r>
                       <a:endParaRPr lang="en-US" sz="900" dirty="0">
                         <a:latin typeface="Arial" charset="0"/>
@@ -8782,7 +8782,7 @@
                           <a:ea typeface="Arial" pitchFamily="34" charset="-122"/>
                           <a:cs typeface="Arial" pitchFamily="34" charset="-120"/>
                         </a:rPr>
-                        <a:t>8.46</a:t>
+                        <a:t>8.67</a:t>
                       </a:r>
                       <a:endParaRPr lang="en-US" sz="900" dirty="0">
                         <a:latin typeface="Arial" charset="0"/>
@@ -9262,7 +9262,7 @@
                           <a:ea typeface="Arial" pitchFamily="34" charset="-122"/>
                           <a:cs typeface="Arial" pitchFamily="34" charset="-120"/>
                         </a:rPr>
-                        <a:t>31</a:t>
+                        <a:t>33</a:t>
                       </a:r>
                       <a:endParaRPr lang="en-US" sz="900" dirty="0">
                         <a:latin typeface="Arial" charset="0"/>
@@ -9330,7 +9330,7 @@
                           <a:ea typeface="Arial" pitchFamily="34" charset="-122"/>
                           <a:cs typeface="Arial" pitchFamily="34" charset="-120"/>
                         </a:rPr>
-                        <a:t>3.81</a:t>
+                        <a:t>3.85</a:t>
                       </a:r>
                       <a:endParaRPr lang="en-US" sz="900" dirty="0">
                         <a:latin typeface="Arial" charset="0"/>
@@ -9466,7 +9466,7 @@
                           <a:ea typeface="Arial" pitchFamily="34" charset="-122"/>
                           <a:cs typeface="Arial" pitchFamily="34" charset="-120"/>
                         </a:rPr>
-                        <a:t>7.61</a:t>
+                        <a:t>7.7</a:t>
                       </a:r>
                       <a:endParaRPr lang="en-US" sz="900" dirty="0">
                         <a:latin typeface="Arial" charset="0"/>
@@ -10216,7 +10216,7 @@
                 <a:ea typeface="Arial" pitchFamily="34" charset="-122"/>
                 <a:cs typeface="Arial" pitchFamily="34" charset="-120"/>
               </a:rPr>
-              <a:t>91件（79.1%）</a:t>
+              <a:t>96件（80.0%）</a:t>
             </a:r>
             <a:endParaRPr lang="en-US" sz="1100" dirty="0"/>
           </a:p>
@@ -10314,7 +10314,7 @@
                 <a:ea typeface="Arial" pitchFamily="34" charset="-122"/>
                 <a:cs typeface="Arial" pitchFamily="34" charset="-120"/>
               </a:rPr>
-              <a:t>15件（13.0%）</a:t>
+              <a:t>15件（12.5%）</a:t>
             </a:r>
             <a:endParaRPr lang="en-US" sz="1100" dirty="0"/>
           </a:p>
@@ -10412,7 +10412,7 @@
                 <a:ea typeface="Arial" pitchFamily="34" charset="-122"/>
                 <a:cs typeface="Arial" pitchFamily="34" charset="-120"/>
               </a:rPr>
-              <a:t>9件（7.8%）</a:t>
+              <a:t>9件（7.5%）</a:t>
             </a:r>
             <a:endParaRPr lang="en-US" sz="1100" dirty="0"/>
           </a:p>
@@ -10746,7 +10746,7 @@
                 <a:ea typeface="Arial" pitchFamily="34" charset="-122"/>
                 <a:cs typeface="Arial" pitchFamily="34" charset="-120"/>
               </a:rPr>
-              <a:t>20件+</a:t>
+              <a:t>50件+</a:t>
             </a:r>
             <a:endParaRPr lang="en-US" sz="900" dirty="0"/>
           </a:p>
@@ -10824,7 +10824,7 @@
                 <a:ea typeface="Arial" pitchFamily="34" charset="-122"/>
                 <a:cs typeface="Arial" pitchFamily="34" charset="-120"/>
               </a:rPr>
-              <a:t>The location and very comfortable place to stay</a:t>
+              <a:t>駅からも近く部屋はベッド４つで添い寝も問題なくゆったりとした部屋で大満足</a:t>
             </a:r>
             <a:endParaRPr lang="en-US" sz="900" dirty="0"/>
           </a:p>
@@ -10863,7 +10863,7 @@
                 <a:ea typeface="Arial" pitchFamily="34" charset="-122"/>
                 <a:cs typeface="Arial" pitchFamily="34" charset="-120"/>
               </a:rPr>
-              <a:t>「立地は良いが部屋は狭く、外国人観光客も多いからか壁紙等も綺麗ではない」</a:t>
+              <a:t>「The location and very comfortable place to stay」</a:t>
             </a:r>
             <a:endParaRPr lang="en-US" sz="900" dirty="0"/>
           </a:p>
@@ -11047,7 +11047,7 @@
                 <a:ea typeface="Arial" pitchFamily="34" charset="-122"/>
                 <a:cs typeface="Arial" pitchFamily="34" charset="-120"/>
               </a:rPr>
-              <a:t>駅からちかい スタッフの感じがいい</a:t>
+              <a:t>完全不親切に気分が悪い</a:t>
             </a:r>
             <a:endParaRPr lang="en-US" sz="900" dirty="0"/>
           </a:p>
@@ -11086,7 +11086,7 @@
                 <a:ea typeface="Arial" pitchFamily="34" charset="-122"/>
                 <a:cs typeface="Arial" pitchFamily="34" charset="-120"/>
               </a:rPr>
-              <a:t>「ウエルカムドリンクはコーヒーと紅茶（大好きなティーアース♡）があり2階に自販機、氷、レンジがあり便利でした(⁠◍⁠...」</a:t>
+              <a:t>「スタッフの対応も良くいい時間を過ごすことができました」</a:t>
             </a:r>
             <a:endParaRPr lang="en-US" sz="900" dirty="0"/>
           </a:p>
@@ -11270,7 +11270,7 @@
                 <a:ea typeface="Arial" pitchFamily="34" charset="-122"/>
                 <a:cs typeface="Arial" pitchFamily="34" charset="-120"/>
               </a:rPr>
-              <a:t>The location and very comfortable place to stay</a:t>
+              <a:t>とにかくここファミリールームのツインベッドルームはエキストラベッドに増えて4人まで入るのに十分ですね</a:t>
             </a:r>
             <a:endParaRPr lang="en-US" sz="900" dirty="0"/>
           </a:p>
@@ -11309,7 +11309,7 @@
                 <a:ea typeface="Arial" pitchFamily="34" charset="-122"/>
                 <a:cs typeface="Arial" pitchFamily="34" charset="-120"/>
               </a:rPr>
-              <a:t>「とにかくここファミリールームのツインベッドルームはエキストラベッドに増えて4人まで入るのに十分ですね」</a:t>
+              <a:t>「10分舒服的一間酒店設備又齊全非常新淨價錢合分合理，再來也會選擇他 とても快適で、設備も新しく、料金も非常にリーズ...」</a:t>
             </a:r>
             <a:endParaRPr lang="en-US" sz="900" dirty="0"/>
           </a:p>
@@ -11493,7 +11493,7 @@
                 <a:ea typeface="Arial" pitchFamily="34" charset="-122"/>
                 <a:cs typeface="Arial" pitchFamily="34" charset="-120"/>
               </a:rPr>
-              <a:t>立地は良いが部屋は狭く、外国人観光客も多いからか壁紙等も綺麗ではない</a:t>
+              <a:t>比較的綺麗に保たれるようだが昔のようではないよう</a:t>
             </a:r>
             <a:endParaRPr lang="en-US" sz="900" dirty="0"/>
           </a:p>
@@ -11532,7 +11532,7 @@
                 <a:ea typeface="Arial" pitchFamily="34" charset="-122"/>
                 <a:cs typeface="Arial" pitchFamily="34" charset="-120"/>
               </a:rPr>
-              <a:t>「比較的綺麗に保たれるようだが昔のようではないよう」</a:t>
+              <a:t>「とても綺麗なお部屋で満足しました」</a:t>
             </a:r>
             <a:endParaRPr lang="en-US" sz="900" dirty="0"/>
           </a:p>
@@ -11755,7 +11755,7 @@
                 <a:ea typeface="Arial" pitchFamily="34" charset="-122"/>
                 <a:cs typeface="Arial" pitchFamily="34" charset="-120"/>
               </a:rPr>
-              <a:t>「タイ風の朝食は本当に美味しく、期待以上で、ぜひおすすめします」</a:t>
+              <a:t>「タイ式の朝食は本当に美味しく、期待以上で、ぜひおすすめします」</a:t>
             </a:r>
             <a:endParaRPr lang="en-US" sz="900" dirty="0"/>
           </a:p>
@@ -13010,7 +13010,7 @@
                           <a:ea typeface="Arial" pitchFamily="34" charset="-122"/>
                           <a:cs typeface="Arial" pitchFamily="34" charset="-120"/>
                         </a:rPr>
-                        <a:t>20件</a:t>
+                        <a:t>21件</a:t>
                       </a:r>
                       <a:endParaRPr lang="en-US" sz="900" dirty="0">
                         <a:latin typeface="Arial" charset="0"/>
@@ -13216,7 +13216,7 @@
                           <a:ea typeface="Arial" pitchFamily="34" charset="-122"/>
                           <a:cs typeface="Arial" pitchFamily="34" charset="-120"/>
                         </a:rPr>
-                        <a:t>自分は狭い部屋に追いやられたのかと思ってしまうくらい部屋は狭いです</a:t>
+                        <a:t>バスルーム、トイレは小さいですが、そのまま水がよく出て水伝も最近変えたようです</a:t>
                       </a:r>
                       <a:endParaRPr lang="en-US" sz="900" dirty="0">
                         <a:latin typeface="Arial" charset="0"/>
@@ -13284,7 +13284,7 @@
                           <a:ea typeface="Arial" pitchFamily="34" charset="-122"/>
                           <a:cs typeface="Arial" pitchFamily="34" charset="-120"/>
                         </a:rPr>
-                        <a:t>13件</a:t>
+                        <a:t>14件</a:t>
                       </a:r>
                       <a:endParaRPr lang="en-US" sz="900" dirty="0">
                         <a:latin typeface="Arial" charset="0"/>
@@ -13558,7 +13558,7 @@
                           <a:ea typeface="Arial" pitchFamily="34" charset="-122"/>
                           <a:cs typeface="Arial" pitchFamily="34" charset="-120"/>
                         </a:rPr>
-                        <a:t>9件</a:t>
+                        <a:t>10件</a:t>
                       </a:r>
                       <a:endParaRPr lang="en-US" sz="900" dirty="0">
                         <a:latin typeface="Arial" charset="0"/>
@@ -13764,7 +13764,7 @@
                           <a:ea typeface="Arial" pitchFamily="34" charset="-122"/>
                           <a:cs typeface="Arial" pitchFamily="34" charset="-120"/>
                         </a:rPr>
-                        <a:t>短所/窓の外がすぐに高架道路があるので防音がうまくいきません</a:t>
+                        <a:t>窓の外にすぐに高架道路があるので防音がうまくいきません</a:t>
                       </a:r>
                       <a:endParaRPr lang="en-US" sz="900" dirty="0">
                         <a:latin typeface="Arial" charset="0"/>
@@ -13832,7 +13832,7 @@
                           <a:ea typeface="Arial" pitchFamily="34" charset="-122"/>
                           <a:cs typeface="Arial" pitchFamily="34" charset="-120"/>
                         </a:rPr>
-                        <a:t>7件</a:t>
+                        <a:t>8件</a:t>
                       </a:r>
                       <a:endParaRPr lang="en-US" sz="900" dirty="0">
                         <a:latin typeface="Arial" charset="0"/>
@@ -13970,7 +13970,7 @@
                           <a:ea typeface="Arial" pitchFamily="34" charset="-122"/>
                           <a:cs typeface="Arial" pitchFamily="34" charset="-120"/>
                         </a:rPr>
-                        <a:t>対応・サービスの不満</a:t>
+                        <a:t>防音性能</a:t>
                       </a:r>
                       <a:endParaRPr lang="en-US" sz="900" dirty="0">
                         <a:latin typeface="Arial" charset="0"/>
@@ -14038,7 +14038,7 @@
                           <a:ea typeface="Arial" pitchFamily="34" charset="-122"/>
                           <a:cs typeface="Arial" pitchFamily="34" charset="-120"/>
                         </a:rPr>
-                        <a:t>這裏太方便了，樓下就是地鐵站，不論是自己或是朋友一起來都非常之方便，最重要的是客服人員態度10分好，10分推薦 こ...</a:t>
+                        <a:t>窓の外にすぐに高架道路があるので防音がうまくいきません</a:t>
                       </a:r>
                       <a:endParaRPr lang="en-US" sz="900" dirty="0">
                         <a:latin typeface="Arial" charset="0"/>
@@ -14244,7 +14244,7 @@
                           <a:ea typeface="Arial" pitchFamily="34" charset="-122"/>
                           <a:cs typeface="Arial" pitchFamily="34" charset="-120"/>
                         </a:rPr>
-                        <a:t>防音性能</a:t>
+                        <a:t>対応・サービスの不満</a:t>
                       </a:r>
                       <a:endParaRPr lang="en-US" sz="900" dirty="0">
                         <a:latin typeface="Arial" charset="0"/>
@@ -14312,7 +14312,7 @@
                           <a:ea typeface="Arial" pitchFamily="34" charset="-122"/>
                           <a:cs typeface="Arial" pitchFamily="34" charset="-120"/>
                         </a:rPr>
-                        <a:t>短所/窓の外がすぐに高架道路があるので防音がうまくいきません</a:t>
+                        <a:t>這裏太方便了，樓下就是地鐵站，不論是自己或是朋友一起來都非常之方便，最重要的是客服人員態度10分好，10分推薦 こ...</a:t>
                       </a:r>
                       <a:endParaRPr lang="en-US" sz="900" dirty="0">
                         <a:latin typeface="Arial" charset="0"/>
@@ -14380,7 +14380,7 @@
                           <a:ea typeface="Arial" pitchFamily="34" charset="-122"/>
                           <a:cs typeface="Arial" pitchFamily="34" charset="-120"/>
                         </a:rPr>
-                        <a:t>6件</a:t>
+                        <a:t>7件</a:t>
                       </a:r>
                       <a:endParaRPr lang="en-US" sz="900" dirty="0">
                         <a:latin typeface="Arial" charset="0"/>

--- a/納品レポート/ホテル別レポート/comfort_roppongi_口コミ分析レポート.pptx
+++ b/納品レポート/ホテル別レポート/comfort_roppongi_口コミ分析レポート.pptx
@@ -217,7 +217,7 @@
                   <c:v>8.67</c:v>
                 </c:pt>
                 <c:pt idx="3">
-                  <c:v>8.22</c:v>
+                  <c:v>8.25</c:v>
                 </c:pt>
                 <c:pt idx="4">
                   <c:v>7.7</c:v>
@@ -566,7 +566,7 @@
               <c:numCache>
                 <c:ptCount val="3"/>
                 <c:pt idx="0">
-                  <c:v>96</c:v>
+                  <c:v>98</c:v>
                 </c:pt>
                 <c:pt idx="1">
                   <c:v>15</c:v>
@@ -809,13 +809,13 @@
                 <c:formatCode>General</c:formatCode>
                 <c:ptCount val="8"/>
                 <c:pt idx="0">
-                  <c:v>42</c:v>
+                  <c:v>43</c:v>
                 </c:pt>
                 <c:pt idx="1">
                   <c:v>16</c:v>
                 </c:pt>
                 <c:pt idx="2">
-                  <c:v>38</c:v>
+                  <c:v>39</c:v>
                 </c:pt>
                 <c:pt idx="3">
                   <c:v>8</c:v>
@@ -2781,7 +2781,7 @@
                 <a:ea typeface="Arial" pitchFamily="34" charset="-122"/>
                 <a:cs typeface="Arial" pitchFamily="34" charset="-120"/>
               </a:rPr>
-              <a:t>レビュー総数：120件（6サイト）</a:t>
+              <a:t>レビュー総数：122件（6サイト）</a:t>
             </a:r>
             <a:endParaRPr lang="en-US" sz="1000" dirty="0"/>
           </a:p>
@@ -2801,7 +2801,7 @@
                 <a:ea typeface="Arial" pitchFamily="34" charset="-122"/>
                 <a:cs typeface="Arial" pitchFamily="34" charset="-120"/>
               </a:rPr>
-              <a:t>作成日：2026年3月24日</a:t>
+              <a:t>作成日：2026年3月25日</a:t>
             </a:r>
             <a:endParaRPr lang="en-US" sz="1000" dirty="0"/>
           </a:p>
@@ -3347,7 +3347,7 @@
                           <a:ea typeface="Arial" pitchFamily="34" charset="-122"/>
                           <a:cs typeface="Arial" pitchFamily="34" charset="-120"/>
                         </a:rPr>
-                        <a:t>8.22点</a:t>
+                        <a:t>8.23点</a:t>
                       </a:r>
                       <a:endParaRPr lang="en-US" sz="1000" dirty="0">
                         <a:latin typeface="Arial" charset="0"/>
@@ -3621,7 +3621,7 @@
                           <a:ea typeface="Arial" pitchFamily="34" charset="-122"/>
                           <a:cs typeface="Arial" pitchFamily="34" charset="-120"/>
                         </a:rPr>
-                        <a:t>80.0%</a:t>
+                        <a:t>80.3%</a:t>
                       </a:r>
                       <a:endParaRPr lang="en-US" sz="1000" dirty="0">
                         <a:latin typeface="Arial" charset="0"/>
@@ -3895,7 +3895,7 @@
                           <a:ea typeface="Arial" pitchFamily="34" charset="-122"/>
                           <a:cs typeface="Arial" pitchFamily="34" charset="-120"/>
                         </a:rPr>
-                        <a:t>7.5%</a:t>
+                        <a:t>7.4%</a:t>
                       </a:r>
                       <a:endParaRPr lang="en-US" sz="1000" dirty="0">
                         <a:latin typeface="Arial" charset="0"/>
@@ -3963,7 +3963,7 @@
                           <a:ea typeface="Arial" pitchFamily="34" charset="-122"/>
                           <a:cs typeface="Arial" pitchFamily="34" charset="-120"/>
                         </a:rPr>
-                        <a:t>5%以下</a:t>
+                        <a:t>4%以下</a:t>
                       </a:r>
                       <a:endParaRPr lang="en-US" sz="1000" dirty="0">
                         <a:latin typeface="Arial" charset="0"/>
@@ -4717,7 +4717,7 @@
                           <a:ea typeface="Arial" pitchFamily="34" charset="-122"/>
                           <a:cs typeface="Arial" pitchFamily="34" charset="-120"/>
                         </a:rPr>
-                        <a:t>約25件/期間</a:t>
+                        <a:t>約26件/期間</a:t>
                       </a:r>
                       <a:endParaRPr lang="en-US" sz="1000" dirty="0">
                         <a:latin typeface="Arial" charset="0"/>
@@ -4785,7 +4785,7 @@
                           <a:ea typeface="Arial" pitchFamily="34" charset="-122"/>
                           <a:cs typeface="Arial" pitchFamily="34" charset="-120"/>
                         </a:rPr>
-                        <a:t>12件以下</a:t>
+                        <a:t>13件以下</a:t>
                       </a:r>
                       <a:endParaRPr lang="en-US" sz="1000" dirty="0">
                         <a:latin typeface="Arial" charset="0"/>
@@ -5356,7 +5356,7 @@
                 <a:ea typeface="Arial" pitchFamily="34" charset="-122"/>
                 <a:cs typeface="Arial" pitchFamily="34" charset="-120"/>
               </a:rPr>
-              <a:t>8.22</a:t>
+              <a:t>8.23</a:t>
             </a:r>
             <a:endParaRPr lang="en-US" sz="3200" dirty="0"/>
           </a:p>
@@ -5481,7 +5481,7 @@
                 <a:ea typeface="Arial" pitchFamily="34" charset="-122"/>
                 <a:cs typeface="Arial" pitchFamily="34" charset="-120"/>
               </a:rPr>
-              <a:t>80.0%</a:t>
+              <a:t>80.3%</a:t>
             </a:r>
             <a:endParaRPr lang="en-US" sz="3200" dirty="0"/>
           </a:p>
@@ -5606,7 +5606,7 @@
                 <a:ea typeface="Arial" pitchFamily="34" charset="-122"/>
                 <a:cs typeface="Arial" pitchFamily="34" charset="-120"/>
               </a:rPr>
-              <a:t>7.5%</a:t>
+              <a:t>7.4%</a:t>
             </a:r>
             <a:endParaRPr lang="en-US" sz="3200" dirty="0"/>
           </a:p>
@@ -5731,7 +5731,7 @@
                 <a:ea typeface="Arial" pitchFamily="34" charset="-122"/>
                 <a:cs typeface="Arial" pitchFamily="34" charset="-120"/>
               </a:rPr>
-              <a:t>120件</a:t>
+              <a:t>122件</a:t>
             </a:r>
             <a:endParaRPr lang="en-US" sz="3200" dirty="0"/>
           </a:p>
@@ -5959,7 +5959,7 @@
                 <a:ea typeface="Arial" pitchFamily="34" charset="-122"/>
                 <a:cs typeface="Arial" pitchFamily="34" charset="-120"/>
               </a:rPr>
-              <a:t>  とにかくここファミリールームのツインベッドルームはエキストラベッドに増えて4人まで入るのに十分ですね</a:t>
+              <a:t>  The room was very comfortable, with a very large bathroom...</a:t>
             </a:r>
             <a:endParaRPr lang="en-US" sz="1100" dirty="0"/>
           </a:p>
@@ -6107,7 +6107,7 @@
                 <a:ea typeface="Arial" pitchFamily="34" charset="-122"/>
                 <a:cs typeface="Arial" pitchFamily="34" charset="-120"/>
               </a:rPr>
-              <a:t>  The location and very comfortable place to stay</a:t>
+              <a:t>  While not the best Thai food I have aver tasted in Tokyo,...</a:t>
             </a:r>
             <a:endParaRPr lang="en-US" sz="1100" dirty="0"/>
           </a:p>
@@ -6147,7 +6147,7 @@
                 <a:ea typeface="Arial" pitchFamily="34" charset="-122"/>
                 <a:cs typeface="Arial" pitchFamily="34" charset="-120"/>
               </a:rPr>
-              <a:t>  バスルーム、トイレは小さいですが、そのまま水がよく出て水伝も最近変えたようです</a:t>
+              <a:t>  The room was very comfortable, with a very large bathroom...</a:t>
             </a:r>
             <a:endParaRPr lang="en-US" sz="1100" dirty="0"/>
           </a:p>
@@ -6540,7 +6540,7 @@
                 <a:ea typeface="Arial" pitchFamily="34" charset="-122"/>
                 <a:cs typeface="Arial" pitchFamily="34" charset="-120"/>
               </a:rPr>
-              <a:t>8.22</a:t>
+              <a:t>8.23</a:t>
             </a:r>
             <a:endParaRPr lang="en-US" sz="3200" dirty="0"/>
           </a:p>
@@ -6665,7 +6665,7 @@
                 <a:ea typeface="Arial" pitchFamily="34" charset="-122"/>
                 <a:cs typeface="Arial" pitchFamily="34" charset="-120"/>
               </a:rPr>
-              <a:t>80.0%</a:t>
+              <a:t>80.3%</a:t>
             </a:r>
             <a:endParaRPr lang="en-US" sz="3200" dirty="0"/>
           </a:p>
@@ -6790,7 +6790,7 @@
                 <a:ea typeface="Arial" pitchFamily="34" charset="-122"/>
                 <a:cs typeface="Arial" pitchFamily="34" charset="-120"/>
               </a:rPr>
-              <a:t>7.5%</a:t>
+              <a:t>7.4%</a:t>
             </a:r>
             <a:endParaRPr lang="en-US" sz="3200" dirty="0"/>
           </a:p>
@@ -6915,7 +6915,7 @@
                 <a:ea typeface="Arial" pitchFamily="34" charset="-122"/>
                 <a:cs typeface="Arial" pitchFamily="34" charset="-120"/>
               </a:rPr>
-              <a:t>120件</a:t>
+              <a:t>122件</a:t>
             </a:r>
             <a:endParaRPr lang="en-US" sz="3200" dirty="0"/>
           </a:p>
@@ -8920,7 +8920,7 @@
                           <a:ea typeface="Arial" pitchFamily="34" charset="-122"/>
                           <a:cs typeface="Arial" pitchFamily="34" charset="-120"/>
                         </a:rPr>
-                        <a:t>58</a:t>
+                        <a:t>60</a:t>
                       </a:r>
                       <a:endParaRPr lang="en-US" sz="900" dirty="0">
                         <a:latin typeface="Arial" charset="0"/>
@@ -8988,7 +8988,7 @@
                           <a:ea typeface="Arial" pitchFamily="34" charset="-122"/>
                           <a:cs typeface="Arial" pitchFamily="34" charset="-120"/>
                         </a:rPr>
-                        <a:t>8.22</a:t>
+                        <a:t>8.25</a:t>
                       </a:r>
                       <a:endParaRPr lang="en-US" sz="900" dirty="0">
                         <a:latin typeface="Arial" charset="0"/>
@@ -9124,7 +9124,7 @@
                           <a:ea typeface="Arial" pitchFamily="34" charset="-122"/>
                           <a:cs typeface="Arial" pitchFamily="34" charset="-120"/>
                         </a:rPr>
-                        <a:t>8.22</a:t>
+                        <a:t>8.25</a:t>
                       </a:r>
                       <a:endParaRPr lang="en-US" sz="900" dirty="0">
                         <a:latin typeface="Arial" charset="0"/>
@@ -10216,7 +10216,7 @@
                 <a:ea typeface="Arial" pitchFamily="34" charset="-122"/>
                 <a:cs typeface="Arial" pitchFamily="34" charset="-120"/>
               </a:rPr>
-              <a:t>96件（80.0%）</a:t>
+              <a:t>98件（80.3%）</a:t>
             </a:r>
             <a:endParaRPr lang="en-US" sz="1100" dirty="0"/>
           </a:p>
@@ -10314,7 +10314,7 @@
                 <a:ea typeface="Arial" pitchFamily="34" charset="-122"/>
                 <a:cs typeface="Arial" pitchFamily="34" charset="-120"/>
               </a:rPr>
-              <a:t>15件（12.5%）</a:t>
+              <a:t>15件（12.3%）</a:t>
             </a:r>
             <a:endParaRPr lang="en-US" sz="1100" dirty="0"/>
           </a:p>
@@ -10412,7 +10412,7 @@
                 <a:ea typeface="Arial" pitchFamily="34" charset="-122"/>
                 <a:cs typeface="Arial" pitchFamily="34" charset="-120"/>
               </a:rPr>
-              <a:t>9件（7.5%）</a:t>
+              <a:t>9件（7.4%）</a:t>
             </a:r>
             <a:endParaRPr lang="en-US" sz="1100" dirty="0"/>
           </a:p>
@@ -11270,7 +11270,7 @@
                 <a:ea typeface="Arial" pitchFamily="34" charset="-122"/>
                 <a:cs typeface="Arial" pitchFamily="34" charset="-120"/>
               </a:rPr>
-              <a:t>とにかくここファミリールームのツインベッドルームはエキストラベッドに増えて4人まで入るのに十分ですね</a:t>
+              <a:t>The room was very comfortable, with a very large bathroom...</a:t>
             </a:r>
             <a:endParaRPr lang="en-US" sz="900" dirty="0"/>
           </a:p>
@@ -11309,7 +11309,7 @@
                 <a:ea typeface="Arial" pitchFamily="34" charset="-122"/>
                 <a:cs typeface="Arial" pitchFamily="34" charset="-120"/>
               </a:rPr>
-              <a:t>「10分舒服的一間酒店設備又齊全非常新淨價錢合分合理，再來也會選擇他 とても快適で、設備も新しく、料金も非常にリーズ...」</a:t>
+              <a:t>「とにかくここファミリールームのツインベッドルームはエキストラベッドに増えて4人まで入るのに十分ですね」</a:t>
             </a:r>
             <a:endParaRPr lang="en-US" sz="900" dirty="0"/>
           </a:p>
@@ -11716,7 +11716,7 @@
                 <a:ea typeface="Arial" pitchFamily="34" charset="-122"/>
                 <a:cs typeface="Arial" pitchFamily="34" charset="-120"/>
               </a:rPr>
-              <a:t>ウエルカムドリンクはコーヒーと紅茶（大好きなティーアース♡）があり2階に自販機、氷、レンジがあり便利でした(⁠◍⁠...</a:t>
+              <a:t>The Thai breakfast was a pleasant surprise</a:t>
             </a:r>
             <a:endParaRPr lang="en-US" sz="900" dirty="0"/>
           </a:p>
@@ -11755,7 +11755,7 @@
                 <a:ea typeface="Arial" pitchFamily="34" charset="-122"/>
                 <a:cs typeface="Arial" pitchFamily="34" charset="-120"/>
               </a:rPr>
-              <a:t>「タイ式の朝食は本当に美味しく、期待以上で、ぜひおすすめします」</a:t>
+              <a:t>「ウエルカムドリンクはコーヒーと紅茶（大好きなティーアース♡）があり2階に自販機、氷、レンジがあり便利でした(⁠◍⁠...」</a:t>
             </a:r>
             <a:endParaRPr lang="en-US" sz="900" dirty="0"/>
           </a:p>
@@ -11939,7 +11939,7 @@
                 <a:ea typeface="Arial" pitchFamily="34" charset="-122"/>
                 <a:cs typeface="Arial" pitchFamily="34" charset="-120"/>
               </a:rPr>
-              <a:t>スペースをゆっくりと使えていいです</a:t>
+              <a:t>The room was very comfortable, with a very large bathroom...</a:t>
             </a:r>
             <a:endParaRPr lang="en-US" sz="900" dirty="0"/>
           </a:p>
@@ -11978,7 +11978,7 @@
                 <a:ea typeface="Arial" pitchFamily="34" charset="-122"/>
                 <a:cs typeface="Arial" pitchFamily="34" charset="-120"/>
               </a:rPr>
-              <a:t>「I booked a room with a queen bed, which I found quite spa...」</a:t>
+              <a:t>「スペースをゆっくりと使えていいです」</a:t>
             </a:r>
             <a:endParaRPr lang="en-US" sz="900" dirty="0"/>
           </a:p>
@@ -12668,7 +12668,7 @@
                           <a:ea typeface="Arial" pitchFamily="34" charset="-122"/>
                           <a:cs typeface="Arial" pitchFamily="34" charset="-120"/>
                         </a:rPr>
-                        <a:t>The location and very comfortable place to stay</a:t>
+                        <a:t>While not the best Thai food I have aver tasted in Tokyo,...</a:t>
                       </a:r>
                       <a:endParaRPr lang="en-US" sz="900" dirty="0">
                         <a:latin typeface="Arial" charset="0"/>
@@ -12736,7 +12736,7 @@
                           <a:ea typeface="Arial" pitchFamily="34" charset="-122"/>
                           <a:cs typeface="Arial" pitchFamily="34" charset="-120"/>
                         </a:rPr>
-                        <a:t>25件</a:t>
+                        <a:t>26件</a:t>
                       </a:r>
                       <a:endParaRPr lang="en-US" sz="900" dirty="0">
                         <a:latin typeface="Arial" charset="0"/>
@@ -12942,7 +12942,7 @@
                           <a:ea typeface="Arial" pitchFamily="34" charset="-122"/>
                           <a:cs typeface="Arial" pitchFamily="34" charset="-120"/>
                         </a:rPr>
-                        <a:t>バスルーム、トイレは小さいですが、そのまま水がよく出て水伝も最近変えたようです</a:t>
+                        <a:t>The room was very comfortable, with a very large bathroom...</a:t>
                       </a:r>
                       <a:endParaRPr lang="en-US" sz="900" dirty="0">
                         <a:latin typeface="Arial" charset="0"/>
@@ -13010,7 +13010,7 @@
                           <a:ea typeface="Arial" pitchFamily="34" charset="-122"/>
                           <a:cs typeface="Arial" pitchFamily="34" charset="-120"/>
                         </a:rPr>
-                        <a:t>21件</a:t>
+                        <a:t>22件</a:t>
                       </a:r>
                       <a:endParaRPr lang="en-US" sz="900" dirty="0">
                         <a:latin typeface="Arial" charset="0"/>

--- a/納品レポート/ホテル別レポート/comfort_roppongi_口コミ分析レポート.pptx
+++ b/納品レポート/ホテル別レポート/comfort_roppongi_口コミ分析レポート.pptx
@@ -217,7 +217,7 @@
                   <c:v>8.67</c:v>
                 </c:pt>
                 <c:pt idx="3">
-                  <c:v>8.25</c:v>
+                  <c:v>8.26</c:v>
                 </c:pt>
                 <c:pt idx="4">
                   <c:v>7.7</c:v>
@@ -566,10 +566,10 @@
               <c:numCache>
                 <c:ptCount val="3"/>
                 <c:pt idx="0">
-                  <c:v>98</c:v>
+                  <c:v>99</c:v>
                 </c:pt>
                 <c:pt idx="1">
-                  <c:v>15</c:v>
+                  <c:v>16</c:v>
                 </c:pt>
                 <c:pt idx="2">
                   <c:v>9</c:v>
@@ -809,7 +809,7 @@
                 <c:formatCode>General</c:formatCode>
                 <c:ptCount val="8"/>
                 <c:pt idx="0">
-                  <c:v>43</c:v>
+                  <c:v>44</c:v>
                 </c:pt>
                 <c:pt idx="1">
                   <c:v>16</c:v>
@@ -818,7 +818,7 @@
                   <c:v>39</c:v>
                 </c:pt>
                 <c:pt idx="3">
-                  <c:v>8</c:v>
+                  <c:v>9</c:v>
                 </c:pt>
                 <c:pt idx="4">
                   <c:v>5</c:v>
@@ -2781,7 +2781,7 @@
                 <a:ea typeface="Arial" pitchFamily="34" charset="-122"/>
                 <a:cs typeface="Arial" pitchFamily="34" charset="-120"/>
               </a:rPr>
-              <a:t>レビュー総数：122件（6サイト）</a:t>
+              <a:t>レビュー総数：124件（6サイト）</a:t>
             </a:r>
             <a:endParaRPr lang="en-US" sz="1000" dirty="0"/>
           </a:p>
@@ -2801,7 +2801,7 @@
                 <a:ea typeface="Arial" pitchFamily="34" charset="-122"/>
                 <a:cs typeface="Arial" pitchFamily="34" charset="-120"/>
               </a:rPr>
-              <a:t>作成日：2026年3月25日</a:t>
+              <a:t>作成日：2026年3月26日</a:t>
             </a:r>
             <a:endParaRPr lang="en-US" sz="1000" dirty="0"/>
           </a:p>
@@ -3621,7 +3621,7 @@
                           <a:ea typeface="Arial" pitchFamily="34" charset="-122"/>
                           <a:cs typeface="Arial" pitchFamily="34" charset="-120"/>
                         </a:rPr>
-                        <a:t>80.3%</a:t>
+                        <a:t>79.8%</a:t>
                       </a:r>
                       <a:endParaRPr lang="en-US" sz="1000" dirty="0">
                         <a:latin typeface="Arial" charset="0"/>
@@ -3895,7 +3895,7 @@
                           <a:ea typeface="Arial" pitchFamily="34" charset="-122"/>
                           <a:cs typeface="Arial" pitchFamily="34" charset="-120"/>
                         </a:rPr>
-                        <a:t>7.4%</a:t>
+                        <a:t>7.3%</a:t>
                       </a:r>
                       <a:endParaRPr lang="en-US" sz="1000" dirty="0">
                         <a:latin typeface="Arial" charset="0"/>
@@ -5481,7 +5481,7 @@
                 <a:ea typeface="Arial" pitchFamily="34" charset="-122"/>
                 <a:cs typeface="Arial" pitchFamily="34" charset="-120"/>
               </a:rPr>
-              <a:t>80.3%</a:t>
+              <a:t>79.8%</a:t>
             </a:r>
             <a:endParaRPr lang="en-US" sz="3200" dirty="0"/>
           </a:p>
@@ -5606,7 +5606,7 @@
                 <a:ea typeface="Arial" pitchFamily="34" charset="-122"/>
                 <a:cs typeface="Arial" pitchFamily="34" charset="-120"/>
               </a:rPr>
-              <a:t>7.4%</a:t>
+              <a:t>7.3%</a:t>
             </a:r>
             <a:endParaRPr lang="en-US" sz="3200" dirty="0"/>
           </a:p>
@@ -5731,7 +5731,7 @@
                 <a:ea typeface="Arial" pitchFamily="34" charset="-122"/>
                 <a:cs typeface="Arial" pitchFamily="34" charset="-120"/>
               </a:rPr>
-              <a:t>122件</a:t>
+              <a:t>124件</a:t>
             </a:r>
             <a:endParaRPr lang="en-US" sz="3200" dirty="0"/>
           </a:p>
@@ -5879,7 +5879,7 @@
                 <a:ea typeface="Arial" pitchFamily="34" charset="-122"/>
                 <a:cs typeface="Arial" pitchFamily="34" charset="-120"/>
               </a:rPr>
-              <a:t>  駅からも近く部屋はベッド４つで添い寝も問題なくゆったりとした部屋で大満足</a:t>
+              <a:t>  Everything was fine clean room staff were amazing great l...</a:t>
             </a:r>
             <a:endParaRPr lang="en-US" sz="1100" dirty="0"/>
           </a:p>
@@ -5919,7 +5919,7 @@
                 <a:ea typeface="Arial" pitchFamily="34" charset="-122"/>
                 <a:cs typeface="Arial" pitchFamily="34" charset="-120"/>
               </a:rPr>
-              <a:t>  完全不親切に気分が悪い</a:t>
+              <a:t>  Everything was fine clean room staff were amazing great l...</a:t>
             </a:r>
             <a:endParaRPr lang="en-US" sz="1100" dirty="0"/>
           </a:p>
@@ -6588,7 +6588,7 @@
             <a:avLst/>
           </a:prstGeom>
           <a:solidFill>
-            <a:srgbClr val="16A34A"/>
+            <a:srgbClr val="D4A843"/>
           </a:solidFill>
           <a:ln/>
         </p:spPr>
@@ -6659,13 +6659,13 @@
             <a:r>
               <a:rPr lang="en-US" sz="3200" b="1" dirty="0">
                 <a:solidFill>
-                  <a:srgbClr val="16A34A"/>
+                  <a:srgbClr val="D4A843"/>
                 </a:solidFill>
                 <a:latin typeface="Arial" pitchFamily="34" charset="0"/>
                 <a:ea typeface="Arial" pitchFamily="34" charset="-122"/>
                 <a:cs typeface="Arial" pitchFamily="34" charset="-120"/>
               </a:rPr>
-              <a:t>80.3%</a:t>
+              <a:t>79.8%</a:t>
             </a:r>
             <a:endParaRPr lang="en-US" sz="3200" dirty="0"/>
           </a:p>
@@ -6790,7 +6790,7 @@
                 <a:ea typeface="Arial" pitchFamily="34" charset="-122"/>
                 <a:cs typeface="Arial" pitchFamily="34" charset="-120"/>
               </a:rPr>
-              <a:t>7.4%</a:t>
+              <a:t>7.3%</a:t>
             </a:r>
             <a:endParaRPr lang="en-US" sz="3200" dirty="0"/>
           </a:p>
@@ -6915,7 +6915,7 @@
                 <a:ea typeface="Arial" pitchFamily="34" charset="-122"/>
                 <a:cs typeface="Arial" pitchFamily="34" charset="-120"/>
               </a:rPr>
-              <a:t>122件</a:t>
+              <a:t>124件</a:t>
             </a:r>
             <a:endParaRPr lang="en-US" sz="3200" dirty="0"/>
           </a:p>
@@ -8920,7 +8920,7 @@
                           <a:ea typeface="Arial" pitchFamily="34" charset="-122"/>
                           <a:cs typeface="Arial" pitchFamily="34" charset="-120"/>
                         </a:rPr>
-                        <a:t>60</a:t>
+                        <a:t>62</a:t>
                       </a:r>
                       <a:endParaRPr lang="en-US" sz="900" dirty="0">
                         <a:latin typeface="Arial" charset="0"/>
@@ -8988,7 +8988,7 @@
                           <a:ea typeface="Arial" pitchFamily="34" charset="-122"/>
                           <a:cs typeface="Arial" pitchFamily="34" charset="-120"/>
                         </a:rPr>
-                        <a:t>8.25</a:t>
+                        <a:t>8.26</a:t>
                       </a:r>
                       <a:endParaRPr lang="en-US" sz="900" dirty="0">
                         <a:latin typeface="Arial" charset="0"/>
@@ -9124,7 +9124,7 @@
                           <a:ea typeface="Arial" pitchFamily="34" charset="-122"/>
                           <a:cs typeface="Arial" pitchFamily="34" charset="-120"/>
                         </a:rPr>
-                        <a:t>8.25</a:t>
+                        <a:t>8.26</a:t>
                       </a:r>
                       <a:endParaRPr lang="en-US" sz="900" dirty="0">
                         <a:latin typeface="Arial" charset="0"/>
@@ -10216,7 +10216,7 @@
                 <a:ea typeface="Arial" pitchFamily="34" charset="-122"/>
                 <a:cs typeface="Arial" pitchFamily="34" charset="-120"/>
               </a:rPr>
-              <a:t>98件（80.3%）</a:t>
+              <a:t>99件（79.8%）</a:t>
             </a:r>
             <a:endParaRPr lang="en-US" sz="1100" dirty="0"/>
           </a:p>
@@ -10314,7 +10314,7 @@
                 <a:ea typeface="Arial" pitchFamily="34" charset="-122"/>
                 <a:cs typeface="Arial" pitchFamily="34" charset="-120"/>
               </a:rPr>
-              <a:t>15件（12.3%）</a:t>
+              <a:t>16件（12.9%）</a:t>
             </a:r>
             <a:endParaRPr lang="en-US" sz="1100" dirty="0"/>
           </a:p>
@@ -10412,7 +10412,7 @@
                 <a:ea typeface="Arial" pitchFamily="34" charset="-122"/>
                 <a:cs typeface="Arial" pitchFamily="34" charset="-120"/>
               </a:rPr>
-              <a:t>9件（7.4%）</a:t>
+              <a:t>9件（7.3%）</a:t>
             </a:r>
             <a:endParaRPr lang="en-US" sz="1100" dirty="0"/>
           </a:p>
@@ -10824,7 +10824,7 @@
                 <a:ea typeface="Arial" pitchFamily="34" charset="-122"/>
                 <a:cs typeface="Arial" pitchFamily="34" charset="-120"/>
               </a:rPr>
-              <a:t>駅からも近く部屋はベッド４つで添い寝も問題なくゆったりとした部屋で大満足</a:t>
+              <a:t>Everything was fine clean room staff were amazing great l...</a:t>
             </a:r>
             <a:endParaRPr lang="en-US" sz="900" dirty="0"/>
           </a:p>
@@ -10863,7 +10863,7 @@
                 <a:ea typeface="Arial" pitchFamily="34" charset="-122"/>
                 <a:cs typeface="Arial" pitchFamily="34" charset="-120"/>
               </a:rPr>
-              <a:t>「The location and very comfortable place to stay」</a:t>
+              <a:t>「駅からも近く部屋はベッド４つで添い寝も問題なくゆったりとした部屋で大満足」</a:t>
             </a:r>
             <a:endParaRPr lang="en-US" sz="900" dirty="0"/>
           </a:p>
@@ -11047,7 +11047,7 @@
                 <a:ea typeface="Arial" pitchFamily="34" charset="-122"/>
                 <a:cs typeface="Arial" pitchFamily="34" charset="-120"/>
               </a:rPr>
-              <a:t>完全不親切に気分が悪い</a:t>
+              <a:t>Everything was fine clean room staff were amazing great l...</a:t>
             </a:r>
             <a:endParaRPr lang="en-US" sz="900" dirty="0"/>
           </a:p>
@@ -11086,7 +11086,7 @@
                 <a:ea typeface="Arial" pitchFamily="34" charset="-122"/>
                 <a:cs typeface="Arial" pitchFamily="34" charset="-120"/>
               </a:rPr>
-              <a:t>「スタッフの対応も良くいい時間を過ごすことができました」</a:t>
+              <a:t>「完全不親切に気分が悪い」</a:t>
             </a:r>
             <a:endParaRPr lang="en-US" sz="900" dirty="0"/>
           </a:p>
@@ -11493,7 +11493,7 @@
                 <a:ea typeface="Arial" pitchFamily="34" charset="-122"/>
                 <a:cs typeface="Arial" pitchFamily="34" charset="-120"/>
               </a:rPr>
-              <a:t>比較的綺麗に保たれるようだが昔のようではないよう</a:t>
+              <a:t>Everything was fine clean room staff were amazing great l...</a:t>
             </a:r>
             <a:endParaRPr lang="en-US" sz="900" dirty="0"/>
           </a:p>
@@ -11532,7 +11532,7 @@
                 <a:ea typeface="Arial" pitchFamily="34" charset="-122"/>
                 <a:cs typeface="Arial" pitchFamily="34" charset="-120"/>
               </a:rPr>
-              <a:t>「とても綺麗なお部屋で満足しました」</a:t>
+              <a:t>「比較的綺麗に保たれるようだが昔のようではないよう」</a:t>
             </a:r>
             <a:endParaRPr lang="en-US" sz="900" dirty="0"/>
           </a:p>
@@ -11716,7 +11716,7 @@
                 <a:ea typeface="Arial" pitchFamily="34" charset="-122"/>
                 <a:cs typeface="Arial" pitchFamily="34" charset="-120"/>
               </a:rPr>
-              <a:t>The Thai breakfast was a pleasant surprise</a:t>
+              <a:t>Everything was fine clean room staff were amazing great l...</a:t>
             </a:r>
             <a:endParaRPr lang="en-US" sz="900" dirty="0"/>
           </a:p>
@@ -11755,7 +11755,7 @@
                 <a:ea typeface="Arial" pitchFamily="34" charset="-122"/>
                 <a:cs typeface="Arial" pitchFamily="34" charset="-120"/>
               </a:rPr>
-              <a:t>「ウエルカムドリンクはコーヒーと紅茶（大好きなティーアース♡）があり2階に自販機、氷、レンジがあり便利でした(⁠◍⁠...」</a:t>
+              <a:t>「The Thai breakfast was a pleasant surprise」</a:t>
             </a:r>
             <a:endParaRPr lang="en-US" sz="900" dirty="0"/>
           </a:p>

--- a/納品レポート/ホテル別レポート/comfort_roppongi_口コミ分析レポート.pptx
+++ b/納品レポート/ホテル別レポート/comfort_roppongi_口コミ分析レポート.pptx
@@ -211,13 +211,13 @@
                   <c:v>10</c:v>
                 </c:pt>
                 <c:pt idx="1">
-                  <c:v>9.75</c:v>
+                  <c:v>9.67</c:v>
                 </c:pt>
                 <c:pt idx="2">
-                  <c:v>8.67</c:v>
+                  <c:v>8.62</c:v>
                 </c:pt>
                 <c:pt idx="3">
-                  <c:v>8.26</c:v>
+                  <c:v>8.23</c:v>
                 </c:pt>
                 <c:pt idx="4">
                   <c:v>7.7</c:v>
@@ -566,10 +566,10 @@
               <c:numCache>
                 <c:ptCount val="3"/>
                 <c:pt idx="0">
-                  <c:v>99</c:v>
+                  <c:v>102</c:v>
                 </c:pt>
                 <c:pt idx="1">
-                  <c:v>16</c:v>
+                  <c:v>17</c:v>
                 </c:pt>
                 <c:pt idx="2">
                   <c:v>9</c:v>
@@ -812,13 +812,13 @@
                   <c:v>44</c:v>
                 </c:pt>
                 <c:pt idx="1">
-                  <c:v>16</c:v>
+                  <c:v>17</c:v>
                 </c:pt>
                 <c:pt idx="2">
-                  <c:v>39</c:v>
+                  <c:v>41</c:v>
                 </c:pt>
                 <c:pt idx="3">
-                  <c:v>9</c:v>
+                  <c:v>10</c:v>
                 </c:pt>
                 <c:pt idx="4">
                   <c:v>5</c:v>
@@ -2781,7 +2781,7 @@
                 <a:ea typeface="Arial" pitchFamily="34" charset="-122"/>
                 <a:cs typeface="Arial" pitchFamily="34" charset="-120"/>
               </a:rPr>
-              <a:t>レビュー総数：124件（6サイト）</a:t>
+              <a:t>レビュー総数：128件（6サイト）</a:t>
             </a:r>
             <a:endParaRPr lang="en-US" sz="1000" dirty="0"/>
           </a:p>
@@ -2801,7 +2801,7 @@
                 <a:ea typeface="Arial" pitchFamily="34" charset="-122"/>
                 <a:cs typeface="Arial" pitchFamily="34" charset="-120"/>
               </a:rPr>
-              <a:t>作成日：2026年3月26日</a:t>
+              <a:t>作成日：2026年3月27日</a:t>
             </a:r>
             <a:endParaRPr lang="en-US" sz="1000" dirty="0"/>
           </a:p>
@@ -3621,7 +3621,7 @@
                           <a:ea typeface="Arial" pitchFamily="34" charset="-122"/>
                           <a:cs typeface="Arial" pitchFamily="34" charset="-120"/>
                         </a:rPr>
-                        <a:t>79.8%</a:t>
+                        <a:t>79.7%</a:t>
                       </a:r>
                       <a:endParaRPr lang="en-US" sz="1000" dirty="0">
                         <a:latin typeface="Arial" charset="0"/>
@@ -3895,7 +3895,7 @@
                           <a:ea typeface="Arial" pitchFamily="34" charset="-122"/>
                           <a:cs typeface="Arial" pitchFamily="34" charset="-120"/>
                         </a:rPr>
-                        <a:t>7.3%</a:t>
+                        <a:t>7.0%</a:t>
                       </a:r>
                       <a:endParaRPr lang="en-US" sz="1000" dirty="0">
                         <a:latin typeface="Arial" charset="0"/>
@@ -5481,7 +5481,7 @@
                 <a:ea typeface="Arial" pitchFamily="34" charset="-122"/>
                 <a:cs typeface="Arial" pitchFamily="34" charset="-120"/>
               </a:rPr>
-              <a:t>79.8%</a:t>
+              <a:t>79.7%</a:t>
             </a:r>
             <a:endParaRPr lang="en-US" sz="3200" dirty="0"/>
           </a:p>
@@ -5606,7 +5606,7 @@
                 <a:ea typeface="Arial" pitchFamily="34" charset="-122"/>
                 <a:cs typeface="Arial" pitchFamily="34" charset="-120"/>
               </a:rPr>
-              <a:t>7.3%</a:t>
+              <a:t>7.0%</a:t>
             </a:r>
             <a:endParaRPr lang="en-US" sz="3200" dirty="0"/>
           </a:p>
@@ -5731,7 +5731,7 @@
                 <a:ea typeface="Arial" pitchFamily="34" charset="-122"/>
                 <a:cs typeface="Arial" pitchFamily="34" charset="-120"/>
               </a:rPr>
-              <a:t>124件</a:t>
+              <a:t>128件</a:t>
             </a:r>
             <a:endParaRPr lang="en-US" sz="3200" dirty="0"/>
           </a:p>
@@ -5879,7 +5879,7 @@
                 <a:ea typeface="Arial" pitchFamily="34" charset="-122"/>
                 <a:cs typeface="Arial" pitchFamily="34" charset="-120"/>
               </a:rPr>
-              <a:t>  Everything was fine clean room staff were amazing great l...</a:t>
+              <a:t>  六本木駅から近い立地で良かったです</a:t>
             </a:r>
             <a:endParaRPr lang="en-US" sz="1100" dirty="0"/>
           </a:p>
@@ -6147,7 +6147,7 @@
                 <a:ea typeface="Arial" pitchFamily="34" charset="-122"/>
                 <a:cs typeface="Arial" pitchFamily="34" charset="-120"/>
               </a:rPr>
-              <a:t>  The room was very comfortable, with a very large bathroom...</a:t>
+              <a:t>  そしてバスルームが少し古い点</a:t>
             </a:r>
             <a:endParaRPr lang="en-US" sz="1100" dirty="0"/>
           </a:p>
@@ -6187,7 +6187,7 @@
                 <a:ea typeface="Arial" pitchFamily="34" charset="-122"/>
                 <a:cs typeface="Arial" pitchFamily="34" charset="-120"/>
               </a:rPr>
-              <a:t>  バスルーム、トイレは小さいですが、そのまま水がよく出て水伝も最近変えたようです</a:t>
+              <a:t>  以前シンガポールで泊まった4つ星ホテルのように、古くて狭いだろうと思っていたのだが、部屋は確かに狭かったものの、必...</a:t>
             </a:r>
             <a:endParaRPr lang="en-US" sz="1100" dirty="0"/>
           </a:p>
@@ -6665,7 +6665,7 @@
                 <a:ea typeface="Arial" pitchFamily="34" charset="-122"/>
                 <a:cs typeface="Arial" pitchFamily="34" charset="-120"/>
               </a:rPr>
-              <a:t>79.8%</a:t>
+              <a:t>79.7%</a:t>
             </a:r>
             <a:endParaRPr lang="en-US" sz="3200" dirty="0"/>
           </a:p>
@@ -6790,7 +6790,7 @@
                 <a:ea typeface="Arial" pitchFamily="34" charset="-122"/>
                 <a:cs typeface="Arial" pitchFamily="34" charset="-120"/>
               </a:rPr>
-              <a:t>7.3%</a:t>
+              <a:t>7.0%</a:t>
             </a:r>
             <a:endParaRPr lang="en-US" sz="3200" dirty="0"/>
           </a:p>
@@ -6915,7 +6915,7 @@
                 <a:ea typeface="Arial" pitchFamily="34" charset="-122"/>
                 <a:cs typeface="Arial" pitchFamily="34" charset="-120"/>
               </a:rPr>
-              <a:t>124件</a:t>
+              <a:t>128件</a:t>
             </a:r>
             <a:endParaRPr lang="en-US" sz="3200" dirty="0"/>
           </a:p>
@@ -8236,7 +8236,7 @@
                           <a:ea typeface="Arial" pitchFamily="34" charset="-122"/>
                           <a:cs typeface="Arial" pitchFamily="34" charset="-120"/>
                         </a:rPr>
-                        <a:t>8</a:t>
+                        <a:t>9</a:t>
                       </a:r>
                       <a:endParaRPr lang="en-US" sz="900" dirty="0">
                         <a:latin typeface="Arial" charset="0"/>
@@ -8304,7 +8304,7 @@
                           <a:ea typeface="Arial" pitchFamily="34" charset="-122"/>
                           <a:cs typeface="Arial" pitchFamily="34" charset="-120"/>
                         </a:rPr>
-                        <a:t>9.75</a:t>
+                        <a:t>9.67</a:t>
                       </a:r>
                       <a:endParaRPr lang="en-US" sz="900" dirty="0">
                         <a:latin typeface="Arial" charset="0"/>
@@ -8440,7 +8440,7 @@
                           <a:ea typeface="Arial" pitchFamily="34" charset="-122"/>
                           <a:cs typeface="Arial" pitchFamily="34" charset="-120"/>
                         </a:rPr>
-                        <a:t>9.75</a:t>
+                        <a:t>9.67</a:t>
                       </a:r>
                       <a:endParaRPr lang="en-US" sz="900" dirty="0">
                         <a:latin typeface="Arial" charset="0"/>
@@ -8578,7 +8578,7 @@
                           <a:ea typeface="Arial" pitchFamily="34" charset="-122"/>
                           <a:cs typeface="Arial" pitchFamily="34" charset="-120"/>
                         </a:rPr>
-                        <a:t>15</a:t>
+                        <a:t>16</a:t>
                       </a:r>
                       <a:endParaRPr lang="en-US" sz="900" dirty="0">
                         <a:latin typeface="Arial" charset="0"/>
@@ -8646,7 +8646,7 @@
                           <a:ea typeface="Arial" pitchFamily="34" charset="-122"/>
                           <a:cs typeface="Arial" pitchFamily="34" charset="-120"/>
                         </a:rPr>
-                        <a:t>4.33</a:t>
+                        <a:t>4.31</a:t>
                       </a:r>
                       <a:endParaRPr lang="en-US" sz="900" dirty="0">
                         <a:latin typeface="Arial" charset="0"/>
@@ -8782,7 +8782,7 @@
                           <a:ea typeface="Arial" pitchFamily="34" charset="-122"/>
                           <a:cs typeface="Arial" pitchFamily="34" charset="-120"/>
                         </a:rPr>
-                        <a:t>8.67</a:t>
+                        <a:t>8.62</a:t>
                       </a:r>
                       <a:endParaRPr lang="en-US" sz="900" dirty="0">
                         <a:latin typeface="Arial" charset="0"/>
@@ -8920,7 +8920,7 @@
                           <a:ea typeface="Arial" pitchFamily="34" charset="-122"/>
                           <a:cs typeface="Arial" pitchFamily="34" charset="-120"/>
                         </a:rPr>
-                        <a:t>62</a:t>
+                        <a:t>64</a:t>
                       </a:r>
                       <a:endParaRPr lang="en-US" sz="900" dirty="0">
                         <a:latin typeface="Arial" charset="0"/>
@@ -8988,7 +8988,7 @@
                           <a:ea typeface="Arial" pitchFamily="34" charset="-122"/>
                           <a:cs typeface="Arial" pitchFamily="34" charset="-120"/>
                         </a:rPr>
-                        <a:t>8.26</a:t>
+                        <a:t>8.23</a:t>
                       </a:r>
                       <a:endParaRPr lang="en-US" sz="900" dirty="0">
                         <a:latin typeface="Arial" charset="0"/>
@@ -9124,7 +9124,7 @@
                           <a:ea typeface="Arial" pitchFamily="34" charset="-122"/>
                           <a:cs typeface="Arial" pitchFamily="34" charset="-120"/>
                         </a:rPr>
-                        <a:t>8.26</a:t>
+                        <a:t>8.23</a:t>
                       </a:r>
                       <a:endParaRPr lang="en-US" sz="900" dirty="0">
                         <a:latin typeface="Arial" charset="0"/>
@@ -10216,7 +10216,7 @@
                 <a:ea typeface="Arial" pitchFamily="34" charset="-122"/>
                 <a:cs typeface="Arial" pitchFamily="34" charset="-120"/>
               </a:rPr>
-              <a:t>99件（79.8%）</a:t>
+              <a:t>102件（79.7%）</a:t>
             </a:r>
             <a:endParaRPr lang="en-US" sz="1100" dirty="0"/>
           </a:p>
@@ -10314,7 +10314,7 @@
                 <a:ea typeface="Arial" pitchFamily="34" charset="-122"/>
                 <a:cs typeface="Arial" pitchFamily="34" charset="-120"/>
               </a:rPr>
-              <a:t>16件（12.9%）</a:t>
+              <a:t>17件（13.3%）</a:t>
             </a:r>
             <a:endParaRPr lang="en-US" sz="1100" dirty="0"/>
           </a:p>
@@ -10412,7 +10412,7 @@
                 <a:ea typeface="Arial" pitchFamily="34" charset="-122"/>
                 <a:cs typeface="Arial" pitchFamily="34" charset="-120"/>
               </a:rPr>
-              <a:t>9件（7.3%）</a:t>
+              <a:t>9件（7.0%）</a:t>
             </a:r>
             <a:endParaRPr lang="en-US" sz="1100" dirty="0"/>
           </a:p>
@@ -10824,7 +10824,7 @@
                 <a:ea typeface="Arial" pitchFamily="34" charset="-122"/>
                 <a:cs typeface="Arial" pitchFamily="34" charset="-120"/>
               </a:rPr>
-              <a:t>Everything was fine clean room staff were amazing great l...</a:t>
+              <a:t>六本木駅から近い立地で良かったです</a:t>
             </a:r>
             <a:endParaRPr lang="en-US" sz="900" dirty="0"/>
           </a:p>
@@ -10863,7 +10863,7 @@
                 <a:ea typeface="Arial" pitchFamily="34" charset="-122"/>
                 <a:cs typeface="Arial" pitchFamily="34" charset="-120"/>
               </a:rPr>
-              <a:t>「駅からも近く部屋はベッド４つで添い寝も問題なくゆったりとした部屋で大満足」</a:t>
+              <a:t>「Everything was fine clean room staff were amazing great l...」</a:t>
             </a:r>
             <a:endParaRPr lang="en-US" sz="900" dirty="0"/>
           </a:p>
@@ -11493,7 +11493,7 @@
                 <a:ea typeface="Arial" pitchFamily="34" charset="-122"/>
                 <a:cs typeface="Arial" pitchFamily="34" charset="-120"/>
               </a:rPr>
-              <a:t>Everything was fine clean room staff were amazing great l...</a:t>
+              <a:t>以前シンガポールで泊まった4つ星ホテルのように、古くて狭いだろうと思っていたのだが、部屋は確かに狭かったものの、必...</a:t>
             </a:r>
             <a:endParaRPr lang="en-US" sz="900" dirty="0"/>
           </a:p>
@@ -11532,7 +11532,7 @@
                 <a:ea typeface="Arial" pitchFamily="34" charset="-122"/>
                 <a:cs typeface="Arial" pitchFamily="34" charset="-120"/>
               </a:rPr>
-              <a:t>「比較的綺麗に保たれるようだが昔のようではないよう」</a:t>
+              <a:t>「Everything was fine clean room staff were amazing great l...」</a:t>
             </a:r>
             <a:endParaRPr lang="en-US" sz="900" dirty="0"/>
           </a:p>
@@ -12942,7 +12942,7 @@
                           <a:ea typeface="Arial" pitchFamily="34" charset="-122"/>
                           <a:cs typeface="Arial" pitchFamily="34" charset="-120"/>
                         </a:rPr>
-                        <a:t>The room was very comfortable, with a very large bathroom...</a:t>
+                        <a:t>そしてバスルームが少し古い点</a:t>
                       </a:r>
                       <a:endParaRPr lang="en-US" sz="900" dirty="0">
                         <a:latin typeface="Arial" charset="0"/>
@@ -13010,7 +13010,7 @@
                           <a:ea typeface="Arial" pitchFamily="34" charset="-122"/>
                           <a:cs typeface="Arial" pitchFamily="34" charset="-120"/>
                         </a:rPr>
-                        <a:t>22件</a:t>
+                        <a:t>23件</a:t>
                       </a:r>
                       <a:endParaRPr lang="en-US" sz="900" dirty="0">
                         <a:latin typeface="Arial" charset="0"/>
@@ -13216,7 +13216,7 @@
                           <a:ea typeface="Arial" pitchFamily="34" charset="-122"/>
                           <a:cs typeface="Arial" pitchFamily="34" charset="-120"/>
                         </a:rPr>
-                        <a:t>バスルーム、トイレは小さいですが、そのまま水がよく出て水伝も最近変えたようです</a:t>
+                        <a:t>以前シンガポールで泊まった4つ星ホテルのように、古くて狭いだろうと思っていたのだが、部屋は確かに狭かったものの、必...</a:t>
                       </a:r>
                       <a:endParaRPr lang="en-US" sz="900" dirty="0">
                         <a:latin typeface="Arial" charset="0"/>
@@ -13284,7 +13284,7 @@
                           <a:ea typeface="Arial" pitchFamily="34" charset="-122"/>
                           <a:cs typeface="Arial" pitchFamily="34" charset="-120"/>
                         </a:rPr>
-                        <a:t>14件</a:t>
+                        <a:t>15件</a:t>
                       </a:r>
                       <a:endParaRPr lang="en-US" sz="900" dirty="0">
                         <a:latin typeface="Arial" charset="0"/>
@@ -13490,7 +13490,7 @@
                           <a:ea typeface="Arial" pitchFamily="34" charset="-122"/>
                           <a:cs typeface="Arial" pitchFamily="34" charset="-120"/>
                         </a:rPr>
-                        <a:t>古いホテルです</a:t>
+                        <a:t>そしてバスルームが少し古い点</a:t>
                       </a:r>
                       <a:endParaRPr lang="en-US" sz="900" dirty="0">
                         <a:latin typeface="Arial" charset="0"/>
@@ -13558,7 +13558,7 @@
                           <a:ea typeface="Arial" pitchFamily="34" charset="-122"/>
                           <a:cs typeface="Arial" pitchFamily="34" charset="-120"/>
                         </a:rPr>
-                        <a:t>10件</a:t>
+                        <a:t>11件</a:t>
                       </a:r>
                       <a:endParaRPr lang="en-US" sz="900" dirty="0">
                         <a:latin typeface="Arial" charset="0"/>
@@ -13764,7 +13764,7 @@
                           <a:ea typeface="Arial" pitchFamily="34" charset="-122"/>
                           <a:cs typeface="Arial" pitchFamily="34" charset="-120"/>
                         </a:rPr>
-                        <a:t>窓の外にすぐに高架道路があるので防音がうまくいきません</a:t>
+                        <a:t>唯一の難点は、窓が開かず、プライバシーフィルムが貼られていたため、外が全く見えなかったことだ</a:t>
                       </a:r>
                       <a:endParaRPr lang="en-US" sz="900" dirty="0">
                         <a:latin typeface="Arial" charset="0"/>
@@ -13832,7 +13832,7 @@
                           <a:ea typeface="Arial" pitchFamily="34" charset="-122"/>
                           <a:cs typeface="Arial" pitchFamily="34" charset="-120"/>
                         </a:rPr>
-                        <a:t>8件</a:t>
+                        <a:t>9件</a:t>
                       </a:r>
                       <a:endParaRPr lang="en-US" sz="900" dirty="0">
                         <a:latin typeface="Arial" charset="0"/>

--- a/納品レポート/ホテル別レポート/comfort_roppongi_口コミ分析レポート.pptx
+++ b/納品レポート/ホテル別レポート/comfort_roppongi_口コミ分析レポート.pptx
@@ -214,13 +214,13 @@
                   <c:v>9.67</c:v>
                 </c:pt>
                 <c:pt idx="2">
-                  <c:v>8.62</c:v>
+                  <c:v>8.47</c:v>
                 </c:pt>
                 <c:pt idx="3">
-                  <c:v>8.23</c:v>
+                  <c:v>8.2</c:v>
                 </c:pt>
                 <c:pt idx="4">
-                  <c:v>7.7</c:v>
+                  <c:v>7.71</c:v>
                 </c:pt>
                 <c:pt idx="5">
                   <c:v>7.4</c:v>
@@ -566,10 +566,10 @@
               <c:numCache>
                 <c:ptCount val="3"/>
                 <c:pt idx="0">
-                  <c:v>102</c:v>
+                  <c:v>103</c:v>
                 </c:pt>
                 <c:pt idx="1">
-                  <c:v>17</c:v>
+                  <c:v>19</c:v>
                 </c:pt>
                 <c:pt idx="2">
                   <c:v>9</c:v>
@@ -815,13 +815,13 @@
                   <c:v>17</c:v>
                 </c:pt>
                 <c:pt idx="2">
-                  <c:v>41</c:v>
+                  <c:v>42</c:v>
                 </c:pt>
                 <c:pt idx="3">
                   <c:v>10</c:v>
                 </c:pt>
                 <c:pt idx="4">
-                  <c:v>5</c:v>
+                  <c:v>7</c:v>
                 </c:pt>
                 <c:pt idx="5">
                   <c:v>2</c:v>
@@ -2781,7 +2781,7 @@
                 <a:ea typeface="Arial" pitchFamily="34" charset="-122"/>
                 <a:cs typeface="Arial" pitchFamily="34" charset="-120"/>
               </a:rPr>
-              <a:t>レビュー総数：128件（6サイト）</a:t>
+              <a:t>レビュー総数：131件（6サイト）</a:t>
             </a:r>
             <a:endParaRPr lang="en-US" sz="1000" dirty="0"/>
           </a:p>
@@ -2801,7 +2801,7 @@
                 <a:ea typeface="Arial" pitchFamily="34" charset="-122"/>
                 <a:cs typeface="Arial" pitchFamily="34" charset="-120"/>
               </a:rPr>
-              <a:t>作成日：2026年3月27日</a:t>
+              <a:t>作成日：2026年3月28日</a:t>
             </a:r>
             <a:endParaRPr lang="en-US" sz="1000" dirty="0"/>
           </a:p>
@@ -3347,7 +3347,7 @@
                           <a:ea typeface="Arial" pitchFamily="34" charset="-122"/>
                           <a:cs typeface="Arial" pitchFamily="34" charset="-120"/>
                         </a:rPr>
-                        <a:t>8.23点</a:t>
+                        <a:t>8.19点</a:t>
                       </a:r>
                       <a:endParaRPr lang="en-US" sz="1000" dirty="0">
                         <a:latin typeface="Arial" charset="0"/>
@@ -3621,7 +3621,7 @@
                           <a:ea typeface="Arial" pitchFamily="34" charset="-122"/>
                           <a:cs typeface="Arial" pitchFamily="34" charset="-120"/>
                         </a:rPr>
-                        <a:t>79.7%</a:t>
+                        <a:t>78.6%</a:t>
                       </a:r>
                       <a:endParaRPr lang="en-US" sz="1000" dirty="0">
                         <a:latin typeface="Arial" charset="0"/>
@@ -3689,7 +3689,7 @@
                           <a:ea typeface="Arial" pitchFamily="34" charset="-122"/>
                           <a:cs typeface="Arial" pitchFamily="34" charset="-120"/>
                         </a:rPr>
-                        <a:t>85%以上</a:t>
+                        <a:t>84%以上</a:t>
                       </a:r>
                       <a:endParaRPr lang="en-US" sz="1000" dirty="0">
                         <a:latin typeface="Arial" charset="0"/>
@@ -3895,7 +3895,7 @@
                           <a:ea typeface="Arial" pitchFamily="34" charset="-122"/>
                           <a:cs typeface="Arial" pitchFamily="34" charset="-120"/>
                         </a:rPr>
-                        <a:t>7.0%</a:t>
+                        <a:t>6.9%</a:t>
                       </a:r>
                       <a:endParaRPr lang="en-US" sz="1000" dirty="0">
                         <a:latin typeface="Arial" charset="0"/>
@@ -5356,7 +5356,7 @@
                 <a:ea typeface="Arial" pitchFamily="34" charset="-122"/>
                 <a:cs typeface="Arial" pitchFamily="34" charset="-120"/>
               </a:rPr>
-              <a:t>8.23</a:t>
+              <a:t>8.19</a:t>
             </a:r>
             <a:endParaRPr lang="en-US" sz="3200" dirty="0"/>
           </a:p>
@@ -5481,7 +5481,7 @@
                 <a:ea typeface="Arial" pitchFamily="34" charset="-122"/>
                 <a:cs typeface="Arial" pitchFamily="34" charset="-120"/>
               </a:rPr>
-              <a:t>79.7%</a:t>
+              <a:t>78.6%</a:t>
             </a:r>
             <a:endParaRPr lang="en-US" sz="3200" dirty="0"/>
           </a:p>
@@ -5606,7 +5606,7 @@
                 <a:ea typeface="Arial" pitchFamily="34" charset="-122"/>
                 <a:cs typeface="Arial" pitchFamily="34" charset="-120"/>
               </a:rPr>
-              <a:t>7.0%</a:t>
+              <a:t>6.9%</a:t>
             </a:r>
             <a:endParaRPr lang="en-US" sz="3200" dirty="0"/>
           </a:p>
@@ -5731,7 +5731,7 @@
                 <a:ea typeface="Arial" pitchFamily="34" charset="-122"/>
                 <a:cs typeface="Arial" pitchFamily="34" charset="-120"/>
               </a:rPr>
-              <a:t>128件</a:t>
+              <a:t>131件</a:t>
             </a:r>
             <a:endParaRPr lang="en-US" sz="3200" dirty="0"/>
           </a:p>
@@ -5879,7 +5879,7 @@
                 <a:ea typeface="Arial" pitchFamily="34" charset="-122"/>
                 <a:cs typeface="Arial" pitchFamily="34" charset="-120"/>
               </a:rPr>
-              <a:t>  六本木駅から近い立地で良かったです</a:t>
+              <a:t>  立地が良いので付近に来ればまた利用します</a:t>
             </a:r>
             <a:endParaRPr lang="en-US" sz="1100" dirty="0"/>
           </a:p>
@@ -5919,7 +5919,7 @@
                 <a:ea typeface="Arial" pitchFamily="34" charset="-122"/>
                 <a:cs typeface="Arial" pitchFamily="34" charset="-120"/>
               </a:rPr>
-              <a:t>  Everything was fine clean room staff were amazing great l...</a:t>
+              <a:t>  방이 넓고 위치가 좋음 직원 대응이 별로임 従業員の対応はあまりありません</a:t>
             </a:r>
             <a:endParaRPr lang="en-US" sz="1100" dirty="0"/>
           </a:p>
@@ -6540,7 +6540,7 @@
                 <a:ea typeface="Arial" pitchFamily="34" charset="-122"/>
                 <a:cs typeface="Arial" pitchFamily="34" charset="-120"/>
               </a:rPr>
-              <a:t>8.23</a:t>
+              <a:t>8.19</a:t>
             </a:r>
             <a:endParaRPr lang="en-US" sz="3200" dirty="0"/>
           </a:p>
@@ -6665,7 +6665,7 @@
                 <a:ea typeface="Arial" pitchFamily="34" charset="-122"/>
                 <a:cs typeface="Arial" pitchFamily="34" charset="-120"/>
               </a:rPr>
-              <a:t>79.7%</a:t>
+              <a:t>78.6%</a:t>
             </a:r>
             <a:endParaRPr lang="en-US" sz="3200" dirty="0"/>
           </a:p>
@@ -6790,7 +6790,7 @@
                 <a:ea typeface="Arial" pitchFamily="34" charset="-122"/>
                 <a:cs typeface="Arial" pitchFamily="34" charset="-120"/>
               </a:rPr>
-              <a:t>7.0%</a:t>
+              <a:t>6.9%</a:t>
             </a:r>
             <a:endParaRPr lang="en-US" sz="3200" dirty="0"/>
           </a:p>
@@ -6915,7 +6915,7 @@
                 <a:ea typeface="Arial" pitchFamily="34" charset="-122"/>
                 <a:cs typeface="Arial" pitchFamily="34" charset="-120"/>
               </a:rPr>
-              <a:t>128件</a:t>
+              <a:t>131件</a:t>
             </a:r>
             <a:endParaRPr lang="en-US" sz="3200" dirty="0"/>
           </a:p>
@@ -8578,7 +8578,7 @@
                           <a:ea typeface="Arial" pitchFamily="34" charset="-122"/>
                           <a:cs typeface="Arial" pitchFamily="34" charset="-120"/>
                         </a:rPr>
-                        <a:t>16</a:t>
+                        <a:t>17</a:t>
                       </a:r>
                       <a:endParaRPr lang="en-US" sz="900" dirty="0">
                         <a:latin typeface="Arial" charset="0"/>
@@ -8646,7 +8646,7 @@
                           <a:ea typeface="Arial" pitchFamily="34" charset="-122"/>
                           <a:cs typeface="Arial" pitchFamily="34" charset="-120"/>
                         </a:rPr>
-                        <a:t>4.31</a:t>
+                        <a:t>4.24</a:t>
                       </a:r>
                       <a:endParaRPr lang="en-US" sz="900" dirty="0">
                         <a:latin typeface="Arial" charset="0"/>
@@ -8782,7 +8782,7 @@
                           <a:ea typeface="Arial" pitchFamily="34" charset="-122"/>
                           <a:cs typeface="Arial" pitchFamily="34" charset="-120"/>
                         </a:rPr>
-                        <a:t>8.62</a:t>
+                        <a:t>8.47</a:t>
                       </a:r>
                       <a:endParaRPr lang="en-US" sz="900" dirty="0">
                         <a:latin typeface="Arial" charset="0"/>
@@ -8920,7 +8920,7 @@
                           <a:ea typeface="Arial" pitchFamily="34" charset="-122"/>
                           <a:cs typeface="Arial" pitchFamily="34" charset="-120"/>
                         </a:rPr>
-                        <a:t>64</a:t>
+                        <a:t>65</a:t>
                       </a:r>
                       <a:endParaRPr lang="en-US" sz="900" dirty="0">
                         <a:latin typeface="Arial" charset="0"/>
@@ -8988,7 +8988,7 @@
                           <a:ea typeface="Arial" pitchFamily="34" charset="-122"/>
                           <a:cs typeface="Arial" pitchFamily="34" charset="-120"/>
                         </a:rPr>
-                        <a:t>8.23</a:t>
+                        <a:t>8.2</a:t>
                       </a:r>
                       <a:endParaRPr lang="en-US" sz="900" dirty="0">
                         <a:latin typeface="Arial" charset="0"/>
@@ -9124,7 +9124,7 @@
                           <a:ea typeface="Arial" pitchFamily="34" charset="-122"/>
                           <a:cs typeface="Arial" pitchFamily="34" charset="-120"/>
                         </a:rPr>
-                        <a:t>8.23</a:t>
+                        <a:t>8.2</a:t>
                       </a:r>
                       <a:endParaRPr lang="en-US" sz="900" dirty="0">
                         <a:latin typeface="Arial" charset="0"/>
@@ -9262,7 +9262,7 @@
                           <a:ea typeface="Arial" pitchFamily="34" charset="-122"/>
                           <a:cs typeface="Arial" pitchFamily="34" charset="-120"/>
                         </a:rPr>
-                        <a:t>33</a:t>
+                        <a:t>34</a:t>
                       </a:r>
                       <a:endParaRPr lang="en-US" sz="900" dirty="0">
                         <a:latin typeface="Arial" charset="0"/>
@@ -9466,7 +9466,7 @@
                           <a:ea typeface="Arial" pitchFamily="34" charset="-122"/>
                           <a:cs typeface="Arial" pitchFamily="34" charset="-120"/>
                         </a:rPr>
-                        <a:t>7.7</a:t>
+                        <a:t>7.71</a:t>
                       </a:r>
                       <a:endParaRPr lang="en-US" sz="900" dirty="0">
                         <a:latin typeface="Arial" charset="0"/>
@@ -10216,7 +10216,7 @@
                 <a:ea typeface="Arial" pitchFamily="34" charset="-122"/>
                 <a:cs typeface="Arial" pitchFamily="34" charset="-120"/>
               </a:rPr>
-              <a:t>102件（79.7%）</a:t>
+              <a:t>103件（78.6%）</a:t>
             </a:r>
             <a:endParaRPr lang="en-US" sz="1100" dirty="0"/>
           </a:p>
@@ -10314,7 +10314,7 @@
                 <a:ea typeface="Arial" pitchFamily="34" charset="-122"/>
                 <a:cs typeface="Arial" pitchFamily="34" charset="-120"/>
               </a:rPr>
-              <a:t>17件（13.3%）</a:t>
+              <a:t>19件（14.5%）</a:t>
             </a:r>
             <a:endParaRPr lang="en-US" sz="1100" dirty="0"/>
           </a:p>
@@ -10412,7 +10412,7 @@
                 <a:ea typeface="Arial" pitchFamily="34" charset="-122"/>
                 <a:cs typeface="Arial" pitchFamily="34" charset="-120"/>
               </a:rPr>
-              <a:t>9件（7.0%）</a:t>
+              <a:t>9件（6.9%）</a:t>
             </a:r>
             <a:endParaRPr lang="en-US" sz="1100" dirty="0"/>
           </a:p>
@@ -10824,7 +10824,7 @@
                 <a:ea typeface="Arial" pitchFamily="34" charset="-122"/>
                 <a:cs typeface="Arial" pitchFamily="34" charset="-120"/>
               </a:rPr>
-              <a:t>六本木駅から近い立地で良かったです</a:t>
+              <a:t>立地が良いので付近に来ればまた利用します</a:t>
             </a:r>
             <a:endParaRPr lang="en-US" sz="900" dirty="0"/>
           </a:p>
@@ -10839,6 +10839,675 @@
         <p:spPr>
           <a:xfrm>
             <a:off x="594360" y="1828800"/>
+            <a:ext cx="2377440" cy="640080"/>
+          </a:xfrm>
+          <a:prstGeom prst="rect">
+            <a:avLst/>
+          </a:prstGeom>
+          <a:noFill/>
+          <a:ln/>
+        </p:spPr>
+        <p:txBody>
+          <a:bodyPr wrap="square" lIns="0" tIns="0" rIns="0" bIns="0" rtlCol="0" anchor="ctr"/>
+          <a:lstStyle/>
+          <a:p>
+            <a:pPr indent="0" marL="0">
+              <a:buNone/>
+            </a:pPr>
+            <a:r>
+              <a:rPr lang="en-US" sz="900" i="1" dirty="0">
+                <a:solidFill>
+                  <a:srgbClr val="3B7DD8"/>
+                </a:solidFill>
+                <a:latin typeface="Arial" pitchFamily="34" charset="0"/>
+                <a:ea typeface="Arial" pitchFamily="34" charset="-122"/>
+                <a:cs typeface="Arial" pitchFamily="34" charset="-120"/>
+              </a:rPr>
+              <a:t>「六本木駅から近い立地で良かったです」</a:t>
+            </a:r>
+            <a:endParaRPr lang="en-US" sz="900" dirty="0"/>
+          </a:p>
+        </p:txBody>
+      </p:sp>
+      <p:sp>
+        <p:nvSpPr>
+          <p:cNvPr id="12" name="Shape 10"/>
+          <p:cNvSpPr/>
+          <p:nvPr/>
+        </p:nvSpPr>
+        <p:spPr>
+          <a:xfrm>
+            <a:off x="3291840" y="1051560"/>
+            <a:ext cx="2651760" cy="1600200"/>
+          </a:xfrm>
+          <a:prstGeom prst="rect">
+            <a:avLst/>
+          </a:prstGeom>
+          <a:solidFill>
+            <a:srgbClr val="FFFFFF"/>
+          </a:solidFill>
+          <a:ln/>
+          <a:effectLst>
+            <a:outerShdw sx="100000" sy="100000" kx="0" ky="0" algn="bl" rotWithShape="0" blurRad="50800" dist="25400" dir="8100000">
+              <a:srgbClr val="000000">
+                <a:alpha val="10000"/>
+              </a:srgbClr>
+            </a:outerShdw>
+          </a:effectLst>
+        </p:spPr>
+      </p:sp>
+      <p:sp>
+        <p:nvSpPr>
+          <p:cNvPr id="13" name="Shape 11"/>
+          <p:cNvSpPr/>
+          <p:nvPr/>
+        </p:nvSpPr>
+        <p:spPr>
+          <a:xfrm>
+            <a:off x="3291840" y="1051560"/>
+            <a:ext cx="54864" cy="1600200"/>
+          </a:xfrm>
+          <a:prstGeom prst="rect">
+            <a:avLst/>
+          </a:prstGeom>
+          <a:solidFill>
+            <a:srgbClr val="16A34A"/>
+          </a:solidFill>
+          <a:ln/>
+        </p:spPr>
+      </p:sp>
+      <p:sp>
+        <p:nvSpPr>
+          <p:cNvPr id="14" name="Shape 12"/>
+          <p:cNvSpPr/>
+          <p:nvPr/>
+        </p:nvSpPr>
+        <p:spPr>
+          <a:xfrm>
+            <a:off x="5120640" y="1124712"/>
+            <a:ext cx="658368" cy="228600"/>
+          </a:xfrm>
+          <a:prstGeom prst="rect">
+            <a:avLst/>
+          </a:prstGeom>
+          <a:solidFill>
+            <a:srgbClr val="DCFCE7"/>
+          </a:solidFill>
+          <a:ln/>
+        </p:spPr>
+      </p:sp>
+      <p:sp>
+        <p:nvSpPr>
+          <p:cNvPr id="15" name="Text 13"/>
+          <p:cNvSpPr/>
+          <p:nvPr/>
+        </p:nvSpPr>
+        <p:spPr>
+          <a:xfrm>
+            <a:off x="5120640" y="1124712"/>
+            <a:ext cx="658368" cy="228600"/>
+          </a:xfrm>
+          <a:prstGeom prst="rect">
+            <a:avLst/>
+          </a:prstGeom>
+          <a:noFill/>
+          <a:ln/>
+        </p:spPr>
+        <p:txBody>
+          <a:bodyPr wrap="square" lIns="0" tIns="0" rIns="0" bIns="0" rtlCol="0" anchor="ctr"/>
+          <a:lstStyle/>
+          <a:p>
+            <a:pPr algn="ctr" indent="0" marL="0">
+              <a:buNone/>
+            </a:pPr>
+            <a:r>
+              <a:rPr lang="en-US" sz="900" b="1" dirty="0">
+                <a:solidFill>
+                  <a:srgbClr val="16A34A"/>
+                </a:solidFill>
+                <a:latin typeface="Arial" pitchFamily="34" charset="0"/>
+                <a:ea typeface="Arial" pitchFamily="34" charset="-122"/>
+                <a:cs typeface="Arial" pitchFamily="34" charset="-120"/>
+              </a:rPr>
+              <a:t>20件+</a:t>
+            </a:r>
+            <a:endParaRPr lang="en-US" sz="900" dirty="0"/>
+          </a:p>
+        </p:txBody>
+      </p:sp>
+      <p:sp>
+        <p:nvSpPr>
+          <p:cNvPr id="16" name="Text 14"/>
+          <p:cNvSpPr/>
+          <p:nvPr/>
+        </p:nvSpPr>
+        <p:spPr>
+          <a:xfrm>
+            <a:off x="3429000" y="1124712"/>
+            <a:ext cx="1645920" cy="274320"/>
+          </a:xfrm>
+          <a:prstGeom prst="rect">
+            <a:avLst/>
+          </a:prstGeom>
+          <a:noFill/>
+          <a:ln/>
+        </p:spPr>
+        <p:txBody>
+          <a:bodyPr wrap="square" lIns="0" tIns="0" rIns="0" bIns="0" rtlCol="0" anchor="ctr"/>
+          <a:lstStyle/>
+          <a:p>
+            <a:pPr indent="0" marL="0">
+              <a:buNone/>
+            </a:pPr>
+            <a:r>
+              <a:rPr lang="en-US" sz="1300" b="1" dirty="0">
+                <a:solidFill>
+                  <a:srgbClr val="1A2744"/>
+                </a:solidFill>
+                <a:latin typeface="Arial" pitchFamily="34" charset="0"/>
+                <a:ea typeface="Arial" pitchFamily="34" charset="-122"/>
+                <a:cs typeface="Arial" pitchFamily="34" charset="-120"/>
+              </a:rPr>
+              <a:t>スタッフの対応</a:t>
+            </a:r>
+            <a:endParaRPr lang="en-US" sz="1300" dirty="0"/>
+          </a:p>
+        </p:txBody>
+      </p:sp>
+      <p:sp>
+        <p:nvSpPr>
+          <p:cNvPr id="17" name="Text 15"/>
+          <p:cNvSpPr/>
+          <p:nvPr/>
+        </p:nvSpPr>
+        <p:spPr>
+          <a:xfrm>
+            <a:off x="3429000" y="1417320"/>
+            <a:ext cx="2377440" cy="365760"/>
+          </a:xfrm>
+          <a:prstGeom prst="rect">
+            <a:avLst/>
+          </a:prstGeom>
+          <a:noFill/>
+          <a:ln/>
+        </p:spPr>
+        <p:txBody>
+          <a:bodyPr wrap="square" lIns="0" tIns="0" rIns="0" bIns="0" rtlCol="0" anchor="ctr"/>
+          <a:lstStyle/>
+          <a:p>
+            <a:pPr indent="0" marL="0">
+              <a:buNone/>
+            </a:pPr>
+            <a:r>
+              <a:rPr lang="en-US" sz="900" dirty="0">
+                <a:solidFill>
+                  <a:srgbClr val="64748B"/>
+                </a:solidFill>
+                <a:latin typeface="Arial" pitchFamily="34" charset="0"/>
+                <a:ea typeface="Arial" pitchFamily="34" charset="-122"/>
+                <a:cs typeface="Arial" pitchFamily="34" charset="-120"/>
+              </a:rPr>
+              <a:t>방이 넓고 위치가 좋음 직원 대응이 별로임 従業員の対応はあまりありません</a:t>
+            </a:r>
+            <a:endParaRPr lang="en-US" sz="900" dirty="0"/>
+          </a:p>
+        </p:txBody>
+      </p:sp>
+      <p:sp>
+        <p:nvSpPr>
+          <p:cNvPr id="18" name="Text 16"/>
+          <p:cNvSpPr/>
+          <p:nvPr/>
+        </p:nvSpPr>
+        <p:spPr>
+          <a:xfrm>
+            <a:off x="3429000" y="1828800"/>
+            <a:ext cx="2377440" cy="640080"/>
+          </a:xfrm>
+          <a:prstGeom prst="rect">
+            <a:avLst/>
+          </a:prstGeom>
+          <a:noFill/>
+          <a:ln/>
+        </p:spPr>
+        <p:txBody>
+          <a:bodyPr wrap="square" lIns="0" tIns="0" rIns="0" bIns="0" rtlCol="0" anchor="ctr"/>
+          <a:lstStyle/>
+          <a:p>
+            <a:pPr indent="0" marL="0">
+              <a:buNone/>
+            </a:pPr>
+            <a:r>
+              <a:rPr lang="en-US" sz="900" i="1" dirty="0">
+                <a:solidFill>
+                  <a:srgbClr val="3B7DD8"/>
+                </a:solidFill>
+                <a:latin typeface="Arial" pitchFamily="34" charset="0"/>
+                <a:ea typeface="Arial" pitchFamily="34" charset="-122"/>
+                <a:cs typeface="Arial" pitchFamily="34" charset="-120"/>
+              </a:rPr>
+              <a:t>「従業員さんの接客は良いです」</a:t>
+            </a:r>
+            <a:endParaRPr lang="en-US" sz="900" dirty="0"/>
+          </a:p>
+        </p:txBody>
+      </p:sp>
+      <p:sp>
+        <p:nvSpPr>
+          <p:cNvPr id="19" name="Shape 17"/>
+          <p:cNvSpPr/>
+          <p:nvPr/>
+        </p:nvSpPr>
+        <p:spPr>
+          <a:xfrm>
+            <a:off x="6126480" y="1051560"/>
+            <a:ext cx="2651760" cy="1600200"/>
+          </a:xfrm>
+          <a:prstGeom prst="rect">
+            <a:avLst/>
+          </a:prstGeom>
+          <a:solidFill>
+            <a:srgbClr val="FFFFFF"/>
+          </a:solidFill>
+          <a:ln/>
+          <a:effectLst>
+            <a:outerShdw sx="100000" sy="100000" kx="0" ky="0" algn="bl" rotWithShape="0" blurRad="50800" dist="25400" dir="8100000">
+              <a:srgbClr val="000000">
+                <a:alpha val="10000"/>
+              </a:srgbClr>
+            </a:outerShdw>
+          </a:effectLst>
+        </p:spPr>
+      </p:sp>
+      <p:sp>
+        <p:nvSpPr>
+          <p:cNvPr id="20" name="Shape 18"/>
+          <p:cNvSpPr/>
+          <p:nvPr/>
+        </p:nvSpPr>
+        <p:spPr>
+          <a:xfrm>
+            <a:off x="6126480" y="1051560"/>
+            <a:ext cx="54864" cy="1600200"/>
+          </a:xfrm>
+          <a:prstGeom prst="rect">
+            <a:avLst/>
+          </a:prstGeom>
+          <a:solidFill>
+            <a:srgbClr val="16A34A"/>
+          </a:solidFill>
+          <a:ln/>
+        </p:spPr>
+      </p:sp>
+      <p:sp>
+        <p:nvSpPr>
+          <p:cNvPr id="21" name="Shape 19"/>
+          <p:cNvSpPr/>
+          <p:nvPr/>
+        </p:nvSpPr>
+        <p:spPr>
+          <a:xfrm>
+            <a:off x="7955280" y="1124712"/>
+            <a:ext cx="658368" cy="228600"/>
+          </a:xfrm>
+          <a:prstGeom prst="rect">
+            <a:avLst/>
+          </a:prstGeom>
+          <a:solidFill>
+            <a:srgbClr val="DCFCE7"/>
+          </a:solidFill>
+          <a:ln/>
+        </p:spPr>
+      </p:sp>
+      <p:sp>
+        <p:nvSpPr>
+          <p:cNvPr id="22" name="Text 20"/>
+          <p:cNvSpPr/>
+          <p:nvPr/>
+        </p:nvSpPr>
+        <p:spPr>
+          <a:xfrm>
+            <a:off x="7955280" y="1124712"/>
+            <a:ext cx="658368" cy="228600"/>
+          </a:xfrm>
+          <a:prstGeom prst="rect">
+            <a:avLst/>
+          </a:prstGeom>
+          <a:noFill/>
+          <a:ln/>
+        </p:spPr>
+        <p:txBody>
+          <a:bodyPr wrap="square" lIns="0" tIns="0" rIns="0" bIns="0" rtlCol="0" anchor="ctr"/>
+          <a:lstStyle/>
+          <a:p>
+            <a:pPr algn="ctr" indent="0" marL="0">
+              <a:buNone/>
+            </a:pPr>
+            <a:r>
+              <a:rPr lang="en-US" sz="900" b="1" dirty="0">
+                <a:solidFill>
+                  <a:srgbClr val="16A34A"/>
+                </a:solidFill>
+                <a:latin typeface="Arial" pitchFamily="34" charset="0"/>
+                <a:ea typeface="Arial" pitchFamily="34" charset="-122"/>
+                <a:cs typeface="Arial" pitchFamily="34" charset="-120"/>
+              </a:rPr>
+              <a:t>20件+</a:t>
+            </a:r>
+            <a:endParaRPr lang="en-US" sz="900" dirty="0"/>
+          </a:p>
+        </p:txBody>
+      </p:sp>
+      <p:sp>
+        <p:nvSpPr>
+          <p:cNvPr id="23" name="Text 21"/>
+          <p:cNvSpPr/>
+          <p:nvPr/>
+        </p:nvSpPr>
+        <p:spPr>
+          <a:xfrm>
+            <a:off x="6263640" y="1124712"/>
+            <a:ext cx="1645920" cy="274320"/>
+          </a:xfrm>
+          <a:prstGeom prst="rect">
+            <a:avLst/>
+          </a:prstGeom>
+          <a:noFill/>
+          <a:ln/>
+        </p:spPr>
+        <p:txBody>
+          <a:bodyPr wrap="square" lIns="0" tIns="0" rIns="0" bIns="0" rtlCol="0" anchor="ctr"/>
+          <a:lstStyle/>
+          <a:p>
+            <a:pPr indent="0" marL="0">
+              <a:buNone/>
+            </a:pPr>
+            <a:r>
+              <a:rPr lang="en-US" sz="1300" b="1" dirty="0">
+                <a:solidFill>
+                  <a:srgbClr val="1A2744"/>
+                </a:solidFill>
+                <a:latin typeface="Arial" pitchFamily="34" charset="0"/>
+                <a:ea typeface="Arial" pitchFamily="34" charset="-122"/>
+                <a:cs typeface="Arial" pitchFamily="34" charset="-120"/>
+              </a:rPr>
+              <a:t>快適さ・設備</a:t>
+            </a:r>
+            <a:endParaRPr lang="en-US" sz="1300" dirty="0"/>
+          </a:p>
+        </p:txBody>
+      </p:sp>
+      <p:sp>
+        <p:nvSpPr>
+          <p:cNvPr id="24" name="Text 22"/>
+          <p:cNvSpPr/>
+          <p:nvPr/>
+        </p:nvSpPr>
+        <p:spPr>
+          <a:xfrm>
+            <a:off x="6263640" y="1417320"/>
+            <a:ext cx="2377440" cy="365760"/>
+          </a:xfrm>
+          <a:prstGeom prst="rect">
+            <a:avLst/>
+          </a:prstGeom>
+          <a:noFill/>
+          <a:ln/>
+        </p:spPr>
+        <p:txBody>
+          <a:bodyPr wrap="square" lIns="0" tIns="0" rIns="0" bIns="0" rtlCol="0" anchor="ctr"/>
+          <a:lstStyle/>
+          <a:p>
+            <a:pPr indent="0" marL="0">
+              <a:buNone/>
+            </a:pPr>
+            <a:r>
+              <a:rPr lang="en-US" sz="900" dirty="0">
+                <a:solidFill>
+                  <a:srgbClr val="64748B"/>
+                </a:solidFill>
+                <a:latin typeface="Arial" pitchFamily="34" charset="0"/>
+                <a:ea typeface="Arial" pitchFamily="34" charset="-122"/>
+                <a:cs typeface="Arial" pitchFamily="34" charset="-120"/>
+              </a:rPr>
+              <a:t>The room was very comfortable, with a very large bathroom...</a:t>
+            </a:r>
+            <a:endParaRPr lang="en-US" sz="900" dirty="0"/>
+          </a:p>
+        </p:txBody>
+      </p:sp>
+      <p:sp>
+        <p:nvSpPr>
+          <p:cNvPr id="25" name="Text 23"/>
+          <p:cNvSpPr/>
+          <p:nvPr/>
+        </p:nvSpPr>
+        <p:spPr>
+          <a:xfrm>
+            <a:off x="6263640" y="1828800"/>
+            <a:ext cx="2377440" cy="640080"/>
+          </a:xfrm>
+          <a:prstGeom prst="rect">
+            <a:avLst/>
+          </a:prstGeom>
+          <a:noFill/>
+          <a:ln/>
+        </p:spPr>
+        <p:txBody>
+          <a:bodyPr wrap="square" lIns="0" tIns="0" rIns="0" bIns="0" rtlCol="0" anchor="ctr"/>
+          <a:lstStyle/>
+          <a:p>
+            <a:pPr indent="0" marL="0">
+              <a:buNone/>
+            </a:pPr>
+            <a:r>
+              <a:rPr lang="en-US" sz="900" i="1" dirty="0">
+                <a:solidFill>
+                  <a:srgbClr val="3B7DD8"/>
+                </a:solidFill>
+                <a:latin typeface="Arial" pitchFamily="34" charset="0"/>
+                <a:ea typeface="Arial" pitchFamily="34" charset="-122"/>
+                <a:cs typeface="Arial" pitchFamily="34" charset="-120"/>
+              </a:rPr>
+              <a:t>「とにかくここファミリールームのツインベッドルームはエキストラベッドに増えて4人まで入るのに十分ですね」</a:t>
+            </a:r>
+            <a:endParaRPr lang="en-US" sz="900" dirty="0"/>
+          </a:p>
+        </p:txBody>
+      </p:sp>
+      <p:sp>
+        <p:nvSpPr>
+          <p:cNvPr id="26" name="Shape 24"/>
+          <p:cNvSpPr/>
+          <p:nvPr/>
+        </p:nvSpPr>
+        <p:spPr>
+          <a:xfrm>
+            <a:off x="457200" y="2880360"/>
+            <a:ext cx="2651760" cy="1600200"/>
+          </a:xfrm>
+          <a:prstGeom prst="rect">
+            <a:avLst/>
+          </a:prstGeom>
+          <a:solidFill>
+            <a:srgbClr val="FFFFFF"/>
+          </a:solidFill>
+          <a:ln/>
+          <a:effectLst>
+            <a:outerShdw sx="100000" sy="100000" kx="0" ky="0" algn="bl" rotWithShape="0" blurRad="50800" dist="25400" dir="8100000">
+              <a:srgbClr val="000000">
+                <a:alpha val="10000"/>
+              </a:srgbClr>
+            </a:outerShdw>
+          </a:effectLst>
+        </p:spPr>
+      </p:sp>
+      <p:sp>
+        <p:nvSpPr>
+          <p:cNvPr id="27" name="Shape 25"/>
+          <p:cNvSpPr/>
+          <p:nvPr/>
+        </p:nvSpPr>
+        <p:spPr>
+          <a:xfrm>
+            <a:off x="457200" y="2880360"/>
+            <a:ext cx="54864" cy="1600200"/>
+          </a:xfrm>
+          <a:prstGeom prst="rect">
+            <a:avLst/>
+          </a:prstGeom>
+          <a:solidFill>
+            <a:srgbClr val="16A34A"/>
+          </a:solidFill>
+          <a:ln/>
+        </p:spPr>
+      </p:sp>
+      <p:sp>
+        <p:nvSpPr>
+          <p:cNvPr id="28" name="Shape 26"/>
+          <p:cNvSpPr/>
+          <p:nvPr/>
+        </p:nvSpPr>
+        <p:spPr>
+          <a:xfrm>
+            <a:off x="2286000" y="2953512"/>
+            <a:ext cx="658368" cy="228600"/>
+          </a:xfrm>
+          <a:prstGeom prst="rect">
+            <a:avLst/>
+          </a:prstGeom>
+          <a:solidFill>
+            <a:srgbClr val="DCFCE7"/>
+          </a:solidFill>
+          <a:ln/>
+        </p:spPr>
+      </p:sp>
+      <p:sp>
+        <p:nvSpPr>
+          <p:cNvPr id="29" name="Text 27"/>
+          <p:cNvSpPr/>
+          <p:nvPr/>
+        </p:nvSpPr>
+        <p:spPr>
+          <a:xfrm>
+            <a:off x="2286000" y="2953512"/>
+            <a:ext cx="658368" cy="228600"/>
+          </a:xfrm>
+          <a:prstGeom prst="rect">
+            <a:avLst/>
+          </a:prstGeom>
+          <a:noFill/>
+          <a:ln/>
+        </p:spPr>
+        <p:txBody>
+          <a:bodyPr wrap="square" lIns="0" tIns="0" rIns="0" bIns="0" rtlCol="0" anchor="ctr"/>
+          <a:lstStyle/>
+          <a:p>
+            <a:pPr algn="ctr" indent="0" marL="0">
+              <a:buNone/>
+            </a:pPr>
+            <a:r>
+              <a:rPr lang="en-US" sz="900" b="1" dirty="0">
+                <a:solidFill>
+                  <a:srgbClr val="16A34A"/>
+                </a:solidFill>
+                <a:latin typeface="Arial" pitchFamily="34" charset="0"/>
+                <a:ea typeface="Arial" pitchFamily="34" charset="-122"/>
+                <a:cs typeface="Arial" pitchFamily="34" charset="-120"/>
+              </a:rPr>
+              <a:t>20件+</a:t>
+            </a:r>
+            <a:endParaRPr lang="en-US" sz="900" dirty="0"/>
+          </a:p>
+        </p:txBody>
+      </p:sp>
+      <p:sp>
+        <p:nvSpPr>
+          <p:cNvPr id="30" name="Text 28"/>
+          <p:cNvSpPr/>
+          <p:nvPr/>
+        </p:nvSpPr>
+        <p:spPr>
+          <a:xfrm>
+            <a:off x="594360" y="2953512"/>
+            <a:ext cx="1645920" cy="274320"/>
+          </a:xfrm>
+          <a:prstGeom prst="rect">
+            <a:avLst/>
+          </a:prstGeom>
+          <a:noFill/>
+          <a:ln/>
+        </p:spPr>
+        <p:txBody>
+          <a:bodyPr wrap="square" lIns="0" tIns="0" rIns="0" bIns="0" rtlCol="0" anchor="ctr"/>
+          <a:lstStyle/>
+          <a:p>
+            <a:pPr indent="0" marL="0">
+              <a:buNone/>
+            </a:pPr>
+            <a:r>
+              <a:rPr lang="en-US" sz="1300" b="1" dirty="0">
+                <a:solidFill>
+                  <a:srgbClr val="1A2744"/>
+                </a:solidFill>
+                <a:latin typeface="Arial" pitchFamily="34" charset="0"/>
+                <a:ea typeface="Arial" pitchFamily="34" charset="-122"/>
+                <a:cs typeface="Arial" pitchFamily="34" charset="-120"/>
+              </a:rPr>
+              <a:t>清潔さ・清掃</a:t>
+            </a:r>
+            <a:endParaRPr lang="en-US" sz="1300" dirty="0"/>
+          </a:p>
+        </p:txBody>
+      </p:sp>
+      <p:sp>
+        <p:nvSpPr>
+          <p:cNvPr id="31" name="Text 29"/>
+          <p:cNvSpPr/>
+          <p:nvPr/>
+        </p:nvSpPr>
+        <p:spPr>
+          <a:xfrm>
+            <a:off x="594360" y="3246120"/>
+            <a:ext cx="2377440" cy="365760"/>
+          </a:xfrm>
+          <a:prstGeom prst="rect">
+            <a:avLst/>
+          </a:prstGeom>
+          <a:noFill/>
+          <a:ln/>
+        </p:spPr>
+        <p:txBody>
+          <a:bodyPr wrap="square" lIns="0" tIns="0" rIns="0" bIns="0" rtlCol="0" anchor="ctr"/>
+          <a:lstStyle/>
+          <a:p>
+            <a:pPr indent="0" marL="0">
+              <a:buNone/>
+            </a:pPr>
+            <a:r>
+              <a:rPr lang="en-US" sz="900" dirty="0">
+                <a:solidFill>
+                  <a:srgbClr val="64748B"/>
+                </a:solidFill>
+                <a:latin typeface="Arial" pitchFamily="34" charset="0"/>
+                <a:ea typeface="Arial" pitchFamily="34" charset="-122"/>
+                <a:cs typeface="Arial" pitchFamily="34" charset="-120"/>
+              </a:rPr>
+              <a:t>以前シンガポールで泊まった4つ星ホテルのように、古くて狭いだろうと思っていたのだが、部屋は確かに狭かったものの、必...</a:t>
+            </a:r>
+            <a:endParaRPr lang="en-US" sz="900" dirty="0"/>
+          </a:p>
+        </p:txBody>
+      </p:sp>
+      <p:sp>
+        <p:nvSpPr>
+          <p:cNvPr id="32" name="Text 30"/>
+          <p:cNvSpPr/>
+          <p:nvPr/>
+        </p:nvSpPr>
+        <p:spPr>
+          <a:xfrm>
+            <a:off x="594360" y="3657600"/>
             <a:ext cx="2377440" cy="640080"/>
           </a:xfrm>
           <a:prstGeom prst="rect">
@@ -10871,13 +11540,13 @@
       </p:sp>
       <p:sp>
         <p:nvSpPr>
-          <p:cNvPr id="12" name="Shape 10"/>
-          <p:cNvSpPr/>
-          <p:nvPr/>
-        </p:nvSpPr>
-        <p:spPr>
-          <a:xfrm>
-            <a:off x="3291840" y="1051560"/>
+          <p:cNvPr id="33" name="Shape 31"/>
+          <p:cNvSpPr/>
+          <p:nvPr/>
+        </p:nvSpPr>
+        <p:spPr>
+          <a:xfrm>
+            <a:off x="3291840" y="2880360"/>
             <a:ext cx="2651760" cy="1600200"/>
           </a:xfrm>
           <a:prstGeom prst="rect">
@@ -10898,13 +11567,13 @@
       </p:sp>
       <p:sp>
         <p:nvSpPr>
-          <p:cNvPr id="13" name="Shape 11"/>
-          <p:cNvSpPr/>
-          <p:nvPr/>
-        </p:nvSpPr>
-        <p:spPr>
-          <a:xfrm>
-            <a:off x="3291840" y="1051560"/>
+          <p:cNvPr id="34" name="Shape 32"/>
+          <p:cNvSpPr/>
+          <p:nvPr/>
+        </p:nvSpPr>
+        <p:spPr>
+          <a:xfrm>
+            <a:off x="3291840" y="2880360"/>
             <a:ext cx="54864" cy="1600200"/>
           </a:xfrm>
           <a:prstGeom prst="rect">
@@ -10918,13 +11587,13 @@
       </p:sp>
       <p:sp>
         <p:nvSpPr>
-          <p:cNvPr id="14" name="Shape 12"/>
-          <p:cNvSpPr/>
-          <p:nvPr/>
-        </p:nvSpPr>
-        <p:spPr>
-          <a:xfrm>
-            <a:off x="5120640" y="1124712"/>
+          <p:cNvPr id="35" name="Shape 33"/>
+          <p:cNvSpPr/>
+          <p:nvPr/>
+        </p:nvSpPr>
+        <p:spPr>
+          <a:xfrm>
+            <a:off x="5120640" y="2953512"/>
             <a:ext cx="658368" cy="228600"/>
           </a:xfrm>
           <a:prstGeom prst="rect">
@@ -10938,13 +11607,13 @@
       </p:sp>
       <p:sp>
         <p:nvSpPr>
-          <p:cNvPr id="15" name="Text 13"/>
-          <p:cNvSpPr/>
-          <p:nvPr/>
-        </p:nvSpPr>
-        <p:spPr>
-          <a:xfrm>
-            <a:off x="5120640" y="1124712"/>
+          <p:cNvPr id="36" name="Text 34"/>
+          <p:cNvSpPr/>
+          <p:nvPr/>
+        </p:nvSpPr>
+        <p:spPr>
+          <a:xfrm>
+            <a:off x="5120640" y="2953512"/>
             <a:ext cx="658368" cy="228600"/>
           </a:xfrm>
           <a:prstGeom prst="rect">
@@ -10977,675 +11646,6 @@
       </p:sp>
       <p:sp>
         <p:nvSpPr>
-          <p:cNvPr id="16" name="Text 14"/>
-          <p:cNvSpPr/>
-          <p:nvPr/>
-        </p:nvSpPr>
-        <p:spPr>
-          <a:xfrm>
-            <a:off x="3429000" y="1124712"/>
-            <a:ext cx="1645920" cy="274320"/>
-          </a:xfrm>
-          <a:prstGeom prst="rect">
-            <a:avLst/>
-          </a:prstGeom>
-          <a:noFill/>
-          <a:ln/>
-        </p:spPr>
-        <p:txBody>
-          <a:bodyPr wrap="square" lIns="0" tIns="0" rIns="0" bIns="0" rtlCol="0" anchor="ctr"/>
-          <a:lstStyle/>
-          <a:p>
-            <a:pPr indent="0" marL="0">
-              <a:buNone/>
-            </a:pPr>
-            <a:r>
-              <a:rPr lang="en-US" sz="1300" b="1" dirty="0">
-                <a:solidFill>
-                  <a:srgbClr val="1A2744"/>
-                </a:solidFill>
-                <a:latin typeface="Arial" pitchFamily="34" charset="0"/>
-                <a:ea typeface="Arial" pitchFamily="34" charset="-122"/>
-                <a:cs typeface="Arial" pitchFamily="34" charset="-120"/>
-              </a:rPr>
-              <a:t>スタッフの対応</a:t>
-            </a:r>
-            <a:endParaRPr lang="en-US" sz="1300" dirty="0"/>
-          </a:p>
-        </p:txBody>
-      </p:sp>
-      <p:sp>
-        <p:nvSpPr>
-          <p:cNvPr id="17" name="Text 15"/>
-          <p:cNvSpPr/>
-          <p:nvPr/>
-        </p:nvSpPr>
-        <p:spPr>
-          <a:xfrm>
-            <a:off x="3429000" y="1417320"/>
-            <a:ext cx="2377440" cy="365760"/>
-          </a:xfrm>
-          <a:prstGeom prst="rect">
-            <a:avLst/>
-          </a:prstGeom>
-          <a:noFill/>
-          <a:ln/>
-        </p:spPr>
-        <p:txBody>
-          <a:bodyPr wrap="square" lIns="0" tIns="0" rIns="0" bIns="0" rtlCol="0" anchor="ctr"/>
-          <a:lstStyle/>
-          <a:p>
-            <a:pPr indent="0" marL="0">
-              <a:buNone/>
-            </a:pPr>
-            <a:r>
-              <a:rPr lang="en-US" sz="900" dirty="0">
-                <a:solidFill>
-                  <a:srgbClr val="64748B"/>
-                </a:solidFill>
-                <a:latin typeface="Arial" pitchFamily="34" charset="0"/>
-                <a:ea typeface="Arial" pitchFamily="34" charset="-122"/>
-                <a:cs typeface="Arial" pitchFamily="34" charset="-120"/>
-              </a:rPr>
-              <a:t>Everything was fine clean room staff were amazing great l...</a:t>
-            </a:r>
-            <a:endParaRPr lang="en-US" sz="900" dirty="0"/>
-          </a:p>
-        </p:txBody>
-      </p:sp>
-      <p:sp>
-        <p:nvSpPr>
-          <p:cNvPr id="18" name="Text 16"/>
-          <p:cNvSpPr/>
-          <p:nvPr/>
-        </p:nvSpPr>
-        <p:spPr>
-          <a:xfrm>
-            <a:off x="3429000" y="1828800"/>
-            <a:ext cx="2377440" cy="640080"/>
-          </a:xfrm>
-          <a:prstGeom prst="rect">
-            <a:avLst/>
-          </a:prstGeom>
-          <a:noFill/>
-          <a:ln/>
-        </p:spPr>
-        <p:txBody>
-          <a:bodyPr wrap="square" lIns="0" tIns="0" rIns="0" bIns="0" rtlCol="0" anchor="ctr"/>
-          <a:lstStyle/>
-          <a:p>
-            <a:pPr indent="0" marL="0">
-              <a:buNone/>
-            </a:pPr>
-            <a:r>
-              <a:rPr lang="en-US" sz="900" i="1" dirty="0">
-                <a:solidFill>
-                  <a:srgbClr val="3B7DD8"/>
-                </a:solidFill>
-                <a:latin typeface="Arial" pitchFamily="34" charset="0"/>
-                <a:ea typeface="Arial" pitchFamily="34" charset="-122"/>
-                <a:cs typeface="Arial" pitchFamily="34" charset="-120"/>
-              </a:rPr>
-              <a:t>「完全不親切に気分が悪い」</a:t>
-            </a:r>
-            <a:endParaRPr lang="en-US" sz="900" dirty="0"/>
-          </a:p>
-        </p:txBody>
-      </p:sp>
-      <p:sp>
-        <p:nvSpPr>
-          <p:cNvPr id="19" name="Shape 17"/>
-          <p:cNvSpPr/>
-          <p:nvPr/>
-        </p:nvSpPr>
-        <p:spPr>
-          <a:xfrm>
-            <a:off x="6126480" y="1051560"/>
-            <a:ext cx="2651760" cy="1600200"/>
-          </a:xfrm>
-          <a:prstGeom prst="rect">
-            <a:avLst/>
-          </a:prstGeom>
-          <a:solidFill>
-            <a:srgbClr val="FFFFFF"/>
-          </a:solidFill>
-          <a:ln/>
-          <a:effectLst>
-            <a:outerShdw sx="100000" sy="100000" kx="0" ky="0" algn="bl" rotWithShape="0" blurRad="50800" dist="25400" dir="8100000">
-              <a:srgbClr val="000000">
-                <a:alpha val="10000"/>
-              </a:srgbClr>
-            </a:outerShdw>
-          </a:effectLst>
-        </p:spPr>
-      </p:sp>
-      <p:sp>
-        <p:nvSpPr>
-          <p:cNvPr id="20" name="Shape 18"/>
-          <p:cNvSpPr/>
-          <p:nvPr/>
-        </p:nvSpPr>
-        <p:spPr>
-          <a:xfrm>
-            <a:off x="6126480" y="1051560"/>
-            <a:ext cx="54864" cy="1600200"/>
-          </a:xfrm>
-          <a:prstGeom prst="rect">
-            <a:avLst/>
-          </a:prstGeom>
-          <a:solidFill>
-            <a:srgbClr val="16A34A"/>
-          </a:solidFill>
-          <a:ln/>
-        </p:spPr>
-      </p:sp>
-      <p:sp>
-        <p:nvSpPr>
-          <p:cNvPr id="21" name="Shape 19"/>
-          <p:cNvSpPr/>
-          <p:nvPr/>
-        </p:nvSpPr>
-        <p:spPr>
-          <a:xfrm>
-            <a:off x="7955280" y="1124712"/>
-            <a:ext cx="658368" cy="228600"/>
-          </a:xfrm>
-          <a:prstGeom prst="rect">
-            <a:avLst/>
-          </a:prstGeom>
-          <a:solidFill>
-            <a:srgbClr val="DCFCE7"/>
-          </a:solidFill>
-          <a:ln/>
-        </p:spPr>
-      </p:sp>
-      <p:sp>
-        <p:nvSpPr>
-          <p:cNvPr id="22" name="Text 20"/>
-          <p:cNvSpPr/>
-          <p:nvPr/>
-        </p:nvSpPr>
-        <p:spPr>
-          <a:xfrm>
-            <a:off x="7955280" y="1124712"/>
-            <a:ext cx="658368" cy="228600"/>
-          </a:xfrm>
-          <a:prstGeom prst="rect">
-            <a:avLst/>
-          </a:prstGeom>
-          <a:noFill/>
-          <a:ln/>
-        </p:spPr>
-        <p:txBody>
-          <a:bodyPr wrap="square" lIns="0" tIns="0" rIns="0" bIns="0" rtlCol="0" anchor="ctr"/>
-          <a:lstStyle/>
-          <a:p>
-            <a:pPr algn="ctr" indent="0" marL="0">
-              <a:buNone/>
-            </a:pPr>
-            <a:r>
-              <a:rPr lang="en-US" sz="900" b="1" dirty="0">
-                <a:solidFill>
-                  <a:srgbClr val="16A34A"/>
-                </a:solidFill>
-                <a:latin typeface="Arial" pitchFamily="34" charset="0"/>
-                <a:ea typeface="Arial" pitchFamily="34" charset="-122"/>
-                <a:cs typeface="Arial" pitchFamily="34" charset="-120"/>
-              </a:rPr>
-              <a:t>20件+</a:t>
-            </a:r>
-            <a:endParaRPr lang="en-US" sz="900" dirty="0"/>
-          </a:p>
-        </p:txBody>
-      </p:sp>
-      <p:sp>
-        <p:nvSpPr>
-          <p:cNvPr id="23" name="Text 21"/>
-          <p:cNvSpPr/>
-          <p:nvPr/>
-        </p:nvSpPr>
-        <p:spPr>
-          <a:xfrm>
-            <a:off x="6263640" y="1124712"/>
-            <a:ext cx="1645920" cy="274320"/>
-          </a:xfrm>
-          <a:prstGeom prst="rect">
-            <a:avLst/>
-          </a:prstGeom>
-          <a:noFill/>
-          <a:ln/>
-        </p:spPr>
-        <p:txBody>
-          <a:bodyPr wrap="square" lIns="0" tIns="0" rIns="0" bIns="0" rtlCol="0" anchor="ctr"/>
-          <a:lstStyle/>
-          <a:p>
-            <a:pPr indent="0" marL="0">
-              <a:buNone/>
-            </a:pPr>
-            <a:r>
-              <a:rPr lang="en-US" sz="1300" b="1" dirty="0">
-                <a:solidFill>
-                  <a:srgbClr val="1A2744"/>
-                </a:solidFill>
-                <a:latin typeface="Arial" pitchFamily="34" charset="0"/>
-                <a:ea typeface="Arial" pitchFamily="34" charset="-122"/>
-                <a:cs typeface="Arial" pitchFamily="34" charset="-120"/>
-              </a:rPr>
-              <a:t>快適さ・設備</a:t>
-            </a:r>
-            <a:endParaRPr lang="en-US" sz="1300" dirty="0"/>
-          </a:p>
-        </p:txBody>
-      </p:sp>
-      <p:sp>
-        <p:nvSpPr>
-          <p:cNvPr id="24" name="Text 22"/>
-          <p:cNvSpPr/>
-          <p:nvPr/>
-        </p:nvSpPr>
-        <p:spPr>
-          <a:xfrm>
-            <a:off x="6263640" y="1417320"/>
-            <a:ext cx="2377440" cy="365760"/>
-          </a:xfrm>
-          <a:prstGeom prst="rect">
-            <a:avLst/>
-          </a:prstGeom>
-          <a:noFill/>
-          <a:ln/>
-        </p:spPr>
-        <p:txBody>
-          <a:bodyPr wrap="square" lIns="0" tIns="0" rIns="0" bIns="0" rtlCol="0" anchor="ctr"/>
-          <a:lstStyle/>
-          <a:p>
-            <a:pPr indent="0" marL="0">
-              <a:buNone/>
-            </a:pPr>
-            <a:r>
-              <a:rPr lang="en-US" sz="900" dirty="0">
-                <a:solidFill>
-                  <a:srgbClr val="64748B"/>
-                </a:solidFill>
-                <a:latin typeface="Arial" pitchFamily="34" charset="0"/>
-                <a:ea typeface="Arial" pitchFamily="34" charset="-122"/>
-                <a:cs typeface="Arial" pitchFamily="34" charset="-120"/>
-              </a:rPr>
-              <a:t>The room was very comfortable, with a very large bathroom...</a:t>
-            </a:r>
-            <a:endParaRPr lang="en-US" sz="900" dirty="0"/>
-          </a:p>
-        </p:txBody>
-      </p:sp>
-      <p:sp>
-        <p:nvSpPr>
-          <p:cNvPr id="25" name="Text 23"/>
-          <p:cNvSpPr/>
-          <p:nvPr/>
-        </p:nvSpPr>
-        <p:spPr>
-          <a:xfrm>
-            <a:off x="6263640" y="1828800"/>
-            <a:ext cx="2377440" cy="640080"/>
-          </a:xfrm>
-          <a:prstGeom prst="rect">
-            <a:avLst/>
-          </a:prstGeom>
-          <a:noFill/>
-          <a:ln/>
-        </p:spPr>
-        <p:txBody>
-          <a:bodyPr wrap="square" lIns="0" tIns="0" rIns="0" bIns="0" rtlCol="0" anchor="ctr"/>
-          <a:lstStyle/>
-          <a:p>
-            <a:pPr indent="0" marL="0">
-              <a:buNone/>
-            </a:pPr>
-            <a:r>
-              <a:rPr lang="en-US" sz="900" i="1" dirty="0">
-                <a:solidFill>
-                  <a:srgbClr val="3B7DD8"/>
-                </a:solidFill>
-                <a:latin typeface="Arial" pitchFamily="34" charset="0"/>
-                <a:ea typeface="Arial" pitchFamily="34" charset="-122"/>
-                <a:cs typeface="Arial" pitchFamily="34" charset="-120"/>
-              </a:rPr>
-              <a:t>「とにかくここファミリールームのツインベッドルームはエキストラベッドに増えて4人まで入るのに十分ですね」</a:t>
-            </a:r>
-            <a:endParaRPr lang="en-US" sz="900" dirty="0"/>
-          </a:p>
-        </p:txBody>
-      </p:sp>
-      <p:sp>
-        <p:nvSpPr>
-          <p:cNvPr id="26" name="Shape 24"/>
-          <p:cNvSpPr/>
-          <p:nvPr/>
-        </p:nvSpPr>
-        <p:spPr>
-          <a:xfrm>
-            <a:off x="457200" y="2880360"/>
-            <a:ext cx="2651760" cy="1600200"/>
-          </a:xfrm>
-          <a:prstGeom prst="rect">
-            <a:avLst/>
-          </a:prstGeom>
-          <a:solidFill>
-            <a:srgbClr val="FFFFFF"/>
-          </a:solidFill>
-          <a:ln/>
-          <a:effectLst>
-            <a:outerShdw sx="100000" sy="100000" kx="0" ky="0" algn="bl" rotWithShape="0" blurRad="50800" dist="25400" dir="8100000">
-              <a:srgbClr val="000000">
-                <a:alpha val="10000"/>
-              </a:srgbClr>
-            </a:outerShdw>
-          </a:effectLst>
-        </p:spPr>
-      </p:sp>
-      <p:sp>
-        <p:nvSpPr>
-          <p:cNvPr id="27" name="Shape 25"/>
-          <p:cNvSpPr/>
-          <p:nvPr/>
-        </p:nvSpPr>
-        <p:spPr>
-          <a:xfrm>
-            <a:off x="457200" y="2880360"/>
-            <a:ext cx="54864" cy="1600200"/>
-          </a:xfrm>
-          <a:prstGeom prst="rect">
-            <a:avLst/>
-          </a:prstGeom>
-          <a:solidFill>
-            <a:srgbClr val="16A34A"/>
-          </a:solidFill>
-          <a:ln/>
-        </p:spPr>
-      </p:sp>
-      <p:sp>
-        <p:nvSpPr>
-          <p:cNvPr id="28" name="Shape 26"/>
-          <p:cNvSpPr/>
-          <p:nvPr/>
-        </p:nvSpPr>
-        <p:spPr>
-          <a:xfrm>
-            <a:off x="2286000" y="2953512"/>
-            <a:ext cx="658368" cy="228600"/>
-          </a:xfrm>
-          <a:prstGeom prst="rect">
-            <a:avLst/>
-          </a:prstGeom>
-          <a:solidFill>
-            <a:srgbClr val="DCFCE7"/>
-          </a:solidFill>
-          <a:ln/>
-        </p:spPr>
-      </p:sp>
-      <p:sp>
-        <p:nvSpPr>
-          <p:cNvPr id="29" name="Text 27"/>
-          <p:cNvSpPr/>
-          <p:nvPr/>
-        </p:nvSpPr>
-        <p:spPr>
-          <a:xfrm>
-            <a:off x="2286000" y="2953512"/>
-            <a:ext cx="658368" cy="228600"/>
-          </a:xfrm>
-          <a:prstGeom prst="rect">
-            <a:avLst/>
-          </a:prstGeom>
-          <a:noFill/>
-          <a:ln/>
-        </p:spPr>
-        <p:txBody>
-          <a:bodyPr wrap="square" lIns="0" tIns="0" rIns="0" bIns="0" rtlCol="0" anchor="ctr"/>
-          <a:lstStyle/>
-          <a:p>
-            <a:pPr algn="ctr" indent="0" marL="0">
-              <a:buNone/>
-            </a:pPr>
-            <a:r>
-              <a:rPr lang="en-US" sz="900" b="1" dirty="0">
-                <a:solidFill>
-                  <a:srgbClr val="16A34A"/>
-                </a:solidFill>
-                <a:latin typeface="Arial" pitchFamily="34" charset="0"/>
-                <a:ea typeface="Arial" pitchFamily="34" charset="-122"/>
-                <a:cs typeface="Arial" pitchFamily="34" charset="-120"/>
-              </a:rPr>
-              <a:t>20件+</a:t>
-            </a:r>
-            <a:endParaRPr lang="en-US" sz="900" dirty="0"/>
-          </a:p>
-        </p:txBody>
-      </p:sp>
-      <p:sp>
-        <p:nvSpPr>
-          <p:cNvPr id="30" name="Text 28"/>
-          <p:cNvSpPr/>
-          <p:nvPr/>
-        </p:nvSpPr>
-        <p:spPr>
-          <a:xfrm>
-            <a:off x="594360" y="2953512"/>
-            <a:ext cx="1645920" cy="274320"/>
-          </a:xfrm>
-          <a:prstGeom prst="rect">
-            <a:avLst/>
-          </a:prstGeom>
-          <a:noFill/>
-          <a:ln/>
-        </p:spPr>
-        <p:txBody>
-          <a:bodyPr wrap="square" lIns="0" tIns="0" rIns="0" bIns="0" rtlCol="0" anchor="ctr"/>
-          <a:lstStyle/>
-          <a:p>
-            <a:pPr indent="0" marL="0">
-              <a:buNone/>
-            </a:pPr>
-            <a:r>
-              <a:rPr lang="en-US" sz="1300" b="1" dirty="0">
-                <a:solidFill>
-                  <a:srgbClr val="1A2744"/>
-                </a:solidFill>
-                <a:latin typeface="Arial" pitchFamily="34" charset="0"/>
-                <a:ea typeface="Arial" pitchFamily="34" charset="-122"/>
-                <a:cs typeface="Arial" pitchFamily="34" charset="-120"/>
-              </a:rPr>
-              <a:t>清潔さ・清掃</a:t>
-            </a:r>
-            <a:endParaRPr lang="en-US" sz="1300" dirty="0"/>
-          </a:p>
-        </p:txBody>
-      </p:sp>
-      <p:sp>
-        <p:nvSpPr>
-          <p:cNvPr id="31" name="Text 29"/>
-          <p:cNvSpPr/>
-          <p:nvPr/>
-        </p:nvSpPr>
-        <p:spPr>
-          <a:xfrm>
-            <a:off x="594360" y="3246120"/>
-            <a:ext cx="2377440" cy="365760"/>
-          </a:xfrm>
-          <a:prstGeom prst="rect">
-            <a:avLst/>
-          </a:prstGeom>
-          <a:noFill/>
-          <a:ln/>
-        </p:spPr>
-        <p:txBody>
-          <a:bodyPr wrap="square" lIns="0" tIns="0" rIns="0" bIns="0" rtlCol="0" anchor="ctr"/>
-          <a:lstStyle/>
-          <a:p>
-            <a:pPr indent="0" marL="0">
-              <a:buNone/>
-            </a:pPr>
-            <a:r>
-              <a:rPr lang="en-US" sz="900" dirty="0">
-                <a:solidFill>
-                  <a:srgbClr val="64748B"/>
-                </a:solidFill>
-                <a:latin typeface="Arial" pitchFamily="34" charset="0"/>
-                <a:ea typeface="Arial" pitchFamily="34" charset="-122"/>
-                <a:cs typeface="Arial" pitchFamily="34" charset="-120"/>
-              </a:rPr>
-              <a:t>以前シンガポールで泊まった4つ星ホテルのように、古くて狭いだろうと思っていたのだが、部屋は確かに狭かったものの、必...</a:t>
-            </a:r>
-            <a:endParaRPr lang="en-US" sz="900" dirty="0"/>
-          </a:p>
-        </p:txBody>
-      </p:sp>
-      <p:sp>
-        <p:nvSpPr>
-          <p:cNvPr id="32" name="Text 30"/>
-          <p:cNvSpPr/>
-          <p:nvPr/>
-        </p:nvSpPr>
-        <p:spPr>
-          <a:xfrm>
-            <a:off x="594360" y="3657600"/>
-            <a:ext cx="2377440" cy="640080"/>
-          </a:xfrm>
-          <a:prstGeom prst="rect">
-            <a:avLst/>
-          </a:prstGeom>
-          <a:noFill/>
-          <a:ln/>
-        </p:spPr>
-        <p:txBody>
-          <a:bodyPr wrap="square" lIns="0" tIns="0" rIns="0" bIns="0" rtlCol="0" anchor="ctr"/>
-          <a:lstStyle/>
-          <a:p>
-            <a:pPr indent="0" marL="0">
-              <a:buNone/>
-            </a:pPr>
-            <a:r>
-              <a:rPr lang="en-US" sz="900" i="1" dirty="0">
-                <a:solidFill>
-                  <a:srgbClr val="3B7DD8"/>
-                </a:solidFill>
-                <a:latin typeface="Arial" pitchFamily="34" charset="0"/>
-                <a:ea typeface="Arial" pitchFamily="34" charset="-122"/>
-                <a:cs typeface="Arial" pitchFamily="34" charset="-120"/>
-              </a:rPr>
-              <a:t>「Everything was fine clean room staff were amazing great l...」</a:t>
-            </a:r>
-            <a:endParaRPr lang="en-US" sz="900" dirty="0"/>
-          </a:p>
-        </p:txBody>
-      </p:sp>
-      <p:sp>
-        <p:nvSpPr>
-          <p:cNvPr id="33" name="Shape 31"/>
-          <p:cNvSpPr/>
-          <p:nvPr/>
-        </p:nvSpPr>
-        <p:spPr>
-          <a:xfrm>
-            <a:off x="3291840" y="2880360"/>
-            <a:ext cx="2651760" cy="1600200"/>
-          </a:xfrm>
-          <a:prstGeom prst="rect">
-            <a:avLst/>
-          </a:prstGeom>
-          <a:solidFill>
-            <a:srgbClr val="FFFFFF"/>
-          </a:solidFill>
-          <a:ln/>
-          <a:effectLst>
-            <a:outerShdw sx="100000" sy="100000" kx="0" ky="0" algn="bl" rotWithShape="0" blurRad="50800" dist="25400" dir="8100000">
-              <a:srgbClr val="000000">
-                <a:alpha val="10000"/>
-              </a:srgbClr>
-            </a:outerShdw>
-          </a:effectLst>
-        </p:spPr>
-      </p:sp>
-      <p:sp>
-        <p:nvSpPr>
-          <p:cNvPr id="34" name="Shape 32"/>
-          <p:cNvSpPr/>
-          <p:nvPr/>
-        </p:nvSpPr>
-        <p:spPr>
-          <a:xfrm>
-            <a:off x="3291840" y="2880360"/>
-            <a:ext cx="54864" cy="1600200"/>
-          </a:xfrm>
-          <a:prstGeom prst="rect">
-            <a:avLst/>
-          </a:prstGeom>
-          <a:solidFill>
-            <a:srgbClr val="16A34A"/>
-          </a:solidFill>
-          <a:ln/>
-        </p:spPr>
-      </p:sp>
-      <p:sp>
-        <p:nvSpPr>
-          <p:cNvPr id="35" name="Shape 33"/>
-          <p:cNvSpPr/>
-          <p:nvPr/>
-        </p:nvSpPr>
-        <p:spPr>
-          <a:xfrm>
-            <a:off x="5120640" y="2953512"/>
-            <a:ext cx="658368" cy="228600"/>
-          </a:xfrm>
-          <a:prstGeom prst="rect">
-            <a:avLst/>
-          </a:prstGeom>
-          <a:solidFill>
-            <a:srgbClr val="DCFCE7"/>
-          </a:solidFill>
-          <a:ln/>
-        </p:spPr>
-      </p:sp>
-      <p:sp>
-        <p:nvSpPr>
-          <p:cNvPr id="36" name="Text 34"/>
-          <p:cNvSpPr/>
-          <p:nvPr/>
-        </p:nvSpPr>
-        <p:spPr>
-          <a:xfrm>
-            <a:off x="5120640" y="2953512"/>
-            <a:ext cx="658368" cy="228600"/>
-          </a:xfrm>
-          <a:prstGeom prst="rect">
-            <a:avLst/>
-          </a:prstGeom>
-          <a:noFill/>
-          <a:ln/>
-        </p:spPr>
-        <p:txBody>
-          <a:bodyPr wrap="square" lIns="0" tIns="0" rIns="0" bIns="0" rtlCol="0" anchor="ctr"/>
-          <a:lstStyle/>
-          <a:p>
-            <a:pPr algn="ctr" indent="0" marL="0">
-              <a:buNone/>
-            </a:pPr>
-            <a:r>
-              <a:rPr lang="en-US" sz="900" b="1" dirty="0">
-                <a:solidFill>
-                  <a:srgbClr val="16A34A"/>
-                </a:solidFill>
-                <a:latin typeface="Arial" pitchFamily="34" charset="0"/>
-                <a:ea typeface="Arial" pitchFamily="34" charset="-122"/>
-                <a:cs typeface="Arial" pitchFamily="34" charset="-120"/>
-              </a:rPr>
-              <a:t>20件+</a:t>
-            </a:r>
-            <a:endParaRPr lang="en-US" sz="900" dirty="0"/>
-          </a:p>
-        </p:txBody>
-      </p:sp>
-      <p:sp>
-        <p:nvSpPr>
           <p:cNvPr id="37" name="Text 35"/>
           <p:cNvSpPr/>
           <p:nvPr/>
@@ -11716,7 +11716,7 @@
                 <a:ea typeface="Arial" pitchFamily="34" charset="-122"/>
                 <a:cs typeface="Arial" pitchFamily="34" charset="-120"/>
               </a:rPr>
-              <a:t>Everything was fine clean room staff were amazing great l...</a:t>
+              <a:t>タイ料理のバイキング朝食、期待しましたが品数が少なく、すべてタイ系ではなく、ただ、小鉢のトムヤクンラーメンとグリー...</a:t>
             </a:r>
             <a:endParaRPr lang="en-US" sz="900" dirty="0"/>
           </a:p>
@@ -11755,7 +11755,7 @@
                 <a:ea typeface="Arial" pitchFamily="34" charset="-122"/>
                 <a:cs typeface="Arial" pitchFamily="34" charset="-120"/>
               </a:rPr>
-              <a:t>「The Thai breakfast was a pleasant surprise」</a:t>
+              <a:t>「Everything was fine clean room staff were amazing great l...」</a:t>
             </a:r>
             <a:endParaRPr lang="en-US" sz="900" dirty="0"/>
           </a:p>
@@ -14860,7 +14860,7 @@
                           <a:ea typeface="Arial" pitchFamily="34" charset="-122"/>
                           <a:cs typeface="Arial" pitchFamily="34" charset="-120"/>
                         </a:rPr>
-                        <a:t>朝食は品数が多いわけではなく  和食ではありませんが十分です、美味しかったです</a:t>
+                        <a:t>タイ料理のバイキング朝食、期待しましたが品数が少なく、すべてタイ系ではなく、ただ、小鉢のトムヤクンラーメンとグリー...</a:t>
                       </a:r>
                       <a:endParaRPr lang="en-US" sz="900" dirty="0">
                         <a:latin typeface="Arial" charset="0"/>
@@ -14928,7 +14928,7 @@
                           <a:ea typeface="Arial" pitchFamily="34" charset="-122"/>
                           <a:cs typeface="Arial" pitchFamily="34" charset="-120"/>
                         </a:rPr>
-                        <a:t>5件</a:t>
+                        <a:t>6件</a:t>
                       </a:r>
                       <a:endParaRPr lang="en-US" sz="900" dirty="0">
                         <a:latin typeface="Arial" charset="0"/>

--- a/納品レポート/ホテル別レポート/comfort_roppongi_口コミ分析レポート.pptx
+++ b/納品レポート/ホテル別レポート/comfort_roppongi_口コミ分析レポート.pptx
@@ -277,16 +277,16 @@
                   <c:v>10</c:v>
                 </c:pt>
                 <c:pt idx="1">
-                  <c:v>9.67</c:v>
+                  <c:v>9.64</c:v>
                 </c:pt>
                 <c:pt idx="2">
-                  <c:v>8.47</c:v>
+                  <c:v>8.4</c:v>
                 </c:pt>
                 <c:pt idx="3">
-                  <c:v>8.2</c:v>
+                  <c:v>8.21</c:v>
                 </c:pt>
                 <c:pt idx="4">
-                  <c:v>7.71</c:v>
+                  <c:v>7.67</c:v>
                 </c:pt>
                 <c:pt idx="5">
                   <c:v>7.4</c:v>
@@ -628,19 +628,19 @@
                 <c:formatCode>General</c:formatCode>
                 <c:ptCount val="8"/>
                 <c:pt idx="0">
-                  <c:v>44</c:v>
+                  <c:v>45</c:v>
                 </c:pt>
                 <c:pt idx="1">
-                  <c:v>17</c:v>
+                  <c:v>18</c:v>
                 </c:pt>
                 <c:pt idx="2">
-                  <c:v>42</c:v>
+                  <c:v>43</c:v>
                 </c:pt>
                 <c:pt idx="3">
-                  <c:v>10</c:v>
+                  <c:v>9</c:v>
                 </c:pt>
                 <c:pt idx="4">
-                  <c:v>7</c:v>
+                  <c:v>9</c:v>
                 </c:pt>
                 <c:pt idx="5">
                   <c:v>2</c:v>
@@ -2537,7 +2537,7 @@
                 <a:ea typeface="Arial" pitchFamily="34" charset="-122"/>
                 <a:cs typeface="Arial" pitchFamily="34" charset="-120"/>
               </a:rPr>
-              <a:t>レビュー総数：131件</a:t>
+              <a:t>レビュー総数：135件</a:t>
             </a:r>
             <a:endParaRPr lang="en-US" sz="1000" dirty="0"/>
           </a:p>
@@ -2817,7 +2817,7 @@
                 <a:ea typeface="Arial" pitchFamily="34" charset="-122"/>
                 <a:cs typeface="Arial" pitchFamily="34" charset="-120"/>
               </a:rPr>
-              <a:t>コンフォートイン六本木は全体平均8.19点（10pt換算）、高評価率78.6%を達成しています。本レポートで示した改善施策を段階的に実施することで、さらなる顧客満足度向上が期待できます。</a:t>
+              <a:t>コンフォートイン六本木は全体平均8.19点（10pt換算）、高評価率78.5%を達成しています。本レポートで示した改善施策を段階的に実施することで、さらなる顧客満足度向上が期待できます。</a:t>
             </a:r>
             <a:endParaRPr lang="en-US" sz="1200" dirty="0"/>
           </a:p>
@@ -3372,7 +3372,7 @@
                 <a:ea typeface="Arial" pitchFamily="34" charset="-122"/>
                 <a:cs typeface="Arial" pitchFamily="34" charset="-120"/>
               </a:rPr>
-              <a:t>78.6%</a:t>
+              <a:t>78.5%</a:t>
             </a:r>
             <a:endParaRPr lang="en-US" sz="2800" dirty="0"/>
           </a:p>
@@ -3490,7 +3490,7 @@
                 <a:ea typeface="Arial" pitchFamily="34" charset="-122"/>
                 <a:cs typeface="Arial" pitchFamily="34" charset="-120"/>
               </a:rPr>
-              <a:t>6.9%</a:t>
+              <a:t>6.7%</a:t>
             </a:r>
             <a:endParaRPr lang="en-US" sz="2800" dirty="0"/>
           </a:p>
@@ -3608,7 +3608,7 @@
                 <a:ea typeface="Arial" pitchFamily="34" charset="-122"/>
                 <a:cs typeface="Arial" pitchFamily="34" charset="-120"/>
               </a:rPr>
-              <a:t>131件</a:t>
+              <a:t>135件</a:t>
             </a:r>
             <a:endParaRPr lang="en-US" sz="2800" dirty="0"/>
           </a:p>
@@ -4689,7 +4689,7 @@
                           <a:ea typeface="Arial" pitchFamily="34" charset="-122"/>
                           <a:cs typeface="Arial" pitchFamily="34" charset="-120"/>
                         </a:rPr>
-                        <a:t>9</a:t>
+                        <a:t>11</a:t>
                       </a:r>
                       <a:endParaRPr lang="en-US" sz="800" dirty="0">
                         <a:latin typeface="Arial" charset="0"/>
@@ -4757,7 +4757,7 @@
                           <a:ea typeface="Arial" pitchFamily="34" charset="-122"/>
                           <a:cs typeface="Arial" pitchFamily="34" charset="-120"/>
                         </a:rPr>
-                        <a:t>9.67/10</a:t>
+                        <a:t>9.64/10</a:t>
                       </a:r>
                       <a:endParaRPr lang="en-US" sz="800" dirty="0">
                         <a:latin typeface="Arial" charset="0"/>
@@ -4825,7 +4825,7 @@
                           <a:ea typeface="Arial" pitchFamily="34" charset="-122"/>
                           <a:cs typeface="Arial" pitchFamily="34" charset="-120"/>
                         </a:rPr>
-                        <a:t>9.67</a:t>
+                        <a:t>9.64</a:t>
                       </a:r>
                       <a:endParaRPr lang="en-US" sz="800" dirty="0">
                         <a:latin typeface="Arial" charset="0"/>
@@ -5031,7 +5031,7 @@
                           <a:ea typeface="Arial" pitchFamily="34" charset="-122"/>
                           <a:cs typeface="Arial" pitchFamily="34" charset="-120"/>
                         </a:rPr>
-                        <a:t>17</a:t>
+                        <a:t>15</a:t>
                       </a:r>
                       <a:endParaRPr lang="en-US" sz="800" dirty="0">
                         <a:latin typeface="Arial" charset="0"/>
@@ -5099,7 +5099,7 @@
                           <a:ea typeface="Arial" pitchFamily="34" charset="-122"/>
                           <a:cs typeface="Arial" pitchFamily="34" charset="-120"/>
                         </a:rPr>
-                        <a:t>4.24/5</a:t>
+                        <a:t>4.20/5</a:t>
                       </a:r>
                       <a:endParaRPr lang="en-US" sz="800" dirty="0">
                         <a:latin typeface="Arial" charset="0"/>
@@ -5167,7 +5167,7 @@
                           <a:ea typeface="Arial" pitchFamily="34" charset="-122"/>
                           <a:cs typeface="Arial" pitchFamily="34" charset="-120"/>
                         </a:rPr>
-                        <a:t>8.47</a:t>
+                        <a:t>8.40</a:t>
                       </a:r>
                       <a:endParaRPr lang="en-US" sz="800" dirty="0">
                         <a:latin typeface="Arial" charset="0"/>
@@ -5373,7 +5373,7 @@
                           <a:ea typeface="Arial" pitchFamily="34" charset="-122"/>
                           <a:cs typeface="Arial" pitchFamily="34" charset="-120"/>
                         </a:rPr>
-                        <a:t>65</a:t>
+                        <a:t>67</a:t>
                       </a:r>
                       <a:endParaRPr lang="en-US" sz="800" dirty="0">
                         <a:latin typeface="Arial" charset="0"/>
@@ -5441,7 +5441,7 @@
                           <a:ea typeface="Arial" pitchFamily="34" charset="-122"/>
                           <a:cs typeface="Arial" pitchFamily="34" charset="-120"/>
                         </a:rPr>
-                        <a:t>8.20/10</a:t>
+                        <a:t>8.21/10</a:t>
                       </a:r>
                       <a:endParaRPr lang="en-US" sz="800" dirty="0">
                         <a:latin typeface="Arial" charset="0"/>
@@ -5509,7 +5509,7 @@
                           <a:ea typeface="Arial" pitchFamily="34" charset="-122"/>
                           <a:cs typeface="Arial" pitchFamily="34" charset="-120"/>
                         </a:rPr>
-                        <a:t>8.20</a:t>
+                        <a:t>8.21</a:t>
                       </a:r>
                       <a:endParaRPr lang="en-US" sz="800" dirty="0">
                         <a:latin typeface="Arial" charset="0"/>
@@ -5715,7 +5715,7 @@
                           <a:ea typeface="Arial" pitchFamily="34" charset="-122"/>
                           <a:cs typeface="Arial" pitchFamily="34" charset="-120"/>
                         </a:rPr>
-                        <a:t>34</a:t>
+                        <a:t>36</a:t>
                       </a:r>
                       <a:endParaRPr lang="en-US" sz="800" dirty="0">
                         <a:latin typeface="Arial" charset="0"/>
@@ -5783,7 +5783,7 @@
                           <a:ea typeface="Arial" pitchFamily="34" charset="-122"/>
                           <a:cs typeface="Arial" pitchFamily="34" charset="-120"/>
                         </a:rPr>
-                        <a:t>3.85/5</a:t>
+                        <a:t>3.83/5</a:t>
                       </a:r>
                       <a:endParaRPr lang="en-US" sz="800" dirty="0">
                         <a:latin typeface="Arial" charset="0"/>
@@ -5851,7 +5851,7 @@
                           <a:ea typeface="Arial" pitchFamily="34" charset="-122"/>
                           <a:cs typeface="Arial" pitchFamily="34" charset="-120"/>
                         </a:rPr>
-                        <a:t>7.71</a:t>
+                        <a:t>7.67</a:t>
                       </a:r>
                       <a:endParaRPr lang="en-US" sz="800" dirty="0">
                         <a:latin typeface="Arial" charset="0"/>
@@ -6646,7 +6646,7 @@
                 <a:ea typeface="Arial" pitchFamily="34" charset="-122"/>
                 <a:cs typeface="Arial" pitchFamily="34" charset="-120"/>
               </a:rPr>
-              <a:t>103件（78.6%）</a:t>
+              <a:t>106件（78.5%）</a:t>
             </a:r>
             <a:endParaRPr lang="en-US" sz="1600" dirty="0"/>
           </a:p>
@@ -6744,7 +6744,7 @@
                 <a:ea typeface="Arial" pitchFamily="34" charset="-122"/>
                 <a:cs typeface="Arial" pitchFamily="34" charset="-120"/>
               </a:rPr>
-              <a:t>19件（14.5%）</a:t>
+              <a:t>20件（14.8%）</a:t>
             </a:r>
             <a:endParaRPr lang="en-US" sz="1600" dirty="0"/>
           </a:p>
@@ -6842,7 +6842,7 @@
                 <a:ea typeface="Arial" pitchFamily="34" charset="-122"/>
                 <a:cs typeface="Arial" pitchFamily="34" charset="-120"/>
               </a:rPr>
-              <a:t>9件（6.9%）</a:t>
+              <a:t>9件（6.7%）</a:t>
             </a:r>
             <a:endParaRPr lang="en-US" sz="1600" dirty="0"/>
           </a:p>
@@ -7004,7 +7004,7 @@
                 <a:ea typeface="Arial" pitchFamily="34" charset="-122"/>
                 <a:cs typeface="Arial" pitchFamily="34" charset="-120"/>
               </a:rPr>
-              <a:t>高評価レビュー（8-10点: 103件）の分析から、主要な強みテーマを抽出しています。立地・アクセス、客室清潔感、スタッフ対応が高評価の中心的テーマです。</a:t>
+              <a:t>高評価レビュー（8-10点: 106件）の分析から、主要な強みテーマを抽出しています。立地・アクセス、客室清潔感、スタッフ対応が高評価の中心的テーマです。</a:t>
             </a:r>
             <a:endParaRPr lang="en-US" sz="1200" dirty="0"/>
           </a:p>
@@ -7264,7 +7264,7 @@
                 <a:ea typeface="Arial" pitchFamily="34" charset="-122"/>
                 <a:cs typeface="Arial" pitchFamily="34" charset="-120"/>
               </a:rPr>
-              <a:t>低評価・中評価レビュー（28件）から改善課題を優先度別に整理しています。S/A/B/Cの4段階で優先度を設定し、計画的な改善を推進します。</a:t>
+              <a:t>低評価・中評価レビュー（29件）から改善課題を優先度別に整理しています。S/A/B/Cの4段階で優先度を設定し、計画的な改善を推進します。</a:t>
             </a:r>
             <a:endParaRPr lang="en-US" sz="1200" dirty="0"/>
           </a:p>
@@ -8061,7 +8061,7 @@
                 <a:ea typeface="Arial" pitchFamily="34" charset="-122"/>
                 <a:cs typeface="Arial" pitchFamily="34" charset="-120"/>
               </a:rPr>
-              <a:t>高評価率 78.6% → 目標 83.6%</a:t>
+              <a:t>高評価率 78.5% → 目標 83.5%</a:t>
             </a:r>
             <a:endParaRPr lang="en-US" sz="1200" dirty="0"/>
           </a:p>
@@ -8078,7 +8078,7 @@
                 <a:ea typeface="Arial" pitchFamily="34" charset="-122"/>
                 <a:cs typeface="Arial" pitchFamily="34" charset="-120"/>
               </a:rPr>
-              <a:t>低評価率 6.9% → 目標 4.9%</a:t>
+              <a:t>低評価率 6.7% → 目標 4.7%</a:t>
             </a:r>
             <a:endParaRPr lang="en-US" sz="1200" dirty="0"/>
           </a:p>

--- a/納品レポート/ホテル別レポート/comfort_roppongi_口コミ分析レポート.pptx
+++ b/納品レポート/ホテル別レポート/comfort_roppongi_口コミ分析レポート.pptx
@@ -280,13 +280,13 @@
                   <c:v>9.64</c:v>
                 </c:pt>
                 <c:pt idx="2">
-                  <c:v>8.4</c:v>
+                  <c:v>8.5</c:v>
                 </c:pt>
                 <c:pt idx="3">
-                  <c:v>8.21</c:v>
+                  <c:v>8.18</c:v>
                 </c:pt>
                 <c:pt idx="4">
-                  <c:v>7.67</c:v>
+                  <c:v>7.51</c:v>
                 </c:pt>
                 <c:pt idx="5">
                   <c:v>7.4</c:v>
@@ -628,16 +628,16 @@
                 <c:formatCode>General</c:formatCode>
                 <c:ptCount val="8"/>
                 <c:pt idx="0">
-                  <c:v>45</c:v>
+                  <c:v>46</c:v>
                 </c:pt>
                 <c:pt idx="1">
-                  <c:v>18</c:v>
+                  <c:v>17</c:v>
                 </c:pt>
                 <c:pt idx="2">
                   <c:v>43</c:v>
                 </c:pt>
                 <c:pt idx="3">
-                  <c:v>9</c:v>
+                  <c:v>10</c:v>
                 </c:pt>
                 <c:pt idx="4">
                   <c:v>9</c:v>
@@ -649,7 +649,7 @@
                   <c:v>2</c:v>
                 </c:pt>
                 <c:pt idx="7">
-                  <c:v>7</c:v>
+                  <c:v>8</c:v>
                 </c:pt>
               </c:numCache>
             </c:numRef>
@@ -2537,7 +2537,7 @@
                 <a:ea typeface="Arial" pitchFamily="34" charset="-122"/>
                 <a:cs typeface="Arial" pitchFamily="34" charset="-120"/>
               </a:rPr>
-              <a:t>レビュー総数：135件</a:t>
+              <a:t>レビュー総数：137件</a:t>
             </a:r>
             <a:endParaRPr lang="en-US" sz="1000" dirty="0"/>
           </a:p>
@@ -2817,7 +2817,7 @@
                 <a:ea typeface="Arial" pitchFamily="34" charset="-122"/>
                 <a:cs typeface="Arial" pitchFamily="34" charset="-120"/>
               </a:rPr>
-              <a:t>コンフォートイン六本木は全体平均8.19点（10pt換算）、高評価率78.5%を達成しています。本レポートで示した改善施策を段階的に実施することで、さらなる顧客満足度向上が期待できます。</a:t>
+              <a:t>コンフォートイン六本木は全体平均8.14点（10pt換算）、高評価率77.4%を達成しています。本レポートで示した改善施策を段階的に実施することで、さらなる顧客満足度向上が期待できます。</a:t>
             </a:r>
             <a:endParaRPr lang="en-US" sz="1200" dirty="0"/>
           </a:p>
@@ -3254,7 +3254,7 @@
                 <a:ea typeface="Arial" pitchFamily="34" charset="-122"/>
                 <a:cs typeface="Arial" pitchFamily="34" charset="-120"/>
               </a:rPr>
-              <a:t>8.19</a:t>
+              <a:t>8.14</a:t>
             </a:r>
             <a:endParaRPr lang="en-US" sz="2800" dirty="0"/>
           </a:p>
@@ -3372,7 +3372,7 @@
                 <a:ea typeface="Arial" pitchFamily="34" charset="-122"/>
                 <a:cs typeface="Arial" pitchFamily="34" charset="-120"/>
               </a:rPr>
-              <a:t>78.5%</a:t>
+              <a:t>77.4%</a:t>
             </a:r>
             <a:endParaRPr lang="en-US" sz="2800" dirty="0"/>
           </a:p>
@@ -3490,7 +3490,7 @@
                 <a:ea typeface="Arial" pitchFamily="34" charset="-122"/>
                 <a:cs typeface="Arial" pitchFamily="34" charset="-120"/>
               </a:rPr>
-              <a:t>6.7%</a:t>
+              <a:t>7.3%</a:t>
             </a:r>
             <a:endParaRPr lang="en-US" sz="2800" dirty="0"/>
           </a:p>
@@ -3608,7 +3608,7 @@
                 <a:ea typeface="Arial" pitchFamily="34" charset="-122"/>
                 <a:cs typeface="Arial" pitchFamily="34" charset="-120"/>
               </a:rPr>
-              <a:t>135件</a:t>
+              <a:t>137件</a:t>
             </a:r>
             <a:endParaRPr lang="en-US" sz="2800" dirty="0"/>
           </a:p>
@@ -5031,7 +5031,7 @@
                           <a:ea typeface="Arial" pitchFamily="34" charset="-122"/>
                           <a:cs typeface="Arial" pitchFamily="34" charset="-120"/>
                         </a:rPr>
-                        <a:t>15</a:t>
+                        <a:t>16</a:t>
                       </a:r>
                       <a:endParaRPr lang="en-US" sz="800" dirty="0">
                         <a:latin typeface="Arial" charset="0"/>
@@ -5099,7 +5099,7 @@
                           <a:ea typeface="Arial" pitchFamily="34" charset="-122"/>
                           <a:cs typeface="Arial" pitchFamily="34" charset="-120"/>
                         </a:rPr>
-                        <a:t>4.20/5</a:t>
+                        <a:t>4.25/5</a:t>
                       </a:r>
                       <a:endParaRPr lang="en-US" sz="800" dirty="0">
                         <a:latin typeface="Arial" charset="0"/>
@@ -5167,7 +5167,7 @@
                           <a:ea typeface="Arial" pitchFamily="34" charset="-122"/>
                           <a:cs typeface="Arial" pitchFamily="34" charset="-120"/>
                         </a:rPr>
-                        <a:t>8.40</a:t>
+                        <a:t>8.50</a:t>
                       </a:r>
                       <a:endParaRPr lang="en-US" sz="800" dirty="0">
                         <a:latin typeface="Arial" charset="0"/>
@@ -5441,7 +5441,7 @@
                           <a:ea typeface="Arial" pitchFamily="34" charset="-122"/>
                           <a:cs typeface="Arial" pitchFamily="34" charset="-120"/>
                         </a:rPr>
-                        <a:t>8.21/10</a:t>
+                        <a:t>8.18/10</a:t>
                       </a:r>
                       <a:endParaRPr lang="en-US" sz="800" dirty="0">
                         <a:latin typeface="Arial" charset="0"/>
@@ -5509,7 +5509,7 @@
                           <a:ea typeface="Arial" pitchFamily="34" charset="-122"/>
                           <a:cs typeface="Arial" pitchFamily="34" charset="-120"/>
                         </a:rPr>
-                        <a:t>8.21</a:t>
+                        <a:t>8.18</a:t>
                       </a:r>
                       <a:endParaRPr lang="en-US" sz="800" dirty="0">
                         <a:latin typeface="Arial" charset="0"/>
@@ -5715,7 +5715,7 @@
                           <a:ea typeface="Arial" pitchFamily="34" charset="-122"/>
                           <a:cs typeface="Arial" pitchFamily="34" charset="-120"/>
                         </a:rPr>
-                        <a:t>36</a:t>
+                        <a:t>37</a:t>
                       </a:r>
                       <a:endParaRPr lang="en-US" sz="800" dirty="0">
                         <a:latin typeface="Arial" charset="0"/>
@@ -5783,7 +5783,7 @@
                           <a:ea typeface="Arial" pitchFamily="34" charset="-122"/>
                           <a:cs typeface="Arial" pitchFamily="34" charset="-120"/>
                         </a:rPr>
-                        <a:t>3.83/5</a:t>
+                        <a:t>3.76/5</a:t>
                       </a:r>
                       <a:endParaRPr lang="en-US" sz="800" dirty="0">
                         <a:latin typeface="Arial" charset="0"/>
@@ -5851,7 +5851,7 @@
                           <a:ea typeface="Arial" pitchFamily="34" charset="-122"/>
                           <a:cs typeface="Arial" pitchFamily="34" charset="-120"/>
                         </a:rPr>
-                        <a:t>7.67</a:t>
+                        <a:t>7.51</a:t>
                       </a:r>
                       <a:endParaRPr lang="en-US" sz="800" dirty="0">
                         <a:latin typeface="Arial" charset="0"/>
@@ -6646,7 +6646,7 @@
                 <a:ea typeface="Arial" pitchFamily="34" charset="-122"/>
                 <a:cs typeface="Arial" pitchFamily="34" charset="-120"/>
               </a:rPr>
-              <a:t>106件（78.5%）</a:t>
+              <a:t>106件（77.4%）</a:t>
             </a:r>
             <a:endParaRPr lang="en-US" sz="1600" dirty="0"/>
           </a:p>
@@ -6744,7 +6744,7 @@
                 <a:ea typeface="Arial" pitchFamily="34" charset="-122"/>
                 <a:cs typeface="Arial" pitchFamily="34" charset="-120"/>
               </a:rPr>
-              <a:t>20件（14.8%）</a:t>
+              <a:t>21件（15.3%）</a:t>
             </a:r>
             <a:endParaRPr lang="en-US" sz="1600" dirty="0"/>
           </a:p>
@@ -6842,7 +6842,7 @@
                 <a:ea typeface="Arial" pitchFamily="34" charset="-122"/>
                 <a:cs typeface="Arial" pitchFamily="34" charset="-120"/>
               </a:rPr>
-              <a:t>9件（6.7%）</a:t>
+              <a:t>10件（7.3%）</a:t>
             </a:r>
             <a:endParaRPr lang="en-US" sz="1600" dirty="0"/>
           </a:p>
@@ -7264,7 +7264,7 @@
                 <a:ea typeface="Arial" pitchFamily="34" charset="-122"/>
                 <a:cs typeface="Arial" pitchFamily="34" charset="-120"/>
               </a:rPr>
-              <a:t>低評価・中評価レビュー（29件）から改善課題を優先度別に整理しています。S/A/B/Cの4段階で優先度を設定し、計画的な改善を推進します。</a:t>
+              <a:t>低評価・中評価レビュー（31件）から改善課題を優先度別に整理しています。S/A/B/Cの4段階で優先度を設定し、計画的な改善を推進します。</a:t>
             </a:r>
             <a:endParaRPr lang="en-US" sz="1200" dirty="0"/>
           </a:p>
@@ -8044,7 +8044,7 @@
                 <a:ea typeface="Arial" pitchFamily="34" charset="-122"/>
                 <a:cs typeface="Arial" pitchFamily="34" charset="-120"/>
               </a:rPr>
-              <a:t>全体平均 8.19点 → 目標 8.69点</a:t>
+              <a:t>全体平均 8.14点 → 目標 8.64点</a:t>
             </a:r>
             <a:endParaRPr lang="en-US" sz="1200" dirty="0"/>
           </a:p>
@@ -8061,7 +8061,7 @@
                 <a:ea typeface="Arial" pitchFamily="34" charset="-122"/>
                 <a:cs typeface="Arial" pitchFamily="34" charset="-120"/>
               </a:rPr>
-              <a:t>高評価率 78.5% → 目標 83.5%</a:t>
+              <a:t>高評価率 77.4% → 目標 82.4%</a:t>
             </a:r>
             <a:endParaRPr lang="en-US" sz="1200" dirty="0"/>
           </a:p>
@@ -8078,7 +8078,7 @@
                 <a:ea typeface="Arial" pitchFamily="34" charset="-122"/>
                 <a:cs typeface="Arial" pitchFamily="34" charset="-120"/>
               </a:rPr>
-              <a:t>低評価率 6.7% → 目標 4.7%</a:t>
+              <a:t>低評価率 7.3% → 目標 5.3%</a:t>
             </a:r>
             <a:endParaRPr lang="en-US" sz="1200" dirty="0"/>
           </a:p>

--- a/納品レポート/ホテル別レポート/comfort_roppongi_口コミ分析レポート.pptx
+++ b/納品レポート/ホテル別レポート/comfort_roppongi_口コミ分析レポート.pptx
@@ -277,19 +277,19 @@
                   <c:v>10</c:v>
                 </c:pt>
                 <c:pt idx="1">
-                  <c:v>9.64</c:v>
+                  <c:v>9.58</c:v>
                 </c:pt>
                 <c:pt idx="2">
                   <c:v>8.5</c:v>
                 </c:pt>
                 <c:pt idx="3">
-                  <c:v>8.18</c:v>
+                  <c:v>8.2</c:v>
                 </c:pt>
                 <c:pt idx="4">
                   <c:v>7.51</c:v>
                 </c:pt>
                 <c:pt idx="5">
-                  <c:v>7.4</c:v>
+                  <c:v>7.5</c:v>
                 </c:pt>
               </c:numCache>
             </c:numRef>
@@ -628,13 +628,13 @@
                 <c:formatCode>General</c:formatCode>
                 <c:ptCount val="8"/>
                 <c:pt idx="0">
-                  <c:v>46</c:v>
+                  <c:v>45</c:v>
                 </c:pt>
                 <c:pt idx="1">
-                  <c:v>17</c:v>
+                  <c:v>18</c:v>
                 </c:pt>
                 <c:pt idx="2">
-                  <c:v>43</c:v>
+                  <c:v>44</c:v>
                 </c:pt>
                 <c:pt idx="3">
                   <c:v>10</c:v>
@@ -643,7 +643,7 @@
                   <c:v>9</c:v>
                 </c:pt>
                 <c:pt idx="5">
-                  <c:v>2</c:v>
+                  <c:v>1</c:v>
                 </c:pt>
                 <c:pt idx="6">
                   <c:v>2</c:v>
@@ -2817,7 +2817,7 @@
                 <a:ea typeface="Arial" pitchFamily="34" charset="-122"/>
                 <a:cs typeface="Arial" pitchFamily="34" charset="-120"/>
               </a:rPr>
-              <a:t>コンフォートイン六本木は全体平均8.14点（10pt換算）、高評価率77.4%を達成しています。本レポートで示した改善施策を段階的に実施することで、さらなる顧客満足度向上が期待できます。</a:t>
+              <a:t>コンフォートイン六本木は全体平均8.15点（10pt換算）、高評価率78.1%を達成しています。本レポートで示した改善施策を段階的に実施することで、さらなる顧客満足度向上が期待できます。</a:t>
             </a:r>
             <a:endParaRPr lang="en-US" sz="1200" dirty="0"/>
           </a:p>
@@ -3254,7 +3254,7 @@
                 <a:ea typeface="Arial" pitchFamily="34" charset="-122"/>
                 <a:cs typeface="Arial" pitchFamily="34" charset="-120"/>
               </a:rPr>
-              <a:t>8.14</a:t>
+              <a:t>8.15</a:t>
             </a:r>
             <a:endParaRPr lang="en-US" sz="2800" dirty="0"/>
           </a:p>
@@ -3372,7 +3372,7 @@
                 <a:ea typeface="Arial" pitchFamily="34" charset="-122"/>
                 <a:cs typeface="Arial" pitchFamily="34" charset="-120"/>
               </a:rPr>
-              <a:t>77.4%</a:t>
+              <a:t>78.1%</a:t>
             </a:r>
             <a:endParaRPr lang="en-US" sz="2800" dirty="0"/>
           </a:p>
@@ -4689,7 +4689,7 @@
                           <a:ea typeface="Arial" pitchFamily="34" charset="-122"/>
                           <a:cs typeface="Arial" pitchFamily="34" charset="-120"/>
                         </a:rPr>
-                        <a:t>11</a:t>
+                        <a:t>12</a:t>
                       </a:r>
                       <a:endParaRPr lang="en-US" sz="800" dirty="0">
                         <a:latin typeface="Arial" charset="0"/>
@@ -4757,7 +4757,7 @@
                           <a:ea typeface="Arial" pitchFamily="34" charset="-122"/>
                           <a:cs typeface="Arial" pitchFamily="34" charset="-120"/>
                         </a:rPr>
-                        <a:t>9.64/10</a:t>
+                        <a:t>9.58/10</a:t>
                       </a:r>
                       <a:endParaRPr lang="en-US" sz="800" dirty="0">
                         <a:latin typeface="Arial" charset="0"/>
@@ -4825,7 +4825,7 @@
                           <a:ea typeface="Arial" pitchFamily="34" charset="-122"/>
                           <a:cs typeface="Arial" pitchFamily="34" charset="-120"/>
                         </a:rPr>
-                        <a:t>9.64</a:t>
+                        <a:t>9.58</a:t>
                       </a:r>
                       <a:endParaRPr lang="en-US" sz="800" dirty="0">
                         <a:latin typeface="Arial" charset="0"/>
@@ -5373,7 +5373,7 @@
                           <a:ea typeface="Arial" pitchFamily="34" charset="-122"/>
                           <a:cs typeface="Arial" pitchFamily="34" charset="-120"/>
                         </a:rPr>
-                        <a:t>67</a:t>
+                        <a:t>65</a:t>
                       </a:r>
                       <a:endParaRPr lang="en-US" sz="800" dirty="0">
                         <a:latin typeface="Arial" charset="0"/>
@@ -5441,7 +5441,7 @@
                           <a:ea typeface="Arial" pitchFamily="34" charset="-122"/>
                           <a:cs typeface="Arial" pitchFamily="34" charset="-120"/>
                         </a:rPr>
-                        <a:t>8.18/10</a:t>
+                        <a:t>8.20/10</a:t>
                       </a:r>
                       <a:endParaRPr lang="en-US" sz="800" dirty="0">
                         <a:latin typeface="Arial" charset="0"/>
@@ -5509,7 +5509,7 @@
                           <a:ea typeface="Arial" pitchFamily="34" charset="-122"/>
                           <a:cs typeface="Arial" pitchFamily="34" charset="-120"/>
                         </a:rPr>
-                        <a:t>8.18</a:t>
+                        <a:t>8.20</a:t>
                       </a:r>
                       <a:endParaRPr lang="en-US" sz="800" dirty="0">
                         <a:latin typeface="Arial" charset="0"/>
@@ -6057,7 +6057,7 @@
                           <a:ea typeface="Arial" pitchFamily="34" charset="-122"/>
                           <a:cs typeface="Arial" pitchFamily="34" charset="-120"/>
                         </a:rPr>
-                        <a:t>5</a:t>
+                        <a:t>6</a:t>
                       </a:r>
                       <a:endParaRPr lang="en-US" sz="800" dirty="0">
                         <a:latin typeface="Arial" charset="0"/>
@@ -6125,7 +6125,7 @@
                           <a:ea typeface="Arial" pitchFamily="34" charset="-122"/>
                           <a:cs typeface="Arial" pitchFamily="34" charset="-120"/>
                         </a:rPr>
-                        <a:t>7.40/10</a:t>
+                        <a:t>7.50/10</a:t>
                       </a:r>
                       <a:endParaRPr lang="en-US" sz="800" dirty="0">
                         <a:latin typeface="Arial" charset="0"/>
@@ -6193,7 +6193,7 @@
                           <a:ea typeface="Arial" pitchFamily="34" charset="-122"/>
                           <a:cs typeface="Arial" pitchFamily="34" charset="-120"/>
                         </a:rPr>
-                        <a:t>7.40</a:t>
+                        <a:t>7.50</a:t>
                       </a:r>
                       <a:endParaRPr lang="en-US" sz="800" dirty="0">
                         <a:latin typeface="Arial" charset="0"/>
@@ -6646,7 +6646,7 @@
                 <a:ea typeface="Arial" pitchFamily="34" charset="-122"/>
                 <a:cs typeface="Arial" pitchFamily="34" charset="-120"/>
               </a:rPr>
-              <a:t>106件（77.4%）</a:t>
+              <a:t>107件（78.1%）</a:t>
             </a:r>
             <a:endParaRPr lang="en-US" sz="1600" dirty="0"/>
           </a:p>
@@ -6744,7 +6744,7 @@
                 <a:ea typeface="Arial" pitchFamily="34" charset="-122"/>
                 <a:cs typeface="Arial" pitchFamily="34" charset="-120"/>
               </a:rPr>
-              <a:t>21件（15.3%）</a:t>
+              <a:t>20件（14.6%）</a:t>
             </a:r>
             <a:endParaRPr lang="en-US" sz="1600" dirty="0"/>
           </a:p>
@@ -7004,7 +7004,7 @@
                 <a:ea typeface="Arial" pitchFamily="34" charset="-122"/>
                 <a:cs typeface="Arial" pitchFamily="34" charset="-120"/>
               </a:rPr>
-              <a:t>高評価レビュー（8-10点: 106件）の分析から、主要な強みテーマを抽出しています。立地・アクセス、客室清潔感、スタッフ対応が高評価の中心的テーマです。</a:t>
+              <a:t>高評価レビュー（8-10点: 107件）の分析から、主要な強みテーマを抽出しています。立地・アクセス、客室清潔感、スタッフ対応が高評価の中心的テーマです。</a:t>
             </a:r>
             <a:endParaRPr lang="en-US" sz="1200" dirty="0"/>
           </a:p>
@@ -7264,7 +7264,7 @@
                 <a:ea typeface="Arial" pitchFamily="34" charset="-122"/>
                 <a:cs typeface="Arial" pitchFamily="34" charset="-120"/>
               </a:rPr>
-              <a:t>低評価・中評価レビュー（31件）から改善課題を優先度別に整理しています。S/A/B/Cの4段階で優先度を設定し、計画的な改善を推進します。</a:t>
+              <a:t>低評価・中評価レビュー（30件）から改善課題を優先度別に整理しています。S/A/B/Cの4段階で優先度を設定し、計画的な改善を推進します。</a:t>
             </a:r>
             <a:endParaRPr lang="en-US" sz="1200" dirty="0"/>
           </a:p>
@@ -8044,7 +8044,7 @@
                 <a:ea typeface="Arial" pitchFamily="34" charset="-122"/>
                 <a:cs typeface="Arial" pitchFamily="34" charset="-120"/>
               </a:rPr>
-              <a:t>全体平均 8.14点 → 目標 8.64点</a:t>
+              <a:t>全体平均 8.15点 → 目標 8.65点</a:t>
             </a:r>
             <a:endParaRPr lang="en-US" sz="1200" dirty="0"/>
           </a:p>
@@ -8061,7 +8061,7 @@
                 <a:ea typeface="Arial" pitchFamily="34" charset="-122"/>
                 <a:cs typeface="Arial" pitchFamily="34" charset="-120"/>
               </a:rPr>
-              <a:t>高評価率 77.4% → 目標 82.4%</a:t>
+              <a:t>高評価率 78.1% → 目標 83.1%</a:t>
             </a:r>
             <a:endParaRPr lang="en-US" sz="1200" dirty="0"/>
           </a:p>

--- a/納品レポート/ホテル別レポート/comfort_roppongi_口コミ分析レポート.pptx
+++ b/納品レポート/ホテル別レポート/comfort_roppongi_口コミ分析レポート.pptx
@@ -192,10 +192,10 @@
                     <c:v>Booking.com</c:v>
                   </c:pt>
                   <c:pt idx="4">
-                    <c:v>Google</c:v>
+                    <c:v>Agoda</c:v>
                   </c:pt>
                   <c:pt idx="5">
-                    <c:v>Agoda</c:v>
+                    <c:v>Google</c:v>
                   </c:pt>
                 </c:lvl>
               </c:multiLvlStrCache>
@@ -211,19 +211,19 @@
                   <c:v>10</c:v>
                 </c:pt>
                 <c:pt idx="1">
-                  <c:v>9.58</c:v>
+                  <c:v>9.57</c:v>
                 </c:pt>
                 <c:pt idx="2">
-                  <c:v>8.5</c:v>
+                  <c:v>9</c:v>
                 </c:pt>
                 <c:pt idx="3">
-                  <c:v>8.2</c:v>
+                  <c:v>8.11</c:v>
                 </c:pt>
                 <c:pt idx="4">
-                  <c:v>7.51</c:v>
+                  <c:v>7.5</c:v>
                 </c:pt>
                 <c:pt idx="5">
-                  <c:v>7.5</c:v>
+                  <c:v>7.45</c:v>
                 </c:pt>
               </c:numCache>
             </c:numRef>
@@ -566,13 +566,13 @@
               <c:numCache>
                 <c:ptCount val="3"/>
                 <c:pt idx="0">
-                  <c:v>107</c:v>
+                  <c:v>57</c:v>
                 </c:pt>
                 <c:pt idx="1">
-                  <c:v>20</c:v>
+                  <c:v>15</c:v>
                 </c:pt>
                 <c:pt idx="2">
-                  <c:v>10</c:v>
+                  <c:v>1</c:v>
                 </c:pt>
               </c:numCache>
             </c:numRef>
@@ -757,22 +757,11 @@
               <a:effectLst/>
             </c:spPr>
           </c:dPt>
-          <c:dPt>
-            <c:idx val="7"/>
-            <c:invertIfNegative val="0"/>
-            <c:bubble3D val="0"/>
-            <c:spPr>
-              <a:solidFill>
-                <a:srgbClr val="DC2626"/>
-              </a:solidFill>
-              <a:effectLst/>
-            </c:spPr>
-          </c:dPt>
           <c:cat>
             <c:multiLvlStrRef>
-              <c:f>Sheet1!$A$2:$A$9</c:f>
+              <c:f>Sheet1!$A$2:$A$8</c:f>
               <c:multiLvlStrCache>
-                <c:ptCount val="8"/>
+                <c:ptCount val="7"/>
                 <c:lvl>
                   <c:pt idx="0">
                     <c:v>10点</c:v>
@@ -793,9 +782,6 @@
                     <c:v>5点</c:v>
                   </c:pt>
                   <c:pt idx="6">
-                    <c:v>4点</c:v>
-                  </c:pt>
-                  <c:pt idx="7">
                     <c:v>2点</c:v>
                   </c:pt>
                 </c:lvl>
@@ -804,21 +790,21 @@
           </c:cat>
           <c:val>
             <c:numRef>
-              <c:f>Sheet1!$B$2:$B$9</c:f>
+              <c:f>Sheet1!$B$2:$B$8</c:f>
               <c:numCache>
                 <c:formatCode>General</c:formatCode>
-                <c:ptCount val="8"/>
+                <c:ptCount val="7"/>
                 <c:pt idx="0">
-                  <c:v>45</c:v>
+                  <c:v>20</c:v>
                 </c:pt>
                 <c:pt idx="1">
-                  <c:v>18</c:v>
+                  <c:v>10</c:v>
                 </c:pt>
                 <c:pt idx="2">
-                  <c:v>44</c:v>
+                  <c:v>27</c:v>
                 </c:pt>
                 <c:pt idx="3">
-                  <c:v>10</c:v>
+                  <c:v>5</c:v>
                 </c:pt>
                 <c:pt idx="4">
                   <c:v>9</c:v>
@@ -827,10 +813,7 @@
                   <c:v>1</c:v>
                 </c:pt>
                 <c:pt idx="6">
-                  <c:v>2</c:v>
-                </c:pt>
-                <c:pt idx="7">
-                  <c:v>8</c:v>
+                  <c:v>1</c:v>
                 </c:pt>
               </c:numCache>
             </c:numRef>
@@ -2761,7 +2744,7 @@
                 <a:ea typeface="Arial" pitchFamily="34" charset="-122"/>
                 <a:cs typeface="Arial" pitchFamily="34" charset="-120"/>
               </a:rPr>
-              <a:t>分析対象期間：2026年2月〜3月</a:t>
+              <a:t>分析対象期間：2026年3月〜4月</a:t>
             </a:r>
             <a:endParaRPr lang="en-US" sz="1000" dirty="0"/>
           </a:p>
@@ -2781,7 +2764,7 @@
                 <a:ea typeface="Arial" pitchFamily="34" charset="-122"/>
                 <a:cs typeface="Arial" pitchFamily="34" charset="-120"/>
               </a:rPr>
-              <a:t>レビュー総数：137件（6サイト）</a:t>
+              <a:t>レビュー総数：73件（6サイト）</a:t>
             </a:r>
             <a:endParaRPr lang="en-US" sz="1000" dirty="0"/>
           </a:p>
@@ -2801,7 +2784,7 @@
                 <a:ea typeface="Arial" pitchFamily="34" charset="-122"/>
                 <a:cs typeface="Arial" pitchFamily="34" charset="-120"/>
               </a:rPr>
-              <a:t>作成日：2026年4月2日</a:t>
+              <a:t>作成日：2026年4月5日</a:t>
             </a:r>
             <a:endParaRPr lang="en-US" sz="1000" dirty="0"/>
           </a:p>
@@ -3347,7 +3330,7 @@
                           <a:ea typeface="Arial" pitchFamily="34" charset="-122"/>
                           <a:cs typeface="Arial" pitchFamily="34" charset="-120"/>
                         </a:rPr>
-                        <a:t>8.15点</a:t>
+                        <a:t>8.25点</a:t>
                       </a:r>
                       <a:endParaRPr lang="en-US" sz="1000" dirty="0">
                         <a:latin typeface="Arial" charset="0"/>
@@ -3415,7 +3398,7 @@
                           <a:ea typeface="Arial" pitchFamily="34" charset="-122"/>
                           <a:cs typeface="Arial" pitchFamily="34" charset="-120"/>
                         </a:rPr>
-                        <a:t>8.5点以上</a:t>
+                        <a:t>8.6点以上</a:t>
                       </a:r>
                       <a:endParaRPr lang="en-US" sz="1000" dirty="0">
                         <a:latin typeface="Arial" charset="0"/>
@@ -3895,7 +3878,7 @@
                           <a:ea typeface="Arial" pitchFamily="34" charset="-122"/>
                           <a:cs typeface="Arial" pitchFamily="34" charset="-120"/>
                         </a:rPr>
-                        <a:t>7.3%</a:t>
+                        <a:t>1.4%</a:t>
                       </a:r>
                       <a:endParaRPr lang="en-US" sz="1000" dirty="0">
                         <a:latin typeface="Arial" charset="0"/>
@@ -3963,7 +3946,7 @@
                           <a:ea typeface="Arial" pitchFamily="34" charset="-122"/>
                           <a:cs typeface="Arial" pitchFamily="34" charset="-120"/>
                         </a:rPr>
-                        <a:t>4%以下</a:t>
+                        <a:t>0%維持</a:t>
                       </a:r>
                       <a:endParaRPr lang="en-US" sz="1000" dirty="0">
                         <a:latin typeface="Arial" charset="0"/>
@@ -4101,7 +4084,7 @@
                           <a:ea typeface="Arial" pitchFamily="34" charset="-122"/>
                           <a:cs typeface="Arial" pitchFamily="34" charset="-120"/>
                         </a:rPr>
-                        <a:t>Agoda平均評価</a:t>
+                        <a:t>Google平均評価</a:t>
                       </a:r>
                       <a:endParaRPr lang="en-US" sz="1000" dirty="0">
                         <a:latin typeface="Arial" charset="0"/>
@@ -4237,7 +4220,7 @@
                           <a:ea typeface="Arial" pitchFamily="34" charset="-122"/>
                           <a:cs typeface="Arial" pitchFamily="34" charset="-120"/>
                         </a:rPr>
-                        <a:t>8.5点以上</a:t>
+                        <a:t>8.4点以上</a:t>
                       </a:r>
                       <a:endParaRPr lang="en-US" sz="1000" dirty="0">
                         <a:latin typeface="Arial" charset="0"/>
@@ -4717,7 +4700,7 @@
                           <a:ea typeface="Arial" pitchFamily="34" charset="-122"/>
                           <a:cs typeface="Arial" pitchFamily="34" charset="-120"/>
                         </a:rPr>
-                        <a:t>約29件/期間</a:t>
+                        <a:t>約14件/期間</a:t>
                       </a:r>
                       <a:endParaRPr lang="en-US" sz="1000" dirty="0">
                         <a:latin typeface="Arial" charset="0"/>
@@ -4785,7 +4768,7 @@
                           <a:ea typeface="Arial" pitchFamily="34" charset="-122"/>
                           <a:cs typeface="Arial" pitchFamily="34" charset="-120"/>
                         </a:rPr>
-                        <a:t>14件以下</a:t>
+                        <a:t>7件以下</a:t>
                       </a:r>
                       <a:endParaRPr lang="en-US" sz="1000" dirty="0">
                         <a:latin typeface="Arial" charset="0"/>
@@ -5356,7 +5339,7 @@
                 <a:ea typeface="Arial" pitchFamily="34" charset="-122"/>
                 <a:cs typeface="Arial" pitchFamily="34" charset="-120"/>
               </a:rPr>
-              <a:t>8.15</a:t>
+              <a:t>8.25</a:t>
             </a:r>
             <a:endParaRPr lang="en-US" sz="3200" dirty="0"/>
           </a:p>
@@ -5529,7 +5512,7 @@
             <a:avLst/>
           </a:prstGeom>
           <a:solidFill>
-            <a:srgbClr val="DC2626"/>
+            <a:srgbClr val="16A34A"/>
           </a:solidFill>
           <a:ln/>
         </p:spPr>
@@ -5600,13 +5583,13 @@
             <a:r>
               <a:rPr lang="en-US" sz="3200" b="1" dirty="0">
                 <a:solidFill>
-                  <a:srgbClr val="DC2626"/>
+                  <a:srgbClr val="16A34A"/>
                 </a:solidFill>
                 <a:latin typeface="Arial" pitchFamily="34" charset="0"/>
                 <a:ea typeface="Arial" pitchFamily="34" charset="-122"/>
                 <a:cs typeface="Arial" pitchFamily="34" charset="-120"/>
               </a:rPr>
-              <a:t>7.3%</a:t>
+              <a:t>1.4%</a:t>
             </a:r>
             <a:endParaRPr lang="en-US" sz="3200" dirty="0"/>
           </a:p>
@@ -5731,7 +5714,7 @@
                 <a:ea typeface="Arial" pitchFamily="34" charset="-122"/>
                 <a:cs typeface="Arial" pitchFamily="34" charset="-120"/>
               </a:rPr>
-              <a:t>137件</a:t>
+              <a:t>73件</a:t>
             </a:r>
             <a:endParaRPr lang="en-US" sz="3200" dirty="0"/>
           </a:p>
@@ -5879,7 +5862,7 @@
                 <a:ea typeface="Arial" pitchFamily="34" charset="-122"/>
                 <a:cs typeface="Arial" pitchFamily="34" charset="-120"/>
               </a:rPr>
-              <a:t>  La ubicación del alojamiento es buena porque se encuentra...</a:t>
+              <a:t>  The location is great next to a subway station, staff are...</a:t>
             </a:r>
             <a:endParaRPr lang="en-US" sz="1100" dirty="0"/>
           </a:p>
@@ -5919,7 +5902,7 @@
                 <a:ea typeface="Arial" pitchFamily="34" charset="-122"/>
                 <a:cs typeface="Arial" pitchFamily="34" charset="-120"/>
               </a:rPr>
-              <a:t>  必要なものはすべて揃っていて、紅茶、コーヒー、浄水器、ランドリー、素晴らしいシャワーなど、スタッフもサービスも最高...</a:t>
+              <a:t>  The location is great next to a subway station, staff are...</a:t>
             </a:r>
             <a:endParaRPr lang="en-US" sz="1100" dirty="0"/>
           </a:p>
@@ -6107,7 +6090,47 @@
                 <a:ea typeface="Arial" pitchFamily="34" charset="-122"/>
                 <a:cs typeface="Arial" pitchFamily="34" charset="-120"/>
               </a:rPr>
-              <a:t>  La ubicación del alojamiento es buena porque se encuentra...</a:t>
+              <a:t>  The location is great next to a subway station, staff are...</a:t>
+            </a:r>
+            <a:endParaRPr lang="en-US" sz="1100" dirty="0"/>
+          </a:p>
+          <a:p>
+            <a:pPr indent="0" marL="0">
+              <a:spcAft>
+                <a:spcPts val="200"/>
+              </a:spcAft>
+              <a:buNone/>
+            </a:pPr>
+            <a:r>
+              <a:rPr lang="en-US" sz="1100" b="1" dirty="0">
+                <a:solidFill>
+                  <a:srgbClr val="334155"/>
+                </a:solidFill>
+                <a:latin typeface="Arial" pitchFamily="34" charset="0"/>
+                <a:ea typeface="Arial" pitchFamily="34" charset="-122"/>
+                <a:cs typeface="Arial" pitchFamily="34" charset="-120"/>
+              </a:rPr>
+              <a:t>部屋の狭さ </a:t>
+            </a:r>
+            <a:endParaRPr lang="en-US" sz="1100" dirty="0"/>
+          </a:p>
+          <a:p>
+            <a:pPr indent="0" marL="0">
+              <a:spcAft>
+                <a:spcPts val="200"/>
+              </a:spcAft>
+              <a:buNone/>
+            </a:pPr>
+            <a:r>
+              <a:rPr lang="en-US" sz="900" dirty="0">
+                <a:solidFill>
+                  <a:srgbClr val="64748B"/>
+                </a:solidFill>
+                <a:latin typeface="Arial" pitchFamily="34" charset="0"/>
+                <a:ea typeface="Arial" pitchFamily="34" charset="-122"/>
+                <a:cs typeface="Arial" pitchFamily="34" charset="-120"/>
+              </a:rPr>
+              <a:t>  , great staff and service, just the room's are just too s...</a:t>
             </a:r>
             <a:endParaRPr lang="en-US" sz="1100" dirty="0"/>
           </a:p>
@@ -6148,46 +6171,6 @@
                 <a:cs typeface="Arial" pitchFamily="34" charset="-120"/>
               </a:rPr>
               <a:t>  必要なものはすべて揃っていて、紅茶、コーヒー、浄水器、ランドリー、素晴らしいシャワーなど、スタッフもサービスも最高...</a:t>
-            </a:r>
-            <a:endParaRPr lang="en-US" sz="1100" dirty="0"/>
-          </a:p>
-          <a:p>
-            <a:pPr indent="0" marL="0">
-              <a:spcAft>
-                <a:spcPts val="200"/>
-              </a:spcAft>
-              <a:buNone/>
-            </a:pPr>
-            <a:r>
-              <a:rPr lang="en-US" sz="1100" b="1" dirty="0">
-                <a:solidFill>
-                  <a:srgbClr val="334155"/>
-                </a:solidFill>
-                <a:latin typeface="Arial" pitchFamily="34" charset="0"/>
-                <a:ea typeface="Arial" pitchFamily="34" charset="-122"/>
-                <a:cs typeface="Arial" pitchFamily="34" charset="-120"/>
-              </a:rPr>
-              <a:t>部屋の狭さ </a:t>
-            </a:r>
-            <a:endParaRPr lang="en-US" sz="1100" dirty="0"/>
-          </a:p>
-          <a:p>
-            <a:pPr indent="0" marL="0">
-              <a:spcAft>
-                <a:spcPts val="200"/>
-              </a:spcAft>
-              <a:buNone/>
-            </a:pPr>
-            <a:r>
-              <a:rPr lang="en-US" sz="900" dirty="0">
-                <a:solidFill>
-                  <a:srgbClr val="64748B"/>
-                </a:solidFill>
-                <a:latin typeface="Arial" pitchFamily="34" charset="0"/>
-                <a:ea typeface="Arial" pitchFamily="34" charset="-122"/>
-                <a:cs typeface="Arial" pitchFamily="34" charset="-120"/>
-              </a:rPr>
-              <a:t>  , great staff and service, just the room's are just too s...</a:t>
             </a:r>
             <a:endParaRPr lang="en-US" sz="1100" dirty="0"/>
           </a:p>
@@ -6540,7 +6523,7 @@
                 <a:ea typeface="Arial" pitchFamily="34" charset="-122"/>
                 <a:cs typeface="Arial" pitchFamily="34" charset="-120"/>
               </a:rPr>
-              <a:t>8.15</a:t>
+              <a:t>8.25</a:t>
             </a:r>
             <a:endParaRPr lang="en-US" sz="3200" dirty="0"/>
           </a:p>
@@ -6713,7 +6696,7 @@
             <a:avLst/>
           </a:prstGeom>
           <a:solidFill>
-            <a:srgbClr val="DC2626"/>
+            <a:srgbClr val="16A34A"/>
           </a:solidFill>
           <a:ln/>
         </p:spPr>
@@ -6784,13 +6767,13 @@
             <a:r>
               <a:rPr lang="en-US" sz="3200" b="1" dirty="0">
                 <a:solidFill>
-                  <a:srgbClr val="DC2626"/>
+                  <a:srgbClr val="16A34A"/>
                 </a:solidFill>
                 <a:latin typeface="Arial" pitchFamily="34" charset="0"/>
                 <a:ea typeface="Arial" pitchFamily="34" charset="-122"/>
                 <a:cs typeface="Arial" pitchFamily="34" charset="-120"/>
               </a:rPr>
-              <a:t>7.3%</a:t>
+              <a:t>1.4%</a:t>
             </a:r>
             <a:endParaRPr lang="en-US" sz="3200" dirty="0"/>
           </a:p>
@@ -6915,7 +6898,7 @@
                 <a:ea typeface="Arial" pitchFamily="34" charset="-122"/>
                 <a:cs typeface="Arial" pitchFamily="34" charset="-120"/>
               </a:rPr>
-              <a:t>137件</a:t>
+              <a:t>73件</a:t>
             </a:r>
             <a:endParaRPr lang="en-US" sz="3200" dirty="0"/>
           </a:p>
@@ -7385,7 +7368,7 @@
                 <a:ea typeface="Arial" pitchFamily="34" charset="-122"/>
                 <a:cs typeface="Arial" pitchFamily="34" charset="-120"/>
               </a:rPr>
-              <a:t>Agoda(7.5)が相対的に低い。口コミ返信の強化が急務</a:t>
+              <a:t>Google(7.5)が相対的に低い。口コミ返信の強化が急務</a:t>
             </a:r>
             <a:endParaRPr lang="en-US" sz="1100" dirty="0"/>
           </a:p>
@@ -8236,7 +8219,7 @@
                           <a:ea typeface="Arial" pitchFamily="34" charset="-122"/>
                           <a:cs typeface="Arial" pitchFamily="34" charset="-120"/>
                         </a:rPr>
-                        <a:t>12</a:t>
+                        <a:t>7</a:t>
                       </a:r>
                       <a:endParaRPr lang="en-US" sz="900" dirty="0">
                         <a:latin typeface="Arial" charset="0"/>
@@ -8304,7 +8287,7 @@
                           <a:ea typeface="Arial" pitchFamily="34" charset="-122"/>
                           <a:cs typeface="Arial" pitchFamily="34" charset="-120"/>
                         </a:rPr>
-                        <a:t>9.58</a:t>
+                        <a:t>9.57</a:t>
                       </a:r>
                       <a:endParaRPr lang="en-US" sz="900" dirty="0">
                         <a:latin typeface="Arial" charset="0"/>
@@ -8440,7 +8423,7 @@
                           <a:ea typeface="Arial" pitchFamily="34" charset="-122"/>
                           <a:cs typeface="Arial" pitchFamily="34" charset="-120"/>
                         </a:rPr>
-                        <a:t>9.58</a:t>
+                        <a:t>9.57</a:t>
                       </a:r>
                       <a:endParaRPr lang="en-US" sz="900" dirty="0">
                         <a:latin typeface="Arial" charset="0"/>
@@ -8578,7 +8561,7 @@
                           <a:ea typeface="Arial" pitchFamily="34" charset="-122"/>
                           <a:cs typeface="Arial" pitchFamily="34" charset="-120"/>
                         </a:rPr>
-                        <a:t>16</a:t>
+                        <a:t>10</a:t>
                       </a:r>
                       <a:endParaRPr lang="en-US" sz="900" dirty="0">
                         <a:latin typeface="Arial" charset="0"/>
@@ -8646,7 +8629,7 @@
                           <a:ea typeface="Arial" pitchFamily="34" charset="-122"/>
                           <a:cs typeface="Arial" pitchFamily="34" charset="-120"/>
                         </a:rPr>
-                        <a:t>4.25</a:t>
+                        <a:t>4.5</a:t>
                       </a:r>
                       <a:endParaRPr lang="en-US" sz="900" dirty="0">
                         <a:latin typeface="Arial" charset="0"/>
@@ -8782,7 +8765,7 @@
                           <a:ea typeface="Arial" pitchFamily="34" charset="-122"/>
                           <a:cs typeface="Arial" pitchFamily="34" charset="-120"/>
                         </a:rPr>
-                        <a:t>8.5</a:t>
+                        <a:t>9</a:t>
                       </a:r>
                       <a:endParaRPr lang="en-US" sz="900" dirty="0">
                         <a:latin typeface="Arial" charset="0"/>
@@ -8920,7 +8903,7 @@
                           <a:ea typeface="Arial" pitchFamily="34" charset="-122"/>
                           <a:cs typeface="Arial" pitchFamily="34" charset="-120"/>
                         </a:rPr>
-                        <a:t>65</a:t>
+                        <a:t>38</a:t>
                       </a:r>
                       <a:endParaRPr lang="en-US" sz="900" dirty="0">
                         <a:latin typeface="Arial" charset="0"/>
@@ -8988,7 +8971,7 @@
                           <a:ea typeface="Arial" pitchFamily="34" charset="-122"/>
                           <a:cs typeface="Arial" pitchFamily="34" charset="-120"/>
                         </a:rPr>
-                        <a:t>8.2</a:t>
+                        <a:t>8.11</a:t>
                       </a:r>
                       <a:endParaRPr lang="en-US" sz="900" dirty="0">
                         <a:latin typeface="Arial" charset="0"/>
@@ -9124,7 +9107,7 @@
                           <a:ea typeface="Arial" pitchFamily="34" charset="-122"/>
                           <a:cs typeface="Arial" pitchFamily="34" charset="-120"/>
                         </a:rPr>
-                        <a:t>8.2</a:t>
+                        <a:t>8.11</a:t>
                       </a:r>
                       <a:endParaRPr lang="en-US" sz="900" dirty="0">
                         <a:latin typeface="Arial" charset="0"/>
@@ -9172,6 +9155,348 @@
                     </a:lnB>
                     <a:solidFill>
                       <a:srgbClr val="FFFFFF"/>
+                    </a:solidFill>
+                  </a:tcPr>
+                </a:tc>
+              </a:tr>
+              <a:tr h="201168">
+                <a:tc>
+                  <a:txBody>
+                    <a:bodyPr/>
+                    <a:lstStyle/>
+                    <a:p>
+                      <a:pPr algn="ctr" indent="0" marL="0">
+                        <a:buNone/>
+                      </a:pPr>
+                      <a:r>
+                        <a:rPr lang="en-US" sz="900" dirty="0">
+                          <a:solidFill>
+                            <a:srgbClr val="000000"/>
+                          </a:solidFill>
+                          <a:latin typeface="Arial" pitchFamily="34" charset="0"/>
+                          <a:ea typeface="Arial" pitchFamily="34" charset="-122"/>
+                          <a:cs typeface="Arial" pitchFamily="34" charset="-120"/>
+                        </a:rPr>
+                        <a:t>Agoda</a:t>
+                      </a:r>
+                      <a:endParaRPr lang="en-US" sz="900" dirty="0">
+                        <a:latin typeface="Arial" charset="0"/>
+                        <a:ea typeface="Arial" charset="0"/>
+                        <a:cs typeface="Arial" charset="0"/>
+                      </a:endParaRPr>
+                    </a:p>
+                  </a:txBody>
+                  <a:tcPr marL="91440" marR="91440" marT="45720" marB="45720">
+                    <a:lnL w="6350" cap="flat" cmpd="sng" algn="ctr">
+                      <a:solidFill>
+                        <a:srgbClr val="CBD5E1"/>
+                      </a:solidFill>
+                      <a:prstDash val="solid"/>
+                      <a:round/>
+                      <a:headEnd type="none" w="med" len="med"/>
+                      <a:tailEnd type="none" w="med" len="med"/>
+                    </a:lnL>
+                    <a:lnR w="6350" cap="flat" cmpd="sng" algn="ctr">
+                      <a:solidFill>
+                        <a:srgbClr val="CBD5E1"/>
+                      </a:solidFill>
+                      <a:prstDash val="solid"/>
+                      <a:round/>
+                      <a:headEnd type="none" w="med" len="med"/>
+                      <a:tailEnd type="none" w="med" len="med"/>
+                    </a:lnR>
+                    <a:lnT w="6350" cap="flat" cmpd="sng" algn="ctr">
+                      <a:solidFill>
+                        <a:srgbClr val="CBD5E1"/>
+                      </a:solidFill>
+                      <a:prstDash val="solid"/>
+                      <a:round/>
+                      <a:headEnd type="none" w="med" len="med"/>
+                      <a:tailEnd type="none" w="med" len="med"/>
+                    </a:lnT>
+                    <a:lnB w="6350" cap="flat" cmpd="sng" algn="ctr">
+                      <a:solidFill>
+                        <a:srgbClr val="CBD5E1"/>
+                      </a:solidFill>
+                      <a:prstDash val="solid"/>
+                      <a:round/>
+                      <a:headEnd type="none" w="med" len="med"/>
+                      <a:tailEnd type="none" w="med" len="med"/>
+                    </a:lnB>
+                    <a:solidFill>
+                      <a:srgbClr val="E8EFF8"/>
+                    </a:solidFill>
+                  </a:tcPr>
+                </a:tc>
+                <a:tc>
+                  <a:txBody>
+                    <a:bodyPr/>
+                    <a:lstStyle/>
+                    <a:p>
+                      <a:pPr algn="ctr" indent="0" marL="0">
+                        <a:buNone/>
+                      </a:pPr>
+                      <a:r>
+                        <a:rPr lang="en-US" sz="900" dirty="0">
+                          <a:solidFill>
+                            <a:srgbClr val="000000"/>
+                          </a:solidFill>
+                          <a:latin typeface="Arial" pitchFamily="34" charset="0"/>
+                          <a:ea typeface="Arial" pitchFamily="34" charset="-122"/>
+                          <a:cs typeface="Arial" pitchFamily="34" charset="-120"/>
+                        </a:rPr>
+                        <a:t>6</a:t>
+                      </a:r>
+                      <a:endParaRPr lang="en-US" sz="900" dirty="0">
+                        <a:latin typeface="Arial" charset="0"/>
+                        <a:ea typeface="Arial" charset="0"/>
+                        <a:cs typeface="Arial" charset="0"/>
+                      </a:endParaRPr>
+                    </a:p>
+                  </a:txBody>
+                  <a:tcPr marL="91440" marR="91440" marT="45720" marB="45720">
+                    <a:lnL w="6350" cap="flat" cmpd="sng" algn="ctr">
+                      <a:solidFill>
+                        <a:srgbClr val="CBD5E1"/>
+                      </a:solidFill>
+                      <a:prstDash val="solid"/>
+                      <a:round/>
+                      <a:headEnd type="none" w="med" len="med"/>
+                      <a:tailEnd type="none" w="med" len="med"/>
+                    </a:lnL>
+                    <a:lnR w="6350" cap="flat" cmpd="sng" algn="ctr">
+                      <a:solidFill>
+                        <a:srgbClr val="CBD5E1"/>
+                      </a:solidFill>
+                      <a:prstDash val="solid"/>
+                      <a:round/>
+                      <a:headEnd type="none" w="med" len="med"/>
+                      <a:tailEnd type="none" w="med" len="med"/>
+                    </a:lnR>
+                    <a:lnT w="6350" cap="flat" cmpd="sng" algn="ctr">
+                      <a:solidFill>
+                        <a:srgbClr val="CBD5E1"/>
+                      </a:solidFill>
+                      <a:prstDash val="solid"/>
+                      <a:round/>
+                      <a:headEnd type="none" w="med" len="med"/>
+                      <a:tailEnd type="none" w="med" len="med"/>
+                    </a:lnT>
+                    <a:lnB w="6350" cap="flat" cmpd="sng" algn="ctr">
+                      <a:solidFill>
+                        <a:srgbClr val="CBD5E1"/>
+                      </a:solidFill>
+                      <a:prstDash val="solid"/>
+                      <a:round/>
+                      <a:headEnd type="none" w="med" len="med"/>
+                      <a:tailEnd type="none" w="med" len="med"/>
+                    </a:lnB>
+                    <a:solidFill>
+                      <a:srgbClr val="E8EFF8"/>
+                    </a:solidFill>
+                  </a:tcPr>
+                </a:tc>
+                <a:tc>
+                  <a:txBody>
+                    <a:bodyPr/>
+                    <a:lstStyle/>
+                    <a:p>
+                      <a:pPr algn="ctr" indent="0" marL="0">
+                        <a:buNone/>
+                      </a:pPr>
+                      <a:r>
+                        <a:rPr lang="en-US" sz="900" dirty="0">
+                          <a:solidFill>
+                            <a:srgbClr val="000000"/>
+                          </a:solidFill>
+                          <a:latin typeface="Arial" pitchFamily="34" charset="0"/>
+                          <a:ea typeface="Arial" pitchFamily="34" charset="-122"/>
+                          <a:cs typeface="Arial" pitchFamily="34" charset="-120"/>
+                        </a:rPr>
+                        <a:t>7.5</a:t>
+                      </a:r>
+                      <a:endParaRPr lang="en-US" sz="900" dirty="0">
+                        <a:latin typeface="Arial" charset="0"/>
+                        <a:ea typeface="Arial" charset="0"/>
+                        <a:cs typeface="Arial" charset="0"/>
+                      </a:endParaRPr>
+                    </a:p>
+                  </a:txBody>
+                  <a:tcPr marL="91440" marR="91440" marT="45720" marB="45720">
+                    <a:lnL w="6350" cap="flat" cmpd="sng" algn="ctr">
+                      <a:solidFill>
+                        <a:srgbClr val="CBD5E1"/>
+                      </a:solidFill>
+                      <a:prstDash val="solid"/>
+                      <a:round/>
+                      <a:headEnd type="none" w="med" len="med"/>
+                      <a:tailEnd type="none" w="med" len="med"/>
+                    </a:lnL>
+                    <a:lnR w="6350" cap="flat" cmpd="sng" algn="ctr">
+                      <a:solidFill>
+                        <a:srgbClr val="CBD5E1"/>
+                      </a:solidFill>
+                      <a:prstDash val="solid"/>
+                      <a:round/>
+                      <a:headEnd type="none" w="med" len="med"/>
+                      <a:tailEnd type="none" w="med" len="med"/>
+                    </a:lnR>
+                    <a:lnT w="6350" cap="flat" cmpd="sng" algn="ctr">
+                      <a:solidFill>
+                        <a:srgbClr val="CBD5E1"/>
+                      </a:solidFill>
+                      <a:prstDash val="solid"/>
+                      <a:round/>
+                      <a:headEnd type="none" w="med" len="med"/>
+                      <a:tailEnd type="none" w="med" len="med"/>
+                    </a:lnT>
+                    <a:lnB w="6350" cap="flat" cmpd="sng" algn="ctr">
+                      <a:solidFill>
+                        <a:srgbClr val="CBD5E1"/>
+                      </a:solidFill>
+                      <a:prstDash val="solid"/>
+                      <a:round/>
+                      <a:headEnd type="none" w="med" len="med"/>
+                      <a:tailEnd type="none" w="med" len="med"/>
+                    </a:lnB>
+                    <a:solidFill>
+                      <a:srgbClr val="E8EFF8"/>
+                    </a:solidFill>
+                  </a:tcPr>
+                </a:tc>
+                <a:tc>
+                  <a:txBody>
+                    <a:bodyPr/>
+                    <a:lstStyle/>
+                    <a:p>
+                      <a:pPr algn="ctr" indent="0" marL="0">
+                        <a:buNone/>
+                      </a:pPr>
+                      <a:r>
+                        <a:rPr lang="en-US" sz="900" dirty="0">
+                          <a:solidFill>
+                            <a:srgbClr val="000000"/>
+                          </a:solidFill>
+                          <a:latin typeface="Arial" pitchFamily="34" charset="0"/>
+                          <a:ea typeface="Arial" pitchFamily="34" charset="-122"/>
+                          <a:cs typeface="Arial" pitchFamily="34" charset="-120"/>
+                        </a:rPr>
+                        <a:t>/10</a:t>
+                      </a:r>
+                      <a:endParaRPr lang="en-US" sz="900" dirty="0">
+                        <a:latin typeface="Arial" charset="0"/>
+                        <a:ea typeface="Arial" charset="0"/>
+                        <a:cs typeface="Arial" charset="0"/>
+                      </a:endParaRPr>
+                    </a:p>
+                  </a:txBody>
+                  <a:tcPr marL="91440" marR="91440" marT="45720" marB="45720">
+                    <a:lnL w="6350" cap="flat" cmpd="sng" algn="ctr">
+                      <a:solidFill>
+                        <a:srgbClr val="CBD5E1"/>
+                      </a:solidFill>
+                      <a:prstDash val="solid"/>
+                      <a:round/>
+                      <a:headEnd type="none" w="med" len="med"/>
+                      <a:tailEnd type="none" w="med" len="med"/>
+                    </a:lnL>
+                    <a:lnR w="6350" cap="flat" cmpd="sng" algn="ctr">
+                      <a:solidFill>
+                        <a:srgbClr val="CBD5E1"/>
+                      </a:solidFill>
+                      <a:prstDash val="solid"/>
+                      <a:round/>
+                      <a:headEnd type="none" w="med" len="med"/>
+                      <a:tailEnd type="none" w="med" len="med"/>
+                    </a:lnR>
+                    <a:lnT w="6350" cap="flat" cmpd="sng" algn="ctr">
+                      <a:solidFill>
+                        <a:srgbClr val="CBD5E1"/>
+                      </a:solidFill>
+                      <a:prstDash val="solid"/>
+                      <a:round/>
+                      <a:headEnd type="none" w="med" len="med"/>
+                      <a:tailEnd type="none" w="med" len="med"/>
+                    </a:lnT>
+                    <a:lnB w="6350" cap="flat" cmpd="sng" algn="ctr">
+                      <a:solidFill>
+                        <a:srgbClr val="CBD5E1"/>
+                      </a:solidFill>
+                      <a:prstDash val="solid"/>
+                      <a:round/>
+                      <a:headEnd type="none" w="med" len="med"/>
+                      <a:tailEnd type="none" w="med" len="med"/>
+                    </a:lnB>
+                    <a:solidFill>
+                      <a:srgbClr val="E8EFF8"/>
+                    </a:solidFill>
+                  </a:tcPr>
+                </a:tc>
+                <a:tc>
+                  <a:txBody>
+                    <a:bodyPr/>
+                    <a:lstStyle/>
+                    <a:p>
+                      <a:pPr algn="ctr" indent="0" marL="0">
+                        <a:buNone/>
+                      </a:pPr>
+                      <a:r>
+                        <a:rPr lang="en-US" sz="900" dirty="0">
+                          <a:solidFill>
+                            <a:srgbClr val="000000"/>
+                          </a:solidFill>
+                          <a:latin typeface="Arial" pitchFamily="34" charset="0"/>
+                          <a:ea typeface="Arial" pitchFamily="34" charset="-122"/>
+                          <a:cs typeface="Arial" pitchFamily="34" charset="-120"/>
+                        </a:rPr>
+                        <a:t>7.5</a:t>
+                      </a:r>
+                      <a:endParaRPr lang="en-US" sz="900" dirty="0">
+                        <a:latin typeface="Arial" charset="0"/>
+                        <a:ea typeface="Arial" charset="0"/>
+                        <a:cs typeface="Arial" charset="0"/>
+                      </a:endParaRPr>
+                    </a:p>
+                  </a:txBody>
+                  <a:tcPr marL="91440" marR="91440" marT="45720" marB="45720">
+                    <a:lnL w="6350" cap="flat" cmpd="sng" algn="ctr">
+                      <a:solidFill>
+                        <a:srgbClr val="CBD5E1"/>
+                      </a:solidFill>
+                      <a:prstDash val="solid"/>
+                      <a:round/>
+                      <a:headEnd type="none" w="med" len="med"/>
+                      <a:tailEnd type="none" w="med" len="med"/>
+                    </a:lnL>
+                    <a:lnR w="6350" cap="flat" cmpd="sng" algn="ctr">
+                      <a:solidFill>
+                        <a:srgbClr val="CBD5E1"/>
+                      </a:solidFill>
+                      <a:prstDash val="solid"/>
+                      <a:round/>
+                      <a:headEnd type="none" w="med" len="med"/>
+                      <a:tailEnd type="none" w="med" len="med"/>
+                    </a:lnR>
+                    <a:lnT w="6350" cap="flat" cmpd="sng" algn="ctr">
+                      <a:solidFill>
+                        <a:srgbClr val="CBD5E1"/>
+                      </a:solidFill>
+                      <a:prstDash val="solid"/>
+                      <a:round/>
+                      <a:headEnd type="none" w="med" len="med"/>
+                      <a:tailEnd type="none" w="med" len="med"/>
+                    </a:lnT>
+                    <a:lnB w="6350" cap="flat" cmpd="sng" algn="ctr">
+                      <a:solidFill>
+                        <a:srgbClr val="CBD5E1"/>
+                      </a:solidFill>
+                      <a:prstDash val="solid"/>
+                      <a:round/>
+                      <a:headEnd type="none" w="med" len="med"/>
+                      <a:tailEnd type="none" w="med" len="med"/>
+                    </a:lnB>
+                    <a:solidFill>
+                      <a:srgbClr val="E8EFF8"/>
                     </a:solidFill>
                   </a:tcPr>
                 </a:tc>
@@ -9241,7 +9566,7 @@
                       <a:tailEnd type="none" w="med" len="med"/>
                     </a:lnB>
                     <a:solidFill>
-                      <a:srgbClr val="E8EFF8"/>
+                      <a:srgbClr val="FFFFFF"/>
                     </a:solidFill>
                   </a:tcPr>
                 </a:tc>
@@ -9262,7 +9587,7 @@
                           <a:ea typeface="Arial" pitchFamily="34" charset="-122"/>
                           <a:cs typeface="Arial" pitchFamily="34" charset="-120"/>
                         </a:rPr>
-                        <a:t>37</a:t>
+                        <a:t>11</a:t>
                       </a:r>
                       <a:endParaRPr lang="en-US" sz="900" dirty="0">
                         <a:latin typeface="Arial" charset="0"/>
@@ -9309,7 +9634,7 @@
                       <a:tailEnd type="none" w="med" len="med"/>
                     </a:lnB>
                     <a:solidFill>
-                      <a:srgbClr val="E8EFF8"/>
+                      <a:srgbClr val="FFFFFF"/>
                     </a:solidFill>
                   </a:tcPr>
                 </a:tc>
@@ -9330,7 +9655,7 @@
                           <a:ea typeface="Arial" pitchFamily="34" charset="-122"/>
                           <a:cs typeface="Arial" pitchFamily="34" charset="-120"/>
                         </a:rPr>
-                        <a:t>3.76</a:t>
+                        <a:t>3.73</a:t>
                       </a:r>
                       <a:endParaRPr lang="en-US" sz="900" dirty="0">
                         <a:latin typeface="Arial" charset="0"/>
@@ -9377,7 +9702,7 @@
                       <a:tailEnd type="none" w="med" len="med"/>
                     </a:lnB>
                     <a:solidFill>
-                      <a:srgbClr val="E8EFF8"/>
+                      <a:srgbClr val="FFFFFF"/>
                     </a:solidFill>
                   </a:tcPr>
                 </a:tc>
@@ -9445,144 +9770,6 @@
                       <a:tailEnd type="none" w="med" len="med"/>
                     </a:lnB>
                     <a:solidFill>
-                      <a:srgbClr val="E8EFF8"/>
-                    </a:solidFill>
-                  </a:tcPr>
-                </a:tc>
-                <a:tc>
-                  <a:txBody>
-                    <a:bodyPr/>
-                    <a:lstStyle/>
-                    <a:p>
-                      <a:pPr algn="ctr" indent="0" marL="0">
-                        <a:buNone/>
-                      </a:pPr>
-                      <a:r>
-                        <a:rPr lang="en-US" sz="900" dirty="0">
-                          <a:solidFill>
-                            <a:srgbClr val="000000"/>
-                          </a:solidFill>
-                          <a:latin typeface="Arial" pitchFamily="34" charset="0"/>
-                          <a:ea typeface="Arial" pitchFamily="34" charset="-122"/>
-                          <a:cs typeface="Arial" pitchFamily="34" charset="-120"/>
-                        </a:rPr>
-                        <a:t>7.51</a:t>
-                      </a:r>
-                      <a:endParaRPr lang="en-US" sz="900" dirty="0">
-                        <a:latin typeface="Arial" charset="0"/>
-                        <a:ea typeface="Arial" charset="0"/>
-                        <a:cs typeface="Arial" charset="0"/>
-                      </a:endParaRPr>
-                    </a:p>
-                  </a:txBody>
-                  <a:tcPr marL="91440" marR="91440" marT="45720" marB="45720">
-                    <a:lnL w="6350" cap="flat" cmpd="sng" algn="ctr">
-                      <a:solidFill>
-                        <a:srgbClr val="CBD5E1"/>
-                      </a:solidFill>
-                      <a:prstDash val="solid"/>
-                      <a:round/>
-                      <a:headEnd type="none" w="med" len="med"/>
-                      <a:tailEnd type="none" w="med" len="med"/>
-                    </a:lnL>
-                    <a:lnR w="6350" cap="flat" cmpd="sng" algn="ctr">
-                      <a:solidFill>
-                        <a:srgbClr val="CBD5E1"/>
-                      </a:solidFill>
-                      <a:prstDash val="solid"/>
-                      <a:round/>
-                      <a:headEnd type="none" w="med" len="med"/>
-                      <a:tailEnd type="none" w="med" len="med"/>
-                    </a:lnR>
-                    <a:lnT w="6350" cap="flat" cmpd="sng" algn="ctr">
-                      <a:solidFill>
-                        <a:srgbClr val="CBD5E1"/>
-                      </a:solidFill>
-                      <a:prstDash val="solid"/>
-                      <a:round/>
-                      <a:headEnd type="none" w="med" len="med"/>
-                      <a:tailEnd type="none" w="med" len="med"/>
-                    </a:lnT>
-                    <a:lnB w="6350" cap="flat" cmpd="sng" algn="ctr">
-                      <a:solidFill>
-                        <a:srgbClr val="CBD5E1"/>
-                      </a:solidFill>
-                      <a:prstDash val="solid"/>
-                      <a:round/>
-                      <a:headEnd type="none" w="med" len="med"/>
-                      <a:tailEnd type="none" w="med" len="med"/>
-                    </a:lnB>
-                    <a:solidFill>
-                      <a:srgbClr val="E8EFF8"/>
-                    </a:solidFill>
-                  </a:tcPr>
-                </a:tc>
-              </a:tr>
-              <a:tr h="201168">
-                <a:tc>
-                  <a:txBody>
-                    <a:bodyPr/>
-                    <a:lstStyle/>
-                    <a:p>
-                      <a:pPr algn="ctr" indent="0" marL="0">
-                        <a:buNone/>
-                      </a:pPr>
-                      <a:r>
-                        <a:rPr lang="en-US" sz="900" dirty="0">
-                          <a:solidFill>
-                            <a:srgbClr val="000000"/>
-                          </a:solidFill>
-                          <a:latin typeface="Arial" pitchFamily="34" charset="0"/>
-                          <a:ea typeface="Arial" pitchFamily="34" charset="-122"/>
-                          <a:cs typeface="Arial" pitchFamily="34" charset="-120"/>
-                        </a:rPr>
-                        <a:t>Agoda</a:t>
-                      </a:r>
-                      <a:endParaRPr lang="en-US" sz="900" dirty="0">
-                        <a:latin typeface="Arial" charset="0"/>
-                        <a:ea typeface="Arial" charset="0"/>
-                        <a:cs typeface="Arial" charset="0"/>
-                      </a:endParaRPr>
-                    </a:p>
-                  </a:txBody>
-                  <a:tcPr marL="91440" marR="91440" marT="45720" marB="45720">
-                    <a:lnL w="6350" cap="flat" cmpd="sng" algn="ctr">
-                      <a:solidFill>
-                        <a:srgbClr val="CBD5E1"/>
-                      </a:solidFill>
-                      <a:prstDash val="solid"/>
-                      <a:round/>
-                      <a:headEnd type="none" w="med" len="med"/>
-                      <a:tailEnd type="none" w="med" len="med"/>
-                    </a:lnL>
-                    <a:lnR w="6350" cap="flat" cmpd="sng" algn="ctr">
-                      <a:solidFill>
-                        <a:srgbClr val="CBD5E1"/>
-                      </a:solidFill>
-                      <a:prstDash val="solid"/>
-                      <a:round/>
-                      <a:headEnd type="none" w="med" len="med"/>
-                      <a:tailEnd type="none" w="med" len="med"/>
-                    </a:lnR>
-                    <a:lnT w="6350" cap="flat" cmpd="sng" algn="ctr">
-                      <a:solidFill>
-                        <a:srgbClr val="CBD5E1"/>
-                      </a:solidFill>
-                      <a:prstDash val="solid"/>
-                      <a:round/>
-                      <a:headEnd type="none" w="med" len="med"/>
-                      <a:tailEnd type="none" w="med" len="med"/>
-                    </a:lnT>
-                    <a:lnB w="6350" cap="flat" cmpd="sng" algn="ctr">
-                      <a:solidFill>
-                        <a:srgbClr val="CBD5E1"/>
-                      </a:solidFill>
-                      <a:prstDash val="solid"/>
-                      <a:round/>
-                      <a:headEnd type="none" w="med" len="med"/>
-                      <a:tailEnd type="none" w="med" len="med"/>
-                    </a:lnB>
-                    <a:solidFill>
                       <a:srgbClr val="FFFFFF"/>
                     </a:solidFill>
                   </a:tcPr>
@@ -9604,211 +9791,7 @@
                           <a:ea typeface="Arial" pitchFamily="34" charset="-122"/>
                           <a:cs typeface="Arial" pitchFamily="34" charset="-120"/>
                         </a:rPr>
-                        <a:t>6</a:t>
-                      </a:r>
-                      <a:endParaRPr lang="en-US" sz="900" dirty="0">
-                        <a:latin typeface="Arial" charset="0"/>
-                        <a:ea typeface="Arial" charset="0"/>
-                        <a:cs typeface="Arial" charset="0"/>
-                      </a:endParaRPr>
-                    </a:p>
-                  </a:txBody>
-                  <a:tcPr marL="91440" marR="91440" marT="45720" marB="45720">
-                    <a:lnL w="6350" cap="flat" cmpd="sng" algn="ctr">
-                      <a:solidFill>
-                        <a:srgbClr val="CBD5E1"/>
-                      </a:solidFill>
-                      <a:prstDash val="solid"/>
-                      <a:round/>
-                      <a:headEnd type="none" w="med" len="med"/>
-                      <a:tailEnd type="none" w="med" len="med"/>
-                    </a:lnL>
-                    <a:lnR w="6350" cap="flat" cmpd="sng" algn="ctr">
-                      <a:solidFill>
-                        <a:srgbClr val="CBD5E1"/>
-                      </a:solidFill>
-                      <a:prstDash val="solid"/>
-                      <a:round/>
-                      <a:headEnd type="none" w="med" len="med"/>
-                      <a:tailEnd type="none" w="med" len="med"/>
-                    </a:lnR>
-                    <a:lnT w="6350" cap="flat" cmpd="sng" algn="ctr">
-                      <a:solidFill>
-                        <a:srgbClr val="CBD5E1"/>
-                      </a:solidFill>
-                      <a:prstDash val="solid"/>
-                      <a:round/>
-                      <a:headEnd type="none" w="med" len="med"/>
-                      <a:tailEnd type="none" w="med" len="med"/>
-                    </a:lnT>
-                    <a:lnB w="6350" cap="flat" cmpd="sng" algn="ctr">
-                      <a:solidFill>
-                        <a:srgbClr val="CBD5E1"/>
-                      </a:solidFill>
-                      <a:prstDash val="solid"/>
-                      <a:round/>
-                      <a:headEnd type="none" w="med" len="med"/>
-                      <a:tailEnd type="none" w="med" len="med"/>
-                    </a:lnB>
-                    <a:solidFill>
-                      <a:srgbClr val="FFFFFF"/>
-                    </a:solidFill>
-                  </a:tcPr>
-                </a:tc>
-                <a:tc>
-                  <a:txBody>
-                    <a:bodyPr/>
-                    <a:lstStyle/>
-                    <a:p>
-                      <a:pPr algn="ctr" indent="0" marL="0">
-                        <a:buNone/>
-                      </a:pPr>
-                      <a:r>
-                        <a:rPr lang="en-US" sz="900" dirty="0">
-                          <a:solidFill>
-                            <a:srgbClr val="000000"/>
-                          </a:solidFill>
-                          <a:latin typeface="Arial" pitchFamily="34" charset="0"/>
-                          <a:ea typeface="Arial" pitchFamily="34" charset="-122"/>
-                          <a:cs typeface="Arial" pitchFamily="34" charset="-120"/>
-                        </a:rPr>
-                        <a:t>7.5</a:t>
-                      </a:r>
-                      <a:endParaRPr lang="en-US" sz="900" dirty="0">
-                        <a:latin typeface="Arial" charset="0"/>
-                        <a:ea typeface="Arial" charset="0"/>
-                        <a:cs typeface="Arial" charset="0"/>
-                      </a:endParaRPr>
-                    </a:p>
-                  </a:txBody>
-                  <a:tcPr marL="91440" marR="91440" marT="45720" marB="45720">
-                    <a:lnL w="6350" cap="flat" cmpd="sng" algn="ctr">
-                      <a:solidFill>
-                        <a:srgbClr val="CBD5E1"/>
-                      </a:solidFill>
-                      <a:prstDash val="solid"/>
-                      <a:round/>
-                      <a:headEnd type="none" w="med" len="med"/>
-                      <a:tailEnd type="none" w="med" len="med"/>
-                    </a:lnL>
-                    <a:lnR w="6350" cap="flat" cmpd="sng" algn="ctr">
-                      <a:solidFill>
-                        <a:srgbClr val="CBD5E1"/>
-                      </a:solidFill>
-                      <a:prstDash val="solid"/>
-                      <a:round/>
-                      <a:headEnd type="none" w="med" len="med"/>
-                      <a:tailEnd type="none" w="med" len="med"/>
-                    </a:lnR>
-                    <a:lnT w="6350" cap="flat" cmpd="sng" algn="ctr">
-                      <a:solidFill>
-                        <a:srgbClr val="CBD5E1"/>
-                      </a:solidFill>
-                      <a:prstDash val="solid"/>
-                      <a:round/>
-                      <a:headEnd type="none" w="med" len="med"/>
-                      <a:tailEnd type="none" w="med" len="med"/>
-                    </a:lnT>
-                    <a:lnB w="6350" cap="flat" cmpd="sng" algn="ctr">
-                      <a:solidFill>
-                        <a:srgbClr val="CBD5E1"/>
-                      </a:solidFill>
-                      <a:prstDash val="solid"/>
-                      <a:round/>
-                      <a:headEnd type="none" w="med" len="med"/>
-                      <a:tailEnd type="none" w="med" len="med"/>
-                    </a:lnB>
-                    <a:solidFill>
-                      <a:srgbClr val="FFFFFF"/>
-                    </a:solidFill>
-                  </a:tcPr>
-                </a:tc>
-                <a:tc>
-                  <a:txBody>
-                    <a:bodyPr/>
-                    <a:lstStyle/>
-                    <a:p>
-                      <a:pPr algn="ctr" indent="0" marL="0">
-                        <a:buNone/>
-                      </a:pPr>
-                      <a:r>
-                        <a:rPr lang="en-US" sz="900" dirty="0">
-                          <a:solidFill>
-                            <a:srgbClr val="000000"/>
-                          </a:solidFill>
-                          <a:latin typeface="Arial" pitchFamily="34" charset="0"/>
-                          <a:ea typeface="Arial" pitchFamily="34" charset="-122"/>
-                          <a:cs typeface="Arial" pitchFamily="34" charset="-120"/>
-                        </a:rPr>
-                        <a:t>/10</a:t>
-                      </a:r>
-                      <a:endParaRPr lang="en-US" sz="900" dirty="0">
-                        <a:latin typeface="Arial" charset="0"/>
-                        <a:ea typeface="Arial" charset="0"/>
-                        <a:cs typeface="Arial" charset="0"/>
-                      </a:endParaRPr>
-                    </a:p>
-                  </a:txBody>
-                  <a:tcPr marL="91440" marR="91440" marT="45720" marB="45720">
-                    <a:lnL w="6350" cap="flat" cmpd="sng" algn="ctr">
-                      <a:solidFill>
-                        <a:srgbClr val="CBD5E1"/>
-                      </a:solidFill>
-                      <a:prstDash val="solid"/>
-                      <a:round/>
-                      <a:headEnd type="none" w="med" len="med"/>
-                      <a:tailEnd type="none" w="med" len="med"/>
-                    </a:lnL>
-                    <a:lnR w="6350" cap="flat" cmpd="sng" algn="ctr">
-                      <a:solidFill>
-                        <a:srgbClr val="CBD5E1"/>
-                      </a:solidFill>
-                      <a:prstDash val="solid"/>
-                      <a:round/>
-                      <a:headEnd type="none" w="med" len="med"/>
-                      <a:tailEnd type="none" w="med" len="med"/>
-                    </a:lnR>
-                    <a:lnT w="6350" cap="flat" cmpd="sng" algn="ctr">
-                      <a:solidFill>
-                        <a:srgbClr val="CBD5E1"/>
-                      </a:solidFill>
-                      <a:prstDash val="solid"/>
-                      <a:round/>
-                      <a:headEnd type="none" w="med" len="med"/>
-                      <a:tailEnd type="none" w="med" len="med"/>
-                    </a:lnT>
-                    <a:lnB w="6350" cap="flat" cmpd="sng" algn="ctr">
-                      <a:solidFill>
-                        <a:srgbClr val="CBD5E1"/>
-                      </a:solidFill>
-                      <a:prstDash val="solid"/>
-                      <a:round/>
-                      <a:headEnd type="none" w="med" len="med"/>
-                      <a:tailEnd type="none" w="med" len="med"/>
-                    </a:lnB>
-                    <a:solidFill>
-                      <a:srgbClr val="FFFFFF"/>
-                    </a:solidFill>
-                  </a:tcPr>
-                </a:tc>
-                <a:tc>
-                  <a:txBody>
-                    <a:bodyPr/>
-                    <a:lstStyle/>
-                    <a:p>
-                      <a:pPr algn="ctr" indent="0" marL="0">
-                        <a:buNone/>
-                      </a:pPr>
-                      <a:r>
-                        <a:rPr lang="en-US" sz="900" dirty="0">
-                          <a:solidFill>
-                            <a:srgbClr val="000000"/>
-                          </a:solidFill>
-                          <a:latin typeface="Arial" pitchFamily="34" charset="0"/>
-                          <a:ea typeface="Arial" pitchFamily="34" charset="-122"/>
-                          <a:cs typeface="Arial" pitchFamily="34" charset="-120"/>
-                        </a:rPr>
-                        <a:t>7.5</a:t>
+                        <a:t>7.45</a:t>
                       </a:r>
                       <a:endParaRPr lang="en-US" sz="900" dirty="0">
                         <a:latin typeface="Arial" charset="0"/>
@@ -10216,7 +10199,7 @@
                 <a:ea typeface="Arial" pitchFamily="34" charset="-122"/>
                 <a:cs typeface="Arial" pitchFamily="34" charset="-120"/>
               </a:rPr>
-              <a:t>107件（78.1%）</a:t>
+              <a:t>57件（78.1%）</a:t>
             </a:r>
             <a:endParaRPr lang="en-US" sz="1100" dirty="0"/>
           </a:p>
@@ -10314,7 +10297,7 @@
                 <a:ea typeface="Arial" pitchFamily="34" charset="-122"/>
                 <a:cs typeface="Arial" pitchFamily="34" charset="-120"/>
               </a:rPr>
-              <a:t>20件（14.6%）</a:t>
+              <a:t>15件（20.5%）</a:t>
             </a:r>
             <a:endParaRPr lang="en-US" sz="1100" dirty="0"/>
           </a:p>
@@ -10335,7 +10318,7 @@
             <a:avLst/>
           </a:prstGeom>
           <a:solidFill>
-            <a:srgbClr val="FEE2E2"/>
+            <a:srgbClr val="DCFCE7"/>
           </a:solidFill>
           <a:ln/>
         </p:spPr>
@@ -10367,7 +10350,7 @@
             <a:r>
               <a:rPr lang="en-US" sz="1000" b="1" dirty="0">
                 <a:solidFill>
-                  <a:srgbClr val="DC2626"/>
+                  <a:srgbClr val="16A34A"/>
                 </a:solidFill>
                 <a:latin typeface="Arial" pitchFamily="34" charset="0"/>
                 <a:ea typeface="Arial" pitchFamily="34" charset="-122"/>
@@ -10406,13 +10389,13 @@
             <a:r>
               <a:rPr lang="en-US" sz="1100" b="1" dirty="0">
                 <a:solidFill>
-                  <a:srgbClr val="DC2626"/>
+                  <a:srgbClr val="16A34A"/>
                 </a:solidFill>
                 <a:latin typeface="Arial" pitchFamily="34" charset="0"/>
                 <a:ea typeface="Arial" pitchFamily="34" charset="-122"/>
                 <a:cs typeface="Arial" pitchFamily="34" charset="-120"/>
               </a:rPr>
-              <a:t>10件（7.3%）</a:t>
+              <a:t>1件（1.4%）</a:t>
             </a:r>
             <a:endParaRPr lang="en-US" sz="1100" dirty="0"/>
           </a:p>
@@ -10746,7 +10729,7 @@
                 <a:ea typeface="Arial" pitchFamily="34" charset="-122"/>
                 <a:cs typeface="Arial" pitchFamily="34" charset="-120"/>
               </a:rPr>
-              <a:t>50件+</a:t>
+              <a:t>20件+</a:t>
             </a:r>
             <a:endParaRPr lang="en-US" sz="900" dirty="0"/>
           </a:p>
@@ -10824,7 +10807,7 @@
                 <a:ea typeface="Arial" pitchFamily="34" charset="-122"/>
                 <a:cs typeface="Arial" pitchFamily="34" charset="-120"/>
               </a:rPr>
-              <a:t>La ubicación del alojamiento es buena porque se encuentra...</a:t>
+              <a:t>The location is great next to a subway station, staff are...</a:t>
             </a:r>
             <a:endParaRPr lang="en-US" sz="900" dirty="0"/>
           </a:p>
@@ -10863,7 +10846,7 @@
                 <a:ea typeface="Arial" pitchFamily="34" charset="-122"/>
                 <a:cs typeface="Arial" pitchFamily="34" charset="-120"/>
               </a:rPr>
-              <a:t>「Wonderful and responsive staff; great location-  1 min wa...」</a:t>
+              <a:t>「La ubicación del alojamiento es buena porque se encuentra...」</a:t>
             </a:r>
             <a:endParaRPr lang="en-US" sz="900" dirty="0"/>
           </a:p>
@@ -11047,7 +11030,7 @@
                 <a:ea typeface="Arial" pitchFamily="34" charset="-122"/>
                 <a:cs typeface="Arial" pitchFamily="34" charset="-120"/>
               </a:rPr>
-              <a:t>必要なものはすべて揃っていて、紅茶、コーヒー、浄水器、ランドリー、素晴らしいシャワーなど、スタッフもサービスも最高...</a:t>
+              <a:t>The location is great next to a subway station, staff are...</a:t>
             </a:r>
             <a:endParaRPr lang="en-US" sz="900" dirty="0"/>
           </a:p>
@@ -11086,7 +11069,7 @@
                 <a:ea typeface="Arial" pitchFamily="34" charset="-122"/>
                 <a:cs typeface="Arial" pitchFamily="34" charset="-120"/>
               </a:rPr>
-              <a:t>「Wonderful and responsive staff; great location-  1 min wa...」</a:t>
+              <a:t>「必要なものはすべて揃っていて、紅茶、コーヒー、浄水器、ランドリー、素晴らしいシャワーなど、スタッフもサービスも最高...」</a:t>
             </a:r>
             <a:endParaRPr lang="en-US" sz="900" dirty="0"/>
           </a:p>
@@ -11415,7 +11398,7 @@
                 <a:ea typeface="Arial" pitchFamily="34" charset="-122"/>
                 <a:cs typeface="Arial" pitchFamily="34" charset="-120"/>
               </a:rPr>
-              <a:t>20件+</a:t>
+              <a:t>10件+</a:t>
             </a:r>
             <a:endParaRPr lang="en-US" sz="900" dirty="0"/>
           </a:p>
@@ -11638,7 +11621,7 @@
                 <a:ea typeface="Arial" pitchFamily="34" charset="-122"/>
                 <a:cs typeface="Arial" pitchFamily="34" charset="-120"/>
               </a:rPr>
-              <a:t>20件+</a:t>
+              <a:t>10件+</a:t>
             </a:r>
             <a:endParaRPr lang="en-US" sz="900" dirty="0"/>
           </a:p>
@@ -11716,7 +11699,7 @@
                 <a:ea typeface="Arial" pitchFamily="34" charset="-122"/>
                 <a:cs typeface="Arial" pitchFamily="34" charset="-120"/>
               </a:rPr>
-              <a:t>朝食はタイ料理です</a:t>
+              <a:t>Yummy but Very limited breakfast option as they have the ...</a:t>
             </a:r>
             <a:endParaRPr lang="en-US" sz="900" dirty="0"/>
           </a:p>
@@ -11755,7 +11738,7 @@
                 <a:ea typeface="Arial" pitchFamily="34" charset="-122"/>
                 <a:cs typeface="Arial" pitchFamily="34" charset="-120"/>
               </a:rPr>
-              <a:t>「レストランは利用しなかったし、朝食はタイ料理でした」</a:t>
+              <a:t>「朝食はタイ料理です」</a:t>
             </a:r>
             <a:endParaRPr lang="en-US" sz="900" dirty="0"/>
           </a:p>
@@ -11861,7 +11844,7 @@
                 <a:ea typeface="Arial" pitchFamily="34" charset="-122"/>
                 <a:cs typeface="Arial" pitchFamily="34" charset="-120"/>
               </a:rPr>
-              <a:t>10件+</a:t>
+              <a:t>9件</a:t>
             </a:r>
             <a:endParaRPr lang="en-US" sz="900" dirty="0"/>
           </a:p>
@@ -11939,7 +11922,7 @@
                 <a:ea typeface="Arial" pitchFamily="34" charset="-122"/>
                 <a:cs typeface="Arial" pitchFamily="34" charset="-120"/>
               </a:rPr>
-              <a:t>大きなスーツケースと機内持ち込みバッグをそれぞれ持っていた2人で海外旅行をしたのですが、どこにもバッグを置くスペー...</a:t>
+              <a:t>The location is great next to a subway station, staff are...</a:t>
             </a:r>
             <a:endParaRPr lang="en-US" sz="900" dirty="0"/>
           </a:p>
@@ -11978,7 +11961,7 @@
                 <a:ea typeface="Arial" pitchFamily="34" charset="-122"/>
                 <a:cs typeface="Arial" pitchFamily="34" charset="-120"/>
               </a:rPr>
-              <a:t>「シングルツインベッドを予約したのに、ツインベッドが2台あり、部屋の中で歩くスペースすらありませんでした」</a:t>
+              <a:t>「大きなスーツケースと機内持ち込みバッグをそれぞれ持っていた2人組が海外旅行をしたのですが、どこにもバッグを置くスペ...」</a:t>
             </a:r>
             <a:endParaRPr lang="en-US" sz="900" dirty="0"/>
           </a:p>
@@ -12668,7 +12651,7 @@
                           <a:ea typeface="Arial" pitchFamily="34" charset="-122"/>
                           <a:cs typeface="Arial" pitchFamily="34" charset="-120"/>
                         </a:rPr>
-                        <a:t>La ubicación del alojamiento es buena porque se encuentra...</a:t>
+                        <a:t>The location is great next to a subway station, staff are...</a:t>
                       </a:r>
                       <a:endParaRPr lang="en-US" sz="900" dirty="0">
                         <a:latin typeface="Arial" charset="0"/>
@@ -12736,7 +12719,7 @@
                           <a:ea typeface="Arial" pitchFamily="34" charset="-122"/>
                           <a:cs typeface="Arial" pitchFamily="34" charset="-120"/>
                         </a:rPr>
-                        <a:t>29件</a:t>
+                        <a:t>14件</a:t>
                       </a:r>
                       <a:endParaRPr lang="en-US" sz="900" dirty="0">
                         <a:latin typeface="Arial" charset="0"/>
@@ -12874,7 +12857,7 @@
                           <a:ea typeface="Arial" pitchFamily="34" charset="-122"/>
                           <a:cs typeface="Arial" pitchFamily="34" charset="-120"/>
                         </a:rPr>
-                        <a:t>浴室・水回り</a:t>
+                        <a:t>部屋の狭さ</a:t>
                       </a:r>
                       <a:endParaRPr lang="en-US" sz="900" dirty="0">
                         <a:latin typeface="Arial" charset="0"/>
@@ -12942,7 +12925,7 @@
                           <a:ea typeface="Arial" pitchFamily="34" charset="-122"/>
                           <a:cs typeface="Arial" pitchFamily="34" charset="-120"/>
                         </a:rPr>
-                        <a:t>必要なものはすべて揃っていて、紅茶、コーヒー、浄水器、ランドリー、素晴らしいシャワーなど、スタッフもサービスも最高...</a:t>
+                        <a:t>, great staff and service, just the room's are just too s...</a:t>
                       </a:r>
                       <a:endParaRPr lang="en-US" sz="900" dirty="0">
                         <a:latin typeface="Arial" charset="0"/>
@@ -13010,7 +12993,7 @@
                           <a:ea typeface="Arial" pitchFamily="34" charset="-122"/>
                           <a:cs typeface="Arial" pitchFamily="34" charset="-120"/>
                         </a:rPr>
-                        <a:t>24件</a:t>
+                        <a:t>10件</a:t>
                       </a:r>
                       <a:endParaRPr lang="en-US" sz="900" dirty="0">
                         <a:latin typeface="Arial" charset="0"/>
@@ -13148,7 +13131,7 @@
                           <a:ea typeface="Arial" pitchFamily="34" charset="-122"/>
                           <a:cs typeface="Arial" pitchFamily="34" charset="-120"/>
                         </a:rPr>
-                        <a:t>部屋の狭さ</a:t>
+                        <a:t>浴室・水回り</a:t>
                       </a:r>
                       <a:endParaRPr lang="en-US" sz="900" dirty="0">
                         <a:latin typeface="Arial" charset="0"/>
@@ -13216,7 +13199,7 @@
                           <a:ea typeface="Arial" pitchFamily="34" charset="-122"/>
                           <a:cs typeface="Arial" pitchFamily="34" charset="-120"/>
                         </a:rPr>
-                        <a:t>, great staff and service, just the room's are just too s...</a:t>
+                        <a:t>必要なものはすべて揃っていて、紅茶、コーヒー、浄水器、ランドリー、素晴らしいシャワーなど、スタッフもサービスも最高...</a:t>
                       </a:r>
                       <a:endParaRPr lang="en-US" sz="900" dirty="0">
                         <a:latin typeface="Arial" charset="0"/>
@@ -13284,7 +13267,7 @@
                           <a:ea typeface="Arial" pitchFamily="34" charset="-122"/>
                           <a:cs typeface="Arial" pitchFamily="34" charset="-120"/>
                         </a:rPr>
-                        <a:t>18件</a:t>
+                        <a:t>10件</a:t>
                       </a:r>
                       <a:endParaRPr lang="en-US" sz="900" dirty="0">
                         <a:latin typeface="Arial" charset="0"/>
@@ -13558,7 +13541,7 @@
                           <a:ea typeface="Arial" pitchFamily="34" charset="-122"/>
                           <a:cs typeface="Arial" pitchFamily="34" charset="-120"/>
                         </a:rPr>
-                        <a:t>11件</a:t>
+                        <a:t>5件</a:t>
                       </a:r>
                       <a:endParaRPr lang="en-US" sz="900" dirty="0">
                         <a:latin typeface="Arial" charset="0"/>
@@ -13832,7 +13815,7 @@
                           <a:ea typeface="Arial" pitchFamily="34" charset="-122"/>
                           <a:cs typeface="Arial" pitchFamily="34" charset="-120"/>
                         </a:rPr>
-                        <a:t>10件</a:t>
+                        <a:t>5件</a:t>
                       </a:r>
                       <a:endParaRPr lang="en-US" sz="900" dirty="0">
                         <a:latin typeface="Arial" charset="0"/>
@@ -13970,7 +13953,7 @@
                           <a:ea typeface="Arial" pitchFamily="34" charset="-122"/>
                           <a:cs typeface="Arial" pitchFamily="34" charset="-120"/>
                         </a:rPr>
-                        <a:t>対応・サービスの不満</a:t>
+                        <a:t>防音性能</a:t>
                       </a:r>
                       <a:endParaRPr lang="en-US" sz="900" dirty="0">
                         <a:latin typeface="Arial" charset="0"/>
@@ -14038,7 +14021,7 @@
                           <a:ea typeface="Arial" pitchFamily="34" charset="-122"/>
                           <a:cs typeface="Arial" pitchFamily="34" charset="-120"/>
                         </a:rPr>
-                        <a:t>すぐにホテルに連絡したところ、チェックアウト時に「問題ない」と言われ、キャンセルした分の返金はできないと言われました</a:t>
+                        <a:t>窓の外にすぐに高架道路があるので防音がうまくいきません</a:t>
                       </a:r>
                       <a:endParaRPr lang="en-US" sz="900" dirty="0">
                         <a:latin typeface="Arial" charset="0"/>
@@ -14106,7 +14089,7 @@
                           <a:ea typeface="Arial" pitchFamily="34" charset="-122"/>
                           <a:cs typeface="Arial" pitchFamily="34" charset="-120"/>
                         </a:rPr>
-                        <a:t>8件</a:t>
+                        <a:t>4件</a:t>
                       </a:r>
                       <a:endParaRPr lang="en-US" sz="900" dirty="0">
                         <a:latin typeface="Arial" charset="0"/>
@@ -14244,7 +14227,7 @@
                           <a:ea typeface="Arial" pitchFamily="34" charset="-122"/>
                           <a:cs typeface="Arial" pitchFamily="34" charset="-120"/>
                         </a:rPr>
-                        <a:t>防音性能</a:t>
+                        <a:t>朝食の改善要望</a:t>
                       </a:r>
                       <a:endParaRPr lang="en-US" sz="900" dirty="0">
                         <a:latin typeface="Arial" charset="0"/>
@@ -14312,7 +14295,7 @@
                           <a:ea typeface="Arial" pitchFamily="34" charset="-122"/>
                           <a:cs typeface="Arial" pitchFamily="34" charset="-120"/>
                         </a:rPr>
-                        <a:t>窓の外にすぐに高架道路があるので防音がうまくいきません</a:t>
+                        <a:t>Yummy but Very limited breakfast option as they have the ...</a:t>
                       </a:r>
                       <a:endParaRPr lang="en-US" sz="900" dirty="0">
                         <a:latin typeface="Arial" charset="0"/>
@@ -14380,7 +14363,7 @@
                           <a:ea typeface="Arial" pitchFamily="34" charset="-122"/>
                           <a:cs typeface="Arial" pitchFamily="34" charset="-120"/>
                         </a:rPr>
-                        <a:t>7件</a:t>
+                        <a:t>3件</a:t>
                       </a:r>
                       <a:endParaRPr lang="en-US" sz="900" dirty="0">
                         <a:latin typeface="Arial" charset="0"/>
@@ -14518,7 +14501,7 @@
                           <a:ea typeface="Arial" pitchFamily="34" charset="-122"/>
                           <a:cs typeface="Arial" pitchFamily="34" charset="-120"/>
                         </a:rPr>
-                        <a:t>臭い・匂い</a:t>
+                        <a:t>対応・サービスの不満</a:t>
                       </a:r>
                       <a:endParaRPr lang="en-US" sz="900" dirty="0">
                         <a:latin typeface="Arial" charset="0"/>
@@ -14586,7 +14569,7 @@
                           <a:ea typeface="Arial" pitchFamily="34" charset="-122"/>
                           <a:cs typeface="Arial" pitchFamily="34" charset="-120"/>
                         </a:rPr>
-                        <a:t>他のレビュー見て心配しましたが綺麗ですね、臭いとかこんなこともありませんでした</a:t>
+                        <a:t>すぐにホテルに連絡したところ、チェックアウト時に「問題ない」と言われ、キャンセルした分の返金はできないと言われました</a:t>
                       </a:r>
                       <a:endParaRPr lang="en-US" sz="900" dirty="0">
                         <a:latin typeface="Arial" charset="0"/>
@@ -14654,7 +14637,7 @@
                           <a:ea typeface="Arial" pitchFamily="34" charset="-122"/>
                           <a:cs typeface="Arial" pitchFamily="34" charset="-120"/>
                         </a:rPr>
-                        <a:t>7件</a:t>
+                        <a:t>2件</a:t>
                       </a:r>
                       <a:endParaRPr lang="en-US" sz="900" dirty="0">
                         <a:latin typeface="Arial" charset="0"/>
@@ -14792,7 +14775,7 @@
                           <a:ea typeface="Arial" pitchFamily="34" charset="-122"/>
                           <a:cs typeface="Arial" pitchFamily="34" charset="-120"/>
                         </a:rPr>
-                        <a:t>朝食の改善要望</a:t>
+                        <a:t>臭い・匂い</a:t>
                       </a:r>
                       <a:endParaRPr lang="en-US" sz="900" dirty="0">
                         <a:latin typeface="Arial" charset="0"/>
@@ -14860,7 +14843,7 @@
                           <a:ea typeface="Arial" pitchFamily="34" charset="-122"/>
                           <a:cs typeface="Arial" pitchFamily="34" charset="-120"/>
                         </a:rPr>
-                        <a:t>タイ料理のバイキング朝食、期待しましたが品数が少なく、すべてタイ系ではなく、ただ、小鉢のトムヤクンラーメンとグリー...</a:t>
+                        <a:t>他のレビュー見て心配しましたが綺麗ですね、臭いとかこんなこともありませんでした</a:t>
                       </a:r>
                       <a:endParaRPr lang="en-US" sz="900" dirty="0">
                         <a:latin typeface="Arial" charset="0"/>
@@ -14928,7 +14911,7 @@
                           <a:ea typeface="Arial" pitchFamily="34" charset="-122"/>
                           <a:cs typeface="Arial" pitchFamily="34" charset="-120"/>
                         </a:rPr>
-                        <a:t>6件</a:t>
+                        <a:t>1件</a:t>
                       </a:r>
                       <a:endParaRPr lang="en-US" sz="900" dirty="0">
                         <a:latin typeface="Arial" charset="0"/>
@@ -15639,177 +15622,6 @@
                 <a:ea typeface="Arial" pitchFamily="34" charset="-122"/>
                 <a:cs typeface="Arial" pitchFamily="34" charset="-120"/>
               </a:rPr>
-              <a:t>清掃品質の向上</a:t>
-            </a:r>
-            <a:endParaRPr lang="en-US" sz="1200" dirty="0"/>
-          </a:p>
-        </p:txBody>
-      </p:sp>
-      <p:sp>
-        <p:nvSpPr>
-          <p:cNvPr id="13" name="Text 11"/>
-          <p:cNvSpPr/>
-          <p:nvPr/>
-        </p:nvSpPr>
-        <p:spPr>
-          <a:xfrm>
-            <a:off x="4800600" y="1600200"/>
-            <a:ext cx="3657600" cy="1188720"/>
-          </a:xfrm>
-          <a:prstGeom prst="rect">
-            <a:avLst/>
-          </a:prstGeom>
-          <a:noFill/>
-          <a:ln/>
-        </p:spPr>
-        <p:txBody>
-          <a:bodyPr wrap="square" lIns="0" tIns="0" rIns="0" bIns="0" rtlCol="0" anchor="ctr"/>
-          <a:lstStyle/>
-          <a:p>
-            <a:pPr marL="342900" indent="-342900">
-              <a:spcAft>
-                <a:spcPts val="300"/>
-              </a:spcAft>
-              <a:buSzPct val="100000"/>
-              <a:buChar char="•"/>
-            </a:pPr>
-            <a:r>
-              <a:rPr lang="en-US" sz="900" dirty="0">
-                <a:solidFill>
-                  <a:srgbClr val="334155"/>
-                </a:solidFill>
-                <a:latin typeface="Arial" pitchFamily="34" charset="0"/>
-                <a:ea typeface="Arial" pitchFamily="34" charset="-122"/>
-                <a:cs typeface="Arial" pitchFamily="34" charset="-120"/>
-              </a:rPr>
-              <a:t>清掃チェックリストの見直しと強化（ベッド下・隅の重点確認）</a:t>
-            </a:r>
-            <a:endParaRPr lang="en-US" sz="900" dirty="0"/>
-          </a:p>
-          <a:p>
-            <a:pPr marL="342900" indent="-342900">
-              <a:spcAft>
-                <a:spcPts val="300"/>
-              </a:spcAft>
-              <a:buSzPct val="100000"/>
-              <a:buChar char="•"/>
-            </a:pPr>
-            <a:r>
-              <a:rPr lang="en-US" sz="900" dirty="0">
-                <a:solidFill>
-                  <a:srgbClr val="334155"/>
-                </a:solidFill>
-                <a:latin typeface="Arial" pitchFamily="34" charset="0"/>
-                <a:ea typeface="Arial" pitchFamily="34" charset="-122"/>
-                <a:cs typeface="Arial" pitchFamily="34" charset="-120"/>
-              </a:rPr>
-              <a:t>清掃後のダブルチェック体制の導入</a:t>
-            </a:r>
-            <a:endParaRPr lang="en-US" sz="900" dirty="0"/>
-          </a:p>
-          <a:p>
-            <a:pPr marL="342900" indent="-342900">
-              <a:spcAft>
-                <a:spcPts val="300"/>
-              </a:spcAft>
-              <a:buSzPct val="100000"/>
-              <a:buChar char="•"/>
-            </a:pPr>
-            <a:r>
-              <a:rPr lang="en-US" sz="900" dirty="0">
-                <a:solidFill>
-                  <a:srgbClr val="334155"/>
-                </a:solidFill>
-                <a:latin typeface="Arial" pitchFamily="34" charset="0"/>
-                <a:ea typeface="Arial" pitchFamily="34" charset="-122"/>
-                <a:cs typeface="Arial" pitchFamily="34" charset="-120"/>
-              </a:rPr>
-              <a:t>清掃スタッフへの再研修実施</a:t>
-            </a:r>
-            <a:endParaRPr lang="en-US" sz="900" dirty="0"/>
-          </a:p>
-        </p:txBody>
-      </p:sp>
-      <p:sp>
-        <p:nvSpPr>
-          <p:cNvPr id="14" name="Shape 12"/>
-          <p:cNvSpPr/>
-          <p:nvPr/>
-        </p:nvSpPr>
-        <p:spPr>
-          <a:xfrm>
-            <a:off x="457200" y="3017520"/>
-            <a:ext cx="3977640" cy="1600200"/>
-          </a:xfrm>
-          <a:prstGeom prst="rect">
-            <a:avLst/>
-          </a:prstGeom>
-          <a:solidFill>
-            <a:srgbClr val="FFFFFF"/>
-          </a:solidFill>
-          <a:ln/>
-          <a:effectLst>
-            <a:outerShdw sx="100000" sy="100000" kx="0" ky="0" algn="bl" rotWithShape="0" blurRad="50800" dist="25400" dir="8100000">
-              <a:srgbClr val="000000">
-                <a:alpha val="10000"/>
-              </a:srgbClr>
-            </a:outerShdw>
-          </a:effectLst>
-        </p:spPr>
-      </p:sp>
-      <p:sp>
-        <p:nvSpPr>
-          <p:cNvPr id="15" name="Shape 13"/>
-          <p:cNvSpPr/>
-          <p:nvPr/>
-        </p:nvSpPr>
-        <p:spPr>
-          <a:xfrm>
-            <a:off x="457200" y="3017520"/>
-            <a:ext cx="54864" cy="1600200"/>
-          </a:xfrm>
-          <a:prstGeom prst="rect">
-            <a:avLst/>
-          </a:prstGeom>
-          <a:solidFill>
-            <a:srgbClr val="3B7DD8"/>
-          </a:solidFill>
-          <a:ln/>
-        </p:spPr>
-      </p:sp>
-      <p:sp>
-        <p:nvSpPr>
-          <p:cNvPr id="16" name="Text 14"/>
-          <p:cNvSpPr/>
-          <p:nvPr/>
-        </p:nvSpPr>
-        <p:spPr>
-          <a:xfrm>
-            <a:off x="594360" y="3063240"/>
-            <a:ext cx="3657600" cy="320040"/>
-          </a:xfrm>
-          <a:prstGeom prst="rect">
-            <a:avLst/>
-          </a:prstGeom>
-          <a:noFill/>
-          <a:ln/>
-        </p:spPr>
-        <p:txBody>
-          <a:bodyPr wrap="square" lIns="0" tIns="0" rIns="0" bIns="0" rtlCol="0" anchor="ctr"/>
-          <a:lstStyle/>
-          <a:p>
-            <a:pPr indent="0" marL="0">
-              <a:buNone/>
-            </a:pPr>
-            <a:r>
-              <a:rPr lang="en-US" sz="1200" b="1" dirty="0">
-                <a:solidFill>
-                  <a:srgbClr val="1A2744"/>
-                </a:solidFill>
-                <a:latin typeface="Arial" pitchFamily="34" charset="0"/>
-                <a:ea typeface="Arial" pitchFamily="34" charset="-122"/>
-                <a:cs typeface="Arial" pitchFamily="34" charset="-120"/>
-              </a:rPr>
               <a:t>朝食サービスの改善</a:t>
             </a:r>
             <a:endParaRPr lang="en-US" sz="1200" dirty="0"/>
@@ -15818,13 +15630,13 @@
       </p:sp>
       <p:sp>
         <p:nvSpPr>
-          <p:cNvPr id="17" name="Text 15"/>
-          <p:cNvSpPr/>
-          <p:nvPr/>
-        </p:nvSpPr>
-        <p:spPr>
-          <a:xfrm>
-            <a:off x="594360" y="3383280"/>
+          <p:cNvPr id="13" name="Text 11"/>
+          <p:cNvSpPr/>
+          <p:nvPr/>
+        </p:nvSpPr>
+        <p:spPr>
+          <a:xfrm>
+            <a:off x="4800600" y="1600200"/>
             <a:ext cx="3657600" cy="1188720"/>
           </a:xfrm>
           <a:prstGeom prst="rect">
@@ -15903,13 +15715,13 @@
       </p:sp>
       <p:sp>
         <p:nvSpPr>
-          <p:cNvPr id="18" name="Shape 16"/>
-          <p:cNvSpPr/>
-          <p:nvPr/>
-        </p:nvSpPr>
-        <p:spPr>
-          <a:xfrm>
-            <a:off x="4663440" y="3017520"/>
+          <p:cNvPr id="14" name="Shape 12"/>
+          <p:cNvSpPr/>
+          <p:nvPr/>
+        </p:nvSpPr>
+        <p:spPr>
+          <a:xfrm>
+            <a:off x="457200" y="3017520"/>
             <a:ext cx="3977640" cy="1600200"/>
           </a:xfrm>
           <a:prstGeom prst="rect">
@@ -15930,13 +15742,13 @@
       </p:sp>
       <p:sp>
         <p:nvSpPr>
-          <p:cNvPr id="19" name="Shape 17"/>
-          <p:cNvSpPr/>
-          <p:nvPr/>
-        </p:nvSpPr>
-        <p:spPr>
-          <a:xfrm>
-            <a:off x="4663440" y="3017520"/>
+          <p:cNvPr id="15" name="Shape 13"/>
+          <p:cNvSpPr/>
+          <p:nvPr/>
+        </p:nvSpPr>
+        <p:spPr>
+          <a:xfrm>
+            <a:off x="457200" y="3017520"/>
             <a:ext cx="54864" cy="1600200"/>
           </a:xfrm>
           <a:prstGeom prst="rect">
@@ -15950,13 +15762,13 @@
       </p:sp>
       <p:sp>
         <p:nvSpPr>
-          <p:cNvPr id="20" name="Text 18"/>
-          <p:cNvSpPr/>
-          <p:nvPr/>
-        </p:nvSpPr>
-        <p:spPr>
-          <a:xfrm>
-            <a:off x="4800600" y="3063240"/>
+          <p:cNvPr id="16" name="Text 14"/>
+          <p:cNvSpPr/>
+          <p:nvPr/>
+        </p:nvSpPr>
+        <p:spPr>
+          <a:xfrm>
+            <a:off x="594360" y="3063240"/>
             <a:ext cx="3657600" cy="320040"/>
           </a:xfrm>
           <a:prstGeom prst="rect">
@@ -15989,13 +15801,13 @@
       </p:sp>
       <p:sp>
         <p:nvSpPr>
-          <p:cNvPr id="21" name="Text 19"/>
-          <p:cNvSpPr/>
-          <p:nvPr/>
-        </p:nvSpPr>
-        <p:spPr>
-          <a:xfrm>
-            <a:off x="4800600" y="3383280"/>
+          <p:cNvPr id="17" name="Text 15"/>
+          <p:cNvSpPr/>
+          <p:nvPr/>
+        </p:nvSpPr>
+        <p:spPr>
+          <a:xfrm>
+            <a:off x="594360" y="3383280"/>
             <a:ext cx="3657600" cy="1188720"/>
           </a:xfrm>
           <a:prstGeom prst="rect">
@@ -16067,6 +15879,177 @@
                 <a:cs typeface="Arial" pitchFamily="34" charset="-120"/>
               </a:rPr>
               <a:t>異常報告があった客室の優先メンテナンス実施</a:t>
+            </a:r>
+            <a:endParaRPr lang="en-US" sz="900" dirty="0"/>
+          </a:p>
+        </p:txBody>
+      </p:sp>
+      <p:sp>
+        <p:nvSpPr>
+          <p:cNvPr id="18" name="Shape 16"/>
+          <p:cNvSpPr/>
+          <p:nvPr/>
+        </p:nvSpPr>
+        <p:spPr>
+          <a:xfrm>
+            <a:off x="4663440" y="3017520"/>
+            <a:ext cx="3977640" cy="1600200"/>
+          </a:xfrm>
+          <a:prstGeom prst="rect">
+            <a:avLst/>
+          </a:prstGeom>
+          <a:solidFill>
+            <a:srgbClr val="FFFFFF"/>
+          </a:solidFill>
+          <a:ln/>
+          <a:effectLst>
+            <a:outerShdw sx="100000" sy="100000" kx="0" ky="0" algn="bl" rotWithShape="0" blurRad="50800" dist="25400" dir="8100000">
+              <a:srgbClr val="000000">
+                <a:alpha val="10000"/>
+              </a:srgbClr>
+            </a:outerShdw>
+          </a:effectLst>
+        </p:spPr>
+      </p:sp>
+      <p:sp>
+        <p:nvSpPr>
+          <p:cNvPr id="19" name="Shape 17"/>
+          <p:cNvSpPr/>
+          <p:nvPr/>
+        </p:nvSpPr>
+        <p:spPr>
+          <a:xfrm>
+            <a:off x="4663440" y="3017520"/>
+            <a:ext cx="54864" cy="1600200"/>
+          </a:xfrm>
+          <a:prstGeom prst="rect">
+            <a:avLst/>
+          </a:prstGeom>
+          <a:solidFill>
+            <a:srgbClr val="3B7DD8"/>
+          </a:solidFill>
+          <a:ln/>
+        </p:spPr>
+      </p:sp>
+      <p:sp>
+        <p:nvSpPr>
+          <p:cNvPr id="20" name="Text 18"/>
+          <p:cNvSpPr/>
+          <p:nvPr/>
+        </p:nvSpPr>
+        <p:spPr>
+          <a:xfrm>
+            <a:off x="4800600" y="3063240"/>
+            <a:ext cx="3657600" cy="320040"/>
+          </a:xfrm>
+          <a:prstGeom prst="rect">
+            <a:avLst/>
+          </a:prstGeom>
+          <a:noFill/>
+          <a:ln/>
+        </p:spPr>
+        <p:txBody>
+          <a:bodyPr wrap="square" lIns="0" tIns="0" rIns="0" bIns="0" rtlCol="0" anchor="ctr"/>
+          <a:lstStyle/>
+          <a:p>
+            <a:pPr indent="0" marL="0">
+              <a:buNone/>
+            </a:pPr>
+            <a:r>
+              <a:rPr lang="en-US" sz="1200" b="1" dirty="0">
+                <a:solidFill>
+                  <a:srgbClr val="1A2744"/>
+                </a:solidFill>
+                <a:latin typeface="Arial" pitchFamily="34" charset="0"/>
+                <a:ea typeface="Arial" pitchFamily="34" charset="-122"/>
+                <a:cs typeface="Arial" pitchFamily="34" charset="-120"/>
+              </a:rPr>
+              <a:t>スタッフ対応品質の統一</a:t>
+            </a:r>
+            <a:endParaRPr lang="en-US" sz="1200" dirty="0"/>
+          </a:p>
+        </p:txBody>
+      </p:sp>
+      <p:sp>
+        <p:nvSpPr>
+          <p:cNvPr id="21" name="Text 19"/>
+          <p:cNvSpPr/>
+          <p:nvPr/>
+        </p:nvSpPr>
+        <p:spPr>
+          <a:xfrm>
+            <a:off x="4800600" y="3383280"/>
+            <a:ext cx="3657600" cy="1188720"/>
+          </a:xfrm>
+          <a:prstGeom prst="rect">
+            <a:avLst/>
+          </a:prstGeom>
+          <a:noFill/>
+          <a:ln/>
+        </p:spPr>
+        <p:txBody>
+          <a:bodyPr wrap="square" lIns="0" tIns="0" rIns="0" bIns="0" rtlCol="0" anchor="ctr"/>
+          <a:lstStyle/>
+          <a:p>
+            <a:pPr marL="342900" indent="-342900">
+              <a:spcAft>
+                <a:spcPts val="300"/>
+              </a:spcAft>
+              <a:buSzPct val="100000"/>
+              <a:buChar char="•"/>
+            </a:pPr>
+            <a:r>
+              <a:rPr lang="en-US" sz="900" dirty="0">
+                <a:solidFill>
+                  <a:srgbClr val="334155"/>
+                </a:solidFill>
+                <a:latin typeface="Arial" pitchFamily="34" charset="0"/>
+                <a:ea typeface="Arial" pitchFamily="34" charset="-122"/>
+                <a:cs typeface="Arial" pitchFamily="34" charset="-120"/>
+              </a:rPr>
+              <a:t>接客マニュアルの見直しと全スタッフへの周知</a:t>
+            </a:r>
+            <a:endParaRPr lang="en-US" sz="900" dirty="0"/>
+          </a:p>
+          <a:p>
+            <a:pPr marL="342900" indent="-342900">
+              <a:spcAft>
+                <a:spcPts val="300"/>
+              </a:spcAft>
+              <a:buSzPct val="100000"/>
+              <a:buChar char="•"/>
+            </a:pPr>
+            <a:r>
+              <a:rPr lang="en-US" sz="900" dirty="0">
+                <a:solidFill>
+                  <a:srgbClr val="334155"/>
+                </a:solidFill>
+                <a:latin typeface="Arial" pitchFamily="34" charset="0"/>
+                <a:ea typeface="Arial" pitchFamily="34" charset="-122"/>
+                <a:cs typeface="Arial" pitchFamily="34" charset="-120"/>
+              </a:rPr>
+              <a:t>ゲストからのクレーム対応フローの明確化</a:t>
+            </a:r>
+            <a:endParaRPr lang="en-US" sz="900" dirty="0"/>
+          </a:p>
+          <a:p>
+            <a:pPr marL="342900" indent="-342900">
+              <a:spcAft>
+                <a:spcPts val="300"/>
+              </a:spcAft>
+              <a:buSzPct val="100000"/>
+              <a:buChar char="•"/>
+            </a:pPr>
+            <a:r>
+              <a:rPr lang="en-US" sz="900" dirty="0">
+                <a:solidFill>
+                  <a:srgbClr val="334155"/>
+                </a:solidFill>
+                <a:latin typeface="Arial" pitchFamily="34" charset="0"/>
+                <a:ea typeface="Arial" pitchFamily="34" charset="-122"/>
+                <a:cs typeface="Arial" pitchFamily="34" charset="-120"/>
+              </a:rPr>
+              <a:t>定期的なCS研修の実施</a:t>
             </a:r>
             <a:endParaRPr lang="en-US" sz="900" dirty="0"/>
           </a:p>

--- a/納品レポート/ホテル別レポート/comfort_roppongi_口コミ分析レポート.pptx
+++ b/納品レポート/ホテル別レポート/comfort_roppongi_口コミ分析レポート.pptx
@@ -214,10 +214,10 @@
                   <c:v>9.57</c:v>
                 </c:pt>
                 <c:pt idx="2">
-                  <c:v>8.91</c:v>
+                  <c:v>9</c:v>
                 </c:pt>
                 <c:pt idx="3">
-                  <c:v>8.13</c:v>
+                  <c:v>8.1</c:v>
                 </c:pt>
                 <c:pt idx="4">
                   <c:v>7.5</c:v>
@@ -566,10 +566,10 @@
               <c:numCache>
                 <c:ptCount val="3"/>
                 <c:pt idx="0">
-                  <c:v>59</c:v>
+                  <c:v>60</c:v>
                 </c:pt>
                 <c:pt idx="1">
-                  <c:v>15</c:v>
+                  <c:v>16</c:v>
                 </c:pt>
                 <c:pt idx="2">
                   <c:v>1</c:v>
@@ -795,7 +795,7 @@
                 <c:formatCode>General</c:formatCode>
                 <c:ptCount val="7"/>
                 <c:pt idx="0">
-                  <c:v>20</c:v>
+                  <c:v>21</c:v>
                 </c:pt>
                 <c:pt idx="1">
                   <c:v>11</c:v>
@@ -804,7 +804,7 @@
                   <c:v>28</c:v>
                 </c:pt>
                 <c:pt idx="3">
-                  <c:v>5</c:v>
+                  <c:v>6</c:v>
                 </c:pt>
                 <c:pt idx="4">
                   <c:v>9</c:v>
@@ -2764,7 +2764,7 @@
                 <a:ea typeface="Arial" pitchFamily="34" charset="-122"/>
                 <a:cs typeface="Arial" pitchFamily="34" charset="-120"/>
               </a:rPr>
-              <a:t>レビュー総数：75件（6サイト）</a:t>
+              <a:t>レビュー総数：77件（6サイト）</a:t>
             </a:r>
             <a:endParaRPr lang="en-US" sz="1000" dirty="0"/>
           </a:p>
@@ -2784,7 +2784,7 @@
                 <a:ea typeface="Arial" pitchFamily="34" charset="-122"/>
                 <a:cs typeface="Arial" pitchFamily="34" charset="-120"/>
               </a:rPr>
-              <a:t>作成日：2026年4月6日</a:t>
+              <a:t>作成日：2026年4月7日</a:t>
             </a:r>
             <a:endParaRPr lang="en-US" sz="1000" dirty="0"/>
           </a:p>
@@ -3330,7 +3330,7 @@
                           <a:ea typeface="Arial" pitchFamily="34" charset="-122"/>
                           <a:cs typeface="Arial" pitchFamily="34" charset="-120"/>
                         </a:rPr>
-                        <a:t>8.25点</a:t>
+                        <a:t>8.26点</a:t>
                       </a:r>
                       <a:endParaRPr lang="en-US" sz="1000" dirty="0">
                         <a:latin typeface="Arial" charset="0"/>
@@ -3604,7 +3604,7 @@
                           <a:ea typeface="Arial" pitchFamily="34" charset="-122"/>
                           <a:cs typeface="Arial" pitchFamily="34" charset="-120"/>
                         </a:rPr>
-                        <a:t>78.7%</a:t>
+                        <a:t>77.9%</a:t>
                       </a:r>
                       <a:endParaRPr lang="en-US" sz="1000" dirty="0">
                         <a:latin typeface="Arial" charset="0"/>
@@ -3672,7 +3672,7 @@
                           <a:ea typeface="Arial" pitchFamily="34" charset="-122"/>
                           <a:cs typeface="Arial" pitchFamily="34" charset="-120"/>
                         </a:rPr>
-                        <a:t>84%以上</a:t>
+                        <a:t>83%以上</a:t>
                       </a:r>
                       <a:endParaRPr lang="en-US" sz="1000" dirty="0">
                         <a:latin typeface="Arial" charset="0"/>
@@ -5339,7 +5339,7 @@
                 <a:ea typeface="Arial" pitchFamily="34" charset="-122"/>
                 <a:cs typeface="Arial" pitchFamily="34" charset="-120"/>
               </a:rPr>
-              <a:t>8.25</a:t>
+              <a:t>8.26</a:t>
             </a:r>
             <a:endParaRPr lang="en-US" sz="3200" dirty="0"/>
           </a:p>
@@ -5464,7 +5464,7 @@
                 <a:ea typeface="Arial" pitchFamily="34" charset="-122"/>
                 <a:cs typeface="Arial" pitchFamily="34" charset="-120"/>
               </a:rPr>
-              <a:t>78.7%</a:t>
+              <a:t>77.9%</a:t>
             </a:r>
             <a:endParaRPr lang="en-US" sz="3200" dirty="0"/>
           </a:p>
@@ -5714,7 +5714,7 @@
                 <a:ea typeface="Arial" pitchFamily="34" charset="-122"/>
                 <a:cs typeface="Arial" pitchFamily="34" charset="-120"/>
               </a:rPr>
-              <a:t>75件</a:t>
+              <a:t>77件</a:t>
             </a:r>
             <a:endParaRPr lang="en-US" sz="3200" dirty="0"/>
           </a:p>
@@ -5862,7 +5862,7 @@
                 <a:ea typeface="Arial" pitchFamily="34" charset="-122"/>
                 <a:cs typeface="Arial" pitchFamily="34" charset="-120"/>
               </a:rPr>
-              <a:t>  六本木駅前という立地ですが、ホテル周辺は落ち着いていて静かで、治安の良さも感じられました</a:t>
+              <a:t>  六本木駅5番出口から近くて便利</a:t>
             </a:r>
             <a:endParaRPr lang="en-US" sz="1100" dirty="0"/>
           </a:p>
@@ -5902,7 +5902,7 @@
                 <a:ea typeface="Arial" pitchFamily="34" charset="-122"/>
                 <a:cs typeface="Arial" pitchFamily="34" charset="-120"/>
               </a:rPr>
-              <a:t>  The location is great next to a subway station, staff are...</a:t>
+              <a:t>  スタッフさんの気遣いもとてもよかった</a:t>
             </a:r>
             <a:endParaRPr lang="en-US" sz="1100" dirty="0"/>
           </a:p>
@@ -5942,7 +5942,7 @@
                 <a:ea typeface="Arial" pitchFamily="34" charset="-122"/>
                 <a:cs typeface="Arial" pitchFamily="34" charset="-120"/>
               </a:rPr>
-              <a:t>  部屋は想像していたよりも広く、バストイレもゆったりしていて快適でした</a:t>
+              <a:t>  大人2人と幼児2人でキングベッドの一部屋を利用</a:t>
             </a:r>
             <a:endParaRPr lang="en-US" sz="1100" dirty="0"/>
           </a:p>
@@ -6130,7 +6130,7 @@
                 <a:ea typeface="Arial" pitchFamily="34" charset="-122"/>
                 <a:cs typeface="Arial" pitchFamily="34" charset="-120"/>
               </a:rPr>
-              <a:t>  部屋は想像していたよりも広く、バストイレもゆったりしていて快適でした</a:t>
+              <a:t>  トイレは少し水漏れしていて、排水口からかなり強い臭いがしました</a:t>
             </a:r>
             <a:endParaRPr lang="en-US" sz="1100" dirty="0"/>
           </a:p>
@@ -6523,7 +6523,7 @@
                 <a:ea typeface="Arial" pitchFamily="34" charset="-122"/>
                 <a:cs typeface="Arial" pitchFamily="34" charset="-120"/>
               </a:rPr>
-              <a:t>8.25</a:t>
+              <a:t>8.26</a:t>
             </a:r>
             <a:endParaRPr lang="en-US" sz="3200" dirty="0"/>
           </a:p>
@@ -6648,7 +6648,7 @@
                 <a:ea typeface="Arial" pitchFamily="34" charset="-122"/>
                 <a:cs typeface="Arial" pitchFamily="34" charset="-120"/>
               </a:rPr>
-              <a:t>78.7%</a:t>
+              <a:t>77.9%</a:t>
             </a:r>
             <a:endParaRPr lang="en-US" sz="3200" dirty="0"/>
           </a:p>
@@ -6898,7 +6898,7 @@
                 <a:ea typeface="Arial" pitchFamily="34" charset="-122"/>
                 <a:cs typeface="Arial" pitchFamily="34" charset="-120"/>
               </a:rPr>
-              <a:t>75件</a:t>
+              <a:t>77件</a:t>
             </a:r>
             <a:endParaRPr lang="en-US" sz="3200" dirty="0"/>
           </a:p>
@@ -8561,7 +8561,7 @@
                           <a:ea typeface="Arial" pitchFamily="34" charset="-122"/>
                           <a:cs typeface="Arial" pitchFamily="34" charset="-120"/>
                         </a:rPr>
-                        <a:t>11</a:t>
+                        <a:t>12</a:t>
                       </a:r>
                       <a:endParaRPr lang="en-US" sz="900" dirty="0">
                         <a:latin typeface="Arial" charset="0"/>
@@ -8629,7 +8629,7 @@
                           <a:ea typeface="Arial" pitchFamily="34" charset="-122"/>
                           <a:cs typeface="Arial" pitchFamily="34" charset="-120"/>
                         </a:rPr>
-                        <a:t>4.45</a:t>
+                        <a:t>4.5</a:t>
                       </a:r>
                       <a:endParaRPr lang="en-US" sz="900" dirty="0">
                         <a:latin typeface="Arial" charset="0"/>
@@ -8765,7 +8765,7 @@
                           <a:ea typeface="Arial" pitchFamily="34" charset="-122"/>
                           <a:cs typeface="Arial" pitchFamily="34" charset="-120"/>
                         </a:rPr>
-                        <a:t>8.91</a:t>
+                        <a:t>9</a:t>
                       </a:r>
                       <a:endParaRPr lang="en-US" sz="900" dirty="0">
                         <a:latin typeface="Arial" charset="0"/>
@@ -8903,7 +8903,7 @@
                           <a:ea typeface="Arial" pitchFamily="34" charset="-122"/>
                           <a:cs typeface="Arial" pitchFamily="34" charset="-120"/>
                         </a:rPr>
-                        <a:t>39</a:t>
+                        <a:t>40</a:t>
                       </a:r>
                       <a:endParaRPr lang="en-US" sz="900" dirty="0">
                         <a:latin typeface="Arial" charset="0"/>
@@ -8971,7 +8971,7 @@
                           <a:ea typeface="Arial" pitchFamily="34" charset="-122"/>
                           <a:cs typeface="Arial" pitchFamily="34" charset="-120"/>
                         </a:rPr>
-                        <a:t>8.13</a:t>
+                        <a:t>8.1</a:t>
                       </a:r>
                       <a:endParaRPr lang="en-US" sz="900" dirty="0">
                         <a:latin typeface="Arial" charset="0"/>
@@ -9107,7 +9107,7 @@
                           <a:ea typeface="Arial" pitchFamily="34" charset="-122"/>
                           <a:cs typeface="Arial" pitchFamily="34" charset="-120"/>
                         </a:rPr>
-                        <a:t>8.13</a:t>
+                        <a:t>8.1</a:t>
                       </a:r>
                       <a:endParaRPr lang="en-US" sz="900" dirty="0">
                         <a:latin typeface="Arial" charset="0"/>
@@ -10199,7 +10199,7 @@
                 <a:ea typeface="Arial" pitchFamily="34" charset="-122"/>
                 <a:cs typeface="Arial" pitchFamily="34" charset="-120"/>
               </a:rPr>
-              <a:t>59件（78.7%）</a:t>
+              <a:t>60件（77.9%）</a:t>
             </a:r>
             <a:endParaRPr lang="en-US" sz="1100" dirty="0"/>
           </a:p>
@@ -10297,7 +10297,7 @@
                 <a:ea typeface="Arial" pitchFamily="34" charset="-122"/>
                 <a:cs typeface="Arial" pitchFamily="34" charset="-120"/>
               </a:rPr>
-              <a:t>15件（20.0%）</a:t>
+              <a:t>16件（20.8%）</a:t>
             </a:r>
             <a:endParaRPr lang="en-US" sz="1100" dirty="0"/>
           </a:p>
@@ -10807,7 +10807,7 @@
                 <a:ea typeface="Arial" pitchFamily="34" charset="-122"/>
                 <a:cs typeface="Arial" pitchFamily="34" charset="-120"/>
               </a:rPr>
-              <a:t>六本木駅前という立地ですが、ホテル周辺は落ち着いていて静かで、治安の良さも感じられました</a:t>
+              <a:t>六本木駅5番出口から近くて便利</a:t>
             </a:r>
             <a:endParaRPr lang="en-US" sz="900" dirty="0"/>
           </a:p>
@@ -10822,6 +10822,229 @@
         <p:spPr>
           <a:xfrm>
             <a:off x="594360" y="1828800"/>
+            <a:ext cx="2377440" cy="640080"/>
+          </a:xfrm>
+          <a:prstGeom prst="rect">
+            <a:avLst/>
+          </a:prstGeom>
+          <a:noFill/>
+          <a:ln/>
+        </p:spPr>
+        <p:txBody>
+          <a:bodyPr wrap="square" lIns="0" tIns="0" rIns="0" bIns="0" rtlCol="0" anchor="ctr"/>
+          <a:lstStyle/>
+          <a:p>
+            <a:pPr indent="0" marL="0">
+              <a:buNone/>
+            </a:pPr>
+            <a:r>
+              <a:rPr lang="en-US" sz="900" i="1" dirty="0">
+                <a:solidFill>
+                  <a:srgbClr val="3B7DD8"/>
+                </a:solidFill>
+                <a:latin typeface="Arial" pitchFamily="34" charset="0"/>
+                <a:ea typeface="Arial" pitchFamily="34" charset="-122"/>
+                <a:cs typeface="Arial" pitchFamily="34" charset="-120"/>
+              </a:rPr>
+              <a:t>「六本木駅前という立地ですが、ホテル周辺は落ち着いていて静かで、治安の良さも感じられました」</a:t>
+            </a:r>
+            <a:endParaRPr lang="en-US" sz="900" dirty="0"/>
+          </a:p>
+        </p:txBody>
+      </p:sp>
+      <p:sp>
+        <p:nvSpPr>
+          <p:cNvPr id="12" name="Shape 10"/>
+          <p:cNvSpPr/>
+          <p:nvPr/>
+        </p:nvSpPr>
+        <p:spPr>
+          <a:xfrm>
+            <a:off x="3291840" y="1051560"/>
+            <a:ext cx="2651760" cy="1600200"/>
+          </a:xfrm>
+          <a:prstGeom prst="rect">
+            <a:avLst/>
+          </a:prstGeom>
+          <a:solidFill>
+            <a:srgbClr val="FFFFFF"/>
+          </a:solidFill>
+          <a:ln/>
+          <a:effectLst>
+            <a:outerShdw sx="100000" sy="100000" kx="0" ky="0" algn="bl" rotWithShape="0" blurRad="50800" dist="25400" dir="8100000">
+              <a:srgbClr val="000000">
+                <a:alpha val="10000"/>
+              </a:srgbClr>
+            </a:outerShdw>
+          </a:effectLst>
+        </p:spPr>
+      </p:sp>
+      <p:sp>
+        <p:nvSpPr>
+          <p:cNvPr id="13" name="Shape 11"/>
+          <p:cNvSpPr/>
+          <p:nvPr/>
+        </p:nvSpPr>
+        <p:spPr>
+          <a:xfrm>
+            <a:off x="3291840" y="1051560"/>
+            <a:ext cx="54864" cy="1600200"/>
+          </a:xfrm>
+          <a:prstGeom prst="rect">
+            <a:avLst/>
+          </a:prstGeom>
+          <a:solidFill>
+            <a:srgbClr val="16A34A"/>
+          </a:solidFill>
+          <a:ln/>
+        </p:spPr>
+      </p:sp>
+      <p:sp>
+        <p:nvSpPr>
+          <p:cNvPr id="14" name="Shape 12"/>
+          <p:cNvSpPr/>
+          <p:nvPr/>
+        </p:nvSpPr>
+        <p:spPr>
+          <a:xfrm>
+            <a:off x="5120640" y="1124712"/>
+            <a:ext cx="658368" cy="228600"/>
+          </a:xfrm>
+          <a:prstGeom prst="rect">
+            <a:avLst/>
+          </a:prstGeom>
+          <a:solidFill>
+            <a:srgbClr val="DCFCE7"/>
+          </a:solidFill>
+          <a:ln/>
+        </p:spPr>
+      </p:sp>
+      <p:sp>
+        <p:nvSpPr>
+          <p:cNvPr id="15" name="Text 13"/>
+          <p:cNvSpPr/>
+          <p:nvPr/>
+        </p:nvSpPr>
+        <p:spPr>
+          <a:xfrm>
+            <a:off x="5120640" y="1124712"/>
+            <a:ext cx="658368" cy="228600"/>
+          </a:xfrm>
+          <a:prstGeom prst="rect">
+            <a:avLst/>
+          </a:prstGeom>
+          <a:noFill/>
+          <a:ln/>
+        </p:spPr>
+        <p:txBody>
+          <a:bodyPr wrap="square" lIns="0" tIns="0" rIns="0" bIns="0" rtlCol="0" anchor="ctr"/>
+          <a:lstStyle/>
+          <a:p>
+            <a:pPr algn="ctr" indent="0" marL="0">
+              <a:buNone/>
+            </a:pPr>
+            <a:r>
+              <a:rPr lang="en-US" sz="900" b="1" dirty="0">
+                <a:solidFill>
+                  <a:srgbClr val="16A34A"/>
+                </a:solidFill>
+                <a:latin typeface="Arial" pitchFamily="34" charset="0"/>
+                <a:ea typeface="Arial" pitchFamily="34" charset="-122"/>
+                <a:cs typeface="Arial" pitchFamily="34" charset="-120"/>
+              </a:rPr>
+              <a:t>20件+</a:t>
+            </a:r>
+            <a:endParaRPr lang="en-US" sz="900" dirty="0"/>
+          </a:p>
+        </p:txBody>
+      </p:sp>
+      <p:sp>
+        <p:nvSpPr>
+          <p:cNvPr id="16" name="Text 14"/>
+          <p:cNvSpPr/>
+          <p:nvPr/>
+        </p:nvSpPr>
+        <p:spPr>
+          <a:xfrm>
+            <a:off x="3429000" y="1124712"/>
+            <a:ext cx="1645920" cy="274320"/>
+          </a:xfrm>
+          <a:prstGeom prst="rect">
+            <a:avLst/>
+          </a:prstGeom>
+          <a:noFill/>
+          <a:ln/>
+        </p:spPr>
+        <p:txBody>
+          <a:bodyPr wrap="square" lIns="0" tIns="0" rIns="0" bIns="0" rtlCol="0" anchor="ctr"/>
+          <a:lstStyle/>
+          <a:p>
+            <a:pPr indent="0" marL="0">
+              <a:buNone/>
+            </a:pPr>
+            <a:r>
+              <a:rPr lang="en-US" sz="1300" b="1" dirty="0">
+                <a:solidFill>
+                  <a:srgbClr val="1A2744"/>
+                </a:solidFill>
+                <a:latin typeface="Arial" pitchFamily="34" charset="0"/>
+                <a:ea typeface="Arial" pitchFamily="34" charset="-122"/>
+                <a:cs typeface="Arial" pitchFamily="34" charset="-120"/>
+              </a:rPr>
+              <a:t>スタッフの対応</a:t>
+            </a:r>
+            <a:endParaRPr lang="en-US" sz="1300" dirty="0"/>
+          </a:p>
+        </p:txBody>
+      </p:sp>
+      <p:sp>
+        <p:nvSpPr>
+          <p:cNvPr id="17" name="Text 15"/>
+          <p:cNvSpPr/>
+          <p:nvPr/>
+        </p:nvSpPr>
+        <p:spPr>
+          <a:xfrm>
+            <a:off x="3429000" y="1417320"/>
+            <a:ext cx="2377440" cy="365760"/>
+          </a:xfrm>
+          <a:prstGeom prst="rect">
+            <a:avLst/>
+          </a:prstGeom>
+          <a:noFill/>
+          <a:ln/>
+        </p:spPr>
+        <p:txBody>
+          <a:bodyPr wrap="square" lIns="0" tIns="0" rIns="0" bIns="0" rtlCol="0" anchor="ctr"/>
+          <a:lstStyle/>
+          <a:p>
+            <a:pPr indent="0" marL="0">
+              <a:buNone/>
+            </a:pPr>
+            <a:r>
+              <a:rPr lang="en-US" sz="900" dirty="0">
+                <a:solidFill>
+                  <a:srgbClr val="64748B"/>
+                </a:solidFill>
+                <a:latin typeface="Arial" pitchFamily="34" charset="0"/>
+                <a:ea typeface="Arial" pitchFamily="34" charset="-122"/>
+                <a:cs typeface="Arial" pitchFamily="34" charset="-120"/>
+              </a:rPr>
+              <a:t>スタッフさんの気遣いもとてもよかった</a:t>
+            </a:r>
+            <a:endParaRPr lang="en-US" sz="900" dirty="0"/>
+          </a:p>
+        </p:txBody>
+      </p:sp>
+      <p:sp>
+        <p:nvSpPr>
+          <p:cNvPr id="18" name="Text 16"/>
+          <p:cNvSpPr/>
+          <p:nvPr/>
+        </p:nvSpPr>
+        <p:spPr>
+          <a:xfrm>
+            <a:off x="3429000" y="1828800"/>
             <a:ext cx="2377440" cy="640080"/>
           </a:xfrm>
           <a:prstGeom prst="rect">
@@ -10854,13 +11077,13 @@
       </p:sp>
       <p:sp>
         <p:nvSpPr>
-          <p:cNvPr id="12" name="Shape 10"/>
-          <p:cNvSpPr/>
-          <p:nvPr/>
-        </p:nvSpPr>
-        <p:spPr>
-          <a:xfrm>
-            <a:off x="3291840" y="1051560"/>
+          <p:cNvPr id="19" name="Shape 17"/>
+          <p:cNvSpPr/>
+          <p:nvPr/>
+        </p:nvSpPr>
+        <p:spPr>
+          <a:xfrm>
+            <a:off x="6126480" y="1051560"/>
             <a:ext cx="2651760" cy="1600200"/>
           </a:xfrm>
           <a:prstGeom prst="rect">
@@ -10881,13 +11104,13 @@
       </p:sp>
       <p:sp>
         <p:nvSpPr>
-          <p:cNvPr id="13" name="Shape 11"/>
-          <p:cNvSpPr/>
-          <p:nvPr/>
-        </p:nvSpPr>
-        <p:spPr>
-          <a:xfrm>
-            <a:off x="3291840" y="1051560"/>
+          <p:cNvPr id="20" name="Shape 18"/>
+          <p:cNvSpPr/>
+          <p:nvPr/>
+        </p:nvSpPr>
+        <p:spPr>
+          <a:xfrm>
+            <a:off x="6126480" y="1051560"/>
             <a:ext cx="54864" cy="1600200"/>
           </a:xfrm>
           <a:prstGeom prst="rect">
@@ -10901,13 +11124,13 @@
       </p:sp>
       <p:sp>
         <p:nvSpPr>
-          <p:cNvPr id="14" name="Shape 12"/>
-          <p:cNvSpPr/>
-          <p:nvPr/>
-        </p:nvSpPr>
-        <p:spPr>
-          <a:xfrm>
-            <a:off x="5120640" y="1124712"/>
+          <p:cNvPr id="21" name="Shape 19"/>
+          <p:cNvSpPr/>
+          <p:nvPr/>
+        </p:nvSpPr>
+        <p:spPr>
+          <a:xfrm>
+            <a:off x="7955280" y="1124712"/>
             <a:ext cx="658368" cy="228600"/>
           </a:xfrm>
           <a:prstGeom prst="rect">
@@ -10921,13 +11144,13 @@
       </p:sp>
       <p:sp>
         <p:nvSpPr>
-          <p:cNvPr id="15" name="Text 13"/>
-          <p:cNvSpPr/>
-          <p:nvPr/>
-        </p:nvSpPr>
-        <p:spPr>
-          <a:xfrm>
-            <a:off x="5120640" y="1124712"/>
+          <p:cNvPr id="22" name="Text 20"/>
+          <p:cNvSpPr/>
+          <p:nvPr/>
+        </p:nvSpPr>
+        <p:spPr>
+          <a:xfrm>
+            <a:off x="7955280" y="1124712"/>
             <a:ext cx="658368" cy="228600"/>
           </a:xfrm>
           <a:prstGeom prst="rect">
@@ -10960,13 +11183,13 @@
       </p:sp>
       <p:sp>
         <p:nvSpPr>
-          <p:cNvPr id="16" name="Text 14"/>
-          <p:cNvSpPr/>
-          <p:nvPr/>
-        </p:nvSpPr>
-        <p:spPr>
-          <a:xfrm>
-            <a:off x="3429000" y="1124712"/>
+          <p:cNvPr id="23" name="Text 21"/>
+          <p:cNvSpPr/>
+          <p:nvPr/>
+        </p:nvSpPr>
+        <p:spPr>
+          <a:xfrm>
+            <a:off x="6263640" y="1124712"/>
             <a:ext cx="1645920" cy="274320"/>
           </a:xfrm>
           <a:prstGeom prst="rect">
@@ -10991,7 +11214,7 @@
                 <a:ea typeface="Arial" pitchFamily="34" charset="-122"/>
                 <a:cs typeface="Arial" pitchFamily="34" charset="-120"/>
               </a:rPr>
-              <a:t>スタッフの対応</a:t>
+              <a:t>快適さ・設備</a:t>
             </a:r>
             <a:endParaRPr lang="en-US" sz="1300" dirty="0"/>
           </a:p>
@@ -10999,13 +11222,682 @@
       </p:sp>
       <p:sp>
         <p:nvSpPr>
-          <p:cNvPr id="17" name="Text 15"/>
-          <p:cNvSpPr/>
-          <p:nvPr/>
-        </p:nvSpPr>
-        <p:spPr>
-          <a:xfrm>
-            <a:off x="3429000" y="1417320"/>
+          <p:cNvPr id="24" name="Text 22"/>
+          <p:cNvSpPr/>
+          <p:nvPr/>
+        </p:nvSpPr>
+        <p:spPr>
+          <a:xfrm>
+            <a:off x="6263640" y="1417320"/>
+            <a:ext cx="2377440" cy="365760"/>
+          </a:xfrm>
+          <a:prstGeom prst="rect">
+            <a:avLst/>
+          </a:prstGeom>
+          <a:noFill/>
+          <a:ln/>
+        </p:spPr>
+        <p:txBody>
+          <a:bodyPr wrap="square" lIns="0" tIns="0" rIns="0" bIns="0" rtlCol="0" anchor="ctr"/>
+          <a:lstStyle/>
+          <a:p>
+            <a:pPr indent="0" marL="0">
+              <a:buNone/>
+            </a:pPr>
+            <a:r>
+              <a:rPr lang="en-US" sz="900" dirty="0">
+                <a:solidFill>
+                  <a:srgbClr val="64748B"/>
+                </a:solidFill>
+                <a:latin typeface="Arial" pitchFamily="34" charset="0"/>
+                <a:ea typeface="Arial" pitchFamily="34" charset="-122"/>
+                <a:cs typeface="Arial" pitchFamily="34" charset="-120"/>
+              </a:rPr>
+              <a:t>大人2人と幼児2人でキングベッドの一部屋を利用</a:t>
+            </a:r>
+            <a:endParaRPr lang="en-US" sz="900" dirty="0"/>
+          </a:p>
+        </p:txBody>
+      </p:sp>
+      <p:sp>
+        <p:nvSpPr>
+          <p:cNvPr id="25" name="Text 23"/>
+          <p:cNvSpPr/>
+          <p:nvPr/>
+        </p:nvSpPr>
+        <p:spPr>
+          <a:xfrm>
+            <a:off x="6263640" y="1828800"/>
+            <a:ext cx="2377440" cy="640080"/>
+          </a:xfrm>
+          <a:prstGeom prst="rect">
+            <a:avLst/>
+          </a:prstGeom>
+          <a:noFill/>
+          <a:ln/>
+        </p:spPr>
+        <p:txBody>
+          <a:bodyPr wrap="square" lIns="0" tIns="0" rIns="0" bIns="0" rtlCol="0" anchor="ctr"/>
+          <a:lstStyle/>
+          <a:p>
+            <a:pPr indent="0" marL="0">
+              <a:buNone/>
+            </a:pPr>
+            <a:r>
+              <a:rPr lang="en-US" sz="900" i="1" dirty="0">
+                <a:solidFill>
+                  <a:srgbClr val="3B7DD8"/>
+                </a:solidFill>
+                <a:latin typeface="Arial" pitchFamily="34" charset="0"/>
+                <a:ea typeface="Arial" pitchFamily="34" charset="-122"/>
+                <a:cs typeface="Arial" pitchFamily="34" charset="-120"/>
+              </a:rPr>
+              <a:t>「部屋は想像していたよりも広く、バストイレもゆったりしていて快適でした」</a:t>
+            </a:r>
+            <a:endParaRPr lang="en-US" sz="900" dirty="0"/>
+          </a:p>
+        </p:txBody>
+      </p:sp>
+      <p:sp>
+        <p:nvSpPr>
+          <p:cNvPr id="26" name="Shape 24"/>
+          <p:cNvSpPr/>
+          <p:nvPr/>
+        </p:nvSpPr>
+        <p:spPr>
+          <a:xfrm>
+            <a:off x="457200" y="2880360"/>
+            <a:ext cx="2651760" cy="1600200"/>
+          </a:xfrm>
+          <a:prstGeom prst="rect">
+            <a:avLst/>
+          </a:prstGeom>
+          <a:solidFill>
+            <a:srgbClr val="FFFFFF"/>
+          </a:solidFill>
+          <a:ln/>
+          <a:effectLst>
+            <a:outerShdw sx="100000" sy="100000" kx="0" ky="0" algn="bl" rotWithShape="0" blurRad="50800" dist="25400" dir="8100000">
+              <a:srgbClr val="000000">
+                <a:alpha val="10000"/>
+              </a:srgbClr>
+            </a:outerShdw>
+          </a:effectLst>
+        </p:spPr>
+      </p:sp>
+      <p:sp>
+        <p:nvSpPr>
+          <p:cNvPr id="27" name="Shape 25"/>
+          <p:cNvSpPr/>
+          <p:nvPr/>
+        </p:nvSpPr>
+        <p:spPr>
+          <a:xfrm>
+            <a:off x="457200" y="2880360"/>
+            <a:ext cx="54864" cy="1600200"/>
+          </a:xfrm>
+          <a:prstGeom prst="rect">
+            <a:avLst/>
+          </a:prstGeom>
+          <a:solidFill>
+            <a:srgbClr val="16A34A"/>
+          </a:solidFill>
+          <a:ln/>
+        </p:spPr>
+      </p:sp>
+      <p:sp>
+        <p:nvSpPr>
+          <p:cNvPr id="28" name="Shape 26"/>
+          <p:cNvSpPr/>
+          <p:nvPr/>
+        </p:nvSpPr>
+        <p:spPr>
+          <a:xfrm>
+            <a:off x="2286000" y="2953512"/>
+            <a:ext cx="658368" cy="228600"/>
+          </a:xfrm>
+          <a:prstGeom prst="rect">
+            <a:avLst/>
+          </a:prstGeom>
+          <a:solidFill>
+            <a:srgbClr val="DCFCE7"/>
+          </a:solidFill>
+          <a:ln/>
+        </p:spPr>
+      </p:sp>
+      <p:sp>
+        <p:nvSpPr>
+          <p:cNvPr id="29" name="Text 27"/>
+          <p:cNvSpPr/>
+          <p:nvPr/>
+        </p:nvSpPr>
+        <p:spPr>
+          <a:xfrm>
+            <a:off x="2286000" y="2953512"/>
+            <a:ext cx="658368" cy="228600"/>
+          </a:xfrm>
+          <a:prstGeom prst="rect">
+            <a:avLst/>
+          </a:prstGeom>
+          <a:noFill/>
+          <a:ln/>
+        </p:spPr>
+        <p:txBody>
+          <a:bodyPr wrap="square" lIns="0" tIns="0" rIns="0" bIns="0" rtlCol="0" anchor="ctr"/>
+          <a:lstStyle/>
+          <a:p>
+            <a:pPr algn="ctr" indent="0" marL="0">
+              <a:buNone/>
+            </a:pPr>
+            <a:r>
+              <a:rPr lang="en-US" sz="900" b="1" dirty="0">
+                <a:solidFill>
+                  <a:srgbClr val="16A34A"/>
+                </a:solidFill>
+                <a:latin typeface="Arial" pitchFamily="34" charset="0"/>
+                <a:ea typeface="Arial" pitchFamily="34" charset="-122"/>
+                <a:cs typeface="Arial" pitchFamily="34" charset="-120"/>
+              </a:rPr>
+              <a:t>10件+</a:t>
+            </a:r>
+            <a:endParaRPr lang="en-US" sz="900" dirty="0"/>
+          </a:p>
+        </p:txBody>
+      </p:sp>
+      <p:sp>
+        <p:nvSpPr>
+          <p:cNvPr id="30" name="Text 28"/>
+          <p:cNvSpPr/>
+          <p:nvPr/>
+        </p:nvSpPr>
+        <p:spPr>
+          <a:xfrm>
+            <a:off x="594360" y="2953512"/>
+            <a:ext cx="1645920" cy="274320"/>
+          </a:xfrm>
+          <a:prstGeom prst="rect">
+            <a:avLst/>
+          </a:prstGeom>
+          <a:noFill/>
+          <a:ln/>
+        </p:spPr>
+        <p:txBody>
+          <a:bodyPr wrap="square" lIns="0" tIns="0" rIns="0" bIns="0" rtlCol="0" anchor="ctr"/>
+          <a:lstStyle/>
+          <a:p>
+            <a:pPr indent="0" marL="0">
+              <a:buNone/>
+            </a:pPr>
+            <a:r>
+              <a:rPr lang="en-US" sz="1300" b="1" dirty="0">
+                <a:solidFill>
+                  <a:srgbClr val="1A2744"/>
+                </a:solidFill>
+                <a:latin typeface="Arial" pitchFamily="34" charset="0"/>
+                <a:ea typeface="Arial" pitchFamily="34" charset="-122"/>
+                <a:cs typeface="Arial" pitchFamily="34" charset="-120"/>
+              </a:rPr>
+              <a:t>清潔さ・清掃</a:t>
+            </a:r>
+            <a:endParaRPr lang="en-US" sz="1300" dirty="0"/>
+          </a:p>
+        </p:txBody>
+      </p:sp>
+      <p:sp>
+        <p:nvSpPr>
+          <p:cNvPr id="31" name="Text 29"/>
+          <p:cNvSpPr/>
+          <p:nvPr/>
+        </p:nvSpPr>
+        <p:spPr>
+          <a:xfrm>
+            <a:off x="594360" y="3246120"/>
+            <a:ext cx="2377440" cy="365760"/>
+          </a:xfrm>
+          <a:prstGeom prst="rect">
+            <a:avLst/>
+          </a:prstGeom>
+          <a:noFill/>
+          <a:ln/>
+        </p:spPr>
+        <p:txBody>
+          <a:bodyPr wrap="square" lIns="0" tIns="0" rIns="0" bIns="0" rtlCol="0" anchor="ctr"/>
+          <a:lstStyle/>
+          <a:p>
+            <a:pPr indent="0" marL="0">
+              <a:buNone/>
+            </a:pPr>
+            <a:r>
+              <a:rPr lang="en-US" sz="900" dirty="0">
+                <a:solidFill>
+                  <a:srgbClr val="64748B"/>
+                </a:solidFill>
+                <a:latin typeface="Arial" pitchFamily="34" charset="0"/>
+                <a:ea typeface="Arial" pitchFamily="34" charset="-122"/>
+                <a:cs typeface="Arial" pitchFamily="34" charset="-120"/>
+              </a:rPr>
+              <a:t>特に掃除後は、尿の臭いがひどくなる日もありました</a:t>
+            </a:r>
+            <a:endParaRPr lang="en-US" sz="900" dirty="0"/>
+          </a:p>
+        </p:txBody>
+      </p:sp>
+      <p:sp>
+        <p:nvSpPr>
+          <p:cNvPr id="32" name="Text 30"/>
+          <p:cNvSpPr/>
+          <p:nvPr/>
+        </p:nvSpPr>
+        <p:spPr>
+          <a:xfrm>
+            <a:off x="594360" y="3657600"/>
+            <a:ext cx="2377440" cy="640080"/>
+          </a:xfrm>
+          <a:prstGeom prst="rect">
+            <a:avLst/>
+          </a:prstGeom>
+          <a:noFill/>
+          <a:ln/>
+        </p:spPr>
+        <p:txBody>
+          <a:bodyPr wrap="square" lIns="0" tIns="0" rIns="0" bIns="0" rtlCol="0" anchor="ctr"/>
+          <a:lstStyle/>
+          <a:p>
+            <a:pPr indent="0" marL="0">
+              <a:buNone/>
+            </a:pPr>
+            <a:r>
+              <a:rPr lang="en-US" sz="900" i="1" dirty="0">
+                <a:solidFill>
+                  <a:srgbClr val="3B7DD8"/>
+                </a:solidFill>
+                <a:latin typeface="Arial" pitchFamily="34" charset="0"/>
+                <a:ea typeface="Arial" pitchFamily="34" charset="-122"/>
+                <a:cs typeface="Arial" pitchFamily="34" charset="-120"/>
+              </a:rPr>
+              <a:t>「清掃は行き届いているのでキレイ」</a:t>
+            </a:r>
+            <a:endParaRPr lang="en-US" sz="900" dirty="0"/>
+          </a:p>
+        </p:txBody>
+      </p:sp>
+      <p:sp>
+        <p:nvSpPr>
+          <p:cNvPr id="33" name="Shape 31"/>
+          <p:cNvSpPr/>
+          <p:nvPr/>
+        </p:nvSpPr>
+        <p:spPr>
+          <a:xfrm>
+            <a:off x="3291840" y="2880360"/>
+            <a:ext cx="2651760" cy="1600200"/>
+          </a:xfrm>
+          <a:prstGeom prst="rect">
+            <a:avLst/>
+          </a:prstGeom>
+          <a:solidFill>
+            <a:srgbClr val="FFFFFF"/>
+          </a:solidFill>
+          <a:ln/>
+          <a:effectLst>
+            <a:outerShdw sx="100000" sy="100000" kx="0" ky="0" algn="bl" rotWithShape="0" blurRad="50800" dist="25400" dir="8100000">
+              <a:srgbClr val="000000">
+                <a:alpha val="10000"/>
+              </a:srgbClr>
+            </a:outerShdw>
+          </a:effectLst>
+        </p:spPr>
+      </p:sp>
+      <p:sp>
+        <p:nvSpPr>
+          <p:cNvPr id="34" name="Shape 32"/>
+          <p:cNvSpPr/>
+          <p:nvPr/>
+        </p:nvSpPr>
+        <p:spPr>
+          <a:xfrm>
+            <a:off x="3291840" y="2880360"/>
+            <a:ext cx="54864" cy="1600200"/>
+          </a:xfrm>
+          <a:prstGeom prst="rect">
+            <a:avLst/>
+          </a:prstGeom>
+          <a:solidFill>
+            <a:srgbClr val="16A34A"/>
+          </a:solidFill>
+          <a:ln/>
+        </p:spPr>
+      </p:sp>
+      <p:sp>
+        <p:nvSpPr>
+          <p:cNvPr id="35" name="Shape 33"/>
+          <p:cNvSpPr/>
+          <p:nvPr/>
+        </p:nvSpPr>
+        <p:spPr>
+          <a:xfrm>
+            <a:off x="5120640" y="2953512"/>
+            <a:ext cx="658368" cy="228600"/>
+          </a:xfrm>
+          <a:prstGeom prst="rect">
+            <a:avLst/>
+          </a:prstGeom>
+          <a:solidFill>
+            <a:srgbClr val="DCFCE7"/>
+          </a:solidFill>
+          <a:ln/>
+        </p:spPr>
+      </p:sp>
+      <p:sp>
+        <p:nvSpPr>
+          <p:cNvPr id="36" name="Text 34"/>
+          <p:cNvSpPr/>
+          <p:nvPr/>
+        </p:nvSpPr>
+        <p:spPr>
+          <a:xfrm>
+            <a:off x="5120640" y="2953512"/>
+            <a:ext cx="658368" cy="228600"/>
+          </a:xfrm>
+          <a:prstGeom prst="rect">
+            <a:avLst/>
+          </a:prstGeom>
+          <a:noFill/>
+          <a:ln/>
+        </p:spPr>
+        <p:txBody>
+          <a:bodyPr wrap="square" lIns="0" tIns="0" rIns="0" bIns="0" rtlCol="0" anchor="ctr"/>
+          <a:lstStyle/>
+          <a:p>
+            <a:pPr algn="ctr" indent="0" marL="0">
+              <a:buNone/>
+            </a:pPr>
+            <a:r>
+              <a:rPr lang="en-US" sz="900" b="1" dirty="0">
+                <a:solidFill>
+                  <a:srgbClr val="16A34A"/>
+                </a:solidFill>
+                <a:latin typeface="Arial" pitchFamily="34" charset="0"/>
+                <a:ea typeface="Arial" pitchFamily="34" charset="-122"/>
+                <a:cs typeface="Arial" pitchFamily="34" charset="-120"/>
+              </a:rPr>
+              <a:t>10件+</a:t>
+            </a:r>
+            <a:endParaRPr lang="en-US" sz="900" dirty="0"/>
+          </a:p>
+        </p:txBody>
+      </p:sp>
+      <p:sp>
+        <p:nvSpPr>
+          <p:cNvPr id="37" name="Text 35"/>
+          <p:cNvSpPr/>
+          <p:nvPr/>
+        </p:nvSpPr>
+        <p:spPr>
+          <a:xfrm>
+            <a:off x="3429000" y="2953512"/>
+            <a:ext cx="1645920" cy="274320"/>
+          </a:xfrm>
+          <a:prstGeom prst="rect">
+            <a:avLst/>
+          </a:prstGeom>
+          <a:noFill/>
+          <a:ln/>
+        </p:spPr>
+        <p:txBody>
+          <a:bodyPr wrap="square" lIns="0" tIns="0" rIns="0" bIns="0" rtlCol="0" anchor="ctr"/>
+          <a:lstStyle/>
+          <a:p>
+            <a:pPr indent="0" marL="0">
+              <a:buNone/>
+            </a:pPr>
+            <a:r>
+              <a:rPr lang="en-US" sz="1300" b="1" dirty="0">
+                <a:solidFill>
+                  <a:srgbClr val="1A2744"/>
+                </a:solidFill>
+                <a:latin typeface="Arial" pitchFamily="34" charset="0"/>
+                <a:ea typeface="Arial" pitchFamily="34" charset="-122"/>
+                <a:cs typeface="Arial" pitchFamily="34" charset="-120"/>
+              </a:rPr>
+              <a:t>朝食</a:t>
+            </a:r>
+            <a:endParaRPr lang="en-US" sz="1300" dirty="0"/>
+          </a:p>
+        </p:txBody>
+      </p:sp>
+      <p:sp>
+        <p:nvSpPr>
+          <p:cNvPr id="38" name="Text 36"/>
+          <p:cNvSpPr/>
+          <p:nvPr/>
+        </p:nvSpPr>
+        <p:spPr>
+          <a:xfrm>
+            <a:off x="3429000" y="3246120"/>
+            <a:ext cx="2377440" cy="365760"/>
+          </a:xfrm>
+          <a:prstGeom prst="rect">
+            <a:avLst/>
+          </a:prstGeom>
+          <a:noFill/>
+          <a:ln/>
+        </p:spPr>
+        <p:txBody>
+          <a:bodyPr wrap="square" lIns="0" tIns="0" rIns="0" bIns="0" rtlCol="0" anchor="ctr"/>
+          <a:lstStyle/>
+          <a:p>
+            <a:pPr indent="0" marL="0">
+              <a:buNone/>
+            </a:pPr>
+            <a:r>
+              <a:rPr lang="en-US" sz="900" dirty="0">
+                <a:solidFill>
+                  <a:srgbClr val="64748B"/>
+                </a:solidFill>
+                <a:latin typeface="Arial" pitchFamily="34" charset="0"/>
+                <a:ea typeface="Arial" pitchFamily="34" charset="-122"/>
+                <a:cs typeface="Arial" pitchFamily="34" charset="-120"/>
+              </a:rPr>
+              <a:t>朝食は値段が高い上に種類も少なく（パンが3種類、ジャム、バター、シリアル、卵、それだけです</a:t>
+            </a:r>
+            <a:endParaRPr lang="en-US" sz="900" dirty="0"/>
+          </a:p>
+        </p:txBody>
+      </p:sp>
+      <p:sp>
+        <p:nvSpPr>
+          <p:cNvPr id="39" name="Text 37"/>
+          <p:cNvSpPr/>
+          <p:nvPr/>
+        </p:nvSpPr>
+        <p:spPr>
+          <a:xfrm>
+            <a:off x="3429000" y="3657600"/>
+            <a:ext cx="2377440" cy="640080"/>
+          </a:xfrm>
+          <a:prstGeom prst="rect">
+            <a:avLst/>
+          </a:prstGeom>
+          <a:noFill/>
+          <a:ln/>
+        </p:spPr>
+        <p:txBody>
+          <a:bodyPr wrap="square" lIns="0" tIns="0" rIns="0" bIns="0" rtlCol="0" anchor="ctr"/>
+          <a:lstStyle/>
+          <a:p>
+            <a:pPr indent="0" marL="0">
+              <a:buNone/>
+            </a:pPr>
+            <a:r>
+              <a:rPr lang="en-US" sz="900" i="1" dirty="0">
+                <a:solidFill>
+                  <a:srgbClr val="3B7DD8"/>
+                </a:solidFill>
+                <a:latin typeface="Arial" pitchFamily="34" charset="0"/>
+                <a:ea typeface="Arial" pitchFamily="34" charset="-122"/>
+                <a:cs typeface="Arial" pitchFamily="34" charset="-120"/>
+              </a:rPr>
+              <a:t>「Yummy but Very limited breakfast option as they have the ...」</a:t>
+            </a:r>
+            <a:endParaRPr lang="en-US" sz="900" dirty="0"/>
+          </a:p>
+        </p:txBody>
+      </p:sp>
+      <p:sp>
+        <p:nvSpPr>
+          <p:cNvPr id="40" name="Shape 38"/>
+          <p:cNvSpPr/>
+          <p:nvPr/>
+        </p:nvSpPr>
+        <p:spPr>
+          <a:xfrm>
+            <a:off x="6126480" y="2880360"/>
+            <a:ext cx="2651760" cy="1600200"/>
+          </a:xfrm>
+          <a:prstGeom prst="rect">
+            <a:avLst/>
+          </a:prstGeom>
+          <a:solidFill>
+            <a:srgbClr val="FFFFFF"/>
+          </a:solidFill>
+          <a:ln/>
+          <a:effectLst>
+            <a:outerShdw sx="100000" sy="100000" kx="0" ky="0" algn="bl" rotWithShape="0" blurRad="50800" dist="25400" dir="8100000">
+              <a:srgbClr val="000000">
+                <a:alpha val="10000"/>
+              </a:srgbClr>
+            </a:outerShdw>
+          </a:effectLst>
+        </p:spPr>
+      </p:sp>
+      <p:sp>
+        <p:nvSpPr>
+          <p:cNvPr id="41" name="Shape 39"/>
+          <p:cNvSpPr/>
+          <p:nvPr/>
+        </p:nvSpPr>
+        <p:spPr>
+          <a:xfrm>
+            <a:off x="6126480" y="2880360"/>
+            <a:ext cx="54864" cy="1600200"/>
+          </a:xfrm>
+          <a:prstGeom prst="rect">
+            <a:avLst/>
+          </a:prstGeom>
+          <a:solidFill>
+            <a:srgbClr val="16A34A"/>
+          </a:solidFill>
+          <a:ln/>
+        </p:spPr>
+      </p:sp>
+      <p:sp>
+        <p:nvSpPr>
+          <p:cNvPr id="42" name="Shape 40"/>
+          <p:cNvSpPr/>
+          <p:nvPr/>
+        </p:nvSpPr>
+        <p:spPr>
+          <a:xfrm>
+            <a:off x="7955280" y="2953512"/>
+            <a:ext cx="658368" cy="228600"/>
+          </a:xfrm>
+          <a:prstGeom prst="rect">
+            <a:avLst/>
+          </a:prstGeom>
+          <a:solidFill>
+            <a:srgbClr val="DCFCE7"/>
+          </a:solidFill>
+          <a:ln/>
+        </p:spPr>
+      </p:sp>
+      <p:sp>
+        <p:nvSpPr>
+          <p:cNvPr id="43" name="Text 41"/>
+          <p:cNvSpPr/>
+          <p:nvPr/>
+        </p:nvSpPr>
+        <p:spPr>
+          <a:xfrm>
+            <a:off x="7955280" y="2953512"/>
+            <a:ext cx="658368" cy="228600"/>
+          </a:xfrm>
+          <a:prstGeom prst="rect">
+            <a:avLst/>
+          </a:prstGeom>
+          <a:noFill/>
+          <a:ln/>
+        </p:spPr>
+        <p:txBody>
+          <a:bodyPr wrap="square" lIns="0" tIns="0" rIns="0" bIns="0" rtlCol="0" anchor="ctr"/>
+          <a:lstStyle/>
+          <a:p>
+            <a:pPr algn="ctr" indent="0" marL="0">
+              <a:buNone/>
+            </a:pPr>
+            <a:r>
+              <a:rPr lang="en-US" sz="900" b="1" dirty="0">
+                <a:solidFill>
+                  <a:srgbClr val="16A34A"/>
+                </a:solidFill>
+                <a:latin typeface="Arial" pitchFamily="34" charset="0"/>
+                <a:ea typeface="Arial" pitchFamily="34" charset="-122"/>
+                <a:cs typeface="Arial" pitchFamily="34" charset="-120"/>
+              </a:rPr>
+              <a:t>9件</a:t>
+            </a:r>
+            <a:endParaRPr lang="en-US" sz="900" dirty="0"/>
+          </a:p>
+        </p:txBody>
+      </p:sp>
+      <p:sp>
+        <p:nvSpPr>
+          <p:cNvPr id="44" name="Text 42"/>
+          <p:cNvSpPr/>
+          <p:nvPr/>
+        </p:nvSpPr>
+        <p:spPr>
+          <a:xfrm>
+            <a:off x="6263640" y="2953512"/>
+            <a:ext cx="1645920" cy="274320"/>
+          </a:xfrm>
+          <a:prstGeom prst="rect">
+            <a:avLst/>
+          </a:prstGeom>
+          <a:noFill/>
+          <a:ln/>
+        </p:spPr>
+        <p:txBody>
+          <a:bodyPr wrap="square" lIns="0" tIns="0" rIns="0" bIns="0" rtlCol="0" anchor="ctr"/>
+          <a:lstStyle/>
+          <a:p>
+            <a:pPr indent="0" marL="0">
+              <a:buNone/>
+            </a:pPr>
+            <a:r>
+              <a:rPr lang="en-US" sz="1300" b="1" dirty="0">
+                <a:solidFill>
+                  <a:srgbClr val="1A2744"/>
+                </a:solidFill>
+                <a:latin typeface="Arial" pitchFamily="34" charset="0"/>
+                <a:ea typeface="Arial" pitchFamily="34" charset="-122"/>
+                <a:cs typeface="Arial" pitchFamily="34" charset="-120"/>
+              </a:rPr>
+              <a:t>部屋の広さ</a:t>
+            </a:r>
+            <a:endParaRPr lang="en-US" sz="1300" dirty="0"/>
+          </a:p>
+        </p:txBody>
+      </p:sp>
+      <p:sp>
+        <p:nvSpPr>
+          <p:cNvPr id="45" name="Text 43"/>
+          <p:cNvSpPr/>
+          <p:nvPr/>
+        </p:nvSpPr>
+        <p:spPr>
+          <a:xfrm>
+            <a:off x="6263640" y="3246120"/>
             <a:ext cx="2377440" cy="365760"/>
           </a:xfrm>
           <a:prstGeom prst="rect">
@@ -11038,13 +11930,13 @@
       </p:sp>
       <p:sp>
         <p:nvSpPr>
-          <p:cNvPr id="18" name="Text 16"/>
-          <p:cNvSpPr/>
-          <p:nvPr/>
-        </p:nvSpPr>
-        <p:spPr>
-          <a:xfrm>
-            <a:off x="3429000" y="1828800"/>
+          <p:cNvPr id="46" name="Text 44"/>
+          <p:cNvSpPr/>
+          <p:nvPr/>
+        </p:nvSpPr>
+        <p:spPr>
+          <a:xfrm>
+            <a:off x="6263640" y="3657600"/>
             <a:ext cx="2377440" cy="640080"/>
           </a:xfrm>
           <a:prstGeom prst="rect">
@@ -11069,899 +11961,7 @@
                 <a:ea typeface="Arial" pitchFamily="34" charset="-122"/>
                 <a:cs typeface="Arial" pitchFamily="34" charset="-120"/>
               </a:rPr>
-              <a:t>「必要なものはすべて揃っていて、紅茶、コーヒー、浄水器、ランドリー、素晴らしいシャワーなど、スタッフもサービスも最高...」</a:t>
-            </a:r>
-            <a:endParaRPr lang="en-US" sz="900" dirty="0"/>
-          </a:p>
-        </p:txBody>
-      </p:sp>
-      <p:sp>
-        <p:nvSpPr>
-          <p:cNvPr id="19" name="Shape 17"/>
-          <p:cNvSpPr/>
-          <p:nvPr/>
-        </p:nvSpPr>
-        <p:spPr>
-          <a:xfrm>
-            <a:off x="6126480" y="1051560"/>
-            <a:ext cx="2651760" cy="1600200"/>
-          </a:xfrm>
-          <a:prstGeom prst="rect">
-            <a:avLst/>
-          </a:prstGeom>
-          <a:solidFill>
-            <a:srgbClr val="FFFFFF"/>
-          </a:solidFill>
-          <a:ln/>
-          <a:effectLst>
-            <a:outerShdw sx="100000" sy="100000" kx="0" ky="0" algn="bl" rotWithShape="0" blurRad="50800" dist="25400" dir="8100000">
-              <a:srgbClr val="000000">
-                <a:alpha val="10000"/>
-              </a:srgbClr>
-            </a:outerShdw>
-          </a:effectLst>
-        </p:spPr>
-      </p:sp>
-      <p:sp>
-        <p:nvSpPr>
-          <p:cNvPr id="20" name="Shape 18"/>
-          <p:cNvSpPr/>
-          <p:nvPr/>
-        </p:nvSpPr>
-        <p:spPr>
-          <a:xfrm>
-            <a:off x="6126480" y="1051560"/>
-            <a:ext cx="54864" cy="1600200"/>
-          </a:xfrm>
-          <a:prstGeom prst="rect">
-            <a:avLst/>
-          </a:prstGeom>
-          <a:solidFill>
-            <a:srgbClr val="16A34A"/>
-          </a:solidFill>
-          <a:ln/>
-        </p:spPr>
-      </p:sp>
-      <p:sp>
-        <p:nvSpPr>
-          <p:cNvPr id="21" name="Shape 19"/>
-          <p:cNvSpPr/>
-          <p:nvPr/>
-        </p:nvSpPr>
-        <p:spPr>
-          <a:xfrm>
-            <a:off x="7955280" y="1124712"/>
-            <a:ext cx="658368" cy="228600"/>
-          </a:xfrm>
-          <a:prstGeom prst="rect">
-            <a:avLst/>
-          </a:prstGeom>
-          <a:solidFill>
-            <a:srgbClr val="DCFCE7"/>
-          </a:solidFill>
-          <a:ln/>
-        </p:spPr>
-      </p:sp>
-      <p:sp>
-        <p:nvSpPr>
-          <p:cNvPr id="22" name="Text 20"/>
-          <p:cNvSpPr/>
-          <p:nvPr/>
-        </p:nvSpPr>
-        <p:spPr>
-          <a:xfrm>
-            <a:off x="7955280" y="1124712"/>
-            <a:ext cx="658368" cy="228600"/>
-          </a:xfrm>
-          <a:prstGeom prst="rect">
-            <a:avLst/>
-          </a:prstGeom>
-          <a:noFill/>
-          <a:ln/>
-        </p:spPr>
-        <p:txBody>
-          <a:bodyPr wrap="square" lIns="0" tIns="0" rIns="0" bIns="0" rtlCol="0" anchor="ctr"/>
-          <a:lstStyle/>
-          <a:p>
-            <a:pPr algn="ctr" indent="0" marL="0">
-              <a:buNone/>
-            </a:pPr>
-            <a:r>
-              <a:rPr lang="en-US" sz="900" b="1" dirty="0">
-                <a:solidFill>
-                  <a:srgbClr val="16A34A"/>
-                </a:solidFill>
-                <a:latin typeface="Arial" pitchFamily="34" charset="0"/>
-                <a:ea typeface="Arial" pitchFamily="34" charset="-122"/>
-                <a:cs typeface="Arial" pitchFamily="34" charset="-120"/>
-              </a:rPr>
-              <a:t>20件+</a:t>
-            </a:r>
-            <a:endParaRPr lang="en-US" sz="900" dirty="0"/>
-          </a:p>
-        </p:txBody>
-      </p:sp>
-      <p:sp>
-        <p:nvSpPr>
-          <p:cNvPr id="23" name="Text 21"/>
-          <p:cNvSpPr/>
-          <p:nvPr/>
-        </p:nvSpPr>
-        <p:spPr>
-          <a:xfrm>
-            <a:off x="6263640" y="1124712"/>
-            <a:ext cx="1645920" cy="274320"/>
-          </a:xfrm>
-          <a:prstGeom prst="rect">
-            <a:avLst/>
-          </a:prstGeom>
-          <a:noFill/>
-          <a:ln/>
-        </p:spPr>
-        <p:txBody>
-          <a:bodyPr wrap="square" lIns="0" tIns="0" rIns="0" bIns="0" rtlCol="0" anchor="ctr"/>
-          <a:lstStyle/>
-          <a:p>
-            <a:pPr indent="0" marL="0">
-              <a:buNone/>
-            </a:pPr>
-            <a:r>
-              <a:rPr lang="en-US" sz="1300" b="1" dirty="0">
-                <a:solidFill>
-                  <a:srgbClr val="1A2744"/>
-                </a:solidFill>
-                <a:latin typeface="Arial" pitchFamily="34" charset="0"/>
-                <a:ea typeface="Arial" pitchFamily="34" charset="-122"/>
-                <a:cs typeface="Arial" pitchFamily="34" charset="-120"/>
-              </a:rPr>
-              <a:t>快適さ・設備</a:t>
-            </a:r>
-            <a:endParaRPr lang="en-US" sz="1300" dirty="0"/>
-          </a:p>
-        </p:txBody>
-      </p:sp>
-      <p:sp>
-        <p:nvSpPr>
-          <p:cNvPr id="24" name="Text 22"/>
-          <p:cNvSpPr/>
-          <p:nvPr/>
-        </p:nvSpPr>
-        <p:spPr>
-          <a:xfrm>
-            <a:off x="6263640" y="1417320"/>
-            <a:ext cx="2377440" cy="365760"/>
-          </a:xfrm>
-          <a:prstGeom prst="rect">
-            <a:avLst/>
-          </a:prstGeom>
-          <a:noFill/>
-          <a:ln/>
-        </p:spPr>
-        <p:txBody>
-          <a:bodyPr wrap="square" lIns="0" tIns="0" rIns="0" bIns="0" rtlCol="0" anchor="ctr"/>
-          <a:lstStyle/>
-          <a:p>
-            <a:pPr indent="0" marL="0">
-              <a:buNone/>
-            </a:pPr>
-            <a:r>
-              <a:rPr lang="en-US" sz="900" dirty="0">
-                <a:solidFill>
-                  <a:srgbClr val="64748B"/>
-                </a:solidFill>
-                <a:latin typeface="Arial" pitchFamily="34" charset="0"/>
-                <a:ea typeface="Arial" pitchFamily="34" charset="-122"/>
-                <a:cs typeface="Arial" pitchFamily="34" charset="-120"/>
-              </a:rPr>
-              <a:t>部屋は想像していたよりも広く、バストイレもゆったりしていて快適でした</a:t>
-            </a:r>
-            <a:endParaRPr lang="en-US" sz="900" dirty="0"/>
-          </a:p>
-        </p:txBody>
-      </p:sp>
-      <p:sp>
-        <p:nvSpPr>
-          <p:cNvPr id="25" name="Text 23"/>
-          <p:cNvSpPr/>
-          <p:nvPr/>
-        </p:nvSpPr>
-        <p:spPr>
-          <a:xfrm>
-            <a:off x="6263640" y="1828800"/>
-            <a:ext cx="2377440" cy="640080"/>
-          </a:xfrm>
-          <a:prstGeom prst="rect">
-            <a:avLst/>
-          </a:prstGeom>
-          <a:noFill/>
-          <a:ln/>
-        </p:spPr>
-        <p:txBody>
-          <a:bodyPr wrap="square" lIns="0" tIns="0" rIns="0" bIns="0" rtlCol="0" anchor="ctr"/>
-          <a:lstStyle/>
-          <a:p>
-            <a:pPr indent="0" marL="0">
-              <a:buNone/>
-            </a:pPr>
-            <a:r>
-              <a:rPr lang="en-US" sz="900" i="1" dirty="0">
-                <a:solidFill>
-                  <a:srgbClr val="3B7DD8"/>
-                </a:solidFill>
-                <a:latin typeface="Arial" pitchFamily="34" charset="0"/>
-                <a:ea typeface="Arial" pitchFamily="34" charset="-122"/>
-                <a:cs typeface="Arial" pitchFamily="34" charset="-120"/>
-              </a:rPr>
-              <a:t>「部屋は4ベッドルームでしたが、今までのホテルで一番広くて、ソファもあるので部屋食もゆっくり楽しめました」</a:t>
-            </a:r>
-            <a:endParaRPr lang="en-US" sz="900" dirty="0"/>
-          </a:p>
-        </p:txBody>
-      </p:sp>
-      <p:sp>
-        <p:nvSpPr>
-          <p:cNvPr id="26" name="Shape 24"/>
-          <p:cNvSpPr/>
-          <p:nvPr/>
-        </p:nvSpPr>
-        <p:spPr>
-          <a:xfrm>
-            <a:off x="457200" y="2880360"/>
-            <a:ext cx="2651760" cy="1600200"/>
-          </a:xfrm>
-          <a:prstGeom prst="rect">
-            <a:avLst/>
-          </a:prstGeom>
-          <a:solidFill>
-            <a:srgbClr val="FFFFFF"/>
-          </a:solidFill>
-          <a:ln/>
-          <a:effectLst>
-            <a:outerShdw sx="100000" sy="100000" kx="0" ky="0" algn="bl" rotWithShape="0" blurRad="50800" dist="25400" dir="8100000">
-              <a:srgbClr val="000000">
-                <a:alpha val="10000"/>
-              </a:srgbClr>
-            </a:outerShdw>
-          </a:effectLst>
-        </p:spPr>
-      </p:sp>
-      <p:sp>
-        <p:nvSpPr>
-          <p:cNvPr id="27" name="Shape 25"/>
-          <p:cNvSpPr/>
-          <p:nvPr/>
-        </p:nvSpPr>
-        <p:spPr>
-          <a:xfrm>
-            <a:off x="457200" y="2880360"/>
-            <a:ext cx="54864" cy="1600200"/>
-          </a:xfrm>
-          <a:prstGeom prst="rect">
-            <a:avLst/>
-          </a:prstGeom>
-          <a:solidFill>
-            <a:srgbClr val="16A34A"/>
-          </a:solidFill>
-          <a:ln/>
-        </p:spPr>
-      </p:sp>
-      <p:sp>
-        <p:nvSpPr>
-          <p:cNvPr id="28" name="Shape 26"/>
-          <p:cNvSpPr/>
-          <p:nvPr/>
-        </p:nvSpPr>
-        <p:spPr>
-          <a:xfrm>
-            <a:off x="2286000" y="2953512"/>
-            <a:ext cx="658368" cy="228600"/>
-          </a:xfrm>
-          <a:prstGeom prst="rect">
-            <a:avLst/>
-          </a:prstGeom>
-          <a:solidFill>
-            <a:srgbClr val="DCFCE7"/>
-          </a:solidFill>
-          <a:ln/>
-        </p:spPr>
-      </p:sp>
-      <p:sp>
-        <p:nvSpPr>
-          <p:cNvPr id="29" name="Text 27"/>
-          <p:cNvSpPr/>
-          <p:nvPr/>
-        </p:nvSpPr>
-        <p:spPr>
-          <a:xfrm>
-            <a:off x="2286000" y="2953512"/>
-            <a:ext cx="658368" cy="228600"/>
-          </a:xfrm>
-          <a:prstGeom prst="rect">
-            <a:avLst/>
-          </a:prstGeom>
-          <a:noFill/>
-          <a:ln/>
-        </p:spPr>
-        <p:txBody>
-          <a:bodyPr wrap="square" lIns="0" tIns="0" rIns="0" bIns="0" rtlCol="0" anchor="ctr"/>
-          <a:lstStyle/>
-          <a:p>
-            <a:pPr algn="ctr" indent="0" marL="0">
-              <a:buNone/>
-            </a:pPr>
-            <a:r>
-              <a:rPr lang="en-US" sz="900" b="1" dirty="0">
-                <a:solidFill>
-                  <a:srgbClr val="16A34A"/>
-                </a:solidFill>
-                <a:latin typeface="Arial" pitchFamily="34" charset="0"/>
-                <a:ea typeface="Arial" pitchFamily="34" charset="-122"/>
-                <a:cs typeface="Arial" pitchFamily="34" charset="-120"/>
-              </a:rPr>
-              <a:t>10件+</a:t>
-            </a:r>
-            <a:endParaRPr lang="en-US" sz="900" dirty="0"/>
-          </a:p>
-        </p:txBody>
-      </p:sp>
-      <p:sp>
-        <p:nvSpPr>
-          <p:cNvPr id="30" name="Text 28"/>
-          <p:cNvSpPr/>
-          <p:nvPr/>
-        </p:nvSpPr>
-        <p:spPr>
-          <a:xfrm>
-            <a:off x="594360" y="2953512"/>
-            <a:ext cx="1645920" cy="274320"/>
-          </a:xfrm>
-          <a:prstGeom prst="rect">
-            <a:avLst/>
-          </a:prstGeom>
-          <a:noFill/>
-          <a:ln/>
-        </p:spPr>
-        <p:txBody>
-          <a:bodyPr wrap="square" lIns="0" tIns="0" rIns="0" bIns="0" rtlCol="0" anchor="ctr"/>
-          <a:lstStyle/>
-          <a:p>
-            <a:pPr indent="0" marL="0">
-              <a:buNone/>
-            </a:pPr>
-            <a:r>
-              <a:rPr lang="en-US" sz="1300" b="1" dirty="0">
-                <a:solidFill>
-                  <a:srgbClr val="1A2744"/>
-                </a:solidFill>
-                <a:latin typeface="Arial" pitchFamily="34" charset="0"/>
-                <a:ea typeface="Arial" pitchFamily="34" charset="-122"/>
-                <a:cs typeface="Arial" pitchFamily="34" charset="-120"/>
-              </a:rPr>
-              <a:t>清潔さ・清掃</a:t>
-            </a:r>
-            <a:endParaRPr lang="en-US" sz="1300" dirty="0"/>
-          </a:p>
-        </p:txBody>
-      </p:sp>
-      <p:sp>
-        <p:nvSpPr>
-          <p:cNvPr id="31" name="Text 29"/>
-          <p:cNvSpPr/>
-          <p:nvPr/>
-        </p:nvSpPr>
-        <p:spPr>
-          <a:xfrm>
-            <a:off x="594360" y="3246120"/>
-            <a:ext cx="2377440" cy="365760"/>
-          </a:xfrm>
-          <a:prstGeom prst="rect">
-            <a:avLst/>
-          </a:prstGeom>
-          <a:noFill/>
-          <a:ln/>
-        </p:spPr>
-        <p:txBody>
-          <a:bodyPr wrap="square" lIns="0" tIns="0" rIns="0" bIns="0" rtlCol="0" anchor="ctr"/>
-          <a:lstStyle/>
-          <a:p>
-            <a:pPr indent="0" marL="0">
-              <a:buNone/>
-            </a:pPr>
-            <a:r>
-              <a:rPr lang="en-US" sz="900" dirty="0">
-                <a:solidFill>
-                  <a:srgbClr val="64748B"/>
-                </a:solidFill>
-                <a:latin typeface="Arial" pitchFamily="34" charset="0"/>
-                <a:ea typeface="Arial" pitchFamily="34" charset="-122"/>
-                <a:cs typeface="Arial" pitchFamily="34" charset="-120"/>
-              </a:rPr>
-              <a:t>他のレビュー見て心配しましたが綺麗ですね、臭いとかこんなこともありませんでした</a:t>
-            </a:r>
-            <a:endParaRPr lang="en-US" sz="900" dirty="0"/>
-          </a:p>
-        </p:txBody>
-      </p:sp>
-      <p:sp>
-        <p:nvSpPr>
-          <p:cNvPr id="32" name="Text 30"/>
-          <p:cNvSpPr/>
-          <p:nvPr/>
-        </p:nvSpPr>
-        <p:spPr>
-          <a:xfrm>
-            <a:off x="594360" y="3657600"/>
-            <a:ext cx="2377440" cy="640080"/>
-          </a:xfrm>
-          <a:prstGeom prst="rect">
-            <a:avLst/>
-          </a:prstGeom>
-          <a:noFill/>
-          <a:ln/>
-        </p:spPr>
-        <p:txBody>
-          <a:bodyPr wrap="square" lIns="0" tIns="0" rIns="0" bIns="0" rtlCol="0" anchor="ctr"/>
-          <a:lstStyle/>
-          <a:p>
-            <a:pPr indent="0" marL="0">
-              <a:buNone/>
-            </a:pPr>
-            <a:r>
-              <a:rPr lang="en-US" sz="900" i="1" dirty="0">
-                <a:solidFill>
-                  <a:srgbClr val="3B7DD8"/>
-                </a:solidFill>
-                <a:latin typeface="Arial" pitchFamily="34" charset="0"/>
-                <a:ea typeface="Arial" pitchFamily="34" charset="-122"/>
-                <a:cs typeface="Arial" pitchFamily="34" charset="-120"/>
-              </a:rPr>
-              <a:t>「新美術館への道は時期的に桜が綺麗で、ホテルの方に教えていただいた近隣の飲食店もとても良かったです」</a:t>
-            </a:r>
-            <a:endParaRPr lang="en-US" sz="900" dirty="0"/>
-          </a:p>
-        </p:txBody>
-      </p:sp>
-      <p:sp>
-        <p:nvSpPr>
-          <p:cNvPr id="33" name="Shape 31"/>
-          <p:cNvSpPr/>
-          <p:nvPr/>
-        </p:nvSpPr>
-        <p:spPr>
-          <a:xfrm>
-            <a:off x="3291840" y="2880360"/>
-            <a:ext cx="2651760" cy="1600200"/>
-          </a:xfrm>
-          <a:prstGeom prst="rect">
-            <a:avLst/>
-          </a:prstGeom>
-          <a:solidFill>
-            <a:srgbClr val="FFFFFF"/>
-          </a:solidFill>
-          <a:ln/>
-          <a:effectLst>
-            <a:outerShdw sx="100000" sy="100000" kx="0" ky="0" algn="bl" rotWithShape="0" blurRad="50800" dist="25400" dir="8100000">
-              <a:srgbClr val="000000">
-                <a:alpha val="10000"/>
-              </a:srgbClr>
-            </a:outerShdw>
-          </a:effectLst>
-        </p:spPr>
-      </p:sp>
-      <p:sp>
-        <p:nvSpPr>
-          <p:cNvPr id="34" name="Shape 32"/>
-          <p:cNvSpPr/>
-          <p:nvPr/>
-        </p:nvSpPr>
-        <p:spPr>
-          <a:xfrm>
-            <a:off x="3291840" y="2880360"/>
-            <a:ext cx="54864" cy="1600200"/>
-          </a:xfrm>
-          <a:prstGeom prst="rect">
-            <a:avLst/>
-          </a:prstGeom>
-          <a:solidFill>
-            <a:srgbClr val="16A34A"/>
-          </a:solidFill>
-          <a:ln/>
-        </p:spPr>
-      </p:sp>
-      <p:sp>
-        <p:nvSpPr>
-          <p:cNvPr id="35" name="Shape 33"/>
-          <p:cNvSpPr/>
-          <p:nvPr/>
-        </p:nvSpPr>
-        <p:spPr>
-          <a:xfrm>
-            <a:off x="5120640" y="2953512"/>
-            <a:ext cx="658368" cy="228600"/>
-          </a:xfrm>
-          <a:prstGeom prst="rect">
-            <a:avLst/>
-          </a:prstGeom>
-          <a:solidFill>
-            <a:srgbClr val="DCFCE7"/>
-          </a:solidFill>
-          <a:ln/>
-        </p:spPr>
-      </p:sp>
-      <p:sp>
-        <p:nvSpPr>
-          <p:cNvPr id="36" name="Text 34"/>
-          <p:cNvSpPr/>
-          <p:nvPr/>
-        </p:nvSpPr>
-        <p:spPr>
-          <a:xfrm>
-            <a:off x="5120640" y="2953512"/>
-            <a:ext cx="658368" cy="228600"/>
-          </a:xfrm>
-          <a:prstGeom prst="rect">
-            <a:avLst/>
-          </a:prstGeom>
-          <a:noFill/>
-          <a:ln/>
-        </p:spPr>
-        <p:txBody>
-          <a:bodyPr wrap="square" lIns="0" tIns="0" rIns="0" bIns="0" rtlCol="0" anchor="ctr"/>
-          <a:lstStyle/>
-          <a:p>
-            <a:pPr algn="ctr" indent="0" marL="0">
-              <a:buNone/>
-            </a:pPr>
-            <a:r>
-              <a:rPr lang="en-US" sz="900" b="1" dirty="0">
-                <a:solidFill>
-                  <a:srgbClr val="16A34A"/>
-                </a:solidFill>
-                <a:latin typeface="Arial" pitchFamily="34" charset="0"/>
-                <a:ea typeface="Arial" pitchFamily="34" charset="-122"/>
-                <a:cs typeface="Arial" pitchFamily="34" charset="-120"/>
-              </a:rPr>
-              <a:t>10件+</a:t>
-            </a:r>
-            <a:endParaRPr lang="en-US" sz="900" dirty="0"/>
-          </a:p>
-        </p:txBody>
-      </p:sp>
-      <p:sp>
-        <p:nvSpPr>
-          <p:cNvPr id="37" name="Text 35"/>
-          <p:cNvSpPr/>
-          <p:nvPr/>
-        </p:nvSpPr>
-        <p:spPr>
-          <a:xfrm>
-            <a:off x="3429000" y="2953512"/>
-            <a:ext cx="1645920" cy="274320"/>
-          </a:xfrm>
-          <a:prstGeom prst="rect">
-            <a:avLst/>
-          </a:prstGeom>
-          <a:noFill/>
-          <a:ln/>
-        </p:spPr>
-        <p:txBody>
-          <a:bodyPr wrap="square" lIns="0" tIns="0" rIns="0" bIns="0" rtlCol="0" anchor="ctr"/>
-          <a:lstStyle/>
-          <a:p>
-            <a:pPr indent="0" marL="0">
-              <a:buNone/>
-            </a:pPr>
-            <a:r>
-              <a:rPr lang="en-US" sz="1300" b="1" dirty="0">
-                <a:solidFill>
-                  <a:srgbClr val="1A2744"/>
-                </a:solidFill>
-                <a:latin typeface="Arial" pitchFamily="34" charset="0"/>
-                <a:ea typeface="Arial" pitchFamily="34" charset="-122"/>
-                <a:cs typeface="Arial" pitchFamily="34" charset="-120"/>
-              </a:rPr>
-              <a:t>朝食</a:t>
-            </a:r>
-            <a:endParaRPr lang="en-US" sz="1300" dirty="0"/>
-          </a:p>
-        </p:txBody>
-      </p:sp>
-      <p:sp>
-        <p:nvSpPr>
-          <p:cNvPr id="38" name="Text 36"/>
-          <p:cNvSpPr/>
-          <p:nvPr/>
-        </p:nvSpPr>
-        <p:spPr>
-          <a:xfrm>
-            <a:off x="3429000" y="3246120"/>
-            <a:ext cx="2377440" cy="365760"/>
-          </a:xfrm>
-          <a:prstGeom prst="rect">
-            <a:avLst/>
-          </a:prstGeom>
-          <a:noFill/>
-          <a:ln/>
-        </p:spPr>
-        <p:txBody>
-          <a:bodyPr wrap="square" lIns="0" tIns="0" rIns="0" bIns="0" rtlCol="0" anchor="ctr"/>
-          <a:lstStyle/>
-          <a:p>
-            <a:pPr indent="0" marL="0">
-              <a:buNone/>
-            </a:pPr>
-            <a:r>
-              <a:rPr lang="en-US" sz="900" dirty="0">
-                <a:solidFill>
-                  <a:srgbClr val="64748B"/>
-                </a:solidFill>
-                <a:latin typeface="Arial" pitchFamily="34" charset="0"/>
-                <a:ea typeface="Arial" pitchFamily="34" charset="-122"/>
-                <a:cs typeface="Arial" pitchFamily="34" charset="-120"/>
-              </a:rPr>
-              <a:t>Yummy but Very limited breakfast option as they have the ...</a:t>
-            </a:r>
-            <a:endParaRPr lang="en-US" sz="900" dirty="0"/>
-          </a:p>
-        </p:txBody>
-      </p:sp>
-      <p:sp>
-        <p:nvSpPr>
-          <p:cNvPr id="39" name="Text 37"/>
-          <p:cNvSpPr/>
-          <p:nvPr/>
-        </p:nvSpPr>
-        <p:spPr>
-          <a:xfrm>
-            <a:off x="3429000" y="3657600"/>
-            <a:ext cx="2377440" cy="640080"/>
-          </a:xfrm>
-          <a:prstGeom prst="rect">
-            <a:avLst/>
-          </a:prstGeom>
-          <a:noFill/>
-          <a:ln/>
-        </p:spPr>
-        <p:txBody>
-          <a:bodyPr wrap="square" lIns="0" tIns="0" rIns="0" bIns="0" rtlCol="0" anchor="ctr"/>
-          <a:lstStyle/>
-          <a:p>
-            <a:pPr indent="0" marL="0">
-              <a:buNone/>
-            </a:pPr>
-            <a:r>
-              <a:rPr lang="en-US" sz="900" i="1" dirty="0">
-                <a:solidFill>
-                  <a:srgbClr val="3B7DD8"/>
-                </a:solidFill>
-                <a:latin typeface="Arial" pitchFamily="34" charset="0"/>
-                <a:ea typeface="Arial" pitchFamily="34" charset="-122"/>
-                <a:cs typeface="Arial" pitchFamily="34" charset="-120"/>
-              </a:rPr>
-              <a:t>「朝食はタイ料理です」</a:t>
-            </a:r>
-            <a:endParaRPr lang="en-US" sz="900" dirty="0"/>
-          </a:p>
-        </p:txBody>
-      </p:sp>
-      <p:sp>
-        <p:nvSpPr>
-          <p:cNvPr id="40" name="Shape 38"/>
-          <p:cNvSpPr/>
-          <p:nvPr/>
-        </p:nvSpPr>
-        <p:spPr>
-          <a:xfrm>
-            <a:off x="6126480" y="2880360"/>
-            <a:ext cx="2651760" cy="1600200"/>
-          </a:xfrm>
-          <a:prstGeom prst="rect">
-            <a:avLst/>
-          </a:prstGeom>
-          <a:solidFill>
-            <a:srgbClr val="FFFFFF"/>
-          </a:solidFill>
-          <a:ln/>
-          <a:effectLst>
-            <a:outerShdw sx="100000" sy="100000" kx="0" ky="0" algn="bl" rotWithShape="0" blurRad="50800" dist="25400" dir="8100000">
-              <a:srgbClr val="000000">
-                <a:alpha val="10000"/>
-              </a:srgbClr>
-            </a:outerShdw>
-          </a:effectLst>
-        </p:spPr>
-      </p:sp>
-      <p:sp>
-        <p:nvSpPr>
-          <p:cNvPr id="41" name="Shape 39"/>
-          <p:cNvSpPr/>
-          <p:nvPr/>
-        </p:nvSpPr>
-        <p:spPr>
-          <a:xfrm>
-            <a:off x="6126480" y="2880360"/>
-            <a:ext cx="54864" cy="1600200"/>
-          </a:xfrm>
-          <a:prstGeom prst="rect">
-            <a:avLst/>
-          </a:prstGeom>
-          <a:solidFill>
-            <a:srgbClr val="16A34A"/>
-          </a:solidFill>
-          <a:ln/>
-        </p:spPr>
-      </p:sp>
-      <p:sp>
-        <p:nvSpPr>
-          <p:cNvPr id="42" name="Shape 40"/>
-          <p:cNvSpPr/>
-          <p:nvPr/>
-        </p:nvSpPr>
-        <p:spPr>
-          <a:xfrm>
-            <a:off x="7955280" y="2953512"/>
-            <a:ext cx="658368" cy="228600"/>
-          </a:xfrm>
-          <a:prstGeom prst="rect">
-            <a:avLst/>
-          </a:prstGeom>
-          <a:solidFill>
-            <a:srgbClr val="DCFCE7"/>
-          </a:solidFill>
-          <a:ln/>
-        </p:spPr>
-      </p:sp>
-      <p:sp>
-        <p:nvSpPr>
-          <p:cNvPr id="43" name="Text 41"/>
-          <p:cNvSpPr/>
-          <p:nvPr/>
-        </p:nvSpPr>
-        <p:spPr>
-          <a:xfrm>
-            <a:off x="7955280" y="2953512"/>
-            <a:ext cx="658368" cy="228600"/>
-          </a:xfrm>
-          <a:prstGeom prst="rect">
-            <a:avLst/>
-          </a:prstGeom>
-          <a:noFill/>
-          <a:ln/>
-        </p:spPr>
-        <p:txBody>
-          <a:bodyPr wrap="square" lIns="0" tIns="0" rIns="0" bIns="0" rtlCol="0" anchor="ctr"/>
-          <a:lstStyle/>
-          <a:p>
-            <a:pPr algn="ctr" indent="0" marL="0">
-              <a:buNone/>
-            </a:pPr>
-            <a:r>
-              <a:rPr lang="en-US" sz="900" b="1" dirty="0">
-                <a:solidFill>
-                  <a:srgbClr val="16A34A"/>
-                </a:solidFill>
-                <a:latin typeface="Arial" pitchFamily="34" charset="0"/>
-                <a:ea typeface="Arial" pitchFamily="34" charset="-122"/>
-                <a:cs typeface="Arial" pitchFamily="34" charset="-120"/>
-              </a:rPr>
-              <a:t>9件</a:t>
-            </a:r>
-            <a:endParaRPr lang="en-US" sz="900" dirty="0"/>
-          </a:p>
-        </p:txBody>
-      </p:sp>
-      <p:sp>
-        <p:nvSpPr>
-          <p:cNvPr id="44" name="Text 42"/>
-          <p:cNvSpPr/>
-          <p:nvPr/>
-        </p:nvSpPr>
-        <p:spPr>
-          <a:xfrm>
-            <a:off x="6263640" y="2953512"/>
-            <a:ext cx="1645920" cy="274320"/>
-          </a:xfrm>
-          <a:prstGeom prst="rect">
-            <a:avLst/>
-          </a:prstGeom>
-          <a:noFill/>
-          <a:ln/>
-        </p:spPr>
-        <p:txBody>
-          <a:bodyPr wrap="square" lIns="0" tIns="0" rIns="0" bIns="0" rtlCol="0" anchor="ctr"/>
-          <a:lstStyle/>
-          <a:p>
-            <a:pPr indent="0" marL="0">
-              <a:buNone/>
-            </a:pPr>
-            <a:r>
-              <a:rPr lang="en-US" sz="1300" b="1" dirty="0">
-                <a:solidFill>
-                  <a:srgbClr val="1A2744"/>
-                </a:solidFill>
-                <a:latin typeface="Arial" pitchFamily="34" charset="0"/>
-                <a:ea typeface="Arial" pitchFamily="34" charset="-122"/>
-                <a:cs typeface="Arial" pitchFamily="34" charset="-120"/>
-              </a:rPr>
-              <a:t>部屋の広さ</a:t>
-            </a:r>
-            <a:endParaRPr lang="en-US" sz="1300" dirty="0"/>
-          </a:p>
-        </p:txBody>
-      </p:sp>
-      <p:sp>
-        <p:nvSpPr>
-          <p:cNvPr id="45" name="Text 43"/>
-          <p:cNvSpPr/>
-          <p:nvPr/>
-        </p:nvSpPr>
-        <p:spPr>
-          <a:xfrm>
-            <a:off x="6263640" y="3246120"/>
-            <a:ext cx="2377440" cy="365760"/>
-          </a:xfrm>
-          <a:prstGeom prst="rect">
-            <a:avLst/>
-          </a:prstGeom>
-          <a:noFill/>
-          <a:ln/>
-        </p:spPr>
-        <p:txBody>
-          <a:bodyPr wrap="square" lIns="0" tIns="0" rIns="0" bIns="0" rtlCol="0" anchor="ctr"/>
-          <a:lstStyle/>
-          <a:p>
-            <a:pPr indent="0" marL="0">
-              <a:buNone/>
-            </a:pPr>
-            <a:r>
-              <a:rPr lang="en-US" sz="900" dirty="0">
-                <a:solidFill>
-                  <a:srgbClr val="64748B"/>
-                </a:solidFill>
-                <a:latin typeface="Arial" pitchFamily="34" charset="0"/>
-                <a:ea typeface="Arial" pitchFamily="34" charset="-122"/>
-                <a:cs typeface="Arial" pitchFamily="34" charset="-120"/>
-              </a:rPr>
-              <a:t>The location is great next to a subway station, staff are...</a:t>
-            </a:r>
-            <a:endParaRPr lang="en-US" sz="900" dirty="0"/>
-          </a:p>
-        </p:txBody>
-      </p:sp>
-      <p:sp>
-        <p:nvSpPr>
-          <p:cNvPr id="46" name="Text 44"/>
-          <p:cNvSpPr/>
-          <p:nvPr/>
-        </p:nvSpPr>
-        <p:spPr>
-          <a:xfrm>
-            <a:off x="6263640" y="3657600"/>
-            <a:ext cx="2377440" cy="640080"/>
-          </a:xfrm>
-          <a:prstGeom prst="rect">
-            <a:avLst/>
-          </a:prstGeom>
-          <a:noFill/>
-          <a:ln/>
-        </p:spPr>
-        <p:txBody>
-          <a:bodyPr wrap="square" lIns="0" tIns="0" rIns="0" bIns="0" rtlCol="0" anchor="ctr"/>
-          <a:lstStyle/>
-          <a:p>
-            <a:pPr indent="0" marL="0">
-              <a:buNone/>
-            </a:pPr>
-            <a:r>
-              <a:rPr lang="en-US" sz="900" i="1" dirty="0">
-                <a:solidFill>
-                  <a:srgbClr val="3B7DD8"/>
-                </a:solidFill>
-                <a:latin typeface="Arial" pitchFamily="34" charset="0"/>
-                <a:ea typeface="Arial" pitchFamily="34" charset="-122"/>
-                <a:cs typeface="Arial" pitchFamily="34" charset="-120"/>
-              </a:rPr>
-              <a:t>「大きなスーツケースと機内持ち込みバッグをそれぞれ持っていた2人組が海外旅行をしたのですが、どこにもバッグを置くスペ...」</a:t>
+              <a:t>「大きなスーツケースと機内持ち込みバッグをそれぞれ持っていた2人で海外旅行をしたのですが、どこにもバッグを置くスペー...」</a:t>
             </a:r>
             <a:endParaRPr lang="en-US" sz="900" dirty="0"/>
           </a:p>
@@ -12925,7 +12925,7 @@
                           <a:ea typeface="Arial" pitchFamily="34" charset="-122"/>
                           <a:cs typeface="Arial" pitchFamily="34" charset="-120"/>
                         </a:rPr>
-                        <a:t>部屋は想像していたよりも広く、バストイレもゆったりしていて快適でした</a:t>
+                        <a:t>トイレは少し水漏れしていて、排水口からかなり強い臭いがしました</a:t>
                       </a:r>
                       <a:endParaRPr lang="en-US" sz="900" dirty="0">
                         <a:latin typeface="Arial" charset="0"/>
@@ -12993,7 +12993,7 @@
                           <a:ea typeface="Arial" pitchFamily="34" charset="-122"/>
                           <a:cs typeface="Arial" pitchFamily="34" charset="-120"/>
                         </a:rPr>
-                        <a:t>11件</a:t>
+                        <a:t>12件</a:t>
                       </a:r>
                       <a:endParaRPr lang="en-US" sz="900" dirty="0">
                         <a:latin typeface="Arial" charset="0"/>
@@ -14569,7 +14569,7 @@
                           <a:ea typeface="Arial" pitchFamily="34" charset="-122"/>
                           <a:cs typeface="Arial" pitchFamily="34" charset="-120"/>
                         </a:rPr>
-                        <a:t>すぐにホテルに連絡したところ、チェックアウト時に「問題ない」と言われ、キャンセルした分の返金はできないと言われました</a:t>
+                        <a:t>ただ部屋が狭かったのは残念</a:t>
                       </a:r>
                       <a:endParaRPr lang="en-US" sz="900" dirty="0">
                         <a:latin typeface="Arial" charset="0"/>
@@ -14637,7 +14637,7 @@
                           <a:ea typeface="Arial" pitchFamily="34" charset="-122"/>
                           <a:cs typeface="Arial" pitchFamily="34" charset="-120"/>
                         </a:rPr>
-                        <a:t>2件</a:t>
+                        <a:t>3件</a:t>
                       </a:r>
                       <a:endParaRPr lang="en-US" sz="900" dirty="0">
                         <a:latin typeface="Arial" charset="0"/>
@@ -14843,7 +14843,7 @@
                           <a:ea typeface="Arial" pitchFamily="34" charset="-122"/>
                           <a:cs typeface="Arial" pitchFamily="34" charset="-120"/>
                         </a:rPr>
-                        <a:t>他のレビュー見て心配しましたが綺麗ですね、臭いとかこんなこともありませんでした</a:t>
+                        <a:t>トイレは少し水漏れしていて、排水口からかなり強い臭いがしました</a:t>
                       </a:r>
                       <a:endParaRPr lang="en-US" sz="900" dirty="0">
                         <a:latin typeface="Arial" charset="0"/>
@@ -14911,7 +14911,7 @@
                           <a:ea typeface="Arial" pitchFamily="34" charset="-122"/>
                           <a:cs typeface="Arial" pitchFamily="34" charset="-120"/>
                         </a:rPr>
-                        <a:t>1件</a:t>
+                        <a:t>2件</a:t>
                       </a:r>
                       <a:endParaRPr lang="en-US" sz="900" dirty="0">
                         <a:latin typeface="Arial" charset="0"/>

--- a/納品レポート/ホテル別レポート/comfort_roppongi_口コミ分析レポート.pptx
+++ b/納品レポート/ホテル別レポート/comfort_roppongi_口コミ分析レポート.pptx
@@ -2784,7 +2784,7 @@
                 <a:ea typeface="Arial" pitchFamily="34" charset="-122"/>
                 <a:cs typeface="Arial" pitchFamily="34" charset="-120"/>
               </a:rPr>
-              <a:t>作成日：2026年4月7日</a:t>
+              <a:t>作成日：2026年4月8日</a:t>
             </a:r>
             <a:endParaRPr lang="en-US" sz="1000" dirty="0"/>
           </a:p>
@@ -11961,7 +11961,7 @@
                 <a:ea typeface="Arial" pitchFamily="34" charset="-122"/>
                 <a:cs typeface="Arial" pitchFamily="34" charset="-120"/>
               </a:rPr>
-              <a:t>「大きなスーツケースと機内持ち込みバッグをそれぞれ持っていた2人で海外旅行をしたのですが、どこにもバッグを置くスペー...」</a:t>
+              <a:t>「大きなスーツケースと機内持ち込みバッグをそれぞれ持っていた2人組が海外旅行をしたのですが、どこにもバッグを置くスペ...」</a:t>
             </a:r>
             <a:endParaRPr lang="en-US" sz="900" dirty="0"/>
           </a:p>

--- a/納品レポート/ホテル別レポート/comfort_roppongi_口コミ分析レポート.pptx
+++ b/納品レポート/ホテル別レポート/comfort_roppongi_口コミ分析レポート.pptx
@@ -2784,7 +2784,7 @@
                 <a:ea typeface="Arial" pitchFamily="34" charset="-122"/>
                 <a:cs typeface="Arial" pitchFamily="34" charset="-120"/>
               </a:rPr>
-              <a:t>作成日：2026年4月10日</a:t>
+              <a:t>作成日：2026年4月11日</a:t>
             </a:r>
             <a:endParaRPr lang="en-US" sz="1000" dirty="0"/>
           </a:p>

--- a/納品レポート/ホテル別レポート/comfort_roppongi_口コミ分析レポート.pptx
+++ b/納品レポート/ホテル別レポート/comfort_roppongi_口コミ分析レポート.pptx
@@ -2784,7 +2784,7 @@
                 <a:ea typeface="Arial" pitchFamily="34" charset="-122"/>
                 <a:cs typeface="Arial" pitchFamily="34" charset="-120"/>
               </a:rPr>
-              <a:t>作成日：2026年4月11日</a:t>
+              <a:t>作成日：2026年4月13日</a:t>
             </a:r>
             <a:endParaRPr lang="en-US" sz="1000" dirty="0"/>
           </a:p>
@@ -11922,7 +11922,7 @@
                 <a:ea typeface="Arial" pitchFamily="34" charset="-122"/>
                 <a:cs typeface="Arial" pitchFamily="34" charset="-120"/>
               </a:rPr>
-              <a:t>大きなスーツケースと機内持ち込みバッグをそれぞれ持っていた2人で海外旅行をしたのですが、どこにもバッグを置くスペー...</a:t>
+              <a:t>大きなスーツケースと機内持ち込みバッグをそれぞれ持っていた2人組が海外旅行をしたのですが、どこにもバッグを置くスペ...</a:t>
             </a:r>
             <a:endParaRPr lang="en-US" sz="900" dirty="0"/>
           </a:p>

--- a/納品レポート/ホテル別レポート/comfort_roppongi_口コミ分析レポート.pptx
+++ b/納品レポート/ホテル別レポート/comfort_roppongi_口コミ分析レポート.pptx
@@ -2784,7 +2784,7 @@
                 <a:ea typeface="Arial" pitchFamily="34" charset="-122"/>
                 <a:cs typeface="Arial" pitchFamily="34" charset="-120"/>
               </a:rPr>
-              <a:t>作成日：2026年4月13日</a:t>
+              <a:t>作成日：2026年4月15日</a:t>
             </a:r>
             <a:endParaRPr lang="en-US" sz="1000" dirty="0"/>
           </a:p>
@@ -11922,7 +11922,7 @@
                 <a:ea typeface="Arial" pitchFamily="34" charset="-122"/>
                 <a:cs typeface="Arial" pitchFamily="34" charset="-120"/>
               </a:rPr>
-              <a:t>大きなスーツケースと機内持ち込みバッグをそれぞれ持っていた2人組が海外旅行をしたのですが、どこにもバッグを置くスペ...</a:t>
+              <a:t>大きなスーツケースと機内持ち込みバッグをそれぞれ持っていた2人で海外旅行をしたのですが、どこにもバッグを置くスペー...</a:t>
             </a:r>
             <a:endParaRPr lang="en-US" sz="900" dirty="0"/>
           </a:p>

--- a/納品レポート/ホテル別レポート/comfort_roppongi_口コミ分析レポート.pptx
+++ b/納品レポート/ホテル別レポート/comfort_roppongi_口コミ分析レポート.pptx
@@ -2784,7 +2784,7 @@
                 <a:ea typeface="Arial" pitchFamily="34" charset="-122"/>
                 <a:cs typeface="Arial" pitchFamily="34" charset="-120"/>
               </a:rPr>
-              <a:t>作成日：2026年4月16日</a:t>
+              <a:t>作成日：2026年4月20日</a:t>
             </a:r>
             <a:endParaRPr lang="en-US" sz="1000" dirty="0"/>
           </a:p>

--- a/納品レポート/ホテル別レポート/comfort_roppongi_口コミ分析レポート.pptx
+++ b/納品レポート/ホテル別レポート/comfort_roppongi_口コミ分析レポート.pptx
@@ -2784,7 +2784,7 @@
                 <a:ea typeface="Arial" pitchFamily="34" charset="-122"/>
                 <a:cs typeface="Arial" pitchFamily="34" charset="-120"/>
               </a:rPr>
-              <a:t>作成日：2026年4月20日</a:t>
+              <a:t>作成日：2026年4月21日</a:t>
             </a:r>
             <a:endParaRPr lang="en-US" sz="1000" dirty="0"/>
           </a:p>
@@ -11922,7 +11922,7 @@
                 <a:ea typeface="Arial" pitchFamily="34" charset="-122"/>
                 <a:cs typeface="Arial" pitchFamily="34" charset="-120"/>
               </a:rPr>
-              <a:t>大きなスーツケースと機内持ち込みバッグをそれぞれ持っていた2人で海外旅行をしたのですが、どこにもバッグを置くスペー...</a:t>
+              <a:t>大きなスーツケースと機内持ち込みバッグをそれぞれ持っていた2人組が海外旅行をしたのですが、どこにもバッグを置くスペ...</a:t>
             </a:r>
             <a:endParaRPr lang="en-US" sz="900" dirty="0"/>
           </a:p>

--- a/納品レポート/ホテル別レポート/comfort_roppongi_口コミ分析レポート.pptx
+++ b/納品レポート/ホテル別レポート/comfort_roppongi_口コミ分析レポート.pptx
@@ -2784,7 +2784,7 @@
                 <a:ea typeface="Arial" pitchFamily="34" charset="-122"/>
                 <a:cs typeface="Arial" pitchFamily="34" charset="-120"/>
               </a:rPr>
-              <a:t>作成日：2026年4月21日</a:t>
+              <a:t>作成日：2026年4月22日</a:t>
             </a:r>
             <a:endParaRPr lang="en-US" sz="1000" dirty="0"/>
           </a:p>
